--- a/decks/day3/module-2-streaming-structured.pptx
+++ b/decks/day3/module-2-streaming-structured.pptx
@@ -18,9 +18,10 @@
     <p:sldId id="266" r:id="rId12"/>
     <p:sldId id="267" r:id="rId13"/>
     <p:sldId id="268" r:id="rId14"/>
+    <p:sldId id="269" r:id="rId15"/>
   </p:sldIdLst>
   <p:notesMasterIdLst>
-    <p:notesMasterId r:id="rId15"/>
+    <p:notesMasterId r:id="rId16"/>
   </p:notesMasterIdLst>
   <p:sldSz cx="9144000" cy="5143500"/>
   <p:notesSz cx="5143500" cy="9144000"/>
@@ -604,7 +605,7 @@
           <a:p>
             <a:r>
               <a:rPr lang="en-US" dirty="0"/>
-              <a:t>• A token prefix can be syntactically incomplete and semantically unstable. Do not parse or trigger business actions from partial JSON. Finalization assembles the response and applies structured-output parsing.
+              <a:t>• Placeholder marker slide — the runbook has full narration, setup, and fallback plan. Runs the previous slide's exact combined pattern live against the Day 2 docs assistant, now returning a Day-3-shaped TriageResult.
 • GROUNDING SOURCE: https://learn.microsoft.com/en-us/agent-framework/agents/structured-outputs?tabs=python</a:t>
             </a:r>
             <a:endParaRPr lang="en-US" dirty="0"/>
@@ -693,9 +694,8 @@
           <a:p>
             <a:r>
               <a:rPr lang="en-US" dirty="0"/>
-              <a:t>• Keep the claim narrow. Agent supports structured outputs when paired with a compatible chat client and model. Examples in this course use FoundryChatClient where documented; attendees must verify the selected deployment supports the requested format.
-• GROUNDING SOURCE: https://learn.microsoft.com/en-us/agent-framework/agents/structured-outputs?tabs=python
-• GROUNDING SOURCE: https://learn.microsoft.com/en-us/agent-framework/integrations/by-component/model-providers/microsoft-foundry?tabs=python</a:t>
+              <a:t>• A token prefix can be syntactically incomplete and semantically unstable. Do not parse or trigger business actions from partial JSON. Finalization assembles the response and applies structured-output parsing.
+• GROUNDING SOURCE: https://learn.microsoft.com/en-us/agent-framework/agents/structured-outputs?tabs=python</a:t>
             </a:r>
             <a:endParaRPr lang="en-US" dirty="0"/>
           </a:p>
@@ -783,9 +783,9 @@
           <a:p>
             <a:r>
               <a:rPr lang="en-US" dirty="0"/>
-              <a:t>• Ask which row fits each UI. A console can stream text; a workflow handoff should usually consume a structured final value; a rich UI can do both.
-• GROUNDING SOURCE: https://learn.microsoft.com/en-us/agent-framework/concepts/agents/running-agents?tabs=python
-• GROUNDING SOURCE: https://learn.microsoft.com/en-us/agent-framework/agents/structured-outputs?tabs=python</a:t>
+              <a:t>• Keep the claim narrow. Agent supports structured outputs when paired with a compatible chat client and model. Examples in this course use FoundryChatClient where documented; attendees must verify the selected deployment supports the requested format.
+• GROUNDING SOURCE: https://learn.microsoft.com/en-us/agent-framework/agents/structured-outputs?tabs=python
+• GROUNDING SOURCE: https://learn.microsoft.com/en-us/agent-framework/integrations/by-component/model-providers/microsoft-foundry?tabs=python</a:t>
             </a:r>
             <a:endParaRPr lang="en-US" dirty="0"/>
           </a:p>
@@ -873,7 +873,8 @@
           <a:p>
             <a:r>
               <a:rPr lang="en-US" dirty="0"/>
-              <a:t>• Close with the two-contract model. Preview compaction as a separate concern: it changes which history reaches a self-managed agent, not how a response stream is consumed.
+              <a:t>• Ask which row fits each UI. A console can stream text; a workflow handoff should usually consume a structured final value; a rich UI can do both.
+• GROUNDING SOURCE: https://learn.microsoft.com/en-us/agent-framework/concepts/agents/running-agents?tabs=python
 • GROUNDING SOURCE: https://learn.microsoft.com/en-us/agent-framework/agents/structured-outputs?tabs=python</a:t>
             </a:r>
             <a:endParaRPr lang="en-US" dirty="0"/>
@@ -898,6 +899,95 @@
             <a:fld id="{F7021451-1387-4CA6-816F-3879F97B5CBC}" type="slidenum">
               <a:rPr lang="en-US"/>
               <a:t>13</a:t>
+            </a:fld>
+            <a:endParaRPr lang="en-US"/>
+          </a:p>
+        </p:txBody>
+      </p:sp>
+    </p:spTree>
+    <p:extLst>
+      <p:ext uri="{BB962C8B-B14F-4D97-AF65-F5344CB8AC3E}">
+        <p14:creationId xmlns:p14="http://schemas.microsoft.com/office/powerpoint/2010/main" val="1024086991"/>
+      </p:ext>
+    </p:extLst>
+  </p:cSld>
+  <p:clrMapOvr>
+    <a:masterClrMapping/>
+  </p:clrMapOvr>
+</p:notes>
+</file>
+
+<file path=ppt/notesSlides/notesSlide14.xml><?xml version="1.0" encoding="utf-8"?>
+<p:notes xmlns:a="http://schemas.openxmlformats.org/drawingml/2006/main" xmlns:r="http://schemas.openxmlformats.org/officeDocument/2006/relationships" xmlns:p="http://schemas.openxmlformats.org/presentationml/2006/main">
+  <p:cSld>
+    <p:spTree>
+      <p:nvGrpSpPr>
+        <p:cNvPr id="1" name=""/>
+        <p:cNvGrpSpPr/>
+        <p:nvPr/>
+      </p:nvGrpSpPr>
+      <p:grpSpPr>
+        <a:xfrm>
+          <a:off x="0" y="0"/>
+          <a:ext cx="0" cy="0"/>
+          <a:chOff x="0" y="0"/>
+          <a:chExt cx="0" cy="0"/>
+        </a:xfrm>
+      </p:grpSpPr>
+      <p:sp>
+        <p:nvSpPr>
+          <p:cNvPr id="2" name="Slide Image Placeholder 1"/>
+          <p:cNvSpPr>
+            <a:spLocks noGrp="1" noRot="1" noChangeAspect="1"/>
+          </p:cNvSpPr>
+          <p:nvPr>
+            <p:ph type="sldImg"/>
+          </p:nvPr>
+        </p:nvSpPr>
+        <p:spPr/>
+      </p:sp>
+      <p:sp>
+        <p:nvSpPr>
+          <p:cNvPr id="3" name="Notes Placeholder 2"/>
+          <p:cNvSpPr>
+            <a:spLocks noGrp="1"/>
+          </p:cNvSpPr>
+          <p:nvPr>
+            <p:ph type="body" idx="1"/>
+          </p:nvPr>
+        </p:nvSpPr>
+        <p:spPr/>
+        <p:txBody>
+          <a:bodyPr/>
+          <a:lstStyle/>
+          <a:p>
+            <a:r>
+              <a:rPr lang="en-US" dirty="0"/>
+              <a:t>• Close with the two-contract model. Preview compaction as a separate concern: it changes which history reaches a self-managed agent, not how a response stream is consumed.
+• GROUNDING SOURCE: https://learn.microsoft.com/en-us/agent-framework/agents/structured-outputs?tabs=python</a:t>
+            </a:r>
+            <a:endParaRPr lang="en-US" dirty="0"/>
+          </a:p>
+        </p:txBody>
+      </p:sp>
+      <p:sp>
+        <p:nvSpPr>
+          <p:cNvPr id="4" name="Slide Number Placeholder 3"/>
+          <p:cNvSpPr>
+            <a:spLocks noGrp="1"/>
+          </p:cNvSpPr>
+          <p:nvPr>
+            <p:ph type="sldNum" sz="quarter" idx="10"/>
+          </p:nvPr>
+        </p:nvSpPr>
+        <p:spPr/>
+        <p:txBody>
+          <a:bodyPr/>
+          <a:lstStyle/>
+          <a:p>
+            <a:fld id="{F7021451-1387-4CA6-816F-3879F97B5CBC}" type="slidenum">
+              <a:rPr lang="en-US"/>
+              <a:t>14</a:t>
             </a:fld>
             <a:endParaRPr lang="en-US"/>
           </a:p>
@@ -2195,7 +2285,7 @@
     <p:bg>
       <p:bgPr>
         <a:solidFill>
-          <a:srgbClr val="FFFFFF"/>
+          <a:srgbClr val="CADCFC"/>
         </a:solidFill>
       </p:bgPr>
     </p:bg>
@@ -2222,7 +2312,7 @@
         <p:spPr>
           <a:xfrm>
             <a:off x="0" y="0"/>
-            <a:ext cx="54864" cy="5143500"/>
+            <a:ext cx="146304" cy="5143500"/>
           </a:xfrm>
           <a:prstGeom prst="rect">
             <a:avLst/>
@@ -2241,26 +2331,24 @@
         </p:nvSpPr>
         <p:spPr>
           <a:xfrm>
-            <a:off x="5486400" y="256032"/>
-            <a:ext cx="3337560" cy="228600"/>
-          </a:xfrm>
-          <a:prstGeom prst="rect">
-            <a:avLst/>
-          </a:prstGeom>
-          <a:noFill/>
-          <a:ln/>
-        </p:spPr>
-        <p:txBody>
-          <a:bodyPr wrap="square" lIns="0" tIns="0" rIns="0" bIns="0" rtlCol="0" anchor="ctr">
-            <a:normAutofit/>
-          </a:bodyPr>
+            <a:off x="5669280" y="274320"/>
+            <a:ext cx="3291840" cy="274320"/>
+          </a:xfrm>
+          <a:prstGeom prst="rect">
+            <a:avLst/>
+          </a:prstGeom>
+          <a:noFill/>
+          <a:ln/>
+        </p:spPr>
+        <p:txBody>
+          <a:bodyPr wrap="square" lIns="0" tIns="0" rIns="0" bIns="0" rtlCol="0" anchor="ctr"/>
           <a:lstStyle/>
           <a:p>
             <a:pPr algn="r" indent="0" marL="0">
               <a:buNone/>
             </a:pPr>
             <a:r>
-              <a:rPr lang="en-US" sz="950" dirty="0">
+              <a:rPr lang="en-US" sz="1000" dirty="0">
                 <a:solidFill>
                   <a:srgbClr val="6B7280"/>
                 </a:solidFill>
@@ -2268,9 +2356,9 @@
                 <a:ea typeface="Calibri" pitchFamily="34" charset="-122"/>
                 <a:cs typeface="Calibri" pitchFamily="34" charset="-120"/>
               </a:rPr>
-              <a:t>Day 3 · Module 2</a:t>
-            </a:r>
-            <a:endParaRPr lang="en-US" sz="950" dirty="0"/>
+              <a:t>Day 3 · Module 2 · Demo</a:t>
+            </a:r>
+            <a:endParaRPr lang="en-US" sz="1000" dirty="0"/>
           </a:p>
         </p:txBody>
       </p:sp>
@@ -2282,26 +2370,24 @@
         </p:nvSpPr>
         <p:spPr>
           <a:xfrm>
-            <a:off x="365760" y="310896"/>
-            <a:ext cx="6583680" cy="603504"/>
-          </a:xfrm>
-          <a:prstGeom prst="rect">
-            <a:avLst/>
-          </a:prstGeom>
-          <a:noFill/>
-          <a:ln/>
-        </p:spPr>
-        <p:txBody>
-          <a:bodyPr wrap="square" lIns="0" tIns="0" rIns="0" bIns="0" rtlCol="0" anchor="ctr">
-            <a:normAutofit/>
-          </a:bodyPr>
+            <a:off x="548640" y="1051560"/>
+            <a:ext cx="5486400" cy="502920"/>
+          </a:xfrm>
+          <a:prstGeom prst="rect">
+            <a:avLst/>
+          </a:prstGeom>
+          <a:noFill/>
+          <a:ln/>
+        </p:spPr>
+        <p:txBody>
+          <a:bodyPr wrap="square" lIns="0" tIns="0" rIns="0" bIns="0" rtlCol="0" anchor="ctr"/>
           <a:lstStyle/>
           <a:p>
             <a:pPr indent="0" marL="0">
               <a:buNone/>
             </a:pPr>
             <a:r>
-              <a:rPr lang="en-US" sz="2500" b="1" dirty="0">
+              <a:rPr lang="en-US" sz="3200" b="1" spc="800" kern="0" dirty="0">
                 <a:solidFill>
                   <a:srgbClr val="1E2761"/>
                 </a:solidFill>
@@ -2309,65 +2395,38 @@
                 <a:ea typeface="Calibri" pitchFamily="34" charset="-122"/>
                 <a:cs typeface="Calibri" pitchFamily="34" charset="-120"/>
               </a:rPr>
-              <a:t>Partial JSON is display data, not a value</a:t>
-            </a:r>
-            <a:endParaRPr lang="en-US" sz="2500" dirty="0"/>
-          </a:p>
-        </p:txBody>
-      </p:sp>
-      <p:sp>
-        <p:nvSpPr>
-          <p:cNvPr id="5" name="Shape 3"/>
-          <p:cNvSpPr/>
-          <p:nvPr/>
-        </p:nvSpPr>
-        <p:spPr>
-          <a:xfrm>
-            <a:off x="365760" y="1078992"/>
-            <a:ext cx="4114800" cy="3493008"/>
-          </a:xfrm>
-          <a:prstGeom prst="roundRect">
-            <a:avLst/>
-          </a:prstGeom>
-          <a:solidFill>
-            <a:srgbClr val="F3F4F6"/>
-          </a:solidFill>
-          <a:ln w="11430">
-            <a:solidFill>
-              <a:srgbClr val="D1D5DB"/>
-            </a:solidFill>
-            <a:prstDash val="solid"/>
-          </a:ln>
-        </p:spPr>
-      </p:sp>
-      <p:sp>
-        <p:nvSpPr>
-          <p:cNvPr id="6" name="Text 4"/>
-          <p:cNvSpPr/>
-          <p:nvPr/>
-        </p:nvSpPr>
-        <p:spPr>
-          <a:xfrm>
-            <a:off x="566928" y="1298448"/>
-            <a:ext cx="3712464" cy="411480"/>
-          </a:xfrm>
-          <a:prstGeom prst="rect">
-            <a:avLst/>
-          </a:prstGeom>
-          <a:noFill/>
-          <a:ln/>
-        </p:spPr>
-        <p:txBody>
-          <a:bodyPr wrap="square" lIns="0" tIns="0" rIns="0" bIns="0" rtlCol="0" anchor="ctr">
-            <a:normAutofit/>
-          </a:bodyPr>
+              <a:t>DEMO</a:t>
+            </a:r>
+            <a:endParaRPr lang="en-US" sz="3200" dirty="0"/>
+          </a:p>
+        </p:txBody>
+      </p:sp>
+      <p:sp>
+        <p:nvSpPr>
+          <p:cNvPr id="5" name="Text 3"/>
+          <p:cNvSpPr/>
+          <p:nvPr/>
+        </p:nvSpPr>
+        <p:spPr>
+          <a:xfrm>
+            <a:off x="548640" y="1691640"/>
+            <a:ext cx="8046720" cy="914400"/>
+          </a:xfrm>
+          <a:prstGeom prst="rect">
+            <a:avLst/>
+          </a:prstGeom>
+          <a:noFill/>
+          <a:ln/>
+        </p:spPr>
+        <p:txBody>
+          <a:bodyPr wrap="square" lIns="0" tIns="0" rIns="0" bIns="0" rtlCol="0" anchor="ctr"/>
           <a:lstStyle/>
           <a:p>
             <a:pPr indent="0" marL="0">
               <a:buNone/>
             </a:pPr>
             <a:r>
-              <a:rPr lang="en-US" sz="2000" b="1" dirty="0">
+              <a:rPr lang="en-US" sz="3000" b="1" dirty="0">
                 <a:solidFill>
                   <a:srgbClr val="1E2761"/>
                 </a:solidFill>
@@ -2375,59 +2434,80 @@
                 <a:ea typeface="Calibri" pitchFamily="34" charset="-122"/>
                 <a:cs typeface="Calibri" pitchFamily="34" charset="-120"/>
               </a:rPr>
-              <a:t>During the stream</a:t>
-            </a:r>
-            <a:endParaRPr lang="en-US" sz="2000" dirty="0"/>
-          </a:p>
-        </p:txBody>
-      </p:sp>
-      <p:sp>
-        <p:nvSpPr>
-          <p:cNvPr id="7" name="Text 5"/>
-          <p:cNvSpPr/>
-          <p:nvPr/>
-        </p:nvSpPr>
-        <p:spPr>
-          <a:xfrm>
-            <a:off x="594360" y="1828800"/>
-            <a:ext cx="3639312" cy="2395728"/>
-          </a:xfrm>
-          <a:prstGeom prst="rect">
-            <a:avLst/>
-          </a:prstGeom>
-          <a:noFill/>
-          <a:ln/>
-        </p:spPr>
-        <p:txBody>
-          <a:bodyPr wrap="square" lIns="381" tIns="381" rIns="381" bIns="381" rtlCol="0" anchor="ctr">
-            <a:normAutofit/>
-          </a:bodyPr>
-          <a:lstStyle/>
-          <a:p>
-            <a:pPr marL="342900" indent="-342900">
-              <a:buSzPct val="100000"/>
-              <a:buChar char="•"/>
-            </a:pPr>
-            <a:r>
-              <a:rPr lang="en-US" sz="1300" dirty="0">
-                <a:solidFill>
-                  <a:srgbClr val="212121"/>
+              <a:t>Watch it stream, then get the typed TriageResult</a:t>
+            </a:r>
+            <a:endParaRPr lang="en-US" sz="3000" dirty="0"/>
+          </a:p>
+        </p:txBody>
+      </p:sp>
+      <p:sp>
+        <p:nvSpPr>
+          <p:cNvPr id="6" name="Text 4"/>
+          <p:cNvSpPr/>
+          <p:nvPr/>
+        </p:nvSpPr>
+        <p:spPr>
+          <a:xfrm>
+            <a:off x="6583680" y="1051560"/>
+            <a:ext cx="2194560" cy="502920"/>
+          </a:xfrm>
+          <a:prstGeom prst="rect">
+            <a:avLst/>
+          </a:prstGeom>
+          <a:noFill/>
+          <a:ln/>
+        </p:spPr>
+        <p:txBody>
+          <a:bodyPr wrap="square" lIns="0" tIns="0" rIns="0" bIns="0" rtlCol="0" anchor="ctr"/>
+          <a:lstStyle/>
+          <a:p>
+            <a:pPr algn="r" indent="0" marL="0">
+              <a:buNone/>
+            </a:pPr>
+            <a:r>
+              <a:rPr lang="en-US" sz="1800" i="1" dirty="0">
+                <a:solidFill>
+                  <a:srgbClr val="6B7280"/>
                 </a:solidFill>
                 <a:latin typeface="Calibri" pitchFamily="34" charset="0"/>
                 <a:ea typeface="Calibri" pitchFamily="34" charset="-122"/>
                 <a:cs typeface="Calibri" pitchFamily="34" charset="-120"/>
               </a:rPr>
-              <a:t>JSON may be incomplete</a:t>
-            </a:r>
-            <a:endParaRPr lang="en-US" sz="1300" dirty="0"/>
-          </a:p>
-          <a:p>
-            <a:pPr marL="342900" indent="-342900">
-              <a:buSzPct val="100000"/>
-              <a:buChar char="•"/>
-            </a:pPr>
-            <a:r>
-              <a:rPr lang="en-US" sz="1300" dirty="0">
+              <a:t>~5 min</a:t>
+            </a:r>
+            <a:endParaRPr lang="en-US" sz="1800" dirty="0"/>
+          </a:p>
+        </p:txBody>
+      </p:sp>
+      <p:sp>
+        <p:nvSpPr>
+          <p:cNvPr id="7" name="Text 5"/>
+          <p:cNvSpPr/>
+          <p:nvPr/>
+        </p:nvSpPr>
+        <p:spPr>
+          <a:xfrm>
+            <a:off x="548640" y="2788920"/>
+            <a:ext cx="8046720" cy="1371600"/>
+          </a:xfrm>
+          <a:prstGeom prst="rect">
+            <a:avLst/>
+          </a:prstGeom>
+          <a:noFill/>
+          <a:ln/>
+        </p:spPr>
+        <p:txBody>
+          <a:bodyPr wrap="square" lIns="0" tIns="0" rIns="0" bIns="0" rtlCol="0" anchor="ctr"/>
+          <a:lstStyle/>
+          <a:p>
+            <a:pPr indent="0" marL="0">
+              <a:spcAft>
+                <a:spcPts val="600"/>
+              </a:spcAft>
+              <a:buNone/>
+            </a:pPr>
+            <a:r>
+              <a:rPr lang="en-US" sz="1600" dirty="0">
                 <a:solidFill>
                   <a:srgbClr val="212121"/>
                 </a:solidFill>
@@ -2435,177 +2515,54 @@
                 <a:ea typeface="Calibri" pitchFamily="34" charset="-122"/>
                 <a:cs typeface="Calibri" pitchFamily="34" charset="-120"/>
               </a:rPr>
-              <a:t>Fields may not have arrived</a:t>
-            </a:r>
-            <a:endParaRPr lang="en-US" sz="1300" dirty="0"/>
-          </a:p>
-          <a:p>
-            <a:pPr marL="342900" indent="-342900">
-              <a:buSzPct val="100000"/>
-              <a:buChar char="•"/>
-            </a:pPr>
-            <a:r>
-              <a:rPr lang="en-US" sz="1300" dirty="0">
-                <a:solidFill>
-                  <a:srgbClr val="212121"/>
+              <a:t>Run the previous slide's exact combined pattern live: text tokens render as they arrive, then stream.get_final_response().value prints a validated TriageResult — the two-contract model made concrete on the Day 2 docs assistant.</a:t>
+            </a:r>
+            <a:endParaRPr lang="en-US" sz="1600" dirty="0"/>
+          </a:p>
+        </p:txBody>
+      </p:sp>
+      <p:sp>
+        <p:nvSpPr>
+          <p:cNvPr id="8" name="Text 6"/>
+          <p:cNvSpPr/>
+          <p:nvPr/>
+        </p:nvSpPr>
+        <p:spPr>
+          <a:xfrm>
+            <a:off x="548640" y="4434840"/>
+            <a:ext cx="8046720" cy="320040"/>
+          </a:xfrm>
+          <a:prstGeom prst="rect">
+            <a:avLst/>
+          </a:prstGeom>
+          <a:noFill/>
+          <a:ln/>
+        </p:spPr>
+        <p:txBody>
+          <a:bodyPr wrap="square" lIns="0" tIns="0" rIns="0" bIns="0" rtlCol="0" anchor="ctr"/>
+          <a:lstStyle/>
+          <a:p>
+            <a:pPr indent="0" marL="0">
+              <a:buNone/>
+            </a:pPr>
+            <a:r>
+              <a:rPr lang="en-US" sz="1100" i="1" dirty="0">
+                <a:solidFill>
+                  <a:srgbClr val="6B7280"/>
                 </a:solidFill>
                 <a:latin typeface="Calibri" pitchFamily="34" charset="0"/>
                 <a:ea typeface="Calibri" pitchFamily="34" charset="-122"/>
                 <a:cs typeface="Calibri" pitchFamily="34" charset="-120"/>
               </a:rPr>
-              <a:t>Do not parse or act</a:t>
-            </a:r>
-            <a:endParaRPr lang="en-US" sz="1300" dirty="0"/>
-          </a:p>
-        </p:txBody>
-      </p:sp>
-      <p:sp>
-        <p:nvSpPr>
-          <p:cNvPr id="8" name="Shape 6"/>
-          <p:cNvSpPr/>
-          <p:nvPr/>
-        </p:nvSpPr>
-        <p:spPr>
-          <a:xfrm>
-            <a:off x="4663440" y="1078992"/>
-            <a:ext cx="4114800" cy="3493008"/>
-          </a:xfrm>
-          <a:prstGeom prst="roundRect">
-            <a:avLst/>
-          </a:prstGeom>
-          <a:solidFill>
-            <a:srgbClr val="CADCFC"/>
-          </a:solidFill>
-          <a:ln w="11430">
-            <a:solidFill>
-              <a:srgbClr val="1E2761"/>
-            </a:solidFill>
-            <a:prstDash val="solid"/>
-          </a:ln>
-        </p:spPr>
-      </p:sp>
-      <p:sp>
-        <p:nvSpPr>
-          <p:cNvPr id="9" name="Text 7"/>
-          <p:cNvSpPr/>
-          <p:nvPr/>
-        </p:nvSpPr>
-        <p:spPr>
-          <a:xfrm>
-            <a:off x="4864608" y="1298448"/>
-            <a:ext cx="3712464" cy="411480"/>
-          </a:xfrm>
-          <a:prstGeom prst="rect">
-            <a:avLst/>
-          </a:prstGeom>
-          <a:noFill/>
-          <a:ln/>
-        </p:spPr>
-        <p:txBody>
-          <a:bodyPr wrap="square" lIns="0" tIns="0" rIns="0" bIns="0" rtlCol="0" anchor="ctr">
-            <a:normAutofit/>
-          </a:bodyPr>
-          <a:lstStyle/>
-          <a:p>
-            <a:pPr indent="0" marL="0">
-              <a:buNone/>
-            </a:pPr>
-            <a:r>
-              <a:rPr lang="en-US" sz="2000" b="1" dirty="0">
-                <a:solidFill>
-                  <a:srgbClr val="1E2761"/>
-                </a:solidFill>
-                <a:latin typeface="Calibri" pitchFamily="34" charset="0"/>
-                <a:ea typeface="Calibri" pitchFamily="34" charset="-122"/>
-                <a:cs typeface="Calibri" pitchFamily="34" charset="-120"/>
-              </a:rPr>
-              <a:t>After completion</a:t>
-            </a:r>
-            <a:endParaRPr lang="en-US" sz="2000" dirty="0"/>
-          </a:p>
-        </p:txBody>
-      </p:sp>
-      <p:sp>
-        <p:nvSpPr>
-          <p:cNvPr id="10" name="Text 8"/>
-          <p:cNvSpPr/>
-          <p:nvPr/>
-        </p:nvSpPr>
-        <p:spPr>
-          <a:xfrm>
-            <a:off x="4892040" y="1828800"/>
-            <a:ext cx="3639312" cy="2395728"/>
-          </a:xfrm>
-          <a:prstGeom prst="rect">
-            <a:avLst/>
-          </a:prstGeom>
-          <a:noFill/>
-          <a:ln/>
-        </p:spPr>
-        <p:txBody>
-          <a:bodyPr wrap="square" lIns="381" tIns="381" rIns="381" bIns="381" rtlCol="0" anchor="ctr">
-            <a:normAutofit/>
-          </a:bodyPr>
-          <a:lstStyle/>
-          <a:p>
-            <a:pPr marL="342900" indent="-342900">
-              <a:buSzPct val="100000"/>
-              <a:buChar char="•"/>
-            </a:pPr>
-            <a:r>
-              <a:rPr lang="en-US" sz="1300" dirty="0">
-                <a:solidFill>
-                  <a:srgbClr val="212121"/>
-                </a:solidFill>
-                <a:latin typeface="Calibri" pitchFamily="34" charset="0"/>
-                <a:ea typeface="Calibri" pitchFamily="34" charset="-122"/>
-                <a:cs typeface="Calibri" pitchFamily="34" charset="-120"/>
-              </a:rPr>
-              <a:t>Await get_final_response()</a:t>
-            </a:r>
-            <a:endParaRPr lang="en-US" sz="1300" dirty="0"/>
-          </a:p>
-          <a:p>
-            <a:pPr marL="342900" indent="-342900">
-              <a:buSzPct val="100000"/>
-              <a:buChar char="•"/>
-            </a:pPr>
-            <a:r>
-              <a:rPr lang="en-US" sz="1300" dirty="0">
-                <a:solidFill>
-                  <a:srgbClr val="212121"/>
-                </a:solidFill>
-                <a:latin typeface="Calibri" pitchFamily="34" charset="0"/>
-                <a:ea typeface="Calibri" pitchFamily="34" charset="-122"/>
-                <a:cs typeface="Calibri" pitchFamily="34" charset="-120"/>
-              </a:rPr>
-              <a:t>Read validated .value</a:t>
-            </a:r>
-            <a:endParaRPr lang="en-US" sz="1300" dirty="0"/>
-          </a:p>
-          <a:p>
-            <a:pPr marL="342900" indent="-342900">
-              <a:buSzPct val="100000"/>
-              <a:buChar char="•"/>
-            </a:pPr>
-            <a:r>
-              <a:rPr lang="en-US" sz="1300" dirty="0">
-                <a:solidFill>
-                  <a:srgbClr val="212121"/>
-                </a:solidFill>
-                <a:latin typeface="Calibri" pitchFamily="34" charset="0"/>
-                <a:ea typeface="Calibri" pitchFamily="34" charset="-122"/>
-                <a:cs typeface="Calibri" pitchFamily="34" charset="-120"/>
-              </a:rPr>
-              <a:t>Apply business rules and approvals</a:t>
-            </a:r>
-            <a:endParaRPr lang="en-US" sz="1300" dirty="0"/>
-          </a:p>
-        </p:txBody>
-      </p:sp>
-      <p:sp>
-        <p:nvSpPr>
-          <p:cNvPr id="11" name="Shape 9"/>
+              <a:t>Runbook: demos/day3/module-2-demo-1-stream-then-triage.md</a:t>
+            </a:r>
+            <a:endParaRPr lang="en-US" sz="1100" dirty="0"/>
+          </a:p>
+        </p:txBody>
+      </p:sp>
+      <p:sp>
+        <p:nvSpPr>
+          <p:cNvPr id="9" name="Shape 7"/>
           <p:cNvSpPr/>
           <p:nvPr/>
         </p:nvSpPr>
@@ -2628,7 +2585,7 @@
       </p:sp>
       <p:sp>
         <p:nvSpPr>
-          <p:cNvPr id="12" name="Text 10"/>
+          <p:cNvPr id="10" name="Text 8"/>
           <p:cNvSpPr/>
           <p:nvPr/>
         </p:nvSpPr>
@@ -2795,7 +2752,7 @@
                 <a:ea typeface="Calibri" pitchFamily="34" charset="-122"/>
                 <a:cs typeface="Calibri" pitchFamily="34" charset="-120"/>
               </a:rPr>
-              <a:t>Support follows the underlying client</a:t>
+              <a:t>Partial JSON is display data, not a value</a:t>
             </a:r>
             <a:endParaRPr lang="en-US" sz="2500" dirty="0"/>
           </a:p>
@@ -2810,17 +2767,159 @@
         <p:spPr>
           <a:xfrm>
             <a:off x="365760" y="1078992"/>
-            <a:ext cx="4105656" cy="1655064"/>
+            <a:ext cx="4114800" cy="3493008"/>
           </a:xfrm>
           <a:prstGeom prst="roundRect">
-            <a:avLst>
-              <a:gd name="adj" fmla="val 3315"/>
-            </a:avLst>
+            <a:avLst/>
+          </a:prstGeom>
+          <a:solidFill>
+            <a:srgbClr val="F3F4F6"/>
+          </a:solidFill>
+          <a:ln w="11430">
+            <a:solidFill>
+              <a:srgbClr val="D1D5DB"/>
+            </a:solidFill>
+            <a:prstDash val="solid"/>
+          </a:ln>
+        </p:spPr>
+      </p:sp>
+      <p:sp>
+        <p:nvSpPr>
+          <p:cNvPr id="6" name="Text 4"/>
+          <p:cNvSpPr/>
+          <p:nvPr/>
+        </p:nvSpPr>
+        <p:spPr>
+          <a:xfrm>
+            <a:off x="566928" y="1298448"/>
+            <a:ext cx="3712464" cy="411480"/>
+          </a:xfrm>
+          <a:prstGeom prst="rect">
+            <a:avLst/>
+          </a:prstGeom>
+          <a:noFill/>
+          <a:ln/>
+        </p:spPr>
+        <p:txBody>
+          <a:bodyPr wrap="square" lIns="0" tIns="0" rIns="0" bIns="0" rtlCol="0" anchor="ctr">
+            <a:normAutofit/>
+          </a:bodyPr>
+          <a:lstStyle/>
+          <a:p>
+            <a:pPr indent="0" marL="0">
+              <a:buNone/>
+            </a:pPr>
+            <a:r>
+              <a:rPr lang="en-US" sz="2000" b="1" dirty="0">
+                <a:solidFill>
+                  <a:srgbClr val="1E2761"/>
+                </a:solidFill>
+                <a:latin typeface="Calibri" pitchFamily="34" charset="0"/>
+                <a:ea typeface="Calibri" pitchFamily="34" charset="-122"/>
+                <a:cs typeface="Calibri" pitchFamily="34" charset="-120"/>
+              </a:rPr>
+              <a:t>During the stream</a:t>
+            </a:r>
+            <a:endParaRPr lang="en-US" sz="2000" dirty="0"/>
+          </a:p>
+        </p:txBody>
+      </p:sp>
+      <p:sp>
+        <p:nvSpPr>
+          <p:cNvPr id="7" name="Text 5"/>
+          <p:cNvSpPr/>
+          <p:nvPr/>
+        </p:nvSpPr>
+        <p:spPr>
+          <a:xfrm>
+            <a:off x="594360" y="1828800"/>
+            <a:ext cx="3639312" cy="2395728"/>
+          </a:xfrm>
+          <a:prstGeom prst="rect">
+            <a:avLst/>
+          </a:prstGeom>
+          <a:noFill/>
+          <a:ln/>
+        </p:spPr>
+        <p:txBody>
+          <a:bodyPr wrap="square" lIns="381" tIns="381" rIns="381" bIns="381" rtlCol="0" anchor="ctr">
+            <a:normAutofit/>
+          </a:bodyPr>
+          <a:lstStyle/>
+          <a:p>
+            <a:pPr marL="342900" indent="-342900">
+              <a:buSzPct val="100000"/>
+              <a:buChar char="•"/>
+            </a:pPr>
+            <a:r>
+              <a:rPr lang="en-US" sz="1300" dirty="0">
+                <a:solidFill>
+                  <a:srgbClr val="212121"/>
+                </a:solidFill>
+                <a:latin typeface="Calibri" pitchFamily="34" charset="0"/>
+                <a:ea typeface="Calibri" pitchFamily="34" charset="-122"/>
+                <a:cs typeface="Calibri" pitchFamily="34" charset="-120"/>
+              </a:rPr>
+              <a:t>JSON may be incomplete</a:t>
+            </a:r>
+            <a:endParaRPr lang="en-US" sz="1300" dirty="0"/>
+          </a:p>
+          <a:p>
+            <a:pPr marL="342900" indent="-342900">
+              <a:buSzPct val="100000"/>
+              <a:buChar char="•"/>
+            </a:pPr>
+            <a:r>
+              <a:rPr lang="en-US" sz="1300" dirty="0">
+                <a:solidFill>
+                  <a:srgbClr val="212121"/>
+                </a:solidFill>
+                <a:latin typeface="Calibri" pitchFamily="34" charset="0"/>
+                <a:ea typeface="Calibri" pitchFamily="34" charset="-122"/>
+                <a:cs typeface="Calibri" pitchFamily="34" charset="-120"/>
+              </a:rPr>
+              <a:t>Fields may not have arrived</a:t>
+            </a:r>
+            <a:endParaRPr lang="en-US" sz="1300" dirty="0"/>
+          </a:p>
+          <a:p>
+            <a:pPr marL="342900" indent="-342900">
+              <a:buSzPct val="100000"/>
+              <a:buChar char="•"/>
+            </a:pPr>
+            <a:r>
+              <a:rPr lang="en-US" sz="1300" dirty="0">
+                <a:solidFill>
+                  <a:srgbClr val="212121"/>
+                </a:solidFill>
+                <a:latin typeface="Calibri" pitchFamily="34" charset="0"/>
+                <a:ea typeface="Calibri" pitchFamily="34" charset="-122"/>
+                <a:cs typeface="Calibri" pitchFamily="34" charset="-120"/>
+              </a:rPr>
+              <a:t>Do not parse or act</a:t>
+            </a:r>
+            <a:endParaRPr lang="en-US" sz="1300" dirty="0"/>
+          </a:p>
+        </p:txBody>
+      </p:sp>
+      <p:sp>
+        <p:nvSpPr>
+          <p:cNvPr id="8" name="Shape 6"/>
+          <p:cNvSpPr/>
+          <p:nvPr/>
+        </p:nvSpPr>
+        <p:spPr>
+          <a:xfrm>
+            <a:off x="4663440" y="1078992"/>
+            <a:ext cx="4114800" cy="3493008"/>
+          </a:xfrm>
+          <a:prstGeom prst="roundRect">
+            <a:avLst/>
           </a:prstGeom>
           <a:solidFill>
             <a:srgbClr val="CADCFC"/>
           </a:solidFill>
-          <a:ln w="10160">
+          <a:ln w="11430">
             <a:solidFill>
               <a:srgbClr val="1E2761"/>
             </a:solidFill>
@@ -2830,14 +2929,14 @@
       </p:sp>
       <p:sp>
         <p:nvSpPr>
-          <p:cNvPr id="6" name="Text 4"/>
-          <p:cNvSpPr/>
-          <p:nvPr/>
-        </p:nvSpPr>
-        <p:spPr>
-          <a:xfrm>
-            <a:off x="512064" y="1197864"/>
-            <a:ext cx="3813048" cy="310896"/>
+          <p:cNvPr id="9" name="Text 7"/>
+          <p:cNvSpPr/>
+          <p:nvPr/>
+        </p:nvSpPr>
+        <p:spPr>
+          <a:xfrm>
+            <a:off x="4864608" y="1298448"/>
+            <a:ext cx="3712464" cy="411480"/>
           </a:xfrm>
           <a:prstGeom prst="rect">
             <a:avLst/>
@@ -2855,7 +2954,7 @@
               <a:buNone/>
             </a:pPr>
             <a:r>
-              <a:rPr lang="en-US" sz="1500" b="1" dirty="0">
+              <a:rPr lang="en-US" sz="2000" b="1" dirty="0">
                 <a:solidFill>
                   <a:srgbClr val="1E2761"/>
                 </a:solidFill>
@@ -2863,40 +2962,41 @@
                 <a:ea typeface="Calibri" pitchFamily="34" charset="-122"/>
                 <a:cs typeface="Calibri" pitchFamily="34" charset="-120"/>
               </a:rPr>
-              <a:t>Framework</a:t>
-            </a:r>
-            <a:endParaRPr lang="en-US" sz="1500" dirty="0"/>
-          </a:p>
-        </p:txBody>
-      </p:sp>
-      <p:sp>
-        <p:nvSpPr>
-          <p:cNvPr id="7" name="Text 5"/>
-          <p:cNvSpPr/>
-          <p:nvPr/>
-        </p:nvSpPr>
-        <p:spPr>
-          <a:xfrm>
-            <a:off x="512064" y="1581912"/>
-            <a:ext cx="3813048" cy="1033272"/>
-          </a:xfrm>
-          <a:prstGeom prst="rect">
-            <a:avLst/>
-          </a:prstGeom>
-          <a:noFill/>
-          <a:ln/>
-        </p:spPr>
-        <p:txBody>
-          <a:bodyPr wrap="square" lIns="0" tIns="0" rIns="0" bIns="0" rtlCol="0" anchor="t">
+              <a:t>After completion</a:t>
+            </a:r>
+            <a:endParaRPr lang="en-US" sz="2000" dirty="0"/>
+          </a:p>
+        </p:txBody>
+      </p:sp>
+      <p:sp>
+        <p:nvSpPr>
+          <p:cNvPr id="10" name="Text 8"/>
+          <p:cNvSpPr/>
+          <p:nvPr/>
+        </p:nvSpPr>
+        <p:spPr>
+          <a:xfrm>
+            <a:off x="4892040" y="1828800"/>
+            <a:ext cx="3639312" cy="2395728"/>
+          </a:xfrm>
+          <a:prstGeom prst="rect">
+            <a:avLst/>
+          </a:prstGeom>
+          <a:noFill/>
+          <a:ln/>
+        </p:spPr>
+        <p:txBody>
+          <a:bodyPr wrap="square" lIns="381" tIns="381" rIns="381" bIns="381" rtlCol="0" anchor="ctr">
             <a:normAutofit/>
           </a:bodyPr>
           <a:lstStyle/>
           <a:p>
-            <a:pPr indent="0" marL="0">
-              <a:buNone/>
-            </a:pPr>
-            <a:r>
-              <a:rPr lang="en-US" sz="1150" dirty="0">
+            <a:pPr marL="342900" indent="-342900">
+              <a:buSzPct val="100000"/>
+              <a:buChar char="•"/>
+            </a:pPr>
+            <a:r>
+              <a:rPr lang="en-US" sz="1300" dirty="0">
                 <a:solidFill>
                   <a:srgbClr val="212121"/>
                 </a:solidFill>
@@ -2904,108 +3004,35 @@
                 <a:ea typeface="Calibri" pitchFamily="34" charset="-122"/>
                 <a:cs typeface="Calibri" pitchFamily="34" charset="-120"/>
               </a:rPr>
-              <a:t>Agent forwards the response format through the client</a:t>
-            </a:r>
-            <a:endParaRPr lang="en-US" sz="1150" dirty="0"/>
-          </a:p>
-        </p:txBody>
-      </p:sp>
-      <p:sp>
-        <p:nvSpPr>
-          <p:cNvPr id="8" name="Shape 6"/>
-          <p:cNvSpPr/>
-          <p:nvPr/>
-        </p:nvSpPr>
-        <p:spPr>
-          <a:xfrm>
-            <a:off x="4672584" y="1078992"/>
-            <a:ext cx="4105656" cy="1655064"/>
-          </a:xfrm>
-          <a:prstGeom prst="roundRect">
-            <a:avLst>
-              <a:gd name="adj" fmla="val 3315"/>
-            </a:avLst>
-          </a:prstGeom>
-          <a:solidFill>
-            <a:srgbClr val="F3F4F6"/>
-          </a:solidFill>
-          <a:ln w="10160">
-            <a:solidFill>
-              <a:srgbClr val="D1D5DB"/>
-            </a:solidFill>
-            <a:prstDash val="solid"/>
-          </a:ln>
-        </p:spPr>
-      </p:sp>
-      <p:sp>
-        <p:nvSpPr>
-          <p:cNvPr id="9" name="Text 7"/>
-          <p:cNvSpPr/>
-          <p:nvPr/>
-        </p:nvSpPr>
-        <p:spPr>
-          <a:xfrm>
-            <a:off x="4818888" y="1197864"/>
-            <a:ext cx="3813048" cy="310896"/>
-          </a:xfrm>
-          <a:prstGeom prst="rect">
-            <a:avLst/>
-          </a:prstGeom>
-          <a:noFill/>
-          <a:ln/>
-        </p:spPr>
-        <p:txBody>
-          <a:bodyPr wrap="square" lIns="0" tIns="0" rIns="0" bIns="0" rtlCol="0" anchor="ctr">
-            <a:normAutofit/>
-          </a:bodyPr>
-          <a:lstStyle/>
-          <a:p>
-            <a:pPr indent="0" marL="0">
-              <a:buNone/>
-            </a:pPr>
-            <a:r>
-              <a:rPr lang="en-US" sz="1500" b="1" dirty="0">
-                <a:solidFill>
-                  <a:srgbClr val="1E2761"/>
+              <a:t>Await get_final_response()</a:t>
+            </a:r>
+            <a:endParaRPr lang="en-US" sz="1300" dirty="0"/>
+          </a:p>
+          <a:p>
+            <a:pPr marL="342900" indent="-342900">
+              <a:buSzPct val="100000"/>
+              <a:buChar char="•"/>
+            </a:pPr>
+            <a:r>
+              <a:rPr lang="en-US" sz="1300" dirty="0">
+                <a:solidFill>
+                  <a:srgbClr val="212121"/>
                 </a:solidFill>
                 <a:latin typeface="Calibri" pitchFamily="34" charset="0"/>
                 <a:ea typeface="Calibri" pitchFamily="34" charset="-122"/>
                 <a:cs typeface="Calibri" pitchFamily="34" charset="-120"/>
               </a:rPr>
-              <a:t>Client</a:t>
-            </a:r>
-            <a:endParaRPr lang="en-US" sz="1500" dirty="0"/>
-          </a:p>
-        </p:txBody>
-      </p:sp>
-      <p:sp>
-        <p:nvSpPr>
-          <p:cNvPr id="10" name="Text 8"/>
-          <p:cNvSpPr/>
-          <p:nvPr/>
-        </p:nvSpPr>
-        <p:spPr>
-          <a:xfrm>
-            <a:off x="4818888" y="1581912"/>
-            <a:ext cx="3813048" cy="1033272"/>
-          </a:xfrm>
-          <a:prstGeom prst="rect">
-            <a:avLst/>
-          </a:prstGeom>
-          <a:noFill/>
-          <a:ln/>
-        </p:spPr>
-        <p:txBody>
-          <a:bodyPr wrap="square" lIns="0" tIns="0" rIns="0" bIns="0" rtlCol="0" anchor="t">
-            <a:normAutofit/>
-          </a:bodyPr>
-          <a:lstStyle/>
-          <a:p>
-            <a:pPr indent="0" marL="0">
-              <a:buNone/>
-            </a:pPr>
-            <a:r>
-              <a:rPr lang="en-US" sz="1150" dirty="0">
+              <a:t>Read validated .value</a:t>
+            </a:r>
+            <a:endParaRPr lang="en-US" sz="1300" dirty="0"/>
+          </a:p>
+          <a:p>
+            <a:pPr marL="342900" indent="-342900">
+              <a:buSzPct val="100000"/>
+              <a:buChar char="•"/>
+            </a:pPr>
+            <a:r>
+              <a:rPr lang="en-US" sz="1300" dirty="0">
                 <a:solidFill>
                   <a:srgbClr val="212121"/>
                 </a:solidFill>
@@ -3013,233 +3040,15 @@
                 <a:ea typeface="Calibri" pitchFamily="34" charset="-122"/>
                 <a:cs typeface="Calibri" pitchFamily="34" charset="-120"/>
               </a:rPr>
-              <a:t>Must implement compatible structured-output behavior</a:t>
-            </a:r>
-            <a:endParaRPr lang="en-US" sz="1150" dirty="0"/>
+              <a:t>Apply business rules and approvals</a:t>
+            </a:r>
+            <a:endParaRPr lang="en-US" sz="1300" dirty="0"/>
           </a:p>
         </p:txBody>
       </p:sp>
       <p:sp>
         <p:nvSpPr>
           <p:cNvPr id="11" name="Shape 9"/>
-          <p:cNvSpPr/>
-          <p:nvPr/>
-        </p:nvSpPr>
-        <p:spPr>
-          <a:xfrm>
-            <a:off x="365760" y="2935224"/>
-            <a:ext cx="4105656" cy="1655064"/>
-          </a:xfrm>
-          <a:prstGeom prst="roundRect">
-            <a:avLst>
-              <a:gd name="adj" fmla="val 3315"/>
-            </a:avLst>
-          </a:prstGeom>
-          <a:solidFill>
-            <a:srgbClr val="F3F4F6"/>
-          </a:solidFill>
-          <a:ln w="10160">
-            <a:solidFill>
-              <a:srgbClr val="D1D5DB"/>
-            </a:solidFill>
-            <a:prstDash val="solid"/>
-          </a:ln>
-        </p:spPr>
-      </p:sp>
-      <p:sp>
-        <p:nvSpPr>
-          <p:cNvPr id="12" name="Text 10"/>
-          <p:cNvSpPr/>
-          <p:nvPr/>
-        </p:nvSpPr>
-        <p:spPr>
-          <a:xfrm>
-            <a:off x="512064" y="3054096"/>
-            <a:ext cx="3813048" cy="310896"/>
-          </a:xfrm>
-          <a:prstGeom prst="rect">
-            <a:avLst/>
-          </a:prstGeom>
-          <a:noFill/>
-          <a:ln/>
-        </p:spPr>
-        <p:txBody>
-          <a:bodyPr wrap="square" lIns="0" tIns="0" rIns="0" bIns="0" rtlCol="0" anchor="ctr">
-            <a:normAutofit/>
-          </a:bodyPr>
-          <a:lstStyle/>
-          <a:p>
-            <a:pPr indent="0" marL="0">
-              <a:buNone/>
-            </a:pPr>
-            <a:r>
-              <a:rPr lang="en-US" sz="1500" b="1" dirty="0">
-                <a:solidFill>
-                  <a:srgbClr val="1E2761"/>
-                </a:solidFill>
-                <a:latin typeface="Calibri" pitchFamily="34" charset="0"/>
-                <a:ea typeface="Calibri" pitchFamily="34" charset="-122"/>
-                <a:cs typeface="Calibri" pitchFamily="34" charset="-120"/>
-              </a:rPr>
-              <a:t>Model</a:t>
-            </a:r>
-            <a:endParaRPr lang="en-US" sz="1500" dirty="0"/>
-          </a:p>
-        </p:txBody>
-      </p:sp>
-      <p:sp>
-        <p:nvSpPr>
-          <p:cNvPr id="13" name="Text 11"/>
-          <p:cNvSpPr/>
-          <p:nvPr/>
-        </p:nvSpPr>
-        <p:spPr>
-          <a:xfrm>
-            <a:off x="512064" y="3438144"/>
-            <a:ext cx="3813048" cy="1033272"/>
-          </a:xfrm>
-          <a:prstGeom prst="rect">
-            <a:avLst/>
-          </a:prstGeom>
-          <a:noFill/>
-          <a:ln/>
-        </p:spPr>
-        <p:txBody>
-          <a:bodyPr wrap="square" lIns="0" tIns="0" rIns="0" bIns="0" rtlCol="0" anchor="t">
-            <a:normAutofit/>
-          </a:bodyPr>
-          <a:lstStyle/>
-          <a:p>
-            <a:pPr indent="0" marL="0">
-              <a:buNone/>
-            </a:pPr>
-            <a:r>
-              <a:rPr lang="en-US" sz="1150" dirty="0">
-                <a:solidFill>
-                  <a:srgbClr val="212121"/>
-                </a:solidFill>
-                <a:latin typeface="Calibri" pitchFamily="34" charset="0"/>
-                <a:ea typeface="Calibri" pitchFamily="34" charset="-122"/>
-                <a:cs typeface="Calibri" pitchFamily="34" charset="-120"/>
-              </a:rPr>
-              <a:t>Must support the requested response format</a:t>
-            </a:r>
-            <a:endParaRPr lang="en-US" sz="1150" dirty="0"/>
-          </a:p>
-        </p:txBody>
-      </p:sp>
-      <p:sp>
-        <p:nvSpPr>
-          <p:cNvPr id="14" name="Shape 12"/>
-          <p:cNvSpPr/>
-          <p:nvPr/>
-        </p:nvSpPr>
-        <p:spPr>
-          <a:xfrm>
-            <a:off x="4672584" y="2935224"/>
-            <a:ext cx="4105656" cy="1655064"/>
-          </a:xfrm>
-          <a:prstGeom prst="roundRect">
-            <a:avLst>
-              <a:gd name="adj" fmla="val 3315"/>
-            </a:avLst>
-          </a:prstGeom>
-          <a:solidFill>
-            <a:srgbClr val="F3F4F6"/>
-          </a:solidFill>
-          <a:ln w="10160">
-            <a:solidFill>
-              <a:srgbClr val="D1D5DB"/>
-            </a:solidFill>
-            <a:prstDash val="solid"/>
-          </a:ln>
-        </p:spPr>
-      </p:sp>
-      <p:sp>
-        <p:nvSpPr>
-          <p:cNvPr id="15" name="Text 13"/>
-          <p:cNvSpPr/>
-          <p:nvPr/>
-        </p:nvSpPr>
-        <p:spPr>
-          <a:xfrm>
-            <a:off x="4818888" y="3054096"/>
-            <a:ext cx="3813048" cy="310896"/>
-          </a:xfrm>
-          <a:prstGeom prst="rect">
-            <a:avLst/>
-          </a:prstGeom>
-          <a:noFill/>
-          <a:ln/>
-        </p:spPr>
-        <p:txBody>
-          <a:bodyPr wrap="square" lIns="0" tIns="0" rIns="0" bIns="0" rtlCol="0" anchor="ctr">
-            <a:normAutofit/>
-          </a:bodyPr>
-          <a:lstStyle/>
-          <a:p>
-            <a:pPr indent="0" marL="0">
-              <a:buNone/>
-            </a:pPr>
-            <a:r>
-              <a:rPr lang="en-US" sz="1500" b="1" dirty="0">
-                <a:solidFill>
-                  <a:srgbClr val="1E2761"/>
-                </a:solidFill>
-                <a:latin typeface="Calibri" pitchFamily="34" charset="0"/>
-                <a:ea typeface="Calibri" pitchFamily="34" charset="-122"/>
-                <a:cs typeface="Calibri" pitchFamily="34" charset="-120"/>
-              </a:rPr>
-              <a:t>Practice</a:t>
-            </a:r>
-            <a:endParaRPr lang="en-US" sz="1500" dirty="0"/>
-          </a:p>
-        </p:txBody>
-      </p:sp>
-      <p:sp>
-        <p:nvSpPr>
-          <p:cNvPr id="16" name="Text 14"/>
-          <p:cNvSpPr/>
-          <p:nvPr/>
-        </p:nvSpPr>
-        <p:spPr>
-          <a:xfrm>
-            <a:off x="4818888" y="3438144"/>
-            <a:ext cx="3813048" cy="1033272"/>
-          </a:xfrm>
-          <a:prstGeom prst="rect">
-            <a:avLst/>
-          </a:prstGeom>
-          <a:noFill/>
-          <a:ln/>
-        </p:spPr>
-        <p:txBody>
-          <a:bodyPr wrap="square" lIns="0" tIns="0" rIns="0" bIns="0" rtlCol="0" anchor="t">
-            <a:normAutofit/>
-          </a:bodyPr>
-          <a:lstStyle/>
-          <a:p>
-            <a:pPr indent="0" marL="0">
-              <a:buNone/>
-            </a:pPr>
-            <a:r>
-              <a:rPr lang="en-US" sz="1150" dirty="0">
-                <a:solidFill>
-                  <a:srgbClr val="212121"/>
-                </a:solidFill>
-                <a:latin typeface="Calibri" pitchFamily="34" charset="0"/>
-                <a:ea typeface="Calibri" pitchFamily="34" charset="-122"/>
-                <a:cs typeface="Calibri" pitchFamily="34" charset="-120"/>
-              </a:rPr>
-              <a:t>Test the exact deployment and handle invalid values</a:t>
-            </a:r>
-            <a:endParaRPr lang="en-US" sz="1150" dirty="0"/>
-          </a:p>
-        </p:txBody>
-      </p:sp>
-      <p:sp>
-        <p:nvSpPr>
-          <p:cNvPr id="17" name="Shape 15"/>
           <p:cNvSpPr/>
           <p:nvPr/>
         </p:nvSpPr>
@@ -3262,7 +3071,7 @@
       </p:sp>
       <p:sp>
         <p:nvSpPr>
-          <p:cNvPr id="18" name="Text 16"/>
+          <p:cNvPr id="12" name="Text 10"/>
           <p:cNvSpPr/>
           <p:nvPr/>
         </p:nvSpPr>
@@ -3295,7 +3104,7 @@
                 <a:ea typeface="Calibri" pitchFamily="34" charset="-122"/>
                 <a:cs typeface="Calibri" pitchFamily="34" charset="-120"/>
               </a:rPr>
-              <a:t>Source: https://learn.microsoft.com/en-us/agent-framework/agents/structured-outputs?tabs=python  ·  +1 in notes</a:t>
+              <a:t>Source: https://learn.microsoft.com/en-us/agent-framework/agents/structured-outputs?tabs=python</a:t>
             </a:r>
             <a:endParaRPr lang="en-US" sz="820" dirty="0"/>
           </a:p>
@@ -3421,7 +3230,7 @@
               <a:buNone/>
             </a:pPr>
             <a:r>
-              <a:rPr lang="en-US" sz="2800" b="1" dirty="0">
+              <a:rPr lang="en-US" sz="2500" b="1" dirty="0">
                 <a:solidFill>
                   <a:srgbClr val="1E2761"/>
                 </a:solidFill>
@@ -3429,6 +3238,640 @@
                 <a:ea typeface="Calibri" pitchFamily="34" charset="-122"/>
                 <a:cs typeface="Calibri" pitchFamily="34" charset="-120"/>
               </a:rPr>
+              <a:t>Support follows the underlying client</a:t>
+            </a:r>
+            <a:endParaRPr lang="en-US" sz="2500" dirty="0"/>
+          </a:p>
+        </p:txBody>
+      </p:sp>
+      <p:sp>
+        <p:nvSpPr>
+          <p:cNvPr id="5" name="Shape 3"/>
+          <p:cNvSpPr/>
+          <p:nvPr/>
+        </p:nvSpPr>
+        <p:spPr>
+          <a:xfrm>
+            <a:off x="365760" y="1078992"/>
+            <a:ext cx="4105656" cy="1655064"/>
+          </a:xfrm>
+          <a:prstGeom prst="roundRect">
+            <a:avLst>
+              <a:gd name="adj" fmla="val 3315"/>
+            </a:avLst>
+          </a:prstGeom>
+          <a:solidFill>
+            <a:srgbClr val="CADCFC"/>
+          </a:solidFill>
+          <a:ln w="10160">
+            <a:solidFill>
+              <a:srgbClr val="1E2761"/>
+            </a:solidFill>
+            <a:prstDash val="solid"/>
+          </a:ln>
+        </p:spPr>
+      </p:sp>
+      <p:sp>
+        <p:nvSpPr>
+          <p:cNvPr id="6" name="Text 4"/>
+          <p:cNvSpPr/>
+          <p:nvPr/>
+        </p:nvSpPr>
+        <p:spPr>
+          <a:xfrm>
+            <a:off x="512064" y="1197864"/>
+            <a:ext cx="3813048" cy="310896"/>
+          </a:xfrm>
+          <a:prstGeom prst="rect">
+            <a:avLst/>
+          </a:prstGeom>
+          <a:noFill/>
+          <a:ln/>
+        </p:spPr>
+        <p:txBody>
+          <a:bodyPr wrap="square" lIns="0" tIns="0" rIns="0" bIns="0" rtlCol="0" anchor="ctr">
+            <a:normAutofit/>
+          </a:bodyPr>
+          <a:lstStyle/>
+          <a:p>
+            <a:pPr indent="0" marL="0">
+              <a:buNone/>
+            </a:pPr>
+            <a:r>
+              <a:rPr lang="en-US" sz="1500" b="1" dirty="0">
+                <a:solidFill>
+                  <a:srgbClr val="1E2761"/>
+                </a:solidFill>
+                <a:latin typeface="Calibri" pitchFamily="34" charset="0"/>
+                <a:ea typeface="Calibri" pitchFamily="34" charset="-122"/>
+                <a:cs typeface="Calibri" pitchFamily="34" charset="-120"/>
+              </a:rPr>
+              <a:t>Framework</a:t>
+            </a:r>
+            <a:endParaRPr lang="en-US" sz="1500" dirty="0"/>
+          </a:p>
+        </p:txBody>
+      </p:sp>
+      <p:sp>
+        <p:nvSpPr>
+          <p:cNvPr id="7" name="Text 5"/>
+          <p:cNvSpPr/>
+          <p:nvPr/>
+        </p:nvSpPr>
+        <p:spPr>
+          <a:xfrm>
+            <a:off x="512064" y="1581912"/>
+            <a:ext cx="3813048" cy="1033272"/>
+          </a:xfrm>
+          <a:prstGeom prst="rect">
+            <a:avLst/>
+          </a:prstGeom>
+          <a:noFill/>
+          <a:ln/>
+        </p:spPr>
+        <p:txBody>
+          <a:bodyPr wrap="square" lIns="0" tIns="0" rIns="0" bIns="0" rtlCol="0" anchor="t">
+            <a:normAutofit/>
+          </a:bodyPr>
+          <a:lstStyle/>
+          <a:p>
+            <a:pPr indent="0" marL="0">
+              <a:buNone/>
+            </a:pPr>
+            <a:r>
+              <a:rPr lang="en-US" sz="1150" dirty="0">
+                <a:solidFill>
+                  <a:srgbClr val="212121"/>
+                </a:solidFill>
+                <a:latin typeface="Calibri" pitchFamily="34" charset="0"/>
+                <a:ea typeface="Calibri" pitchFamily="34" charset="-122"/>
+                <a:cs typeface="Calibri" pitchFamily="34" charset="-120"/>
+              </a:rPr>
+              <a:t>Agent forwards the response format through the client</a:t>
+            </a:r>
+            <a:endParaRPr lang="en-US" sz="1150" dirty="0"/>
+          </a:p>
+        </p:txBody>
+      </p:sp>
+      <p:sp>
+        <p:nvSpPr>
+          <p:cNvPr id="8" name="Shape 6"/>
+          <p:cNvSpPr/>
+          <p:nvPr/>
+        </p:nvSpPr>
+        <p:spPr>
+          <a:xfrm>
+            <a:off x="4672584" y="1078992"/>
+            <a:ext cx="4105656" cy="1655064"/>
+          </a:xfrm>
+          <a:prstGeom prst="roundRect">
+            <a:avLst>
+              <a:gd name="adj" fmla="val 3315"/>
+            </a:avLst>
+          </a:prstGeom>
+          <a:solidFill>
+            <a:srgbClr val="F3F4F6"/>
+          </a:solidFill>
+          <a:ln w="10160">
+            <a:solidFill>
+              <a:srgbClr val="D1D5DB"/>
+            </a:solidFill>
+            <a:prstDash val="solid"/>
+          </a:ln>
+        </p:spPr>
+      </p:sp>
+      <p:sp>
+        <p:nvSpPr>
+          <p:cNvPr id="9" name="Text 7"/>
+          <p:cNvSpPr/>
+          <p:nvPr/>
+        </p:nvSpPr>
+        <p:spPr>
+          <a:xfrm>
+            <a:off x="4818888" y="1197864"/>
+            <a:ext cx="3813048" cy="310896"/>
+          </a:xfrm>
+          <a:prstGeom prst="rect">
+            <a:avLst/>
+          </a:prstGeom>
+          <a:noFill/>
+          <a:ln/>
+        </p:spPr>
+        <p:txBody>
+          <a:bodyPr wrap="square" lIns="0" tIns="0" rIns="0" bIns="0" rtlCol="0" anchor="ctr">
+            <a:normAutofit/>
+          </a:bodyPr>
+          <a:lstStyle/>
+          <a:p>
+            <a:pPr indent="0" marL="0">
+              <a:buNone/>
+            </a:pPr>
+            <a:r>
+              <a:rPr lang="en-US" sz="1500" b="1" dirty="0">
+                <a:solidFill>
+                  <a:srgbClr val="1E2761"/>
+                </a:solidFill>
+                <a:latin typeface="Calibri" pitchFamily="34" charset="0"/>
+                <a:ea typeface="Calibri" pitchFamily="34" charset="-122"/>
+                <a:cs typeface="Calibri" pitchFamily="34" charset="-120"/>
+              </a:rPr>
+              <a:t>Client</a:t>
+            </a:r>
+            <a:endParaRPr lang="en-US" sz="1500" dirty="0"/>
+          </a:p>
+        </p:txBody>
+      </p:sp>
+      <p:sp>
+        <p:nvSpPr>
+          <p:cNvPr id="10" name="Text 8"/>
+          <p:cNvSpPr/>
+          <p:nvPr/>
+        </p:nvSpPr>
+        <p:spPr>
+          <a:xfrm>
+            <a:off x="4818888" y="1581912"/>
+            <a:ext cx="3813048" cy="1033272"/>
+          </a:xfrm>
+          <a:prstGeom prst="rect">
+            <a:avLst/>
+          </a:prstGeom>
+          <a:noFill/>
+          <a:ln/>
+        </p:spPr>
+        <p:txBody>
+          <a:bodyPr wrap="square" lIns="0" tIns="0" rIns="0" bIns="0" rtlCol="0" anchor="t">
+            <a:normAutofit/>
+          </a:bodyPr>
+          <a:lstStyle/>
+          <a:p>
+            <a:pPr indent="0" marL="0">
+              <a:buNone/>
+            </a:pPr>
+            <a:r>
+              <a:rPr lang="en-US" sz="1150" dirty="0">
+                <a:solidFill>
+                  <a:srgbClr val="212121"/>
+                </a:solidFill>
+                <a:latin typeface="Calibri" pitchFamily="34" charset="0"/>
+                <a:ea typeface="Calibri" pitchFamily="34" charset="-122"/>
+                <a:cs typeface="Calibri" pitchFamily="34" charset="-120"/>
+              </a:rPr>
+              <a:t>Must implement compatible structured-output behavior</a:t>
+            </a:r>
+            <a:endParaRPr lang="en-US" sz="1150" dirty="0"/>
+          </a:p>
+        </p:txBody>
+      </p:sp>
+      <p:sp>
+        <p:nvSpPr>
+          <p:cNvPr id="11" name="Shape 9"/>
+          <p:cNvSpPr/>
+          <p:nvPr/>
+        </p:nvSpPr>
+        <p:spPr>
+          <a:xfrm>
+            <a:off x="365760" y="2935224"/>
+            <a:ext cx="4105656" cy="1655064"/>
+          </a:xfrm>
+          <a:prstGeom prst="roundRect">
+            <a:avLst>
+              <a:gd name="adj" fmla="val 3315"/>
+            </a:avLst>
+          </a:prstGeom>
+          <a:solidFill>
+            <a:srgbClr val="F3F4F6"/>
+          </a:solidFill>
+          <a:ln w="10160">
+            <a:solidFill>
+              <a:srgbClr val="D1D5DB"/>
+            </a:solidFill>
+            <a:prstDash val="solid"/>
+          </a:ln>
+        </p:spPr>
+      </p:sp>
+      <p:sp>
+        <p:nvSpPr>
+          <p:cNvPr id="12" name="Text 10"/>
+          <p:cNvSpPr/>
+          <p:nvPr/>
+        </p:nvSpPr>
+        <p:spPr>
+          <a:xfrm>
+            <a:off x="512064" y="3054096"/>
+            <a:ext cx="3813048" cy="310896"/>
+          </a:xfrm>
+          <a:prstGeom prst="rect">
+            <a:avLst/>
+          </a:prstGeom>
+          <a:noFill/>
+          <a:ln/>
+        </p:spPr>
+        <p:txBody>
+          <a:bodyPr wrap="square" lIns="0" tIns="0" rIns="0" bIns="0" rtlCol="0" anchor="ctr">
+            <a:normAutofit/>
+          </a:bodyPr>
+          <a:lstStyle/>
+          <a:p>
+            <a:pPr indent="0" marL="0">
+              <a:buNone/>
+            </a:pPr>
+            <a:r>
+              <a:rPr lang="en-US" sz="1500" b="1" dirty="0">
+                <a:solidFill>
+                  <a:srgbClr val="1E2761"/>
+                </a:solidFill>
+                <a:latin typeface="Calibri" pitchFamily="34" charset="0"/>
+                <a:ea typeface="Calibri" pitchFamily="34" charset="-122"/>
+                <a:cs typeface="Calibri" pitchFamily="34" charset="-120"/>
+              </a:rPr>
+              <a:t>Model</a:t>
+            </a:r>
+            <a:endParaRPr lang="en-US" sz="1500" dirty="0"/>
+          </a:p>
+        </p:txBody>
+      </p:sp>
+      <p:sp>
+        <p:nvSpPr>
+          <p:cNvPr id="13" name="Text 11"/>
+          <p:cNvSpPr/>
+          <p:nvPr/>
+        </p:nvSpPr>
+        <p:spPr>
+          <a:xfrm>
+            <a:off x="512064" y="3438144"/>
+            <a:ext cx="3813048" cy="1033272"/>
+          </a:xfrm>
+          <a:prstGeom prst="rect">
+            <a:avLst/>
+          </a:prstGeom>
+          <a:noFill/>
+          <a:ln/>
+        </p:spPr>
+        <p:txBody>
+          <a:bodyPr wrap="square" lIns="0" tIns="0" rIns="0" bIns="0" rtlCol="0" anchor="t">
+            <a:normAutofit/>
+          </a:bodyPr>
+          <a:lstStyle/>
+          <a:p>
+            <a:pPr indent="0" marL="0">
+              <a:buNone/>
+            </a:pPr>
+            <a:r>
+              <a:rPr lang="en-US" sz="1150" dirty="0">
+                <a:solidFill>
+                  <a:srgbClr val="212121"/>
+                </a:solidFill>
+                <a:latin typeface="Calibri" pitchFamily="34" charset="0"/>
+                <a:ea typeface="Calibri" pitchFamily="34" charset="-122"/>
+                <a:cs typeface="Calibri" pitchFamily="34" charset="-120"/>
+              </a:rPr>
+              <a:t>Must support the requested response format</a:t>
+            </a:r>
+            <a:endParaRPr lang="en-US" sz="1150" dirty="0"/>
+          </a:p>
+        </p:txBody>
+      </p:sp>
+      <p:sp>
+        <p:nvSpPr>
+          <p:cNvPr id="14" name="Shape 12"/>
+          <p:cNvSpPr/>
+          <p:nvPr/>
+        </p:nvSpPr>
+        <p:spPr>
+          <a:xfrm>
+            <a:off x="4672584" y="2935224"/>
+            <a:ext cx="4105656" cy="1655064"/>
+          </a:xfrm>
+          <a:prstGeom prst="roundRect">
+            <a:avLst>
+              <a:gd name="adj" fmla="val 3315"/>
+            </a:avLst>
+          </a:prstGeom>
+          <a:solidFill>
+            <a:srgbClr val="F3F4F6"/>
+          </a:solidFill>
+          <a:ln w="10160">
+            <a:solidFill>
+              <a:srgbClr val="D1D5DB"/>
+            </a:solidFill>
+            <a:prstDash val="solid"/>
+          </a:ln>
+        </p:spPr>
+      </p:sp>
+      <p:sp>
+        <p:nvSpPr>
+          <p:cNvPr id="15" name="Text 13"/>
+          <p:cNvSpPr/>
+          <p:nvPr/>
+        </p:nvSpPr>
+        <p:spPr>
+          <a:xfrm>
+            <a:off x="4818888" y="3054096"/>
+            <a:ext cx="3813048" cy="310896"/>
+          </a:xfrm>
+          <a:prstGeom prst="rect">
+            <a:avLst/>
+          </a:prstGeom>
+          <a:noFill/>
+          <a:ln/>
+        </p:spPr>
+        <p:txBody>
+          <a:bodyPr wrap="square" lIns="0" tIns="0" rIns="0" bIns="0" rtlCol="0" anchor="ctr">
+            <a:normAutofit/>
+          </a:bodyPr>
+          <a:lstStyle/>
+          <a:p>
+            <a:pPr indent="0" marL="0">
+              <a:buNone/>
+            </a:pPr>
+            <a:r>
+              <a:rPr lang="en-US" sz="1500" b="1" dirty="0">
+                <a:solidFill>
+                  <a:srgbClr val="1E2761"/>
+                </a:solidFill>
+                <a:latin typeface="Calibri" pitchFamily="34" charset="0"/>
+                <a:ea typeface="Calibri" pitchFamily="34" charset="-122"/>
+                <a:cs typeface="Calibri" pitchFamily="34" charset="-120"/>
+              </a:rPr>
+              <a:t>Practice</a:t>
+            </a:r>
+            <a:endParaRPr lang="en-US" sz="1500" dirty="0"/>
+          </a:p>
+        </p:txBody>
+      </p:sp>
+      <p:sp>
+        <p:nvSpPr>
+          <p:cNvPr id="16" name="Text 14"/>
+          <p:cNvSpPr/>
+          <p:nvPr/>
+        </p:nvSpPr>
+        <p:spPr>
+          <a:xfrm>
+            <a:off x="4818888" y="3438144"/>
+            <a:ext cx="3813048" cy="1033272"/>
+          </a:xfrm>
+          <a:prstGeom prst="rect">
+            <a:avLst/>
+          </a:prstGeom>
+          <a:noFill/>
+          <a:ln/>
+        </p:spPr>
+        <p:txBody>
+          <a:bodyPr wrap="square" lIns="0" tIns="0" rIns="0" bIns="0" rtlCol="0" anchor="t">
+            <a:normAutofit/>
+          </a:bodyPr>
+          <a:lstStyle/>
+          <a:p>
+            <a:pPr indent="0" marL="0">
+              <a:buNone/>
+            </a:pPr>
+            <a:r>
+              <a:rPr lang="en-US" sz="1150" dirty="0">
+                <a:solidFill>
+                  <a:srgbClr val="212121"/>
+                </a:solidFill>
+                <a:latin typeface="Calibri" pitchFamily="34" charset="0"/>
+                <a:ea typeface="Calibri" pitchFamily="34" charset="-122"/>
+                <a:cs typeface="Calibri" pitchFamily="34" charset="-120"/>
+              </a:rPr>
+              <a:t>Test the exact deployment and handle invalid values</a:t>
+            </a:r>
+            <a:endParaRPr lang="en-US" sz="1150" dirty="0"/>
+          </a:p>
+        </p:txBody>
+      </p:sp>
+      <p:sp>
+        <p:nvSpPr>
+          <p:cNvPr id="17" name="Shape 15"/>
+          <p:cNvSpPr/>
+          <p:nvPr/>
+        </p:nvSpPr>
+        <p:spPr>
+          <a:xfrm>
+            <a:off x="365760" y="4773168"/>
+            <a:ext cx="8412480" cy="0"/>
+          </a:xfrm>
+          <a:prstGeom prst="line">
+            <a:avLst/>
+          </a:prstGeom>
+          <a:noFill/>
+          <a:ln w="6350">
+            <a:solidFill>
+              <a:srgbClr val="D1D5DB"/>
+            </a:solidFill>
+            <a:prstDash val="solid"/>
+          </a:ln>
+        </p:spPr>
+      </p:sp>
+      <p:sp>
+        <p:nvSpPr>
+          <p:cNvPr id="18" name="Text 16"/>
+          <p:cNvSpPr/>
+          <p:nvPr/>
+        </p:nvSpPr>
+        <p:spPr>
+          <a:xfrm>
+            <a:off x="384048" y="4818888"/>
+            <a:ext cx="8275320" cy="182880"/>
+          </a:xfrm>
+          <a:prstGeom prst="rect">
+            <a:avLst/>
+          </a:prstGeom>
+          <a:noFill/>
+          <a:ln/>
+        </p:spPr>
+        <p:txBody>
+          <a:bodyPr wrap="square" lIns="0" tIns="0" rIns="0" bIns="0" rtlCol="0" anchor="ctr">
+            <a:normAutofit/>
+          </a:bodyPr>
+          <a:lstStyle/>
+          <a:p>
+            <a:pPr indent="0" marL="0">
+              <a:buNone/>
+            </a:pPr>
+            <a:r>
+              <a:rPr lang="en-US" sz="820" dirty="0">
+                <a:solidFill>
+                  <a:srgbClr val="6B7280"/>
+                </a:solidFill>
+                <a:latin typeface="Calibri" pitchFamily="34" charset="0"/>
+                <a:ea typeface="Calibri" pitchFamily="34" charset="-122"/>
+                <a:cs typeface="Calibri" pitchFamily="34" charset="-120"/>
+              </a:rPr>
+              <a:t>Source: https://learn.microsoft.com/en-us/agent-framework/agents/structured-outputs?tabs=python  ·  +1 in notes</a:t>
+            </a:r>
+            <a:endParaRPr lang="en-US" sz="820" dirty="0"/>
+          </a:p>
+        </p:txBody>
+      </p:sp>
+    </p:spTree>
+  </p:cSld>
+  <p:clrMapOvr>
+    <a:masterClrMapping/>
+  </p:clrMapOvr>
+</p:sld>
+</file>
+
+<file path=ppt/slides/slide13.xml><?xml version="1.0" encoding="utf-8"?>
+<p:sld xmlns:a="http://schemas.openxmlformats.org/drawingml/2006/main" xmlns:r="http://schemas.openxmlformats.org/officeDocument/2006/relationships" xmlns:p="http://schemas.openxmlformats.org/presentationml/2006/main">
+  <p:cSld name="Slide 13">
+    <p:bg>
+      <p:bgPr>
+        <a:solidFill>
+          <a:srgbClr val="FFFFFF"/>
+        </a:solidFill>
+      </p:bgPr>
+    </p:bg>
+    <p:spTree>
+      <p:nvGrpSpPr>
+        <p:cNvPr id="1" name=""/>
+        <p:cNvGrpSpPr/>
+        <p:nvPr/>
+      </p:nvGrpSpPr>
+      <p:grpSpPr>
+        <a:xfrm>
+          <a:off x="0" y="0"/>
+          <a:ext cx="0" cy="0"/>
+          <a:chOff x="0" y="0"/>
+          <a:chExt cx="0" cy="0"/>
+        </a:xfrm>
+      </p:grpSpPr>
+      <p:sp>
+        <p:nvSpPr>
+          <p:cNvPr id="2" name="Shape 0"/>
+          <p:cNvSpPr/>
+          <p:nvPr/>
+        </p:nvSpPr>
+        <p:spPr>
+          <a:xfrm>
+            <a:off x="0" y="0"/>
+            <a:ext cx="54864" cy="5143500"/>
+          </a:xfrm>
+          <a:prstGeom prst="rect">
+            <a:avLst/>
+          </a:prstGeom>
+          <a:solidFill>
+            <a:srgbClr val="1E2761"/>
+          </a:solidFill>
+          <a:ln/>
+        </p:spPr>
+      </p:sp>
+      <p:sp>
+        <p:nvSpPr>
+          <p:cNvPr id="3" name="Text 1"/>
+          <p:cNvSpPr/>
+          <p:nvPr/>
+        </p:nvSpPr>
+        <p:spPr>
+          <a:xfrm>
+            <a:off x="5486400" y="256032"/>
+            <a:ext cx="3337560" cy="228600"/>
+          </a:xfrm>
+          <a:prstGeom prst="rect">
+            <a:avLst/>
+          </a:prstGeom>
+          <a:noFill/>
+          <a:ln/>
+        </p:spPr>
+        <p:txBody>
+          <a:bodyPr wrap="square" lIns="0" tIns="0" rIns="0" bIns="0" rtlCol="0" anchor="ctr">
+            <a:normAutofit/>
+          </a:bodyPr>
+          <a:lstStyle/>
+          <a:p>
+            <a:pPr algn="r" indent="0" marL="0">
+              <a:buNone/>
+            </a:pPr>
+            <a:r>
+              <a:rPr lang="en-US" sz="950" dirty="0">
+                <a:solidFill>
+                  <a:srgbClr val="6B7280"/>
+                </a:solidFill>
+                <a:latin typeface="Calibri" pitchFamily="34" charset="0"/>
+                <a:ea typeface="Calibri" pitchFamily="34" charset="-122"/>
+                <a:cs typeface="Calibri" pitchFamily="34" charset="-120"/>
+              </a:rPr>
+              <a:t>Day 3 · Module 2</a:t>
+            </a:r>
+            <a:endParaRPr lang="en-US" sz="950" dirty="0"/>
+          </a:p>
+        </p:txBody>
+      </p:sp>
+      <p:sp>
+        <p:nvSpPr>
+          <p:cNvPr id="4" name="Text 2"/>
+          <p:cNvSpPr/>
+          <p:nvPr/>
+        </p:nvSpPr>
+        <p:spPr>
+          <a:xfrm>
+            <a:off x="365760" y="310896"/>
+            <a:ext cx="6583680" cy="603504"/>
+          </a:xfrm>
+          <a:prstGeom prst="rect">
+            <a:avLst/>
+          </a:prstGeom>
+          <a:noFill/>
+          <a:ln/>
+        </p:spPr>
+        <p:txBody>
+          <a:bodyPr wrap="square" lIns="0" tIns="0" rIns="0" bIns="0" rtlCol="0" anchor="ctr">
+            <a:normAutofit/>
+          </a:bodyPr>
+          <a:lstStyle/>
+          <a:p>
+            <a:pPr indent="0" marL="0">
+              <a:buNone/>
+            </a:pPr>
+            <a:r>
+              <a:rPr lang="en-US" sz="2800" b="1" dirty="0">
+                <a:solidFill>
+                  <a:srgbClr val="1E2761"/>
+                </a:solidFill>
+                <a:latin typeface="Calibri" pitchFamily="34" charset="0"/>
+                <a:ea typeface="Calibri" pitchFamily="34" charset="-122"/>
+                <a:cs typeface="Calibri" pitchFamily="34" charset="-120"/>
+              </a:rPr>
               <a:t>Choose the response contract</a:t>
             </a:r>
             <a:endParaRPr lang="en-US" sz="2800" dirty="0"/>
@@ -3437,7 +3880,7 @@
       </p:sp>
       <p:graphicFrame>
         <p:nvGraphicFramePr>
-          <p:cNvPr id="13" name="Table 0"/>
+          <p:cNvPr id="14" name="Table 0"/>
           <p:cNvGraphicFramePr>
             <a:graphicFrameLocks noGrp="1"/>
           </p:cNvGraphicFramePr>
@@ -4365,9 +4808,9 @@
 </p:sld>
 </file>
 
-<file path=ppt/slides/slide13.xml><?xml version="1.0" encoding="utf-8"?>
+<file path=ppt/slides/slide14.xml><?xml version="1.0" encoding="utf-8"?>
 <p:sld xmlns:a="http://schemas.openxmlformats.org/drawingml/2006/main" xmlns:r="http://schemas.openxmlformats.org/officeDocument/2006/relationships" xmlns:p="http://schemas.openxmlformats.org/presentationml/2006/main">
-  <p:cSld name="Slide 13">
+  <p:cSld name="Slide 14">
     <p:bg>
       <p:bgPr>
         <a:solidFill>

--- a/decks/day3/module-2-streaming-structured.pptx
+++ b/decks/day3/module-2-streaming-structured.pptx
@@ -9136,23 +9136,14 @@
             <a:r>
               <a:rPr lang="en-US" sz="1280" dirty="0">
                 <a:solidFill>
-                  <a:srgbClr val="212121"/>
+                  <a:srgbClr val="1E2761"/>
                 </a:solidFill>
                 <a:latin typeface="Consolas" pitchFamily="34" charset="0"/>
                 <a:ea typeface="Consolas" pitchFamily="34" charset="-122"/>
                 <a:cs typeface="Consolas" pitchFamily="34" charset="-120"/>
               </a:rPr>
-              <a:t>from pydantic import BaseModel</a:t>
-            </a:r>
-            <a:endParaRPr lang="en-US" sz="1280" dirty="0"/>
-          </a:p>
-          <a:p>
-            <a:pPr indent="0" marL="0">
-              <a:buNone/>
-            </a:pPr>
-            <a:endParaRPr lang="en-US" sz="1280" dirty="0"/>
-          </a:p>
-          <a:p>
+              <a:t>from</a:t>
+            </a:r>
             <a:pPr indent="0" marL="0">
               <a:buNone/>
             </a:pPr>
@@ -9165,28 +9156,22 @@
                 <a:ea typeface="Consolas" pitchFamily="34" charset="-122"/>
                 <a:cs typeface="Consolas" pitchFamily="34" charset="-120"/>
               </a:rPr>
-              <a:t>class TriageResult(BaseModel):</a:t>
-            </a:r>
-            <a:endParaRPr lang="en-US" sz="1280" dirty="0"/>
-          </a:p>
-          <a:p>
+              <a:t> pydantic </a:t>
+            </a:r>
             <a:pPr indent="0" marL="0">
               <a:buNone/>
             </a:pPr>
             <a:r>
               <a:rPr lang="en-US" sz="1280" dirty="0">
                 <a:solidFill>
-                  <a:srgbClr val="212121"/>
+                  <a:srgbClr val="1E2761"/>
                 </a:solidFill>
                 <a:latin typeface="Consolas" pitchFamily="34" charset="0"/>
                 <a:ea typeface="Consolas" pitchFamily="34" charset="-122"/>
                 <a:cs typeface="Consolas" pitchFamily="34" charset="-120"/>
               </a:rPr>
-              <a:t>    route: str</a:t>
-            </a:r>
-            <a:endParaRPr lang="en-US" sz="1280" dirty="0"/>
-          </a:p>
-          <a:p>
+              <a:t>import</a:t>
+            </a:r>
             <a:pPr indent="0" marL="0">
               <a:buNone/>
             </a:pPr>
@@ -9199,34 +9184,23 @@
                 <a:ea typeface="Consolas" pitchFamily="34" charset="-122"/>
                 <a:cs typeface="Consolas" pitchFamily="34" charset="-120"/>
               </a:rPr>
-              <a:t>    summary: str</a:t>
-            </a:r>
-            <a:endParaRPr lang="en-US" sz="1280" dirty="0"/>
-          </a:p>
-          <a:p>
+              <a:t> BaseModel
+</a:t>
+            </a:r>
             <a:pPr indent="0" marL="0">
               <a:buNone/>
             </a:pPr>
             <a:r>
               <a:rPr lang="en-US" sz="1280" dirty="0">
                 <a:solidFill>
-                  <a:srgbClr val="212121"/>
+                  <a:srgbClr val="1E2761"/>
                 </a:solidFill>
                 <a:latin typeface="Consolas" pitchFamily="34" charset="0"/>
                 <a:ea typeface="Consolas" pitchFamily="34" charset="-122"/>
                 <a:cs typeface="Consolas" pitchFamily="34" charset="-120"/>
               </a:rPr>
-              <a:t>    needs_work_item: bool</a:t>
-            </a:r>
-            <a:endParaRPr lang="en-US" sz="1280" dirty="0"/>
-          </a:p>
-          <a:p>
-            <a:pPr indent="0" marL="0">
-              <a:buNone/>
-            </a:pPr>
-            <a:endParaRPr lang="en-US" sz="1280" dirty="0"/>
-          </a:p>
-          <a:p>
+              <a:t>class</a:t>
+            </a:r>
             <a:pPr indent="0" marL="0">
               <a:buNone/>
             </a:pPr>
@@ -9239,7 +9213,7 @@
                 <a:ea typeface="Consolas" pitchFamily="34" charset="-122"/>
                 <a:cs typeface="Consolas" pitchFamily="34" charset="-120"/>
               </a:rPr>
-              <a:t>response = await agent.run(</a:t>
+              <a:t> TriageResult(BaseModel):</a:t>
             </a:r>
             <a:endParaRPr lang="en-US" sz="1280" dirty="0"/>
           </a:p>
@@ -9256,7 +9230,7 @@
                 <a:ea typeface="Consolas" pitchFamily="34" charset="-122"/>
                 <a:cs typeface="Consolas" pitchFamily="34" charset="-120"/>
               </a:rPr>
-              <a:t>    request,</a:t>
+              <a:t>    route: str</a:t>
             </a:r>
             <a:endParaRPr lang="en-US" sz="1280" dirty="0"/>
           </a:p>
@@ -9273,7 +9247,143 @@
                 <a:ea typeface="Consolas" pitchFamily="34" charset="-122"/>
                 <a:cs typeface="Consolas" pitchFamily="34" charset="-120"/>
               </a:rPr>
-              <a:t>    options={"response_format": TriageResult},</a:t>
+              <a:t>    summary: str</a:t>
+            </a:r>
+            <a:endParaRPr lang="en-US" sz="1280" dirty="0"/>
+          </a:p>
+          <a:p>
+            <a:pPr indent="0" marL="0">
+              <a:buNone/>
+            </a:pPr>
+            <a:r>
+              <a:rPr lang="en-US" sz="1280" dirty="0">
+                <a:solidFill>
+                  <a:srgbClr val="212121"/>
+                </a:solidFill>
+                <a:latin typeface="Consolas" pitchFamily="34" charset="0"/>
+                <a:ea typeface="Consolas" pitchFamily="34" charset="-122"/>
+                <a:cs typeface="Consolas" pitchFamily="34" charset="-120"/>
+              </a:rPr>
+              <a:t>    needs_work_item: bool</a:t>
+            </a:r>
+            <a:endParaRPr lang="en-US" sz="1280" dirty="0"/>
+          </a:p>
+          <a:p>
+            <a:pPr indent="0" marL="0">
+              <a:buNone/>
+            </a:pPr>
+            <a:endParaRPr lang="en-US" sz="1280" dirty="0"/>
+          </a:p>
+          <a:p>
+            <a:pPr indent="0" marL="0">
+              <a:buNone/>
+            </a:pPr>
+            <a:r>
+              <a:rPr lang="en-US" sz="1280" dirty="0">
+                <a:solidFill>
+                  <a:srgbClr val="212121"/>
+                </a:solidFill>
+                <a:latin typeface="Consolas" pitchFamily="34" charset="0"/>
+                <a:ea typeface="Consolas" pitchFamily="34" charset="-122"/>
+                <a:cs typeface="Consolas" pitchFamily="34" charset="-120"/>
+              </a:rPr>
+              <a:t>response = </a:t>
+            </a:r>
+            <a:endParaRPr lang="en-US" sz="1280" dirty="0"/>
+          </a:p>
+          <a:p>
+            <a:pPr indent="0" marL="0">
+              <a:buNone/>
+            </a:pPr>
+            <a:r>
+              <a:rPr lang="en-US" sz="1280" dirty="0">
+                <a:solidFill>
+                  <a:srgbClr val="1E2761"/>
+                </a:solidFill>
+                <a:latin typeface="Consolas" pitchFamily="34" charset="0"/>
+                <a:ea typeface="Consolas" pitchFamily="34" charset="-122"/>
+                <a:cs typeface="Consolas" pitchFamily="34" charset="-120"/>
+              </a:rPr>
+              <a:t>await</a:t>
+            </a:r>
+            <a:pPr indent="0" marL="0">
+              <a:buNone/>
+            </a:pPr>
+            <a:r>
+              <a:rPr lang="en-US" sz="1280" dirty="0">
+                <a:solidFill>
+                  <a:srgbClr val="212121"/>
+                </a:solidFill>
+                <a:latin typeface="Consolas" pitchFamily="34" charset="0"/>
+                <a:ea typeface="Consolas" pitchFamily="34" charset="-122"/>
+                <a:cs typeface="Consolas" pitchFamily="34" charset="-120"/>
+              </a:rPr>
+              <a:t> agent.run(</a:t>
+            </a:r>
+            <a:endParaRPr lang="en-US" sz="1280" dirty="0"/>
+          </a:p>
+          <a:p>
+            <a:pPr indent="0" marL="0">
+              <a:buNone/>
+            </a:pPr>
+            <a:r>
+              <a:rPr lang="en-US" sz="1280" dirty="0">
+                <a:solidFill>
+                  <a:srgbClr val="212121"/>
+                </a:solidFill>
+                <a:latin typeface="Consolas" pitchFamily="34" charset="0"/>
+                <a:ea typeface="Consolas" pitchFamily="34" charset="-122"/>
+                <a:cs typeface="Consolas" pitchFamily="34" charset="-120"/>
+              </a:rPr>
+              <a:t>    request,</a:t>
+            </a:r>
+            <a:endParaRPr lang="en-US" sz="1280" dirty="0"/>
+          </a:p>
+          <a:p>
+            <a:pPr indent="0" marL="0">
+              <a:buNone/>
+            </a:pPr>
+            <a:r>
+              <a:rPr lang="en-US" sz="1280" dirty="0">
+                <a:solidFill>
+                  <a:srgbClr val="212121"/>
+                </a:solidFill>
+                <a:latin typeface="Consolas" pitchFamily="34" charset="0"/>
+                <a:ea typeface="Consolas" pitchFamily="34" charset="-122"/>
+                <a:cs typeface="Consolas" pitchFamily="34" charset="-120"/>
+              </a:rPr>
+              <a:t>    options={</a:t>
+            </a:r>
+            <a:endParaRPr lang="en-US" sz="1280" dirty="0"/>
+          </a:p>
+          <a:p>
+            <a:pPr indent="0" marL="0">
+              <a:buNone/>
+            </a:pPr>
+            <a:r>
+              <a:rPr lang="en-US" sz="1280" dirty="0">
+                <a:solidFill>
+                  <a:srgbClr val="1F7A4D"/>
+                </a:solidFill>
+                <a:latin typeface="Consolas" pitchFamily="34" charset="0"/>
+                <a:ea typeface="Consolas" pitchFamily="34" charset="-122"/>
+                <a:cs typeface="Consolas" pitchFamily="34" charset="-120"/>
+              </a:rPr>
+              <a:t>"response_format"</a:t>
+            </a:r>
+            <a:pPr indent="0" marL="0">
+              <a:buNone/>
+            </a:pPr>
+            <a:r>
+              <a:rPr lang="en-US" sz="1280" dirty="0">
+                <a:solidFill>
+                  <a:srgbClr val="212121"/>
+                </a:solidFill>
+                <a:latin typeface="Consolas" pitchFamily="34" charset="0"/>
+                <a:ea typeface="Consolas" pitchFamily="34" charset="-122"/>
+                <a:cs typeface="Consolas" pitchFamily="34" charset="-120"/>
+              </a:rPr>
+              <a:t>: TriageResult},</a:t>
             </a:r>
             <a:endParaRPr lang="en-US" sz="1280" dirty="0"/>
           </a:p>
@@ -9586,7 +9696,7 @@
                 <a:ea typeface="Consolas" pitchFamily="34" charset="-122"/>
                 <a:cs typeface="Consolas" pitchFamily="34" charset="-120"/>
               </a:rPr>
-              <a:t>    "type": "object",</a:t>
+              <a:t>    </a:t>
             </a:r>
             <a:endParaRPr lang="en-US" sz="1280" dirty="0"/>
           </a:p>
@@ -9597,17 +9707,14 @@
             <a:r>
               <a:rPr lang="en-US" sz="1280" dirty="0">
                 <a:solidFill>
-                  <a:srgbClr val="212121"/>
+                  <a:srgbClr val="1F7A4D"/>
                 </a:solidFill>
                 <a:latin typeface="Consolas" pitchFamily="34" charset="0"/>
                 <a:ea typeface="Consolas" pitchFamily="34" charset="-122"/>
                 <a:cs typeface="Consolas" pitchFamily="34" charset="-120"/>
               </a:rPr>
-              <a:t>    "properties": {"route": {"type": "string"}},</a:t>
-            </a:r>
-            <a:endParaRPr lang="en-US" sz="1280" dirty="0"/>
-          </a:p>
-          <a:p>
+              <a:t>"type"</a:t>
+            </a:r>
             <a:pPr indent="0" marL="0">
               <a:buNone/>
             </a:pPr>
@@ -9620,34 +9727,22 @@
                 <a:ea typeface="Consolas" pitchFamily="34" charset="-122"/>
                 <a:cs typeface="Consolas" pitchFamily="34" charset="-120"/>
               </a:rPr>
-              <a:t>    "required": ["route"],</a:t>
-            </a:r>
-            <a:endParaRPr lang="en-US" sz="1280" dirty="0"/>
-          </a:p>
-          <a:p>
+              <a:t>: </a:t>
+            </a:r>
             <a:pPr indent="0" marL="0">
               <a:buNone/>
             </a:pPr>
             <a:r>
               <a:rPr lang="en-US" sz="1280" dirty="0">
                 <a:solidFill>
-                  <a:srgbClr val="212121"/>
+                  <a:srgbClr val="1F7A4D"/>
                 </a:solidFill>
                 <a:latin typeface="Consolas" pitchFamily="34" charset="0"/>
                 <a:ea typeface="Consolas" pitchFamily="34" charset="-122"/>
                 <a:cs typeface="Consolas" pitchFamily="34" charset="-120"/>
               </a:rPr>
-              <a:t>}</a:t>
-            </a:r>
-            <a:endParaRPr lang="en-US" sz="1280" dirty="0"/>
-          </a:p>
-          <a:p>
-            <a:pPr indent="0" marL="0">
-              <a:buNone/>
-            </a:pPr>
-            <a:endParaRPr lang="en-US" sz="1280" dirty="0"/>
-          </a:p>
-          <a:p>
+              <a:t>"object"</a:t>
+            </a:r>
             <a:pPr indent="0" marL="0">
               <a:buNone/>
             </a:pPr>
@@ -9660,7 +9755,7 @@
                 <a:ea typeface="Consolas" pitchFamily="34" charset="-122"/>
                 <a:cs typeface="Consolas" pitchFamily="34" charset="-120"/>
               </a:rPr>
-              <a:t>response = await agent.run(</a:t>
+              <a:t>,</a:t>
             </a:r>
             <a:endParaRPr lang="en-US" sz="1280" dirty="0"/>
           </a:p>
@@ -9677,7 +9772,7 @@
                 <a:ea typeface="Consolas" pitchFamily="34" charset="-122"/>
                 <a:cs typeface="Consolas" pitchFamily="34" charset="-120"/>
               </a:rPr>
-              <a:t>    request, options={"response_format": schema}</a:t>
+              <a:t>    </a:t>
             </a:r>
             <a:endParaRPr lang="en-US" sz="1280" dirty="0"/>
           </a:p>
@@ -9688,17 +9783,14 @@
             <a:r>
               <a:rPr lang="en-US" sz="1280" dirty="0">
                 <a:solidFill>
-                  <a:srgbClr val="212121"/>
+                  <a:srgbClr val="1F7A4D"/>
                 </a:solidFill>
                 <a:latin typeface="Consolas" pitchFamily="34" charset="0"/>
                 <a:ea typeface="Consolas" pitchFamily="34" charset="-122"/>
                 <a:cs typeface="Consolas" pitchFamily="34" charset="-120"/>
               </a:rPr>
-              <a:t>)</a:t>
-            </a:r>
-            <a:endParaRPr lang="en-US" sz="1280" dirty="0"/>
-          </a:p>
-          <a:p>
+              <a:t>"properties"</a:t>
+            </a:r>
             <a:pPr indent="0" marL="0">
               <a:buNone/>
             </a:pPr>
@@ -9711,7 +9803,337 @@
                 <a:ea typeface="Consolas" pitchFamily="34" charset="-122"/>
                 <a:cs typeface="Consolas" pitchFamily="34" charset="-120"/>
               </a:rPr>
-              <a:t>result = response.value  # parsed JSON</a:t>
+              <a:t>: {</a:t>
+            </a:r>
+            <a:pPr indent="0" marL="0">
+              <a:buNone/>
+            </a:pPr>
+            <a:r>
+              <a:rPr lang="en-US" sz="1280" dirty="0">
+                <a:solidFill>
+                  <a:srgbClr val="1F7A4D"/>
+                </a:solidFill>
+                <a:latin typeface="Consolas" pitchFamily="34" charset="0"/>
+                <a:ea typeface="Consolas" pitchFamily="34" charset="-122"/>
+                <a:cs typeface="Consolas" pitchFamily="34" charset="-120"/>
+              </a:rPr>
+              <a:t>"route"</a:t>
+            </a:r>
+            <a:pPr indent="0" marL="0">
+              <a:buNone/>
+            </a:pPr>
+            <a:r>
+              <a:rPr lang="en-US" sz="1280" dirty="0">
+                <a:solidFill>
+                  <a:srgbClr val="212121"/>
+                </a:solidFill>
+                <a:latin typeface="Consolas" pitchFamily="34" charset="0"/>
+                <a:ea typeface="Consolas" pitchFamily="34" charset="-122"/>
+                <a:cs typeface="Consolas" pitchFamily="34" charset="-120"/>
+              </a:rPr>
+              <a:t>: {</a:t>
+            </a:r>
+            <a:pPr indent="0" marL="0">
+              <a:buNone/>
+            </a:pPr>
+            <a:r>
+              <a:rPr lang="en-US" sz="1280" dirty="0">
+                <a:solidFill>
+                  <a:srgbClr val="1F7A4D"/>
+                </a:solidFill>
+                <a:latin typeface="Consolas" pitchFamily="34" charset="0"/>
+                <a:ea typeface="Consolas" pitchFamily="34" charset="-122"/>
+                <a:cs typeface="Consolas" pitchFamily="34" charset="-120"/>
+              </a:rPr>
+              <a:t>"type"</a:t>
+            </a:r>
+            <a:pPr indent="0" marL="0">
+              <a:buNone/>
+            </a:pPr>
+            <a:r>
+              <a:rPr lang="en-US" sz="1280" dirty="0">
+                <a:solidFill>
+                  <a:srgbClr val="212121"/>
+                </a:solidFill>
+                <a:latin typeface="Consolas" pitchFamily="34" charset="0"/>
+                <a:ea typeface="Consolas" pitchFamily="34" charset="-122"/>
+                <a:cs typeface="Consolas" pitchFamily="34" charset="-120"/>
+              </a:rPr>
+              <a:t>: </a:t>
+            </a:r>
+            <a:pPr indent="0" marL="0">
+              <a:buNone/>
+            </a:pPr>
+            <a:r>
+              <a:rPr lang="en-US" sz="1280" dirty="0">
+                <a:solidFill>
+                  <a:srgbClr val="1F7A4D"/>
+                </a:solidFill>
+                <a:latin typeface="Consolas" pitchFamily="34" charset="0"/>
+                <a:ea typeface="Consolas" pitchFamily="34" charset="-122"/>
+                <a:cs typeface="Consolas" pitchFamily="34" charset="-120"/>
+              </a:rPr>
+              <a:t>"string"</a:t>
+            </a:r>
+            <a:pPr indent="0" marL="0">
+              <a:buNone/>
+            </a:pPr>
+            <a:r>
+              <a:rPr lang="en-US" sz="1280" dirty="0">
+                <a:solidFill>
+                  <a:srgbClr val="212121"/>
+                </a:solidFill>
+                <a:latin typeface="Consolas" pitchFamily="34" charset="0"/>
+                <a:ea typeface="Consolas" pitchFamily="34" charset="-122"/>
+                <a:cs typeface="Consolas" pitchFamily="34" charset="-120"/>
+              </a:rPr>
+              <a:t>}},</a:t>
+            </a:r>
+            <a:endParaRPr lang="en-US" sz="1280" dirty="0"/>
+          </a:p>
+          <a:p>
+            <a:pPr indent="0" marL="0">
+              <a:buNone/>
+            </a:pPr>
+            <a:r>
+              <a:rPr lang="en-US" sz="1280" dirty="0">
+                <a:solidFill>
+                  <a:srgbClr val="212121"/>
+                </a:solidFill>
+                <a:latin typeface="Consolas" pitchFamily="34" charset="0"/>
+                <a:ea typeface="Consolas" pitchFamily="34" charset="-122"/>
+                <a:cs typeface="Consolas" pitchFamily="34" charset="-120"/>
+              </a:rPr>
+              <a:t>    </a:t>
+            </a:r>
+            <a:endParaRPr lang="en-US" sz="1280" dirty="0"/>
+          </a:p>
+          <a:p>
+            <a:pPr indent="0" marL="0">
+              <a:buNone/>
+            </a:pPr>
+            <a:r>
+              <a:rPr lang="en-US" sz="1280" dirty="0">
+                <a:solidFill>
+                  <a:srgbClr val="1F7A4D"/>
+                </a:solidFill>
+                <a:latin typeface="Consolas" pitchFamily="34" charset="0"/>
+                <a:ea typeface="Consolas" pitchFamily="34" charset="-122"/>
+                <a:cs typeface="Consolas" pitchFamily="34" charset="-120"/>
+              </a:rPr>
+              <a:t>"required"</a:t>
+            </a:r>
+            <a:pPr indent="0" marL="0">
+              <a:buNone/>
+            </a:pPr>
+            <a:r>
+              <a:rPr lang="en-US" sz="1280" dirty="0">
+                <a:solidFill>
+                  <a:srgbClr val="212121"/>
+                </a:solidFill>
+                <a:latin typeface="Consolas" pitchFamily="34" charset="0"/>
+                <a:ea typeface="Consolas" pitchFamily="34" charset="-122"/>
+                <a:cs typeface="Consolas" pitchFamily="34" charset="-120"/>
+              </a:rPr>
+              <a:t>: [</a:t>
+            </a:r>
+            <a:pPr indent="0" marL="0">
+              <a:buNone/>
+            </a:pPr>
+            <a:r>
+              <a:rPr lang="en-US" sz="1280" dirty="0">
+                <a:solidFill>
+                  <a:srgbClr val="1F7A4D"/>
+                </a:solidFill>
+                <a:latin typeface="Consolas" pitchFamily="34" charset="0"/>
+                <a:ea typeface="Consolas" pitchFamily="34" charset="-122"/>
+                <a:cs typeface="Consolas" pitchFamily="34" charset="-120"/>
+              </a:rPr>
+              <a:t>"route"</a:t>
+            </a:r>
+            <a:pPr indent="0" marL="0">
+              <a:buNone/>
+            </a:pPr>
+            <a:r>
+              <a:rPr lang="en-US" sz="1280" dirty="0">
+                <a:solidFill>
+                  <a:srgbClr val="212121"/>
+                </a:solidFill>
+                <a:latin typeface="Consolas" pitchFamily="34" charset="0"/>
+                <a:ea typeface="Consolas" pitchFamily="34" charset="-122"/>
+                <a:cs typeface="Consolas" pitchFamily="34" charset="-120"/>
+              </a:rPr>
+              <a:t>],</a:t>
+            </a:r>
+            <a:endParaRPr lang="en-US" sz="1280" dirty="0"/>
+          </a:p>
+          <a:p>
+            <a:pPr indent="0" marL="0">
+              <a:buNone/>
+            </a:pPr>
+            <a:r>
+              <a:rPr lang="en-US" sz="1280" dirty="0">
+                <a:solidFill>
+                  <a:srgbClr val="212121"/>
+                </a:solidFill>
+                <a:latin typeface="Consolas" pitchFamily="34" charset="0"/>
+                <a:ea typeface="Consolas" pitchFamily="34" charset="-122"/>
+                <a:cs typeface="Consolas" pitchFamily="34" charset="-120"/>
+              </a:rPr>
+              <a:t>}</a:t>
+            </a:r>
+            <a:endParaRPr lang="en-US" sz="1280" dirty="0"/>
+          </a:p>
+          <a:p>
+            <a:pPr indent="0" marL="0">
+              <a:buNone/>
+            </a:pPr>
+            <a:endParaRPr lang="en-US" sz="1280" dirty="0"/>
+          </a:p>
+          <a:p>
+            <a:pPr indent="0" marL="0">
+              <a:buNone/>
+            </a:pPr>
+            <a:r>
+              <a:rPr lang="en-US" sz="1280" dirty="0">
+                <a:solidFill>
+                  <a:srgbClr val="212121"/>
+                </a:solidFill>
+                <a:latin typeface="Consolas" pitchFamily="34" charset="0"/>
+                <a:ea typeface="Consolas" pitchFamily="34" charset="-122"/>
+                <a:cs typeface="Consolas" pitchFamily="34" charset="-120"/>
+              </a:rPr>
+              <a:t>response = </a:t>
+            </a:r>
+            <a:endParaRPr lang="en-US" sz="1280" dirty="0"/>
+          </a:p>
+          <a:p>
+            <a:pPr indent="0" marL="0">
+              <a:buNone/>
+            </a:pPr>
+            <a:r>
+              <a:rPr lang="en-US" sz="1280" dirty="0">
+                <a:solidFill>
+                  <a:srgbClr val="1E2761"/>
+                </a:solidFill>
+                <a:latin typeface="Consolas" pitchFamily="34" charset="0"/>
+                <a:ea typeface="Consolas" pitchFamily="34" charset="-122"/>
+                <a:cs typeface="Consolas" pitchFamily="34" charset="-120"/>
+              </a:rPr>
+              <a:t>await</a:t>
+            </a:r>
+            <a:pPr indent="0" marL="0">
+              <a:buNone/>
+            </a:pPr>
+            <a:r>
+              <a:rPr lang="en-US" sz="1280" dirty="0">
+                <a:solidFill>
+                  <a:srgbClr val="212121"/>
+                </a:solidFill>
+                <a:latin typeface="Consolas" pitchFamily="34" charset="0"/>
+                <a:ea typeface="Consolas" pitchFamily="34" charset="-122"/>
+                <a:cs typeface="Consolas" pitchFamily="34" charset="-120"/>
+              </a:rPr>
+              <a:t> agent.run(</a:t>
+            </a:r>
+            <a:endParaRPr lang="en-US" sz="1280" dirty="0"/>
+          </a:p>
+          <a:p>
+            <a:pPr indent="0" marL="0">
+              <a:buNone/>
+            </a:pPr>
+            <a:r>
+              <a:rPr lang="en-US" sz="1280" dirty="0">
+                <a:solidFill>
+                  <a:srgbClr val="212121"/>
+                </a:solidFill>
+                <a:latin typeface="Consolas" pitchFamily="34" charset="0"/>
+                <a:ea typeface="Consolas" pitchFamily="34" charset="-122"/>
+                <a:cs typeface="Consolas" pitchFamily="34" charset="-120"/>
+              </a:rPr>
+              <a:t>    request, options={</a:t>
+            </a:r>
+            <a:endParaRPr lang="en-US" sz="1280" dirty="0"/>
+          </a:p>
+          <a:p>
+            <a:pPr indent="0" marL="0">
+              <a:buNone/>
+            </a:pPr>
+            <a:r>
+              <a:rPr lang="en-US" sz="1280" dirty="0">
+                <a:solidFill>
+                  <a:srgbClr val="1F7A4D"/>
+                </a:solidFill>
+                <a:latin typeface="Consolas" pitchFamily="34" charset="0"/>
+                <a:ea typeface="Consolas" pitchFamily="34" charset="-122"/>
+                <a:cs typeface="Consolas" pitchFamily="34" charset="-120"/>
+              </a:rPr>
+              <a:t>"response_format"</a:t>
+            </a:r>
+            <a:pPr indent="0" marL="0">
+              <a:buNone/>
+            </a:pPr>
+            <a:r>
+              <a:rPr lang="en-US" sz="1280" dirty="0">
+                <a:solidFill>
+                  <a:srgbClr val="212121"/>
+                </a:solidFill>
+                <a:latin typeface="Consolas" pitchFamily="34" charset="0"/>
+                <a:ea typeface="Consolas" pitchFamily="34" charset="-122"/>
+                <a:cs typeface="Consolas" pitchFamily="34" charset="-120"/>
+              </a:rPr>
+              <a:t>: schema}</a:t>
+            </a:r>
+            <a:endParaRPr lang="en-US" sz="1280" dirty="0"/>
+          </a:p>
+          <a:p>
+            <a:pPr indent="0" marL="0">
+              <a:buNone/>
+            </a:pPr>
+            <a:r>
+              <a:rPr lang="en-US" sz="1280" dirty="0">
+                <a:solidFill>
+                  <a:srgbClr val="212121"/>
+                </a:solidFill>
+                <a:latin typeface="Consolas" pitchFamily="34" charset="0"/>
+                <a:ea typeface="Consolas" pitchFamily="34" charset="-122"/>
+                <a:cs typeface="Consolas" pitchFamily="34" charset="-120"/>
+              </a:rPr>
+              <a:t>)</a:t>
+            </a:r>
+            <a:endParaRPr lang="en-US" sz="1280" dirty="0"/>
+          </a:p>
+          <a:p>
+            <a:pPr indent="0" marL="0">
+              <a:buNone/>
+            </a:pPr>
+            <a:r>
+              <a:rPr lang="en-US" sz="1280" dirty="0">
+                <a:solidFill>
+                  <a:srgbClr val="212121"/>
+                </a:solidFill>
+                <a:latin typeface="Consolas" pitchFamily="34" charset="0"/>
+                <a:ea typeface="Consolas" pitchFamily="34" charset="-122"/>
+                <a:cs typeface="Consolas" pitchFamily="34" charset="-120"/>
+              </a:rPr>
+              <a:t>result = response.value  </a:t>
+            </a:r>
+            <a:endParaRPr lang="en-US" sz="1280" dirty="0"/>
+          </a:p>
+          <a:p>
+            <a:pPr indent="0" marL="0">
+              <a:buNone/>
+            </a:pPr>
+            <a:r>
+              <a:rPr lang="en-US" sz="1280" i="1" dirty="0">
+                <a:solidFill>
+                  <a:srgbClr val="6B7280"/>
+                </a:solidFill>
+                <a:latin typeface="Consolas" pitchFamily="34" charset="0"/>
+                <a:ea typeface="Consolas" pitchFamily="34" charset="-122"/>
+                <a:cs typeface="Consolas" pitchFamily="34" charset="-120"/>
+              </a:rPr>
+              <a:t># parsed JSON</a:t>
             </a:r>
             <a:endParaRPr lang="en-US" sz="1280" dirty="0"/>
           </a:p>
@@ -10937,7 +11359,7 @@
                 <a:ea typeface="Consolas" pitchFamily="34" charset="-122"/>
                 <a:cs typeface="Consolas" pitchFamily="34" charset="-120"/>
               </a:rPr>
-              <a:t>    stream=True,</a:t>
+              <a:t>    stream=</a:t>
             </a:r>
             <a:endParaRPr lang="en-US" sz="1080" dirty="0"/>
           </a:p>
@@ -10948,17 +11370,14 @@
             <a:r>
               <a:rPr lang="en-US" sz="1080" dirty="0">
                 <a:solidFill>
-                  <a:srgbClr val="212121"/>
+                  <a:srgbClr val="1E2761"/>
                 </a:solidFill>
                 <a:latin typeface="Consolas" pitchFamily="34" charset="0"/>
                 <a:ea typeface="Consolas" pitchFamily="34" charset="-122"/>
                 <a:cs typeface="Consolas" pitchFamily="34" charset="-120"/>
               </a:rPr>
-              <a:t>    session=session,</a:t>
-            </a:r>
-            <a:endParaRPr lang="en-US" sz="1080" dirty="0"/>
-          </a:p>
-          <a:p>
+              <a:t>True</a:t>
+            </a:r>
             <a:pPr indent="0" marL="0">
               <a:buNone/>
             </a:pPr>
@@ -10971,7 +11390,7 @@
                 <a:ea typeface="Consolas" pitchFamily="34" charset="-122"/>
                 <a:cs typeface="Consolas" pitchFamily="34" charset="-120"/>
               </a:rPr>
-              <a:t>    options={"response_format": TriageResult},</a:t>
+              <a:t>,</a:t>
             </a:r>
             <a:endParaRPr lang="en-US" sz="1080" dirty="0"/>
           </a:p>
@@ -10988,14 +11407,8 @@
                 <a:ea typeface="Consolas" pitchFamily="34" charset="-122"/>
                 <a:cs typeface="Consolas" pitchFamily="34" charset="-120"/>
               </a:rPr>
-              <a:t>)</a:t>
-            </a:r>
-            <a:endParaRPr lang="en-US" sz="1080" dirty="0"/>
-          </a:p>
-          <a:p>
-            <a:pPr indent="0" marL="0">
-              <a:buNone/>
-            </a:pPr>
+              <a:t>    session=session,</a:t>
+            </a:r>
             <a:endParaRPr lang="en-US" sz="1080" dirty="0"/>
           </a:p>
           <a:p>
@@ -11011,7 +11424,7 @@
                 <a:ea typeface="Consolas" pitchFamily="34" charset="-122"/>
                 <a:cs typeface="Consolas" pitchFamily="34" charset="-120"/>
               </a:rPr>
-              <a:t>async for update in stream:</a:t>
+              <a:t>    options={</a:t>
             </a:r>
             <a:endParaRPr lang="en-US" sz="1080" dirty="0"/>
           </a:p>
@@ -11022,17 +11435,14 @@
             <a:r>
               <a:rPr lang="en-US" sz="1080" dirty="0">
                 <a:solidFill>
-                  <a:srgbClr val="212121"/>
+                  <a:srgbClr val="1F7A4D"/>
                 </a:solidFill>
                 <a:latin typeface="Consolas" pitchFamily="34" charset="0"/>
                 <a:ea typeface="Consolas" pitchFamily="34" charset="-122"/>
                 <a:cs typeface="Consolas" pitchFamily="34" charset="-120"/>
               </a:rPr>
-              <a:t>    if update.text:</a:t>
-            </a:r>
-            <a:endParaRPr lang="en-US" sz="1080" dirty="0"/>
-          </a:p>
-          <a:p>
+              <a:t>"response_format"</a:t>
+            </a:r>
             <a:pPr indent="0" marL="0">
               <a:buNone/>
             </a:pPr>
@@ -11045,30 +11455,212 @@
                 <a:ea typeface="Consolas" pitchFamily="34" charset="-122"/>
                 <a:cs typeface="Consolas" pitchFamily="34" charset="-120"/>
               </a:rPr>
-              <a:t>        render(update.text)</a:t>
-            </a:r>
-            <a:endParaRPr lang="en-US" sz="1080" dirty="0"/>
-          </a:p>
-          <a:p>
-            <a:pPr indent="0" marL="0">
-              <a:buNone/>
-            </a:pPr>
-            <a:endParaRPr lang="en-US" sz="1080" dirty="0"/>
-          </a:p>
-          <a:p>
+              <a:t>: TriageResult},
+)
+</a:t>
+            </a:r>
             <a:pPr indent="0" marL="0">
               <a:buNone/>
             </a:pPr>
             <a:r>
               <a:rPr lang="en-US" sz="1080" dirty="0">
                 <a:solidFill>
-                  <a:srgbClr val="212121"/>
+                  <a:srgbClr val="1E2761"/>
                 </a:solidFill>
                 <a:latin typeface="Consolas" pitchFamily="34" charset="0"/>
                 <a:ea typeface="Consolas" pitchFamily="34" charset="-122"/>
                 <a:cs typeface="Consolas" pitchFamily="34" charset="-120"/>
               </a:rPr>
-              <a:t>final = await stream.get_final_response()</a:t>
+              <a:t>async</a:t>
+            </a:r>
+            <a:pPr indent="0" marL="0">
+              <a:buNone/>
+            </a:pPr>
+            <a:r>
+              <a:rPr lang="en-US" sz="1080" dirty="0">
+                <a:solidFill>
+                  <a:srgbClr val="212121"/>
+                </a:solidFill>
+                <a:latin typeface="Consolas" pitchFamily="34" charset="0"/>
+                <a:ea typeface="Consolas" pitchFamily="34" charset="-122"/>
+                <a:cs typeface="Consolas" pitchFamily="34" charset="-120"/>
+              </a:rPr>
+              <a:t> </a:t>
+            </a:r>
+            <a:pPr indent="0" marL="0">
+              <a:buNone/>
+            </a:pPr>
+            <a:r>
+              <a:rPr lang="en-US" sz="1080" dirty="0">
+                <a:solidFill>
+                  <a:srgbClr val="1E2761"/>
+                </a:solidFill>
+                <a:latin typeface="Consolas" pitchFamily="34" charset="0"/>
+                <a:ea typeface="Consolas" pitchFamily="34" charset="-122"/>
+                <a:cs typeface="Consolas" pitchFamily="34" charset="-120"/>
+              </a:rPr>
+              <a:t>for</a:t>
+            </a:r>
+            <a:pPr indent="0" marL="0">
+              <a:buNone/>
+            </a:pPr>
+            <a:r>
+              <a:rPr lang="en-US" sz="1080" dirty="0">
+                <a:solidFill>
+                  <a:srgbClr val="212121"/>
+                </a:solidFill>
+                <a:latin typeface="Consolas" pitchFamily="34" charset="0"/>
+                <a:ea typeface="Consolas" pitchFamily="34" charset="-122"/>
+                <a:cs typeface="Consolas" pitchFamily="34" charset="-120"/>
+              </a:rPr>
+              <a:t> update </a:t>
+            </a:r>
+            <a:pPr indent="0" marL="0">
+              <a:buNone/>
+            </a:pPr>
+            <a:r>
+              <a:rPr lang="en-US" sz="1080" dirty="0">
+                <a:solidFill>
+                  <a:srgbClr val="1E2761"/>
+                </a:solidFill>
+                <a:latin typeface="Consolas" pitchFamily="34" charset="0"/>
+                <a:ea typeface="Consolas" pitchFamily="34" charset="-122"/>
+                <a:cs typeface="Consolas" pitchFamily="34" charset="-120"/>
+              </a:rPr>
+              <a:t>in</a:t>
+            </a:r>
+            <a:pPr indent="0" marL="0">
+              <a:buNone/>
+            </a:pPr>
+            <a:r>
+              <a:rPr lang="en-US" sz="1080" dirty="0">
+                <a:solidFill>
+                  <a:srgbClr val="212121"/>
+                </a:solidFill>
+                <a:latin typeface="Consolas" pitchFamily="34" charset="0"/>
+                <a:ea typeface="Consolas" pitchFamily="34" charset="-122"/>
+                <a:cs typeface="Consolas" pitchFamily="34" charset="-120"/>
+              </a:rPr>
+              <a:t> stream:</a:t>
+            </a:r>
+            <a:endParaRPr lang="en-US" sz="1080" dirty="0"/>
+          </a:p>
+          <a:p>
+            <a:pPr indent="0" marL="0">
+              <a:buNone/>
+            </a:pPr>
+            <a:r>
+              <a:rPr lang="en-US" sz="1080" dirty="0">
+                <a:solidFill>
+                  <a:srgbClr val="212121"/>
+                </a:solidFill>
+                <a:latin typeface="Consolas" pitchFamily="34" charset="0"/>
+                <a:ea typeface="Consolas" pitchFamily="34" charset="-122"/>
+                <a:cs typeface="Consolas" pitchFamily="34" charset="-120"/>
+              </a:rPr>
+              <a:t>    </a:t>
+            </a:r>
+            <a:endParaRPr lang="en-US" sz="1080" dirty="0"/>
+          </a:p>
+          <a:p>
+            <a:pPr indent="0" marL="0">
+              <a:buNone/>
+            </a:pPr>
+            <a:r>
+              <a:rPr lang="en-US" sz="1080" dirty="0">
+                <a:solidFill>
+                  <a:srgbClr val="1E2761"/>
+                </a:solidFill>
+                <a:latin typeface="Consolas" pitchFamily="34" charset="0"/>
+                <a:ea typeface="Consolas" pitchFamily="34" charset="-122"/>
+                <a:cs typeface="Consolas" pitchFamily="34" charset="-120"/>
+              </a:rPr>
+              <a:t>if</a:t>
+            </a:r>
+            <a:pPr indent="0" marL="0">
+              <a:buNone/>
+            </a:pPr>
+            <a:r>
+              <a:rPr lang="en-US" sz="1080" dirty="0">
+                <a:solidFill>
+                  <a:srgbClr val="212121"/>
+                </a:solidFill>
+                <a:latin typeface="Consolas" pitchFamily="34" charset="0"/>
+                <a:ea typeface="Consolas" pitchFamily="34" charset="-122"/>
+                <a:cs typeface="Consolas" pitchFamily="34" charset="-120"/>
+              </a:rPr>
+              <a:t> update.text:</a:t>
+            </a:r>
+            <a:endParaRPr lang="en-US" sz="1080" dirty="0"/>
+          </a:p>
+          <a:p>
+            <a:pPr indent="0" marL="0">
+              <a:buNone/>
+            </a:pPr>
+            <a:r>
+              <a:rPr lang="en-US" sz="1080" dirty="0">
+                <a:solidFill>
+                  <a:srgbClr val="212121"/>
+                </a:solidFill>
+                <a:latin typeface="Consolas" pitchFamily="34" charset="0"/>
+                <a:ea typeface="Consolas" pitchFamily="34" charset="-122"/>
+                <a:cs typeface="Consolas" pitchFamily="34" charset="-120"/>
+              </a:rPr>
+              <a:t>        render(update.text)</a:t>
+            </a:r>
+            <a:endParaRPr lang="en-US" sz="1080" dirty="0"/>
+          </a:p>
+          <a:p>
+            <a:pPr indent="0" marL="0">
+              <a:buNone/>
+            </a:pPr>
+            <a:endParaRPr lang="en-US" sz="1080" dirty="0"/>
+          </a:p>
+          <a:p>
+            <a:pPr indent="0" marL="0">
+              <a:buNone/>
+            </a:pPr>
+            <a:r>
+              <a:rPr lang="en-US" sz="1080" dirty="0">
+                <a:solidFill>
+                  <a:srgbClr val="212121"/>
+                </a:solidFill>
+                <a:latin typeface="Consolas" pitchFamily="34" charset="0"/>
+                <a:ea typeface="Consolas" pitchFamily="34" charset="-122"/>
+                <a:cs typeface="Consolas" pitchFamily="34" charset="-120"/>
+              </a:rPr>
+              <a:t>final = </a:t>
+            </a:r>
+            <a:endParaRPr lang="en-US" sz="1080" dirty="0"/>
+          </a:p>
+          <a:p>
+            <a:pPr indent="0" marL="0">
+              <a:buNone/>
+            </a:pPr>
+            <a:r>
+              <a:rPr lang="en-US" sz="1080" dirty="0">
+                <a:solidFill>
+                  <a:srgbClr val="1E2761"/>
+                </a:solidFill>
+                <a:latin typeface="Consolas" pitchFamily="34" charset="0"/>
+                <a:ea typeface="Consolas" pitchFamily="34" charset="-122"/>
+                <a:cs typeface="Consolas" pitchFamily="34" charset="-120"/>
+              </a:rPr>
+              <a:t>await</a:t>
+            </a:r>
+            <a:pPr indent="0" marL="0">
+              <a:buNone/>
+            </a:pPr>
+            <a:r>
+              <a:rPr lang="en-US" sz="1080" dirty="0">
+                <a:solidFill>
+                  <a:srgbClr val="212121"/>
+                </a:solidFill>
+                <a:latin typeface="Consolas" pitchFamily="34" charset="0"/>
+                <a:ea typeface="Consolas" pitchFamily="34" charset="-122"/>
+                <a:cs typeface="Consolas" pitchFamily="34" charset="-120"/>
+              </a:rPr>
+              <a:t> stream.get_final_response()</a:t>
             </a:r>
             <a:endParaRPr lang="en-US" sz="1080" dirty="0"/>
           </a:p>

--- a/decks/day3/module-2-streaming-structured.pptx
+++ b/decks/day3/module-2-streaming-structured.pptx
@@ -9099,11 +9099,11 @@
             <a:avLst/>
           </a:prstGeom>
           <a:solidFill>
-            <a:srgbClr val="F3F4F6"/>
+            <a:srgbClr val="1D1E22"/>
           </a:solidFill>
-          <a:ln w="6350">
+          <a:ln w="9525">
             <a:solidFill>
-              <a:srgbClr val="D1D5DB"/>
+              <a:srgbClr val="2A2B2E"/>
             </a:solidFill>
             <a:prstDash val="solid"/>
           </a:ln>
@@ -9136,7 +9136,7 @@
             <a:r>
               <a:rPr lang="en-US" sz="1280" dirty="0">
                 <a:solidFill>
-                  <a:srgbClr val="1E2761"/>
+                  <a:srgbClr val="A996B6"/>
                 </a:solidFill>
                 <a:latin typeface="Consolas" pitchFamily="34" charset="0"/>
                 <a:ea typeface="Consolas" pitchFamily="34" charset="-122"/>
@@ -9150,7 +9150,7 @@
             <a:r>
               <a:rPr lang="en-US" sz="1280" dirty="0">
                 <a:solidFill>
-                  <a:srgbClr val="212121"/>
+                  <a:srgbClr val="FFFFFF"/>
                 </a:solidFill>
                 <a:latin typeface="Consolas" pitchFamily="34" charset="0"/>
                 <a:ea typeface="Consolas" pitchFamily="34" charset="-122"/>
@@ -9164,7 +9164,7 @@
             <a:r>
               <a:rPr lang="en-US" sz="1280" dirty="0">
                 <a:solidFill>
-                  <a:srgbClr val="1E2761"/>
+                  <a:srgbClr val="A996B6"/>
                 </a:solidFill>
                 <a:latin typeface="Consolas" pitchFamily="34" charset="0"/>
                 <a:ea typeface="Consolas" pitchFamily="34" charset="-122"/>
@@ -9178,7 +9178,7 @@
             <a:r>
               <a:rPr lang="en-US" sz="1280" dirty="0">
                 <a:solidFill>
-                  <a:srgbClr val="212121"/>
+                  <a:srgbClr val="FFFFFF"/>
                 </a:solidFill>
                 <a:latin typeface="Consolas" pitchFamily="34" charset="0"/>
                 <a:ea typeface="Consolas" pitchFamily="34" charset="-122"/>
@@ -9193,7 +9193,7 @@
             <a:r>
               <a:rPr lang="en-US" sz="1280" dirty="0">
                 <a:solidFill>
-                  <a:srgbClr val="1E2761"/>
+                  <a:srgbClr val="A996B6"/>
                 </a:solidFill>
                 <a:latin typeface="Consolas" pitchFamily="34" charset="0"/>
                 <a:ea typeface="Consolas" pitchFamily="34" charset="-122"/>
@@ -9207,7 +9207,7 @@
             <a:r>
               <a:rPr lang="en-US" sz="1280" dirty="0">
                 <a:solidFill>
-                  <a:srgbClr val="212121"/>
+                  <a:srgbClr val="FFFFFF"/>
                 </a:solidFill>
                 <a:latin typeface="Consolas" pitchFamily="34" charset="0"/>
                 <a:ea typeface="Consolas" pitchFamily="34" charset="-122"/>
@@ -9224,7 +9224,7 @@
             <a:r>
               <a:rPr lang="en-US" sz="1280" dirty="0">
                 <a:solidFill>
-                  <a:srgbClr val="212121"/>
+                  <a:srgbClr val="FFFFFF"/>
                 </a:solidFill>
                 <a:latin typeface="Consolas" pitchFamily="34" charset="0"/>
                 <a:ea typeface="Consolas" pitchFamily="34" charset="-122"/>
@@ -9241,7 +9241,7 @@
             <a:r>
               <a:rPr lang="en-US" sz="1280" dirty="0">
                 <a:solidFill>
-                  <a:srgbClr val="212121"/>
+                  <a:srgbClr val="FFFFFF"/>
                 </a:solidFill>
                 <a:latin typeface="Consolas" pitchFamily="34" charset="0"/>
                 <a:ea typeface="Consolas" pitchFamily="34" charset="-122"/>
@@ -9258,7 +9258,7 @@
             <a:r>
               <a:rPr lang="en-US" sz="1280" dirty="0">
                 <a:solidFill>
-                  <a:srgbClr val="212121"/>
+                  <a:srgbClr val="FFFFFF"/>
                 </a:solidFill>
                 <a:latin typeface="Consolas" pitchFamily="34" charset="0"/>
                 <a:ea typeface="Consolas" pitchFamily="34" charset="-122"/>
@@ -9281,7 +9281,7 @@
             <a:r>
               <a:rPr lang="en-US" sz="1280" dirty="0">
                 <a:solidFill>
-                  <a:srgbClr val="212121"/>
+                  <a:srgbClr val="FFFFFF"/>
                 </a:solidFill>
                 <a:latin typeface="Consolas" pitchFamily="34" charset="0"/>
                 <a:ea typeface="Consolas" pitchFamily="34" charset="-122"/>
@@ -9298,7 +9298,7 @@
             <a:r>
               <a:rPr lang="en-US" sz="1280" dirty="0">
                 <a:solidFill>
-                  <a:srgbClr val="1E2761"/>
+                  <a:srgbClr val="A996B6"/>
                 </a:solidFill>
                 <a:latin typeface="Consolas" pitchFamily="34" charset="0"/>
                 <a:ea typeface="Consolas" pitchFamily="34" charset="-122"/>
@@ -9312,7 +9312,7 @@
             <a:r>
               <a:rPr lang="en-US" sz="1280" dirty="0">
                 <a:solidFill>
-                  <a:srgbClr val="212121"/>
+                  <a:srgbClr val="FFFFFF"/>
                 </a:solidFill>
                 <a:latin typeface="Consolas" pitchFamily="34" charset="0"/>
                 <a:ea typeface="Consolas" pitchFamily="34" charset="-122"/>
@@ -9329,7 +9329,7 @@
             <a:r>
               <a:rPr lang="en-US" sz="1280" dirty="0">
                 <a:solidFill>
-                  <a:srgbClr val="212121"/>
+                  <a:srgbClr val="FFFFFF"/>
                 </a:solidFill>
                 <a:latin typeface="Consolas" pitchFamily="34" charset="0"/>
                 <a:ea typeface="Consolas" pitchFamily="34" charset="-122"/>
@@ -9346,7 +9346,7 @@
             <a:r>
               <a:rPr lang="en-US" sz="1280" dirty="0">
                 <a:solidFill>
-                  <a:srgbClr val="212121"/>
+                  <a:srgbClr val="FFFFFF"/>
                 </a:solidFill>
                 <a:latin typeface="Consolas" pitchFamily="34" charset="0"/>
                 <a:ea typeface="Consolas" pitchFamily="34" charset="-122"/>
@@ -9363,7 +9363,7 @@
             <a:r>
               <a:rPr lang="en-US" sz="1280" dirty="0">
                 <a:solidFill>
-                  <a:srgbClr val="1F7A4D"/>
+                  <a:srgbClr val="E4C98A"/>
                 </a:solidFill>
                 <a:latin typeface="Consolas" pitchFamily="34" charset="0"/>
                 <a:ea typeface="Consolas" pitchFamily="34" charset="-122"/>
@@ -9377,7 +9377,7 @@
             <a:r>
               <a:rPr lang="en-US" sz="1280" dirty="0">
                 <a:solidFill>
-                  <a:srgbClr val="212121"/>
+                  <a:srgbClr val="FFFFFF"/>
                 </a:solidFill>
                 <a:latin typeface="Consolas" pitchFamily="34" charset="0"/>
                 <a:ea typeface="Consolas" pitchFamily="34" charset="-122"/>
@@ -9394,7 +9394,7 @@
             <a:r>
               <a:rPr lang="en-US" sz="1280" dirty="0">
                 <a:solidFill>
-                  <a:srgbClr val="212121"/>
+                  <a:srgbClr val="FFFFFF"/>
                 </a:solidFill>
                 <a:latin typeface="Consolas" pitchFamily="34" charset="0"/>
                 <a:ea typeface="Consolas" pitchFamily="34" charset="-122"/>
@@ -9411,7 +9411,7 @@
             <a:r>
               <a:rPr lang="en-US" sz="1280" dirty="0">
                 <a:solidFill>
-                  <a:srgbClr val="212121"/>
+                  <a:srgbClr val="FFFFFF"/>
                 </a:solidFill>
                 <a:latin typeface="Consolas" pitchFamily="34" charset="0"/>
                 <a:ea typeface="Consolas" pitchFamily="34" charset="-122"/>
@@ -9636,11 +9636,11 @@
             <a:avLst/>
           </a:prstGeom>
           <a:solidFill>
-            <a:srgbClr val="F3F4F6"/>
+            <a:srgbClr val="1D1E22"/>
           </a:solidFill>
-          <a:ln w="6350">
+          <a:ln w="9525">
             <a:solidFill>
-              <a:srgbClr val="D1D5DB"/>
+              <a:srgbClr val="2A2B2E"/>
             </a:solidFill>
             <a:prstDash val="solid"/>
           </a:ln>
@@ -9673,7 +9673,7 @@
             <a:r>
               <a:rPr lang="en-US" sz="1280" dirty="0">
                 <a:solidFill>
-                  <a:srgbClr val="212121"/>
+                  <a:srgbClr val="FFFFFF"/>
                 </a:solidFill>
                 <a:latin typeface="Consolas" pitchFamily="34" charset="0"/>
                 <a:ea typeface="Consolas" pitchFamily="34" charset="-122"/>
@@ -9690,7 +9690,7 @@
             <a:r>
               <a:rPr lang="en-US" sz="1280" dirty="0">
                 <a:solidFill>
-                  <a:srgbClr val="212121"/>
+                  <a:srgbClr val="FFFFFF"/>
                 </a:solidFill>
                 <a:latin typeface="Consolas" pitchFamily="34" charset="0"/>
                 <a:ea typeface="Consolas" pitchFamily="34" charset="-122"/>
@@ -9707,7 +9707,7 @@
             <a:r>
               <a:rPr lang="en-US" sz="1280" dirty="0">
                 <a:solidFill>
-                  <a:srgbClr val="1F7A4D"/>
+                  <a:srgbClr val="E4C98A"/>
                 </a:solidFill>
                 <a:latin typeface="Consolas" pitchFamily="34" charset="0"/>
                 <a:ea typeface="Consolas" pitchFamily="34" charset="-122"/>
@@ -9721,7 +9721,7 @@
             <a:r>
               <a:rPr lang="en-US" sz="1280" dirty="0">
                 <a:solidFill>
-                  <a:srgbClr val="212121"/>
+                  <a:srgbClr val="FFFFFF"/>
                 </a:solidFill>
                 <a:latin typeface="Consolas" pitchFamily="34" charset="0"/>
                 <a:ea typeface="Consolas" pitchFamily="34" charset="-122"/>
@@ -9735,7 +9735,7 @@
             <a:r>
               <a:rPr lang="en-US" sz="1280" dirty="0">
                 <a:solidFill>
-                  <a:srgbClr val="1F7A4D"/>
+                  <a:srgbClr val="E4C98A"/>
                 </a:solidFill>
                 <a:latin typeface="Consolas" pitchFamily="34" charset="0"/>
                 <a:ea typeface="Consolas" pitchFamily="34" charset="-122"/>
@@ -9749,7 +9749,7 @@
             <a:r>
               <a:rPr lang="en-US" sz="1280" dirty="0">
                 <a:solidFill>
-                  <a:srgbClr val="212121"/>
+                  <a:srgbClr val="FFFFFF"/>
                 </a:solidFill>
                 <a:latin typeface="Consolas" pitchFamily="34" charset="0"/>
                 <a:ea typeface="Consolas" pitchFamily="34" charset="-122"/>
@@ -9766,7 +9766,7 @@
             <a:r>
               <a:rPr lang="en-US" sz="1280" dirty="0">
                 <a:solidFill>
-                  <a:srgbClr val="212121"/>
+                  <a:srgbClr val="FFFFFF"/>
                 </a:solidFill>
                 <a:latin typeface="Consolas" pitchFamily="34" charset="0"/>
                 <a:ea typeface="Consolas" pitchFamily="34" charset="-122"/>
@@ -9783,7 +9783,7 @@
             <a:r>
               <a:rPr lang="en-US" sz="1280" dirty="0">
                 <a:solidFill>
-                  <a:srgbClr val="1F7A4D"/>
+                  <a:srgbClr val="E4C98A"/>
                 </a:solidFill>
                 <a:latin typeface="Consolas" pitchFamily="34" charset="0"/>
                 <a:ea typeface="Consolas" pitchFamily="34" charset="-122"/>
@@ -9797,7 +9797,7 @@
             <a:r>
               <a:rPr lang="en-US" sz="1280" dirty="0">
                 <a:solidFill>
-                  <a:srgbClr val="212121"/>
+                  <a:srgbClr val="FFFFFF"/>
                 </a:solidFill>
                 <a:latin typeface="Consolas" pitchFamily="34" charset="0"/>
                 <a:ea typeface="Consolas" pitchFamily="34" charset="-122"/>
@@ -9811,7 +9811,7 @@
             <a:r>
               <a:rPr lang="en-US" sz="1280" dirty="0">
                 <a:solidFill>
-                  <a:srgbClr val="1F7A4D"/>
+                  <a:srgbClr val="E4C98A"/>
                 </a:solidFill>
                 <a:latin typeface="Consolas" pitchFamily="34" charset="0"/>
                 <a:ea typeface="Consolas" pitchFamily="34" charset="-122"/>
@@ -9825,7 +9825,7 @@
             <a:r>
               <a:rPr lang="en-US" sz="1280" dirty="0">
                 <a:solidFill>
-                  <a:srgbClr val="212121"/>
+                  <a:srgbClr val="FFFFFF"/>
                 </a:solidFill>
                 <a:latin typeface="Consolas" pitchFamily="34" charset="0"/>
                 <a:ea typeface="Consolas" pitchFamily="34" charset="-122"/>
@@ -9839,7 +9839,7 @@
             <a:r>
               <a:rPr lang="en-US" sz="1280" dirty="0">
                 <a:solidFill>
-                  <a:srgbClr val="1F7A4D"/>
+                  <a:srgbClr val="E4C98A"/>
                 </a:solidFill>
                 <a:latin typeface="Consolas" pitchFamily="34" charset="0"/>
                 <a:ea typeface="Consolas" pitchFamily="34" charset="-122"/>
@@ -9853,7 +9853,7 @@
             <a:r>
               <a:rPr lang="en-US" sz="1280" dirty="0">
                 <a:solidFill>
-                  <a:srgbClr val="212121"/>
+                  <a:srgbClr val="FFFFFF"/>
                 </a:solidFill>
                 <a:latin typeface="Consolas" pitchFamily="34" charset="0"/>
                 <a:ea typeface="Consolas" pitchFamily="34" charset="-122"/>
@@ -9867,7 +9867,7 @@
             <a:r>
               <a:rPr lang="en-US" sz="1280" dirty="0">
                 <a:solidFill>
-                  <a:srgbClr val="1F7A4D"/>
+                  <a:srgbClr val="E4C98A"/>
                 </a:solidFill>
                 <a:latin typeface="Consolas" pitchFamily="34" charset="0"/>
                 <a:ea typeface="Consolas" pitchFamily="34" charset="-122"/>
@@ -9881,7 +9881,7 @@
             <a:r>
               <a:rPr lang="en-US" sz="1280" dirty="0">
                 <a:solidFill>
-                  <a:srgbClr val="212121"/>
+                  <a:srgbClr val="FFFFFF"/>
                 </a:solidFill>
                 <a:latin typeface="Consolas" pitchFamily="34" charset="0"/>
                 <a:ea typeface="Consolas" pitchFamily="34" charset="-122"/>
@@ -9898,7 +9898,7 @@
             <a:r>
               <a:rPr lang="en-US" sz="1280" dirty="0">
                 <a:solidFill>
-                  <a:srgbClr val="212121"/>
+                  <a:srgbClr val="FFFFFF"/>
                 </a:solidFill>
                 <a:latin typeface="Consolas" pitchFamily="34" charset="0"/>
                 <a:ea typeface="Consolas" pitchFamily="34" charset="-122"/>
@@ -9915,7 +9915,7 @@
             <a:r>
               <a:rPr lang="en-US" sz="1280" dirty="0">
                 <a:solidFill>
-                  <a:srgbClr val="1F7A4D"/>
+                  <a:srgbClr val="E4C98A"/>
                 </a:solidFill>
                 <a:latin typeface="Consolas" pitchFamily="34" charset="0"/>
                 <a:ea typeface="Consolas" pitchFamily="34" charset="-122"/>
@@ -9929,7 +9929,7 @@
             <a:r>
               <a:rPr lang="en-US" sz="1280" dirty="0">
                 <a:solidFill>
-                  <a:srgbClr val="212121"/>
+                  <a:srgbClr val="FFFFFF"/>
                 </a:solidFill>
                 <a:latin typeface="Consolas" pitchFamily="34" charset="0"/>
                 <a:ea typeface="Consolas" pitchFamily="34" charset="-122"/>
@@ -9943,7 +9943,7 @@
             <a:r>
               <a:rPr lang="en-US" sz="1280" dirty="0">
                 <a:solidFill>
-                  <a:srgbClr val="1F7A4D"/>
+                  <a:srgbClr val="E4C98A"/>
                 </a:solidFill>
                 <a:latin typeface="Consolas" pitchFamily="34" charset="0"/>
                 <a:ea typeface="Consolas" pitchFamily="34" charset="-122"/>
@@ -9957,7 +9957,7 @@
             <a:r>
               <a:rPr lang="en-US" sz="1280" dirty="0">
                 <a:solidFill>
-                  <a:srgbClr val="212121"/>
+                  <a:srgbClr val="FFFFFF"/>
                 </a:solidFill>
                 <a:latin typeface="Consolas" pitchFamily="34" charset="0"/>
                 <a:ea typeface="Consolas" pitchFamily="34" charset="-122"/>
@@ -9974,7 +9974,7 @@
             <a:r>
               <a:rPr lang="en-US" sz="1280" dirty="0">
                 <a:solidFill>
-                  <a:srgbClr val="212121"/>
+                  <a:srgbClr val="FFFFFF"/>
                 </a:solidFill>
                 <a:latin typeface="Consolas" pitchFamily="34" charset="0"/>
                 <a:ea typeface="Consolas" pitchFamily="34" charset="-122"/>
@@ -9997,7 +9997,7 @@
             <a:r>
               <a:rPr lang="en-US" sz="1280" dirty="0">
                 <a:solidFill>
-                  <a:srgbClr val="212121"/>
+                  <a:srgbClr val="FFFFFF"/>
                 </a:solidFill>
                 <a:latin typeface="Consolas" pitchFamily="34" charset="0"/>
                 <a:ea typeface="Consolas" pitchFamily="34" charset="-122"/>
@@ -10014,7 +10014,7 @@
             <a:r>
               <a:rPr lang="en-US" sz="1280" dirty="0">
                 <a:solidFill>
-                  <a:srgbClr val="1E2761"/>
+                  <a:srgbClr val="A996B6"/>
                 </a:solidFill>
                 <a:latin typeface="Consolas" pitchFamily="34" charset="0"/>
                 <a:ea typeface="Consolas" pitchFamily="34" charset="-122"/>
@@ -10028,7 +10028,7 @@
             <a:r>
               <a:rPr lang="en-US" sz="1280" dirty="0">
                 <a:solidFill>
-                  <a:srgbClr val="212121"/>
+                  <a:srgbClr val="FFFFFF"/>
                 </a:solidFill>
                 <a:latin typeface="Consolas" pitchFamily="34" charset="0"/>
                 <a:ea typeface="Consolas" pitchFamily="34" charset="-122"/>
@@ -10045,7 +10045,7 @@
             <a:r>
               <a:rPr lang="en-US" sz="1280" dirty="0">
                 <a:solidFill>
-                  <a:srgbClr val="212121"/>
+                  <a:srgbClr val="FFFFFF"/>
                 </a:solidFill>
                 <a:latin typeface="Consolas" pitchFamily="34" charset="0"/>
                 <a:ea typeface="Consolas" pitchFamily="34" charset="-122"/>
@@ -10062,7 +10062,7 @@
             <a:r>
               <a:rPr lang="en-US" sz="1280" dirty="0">
                 <a:solidFill>
-                  <a:srgbClr val="1F7A4D"/>
+                  <a:srgbClr val="E4C98A"/>
                 </a:solidFill>
                 <a:latin typeface="Consolas" pitchFamily="34" charset="0"/>
                 <a:ea typeface="Consolas" pitchFamily="34" charset="-122"/>
@@ -10076,7 +10076,7 @@
             <a:r>
               <a:rPr lang="en-US" sz="1280" dirty="0">
                 <a:solidFill>
-                  <a:srgbClr val="212121"/>
+                  <a:srgbClr val="FFFFFF"/>
                 </a:solidFill>
                 <a:latin typeface="Consolas" pitchFamily="34" charset="0"/>
                 <a:ea typeface="Consolas" pitchFamily="34" charset="-122"/>
@@ -10093,7 +10093,7 @@
             <a:r>
               <a:rPr lang="en-US" sz="1280" dirty="0">
                 <a:solidFill>
-                  <a:srgbClr val="212121"/>
+                  <a:srgbClr val="FFFFFF"/>
                 </a:solidFill>
                 <a:latin typeface="Consolas" pitchFamily="34" charset="0"/>
                 <a:ea typeface="Consolas" pitchFamily="34" charset="-122"/>
@@ -10110,7 +10110,7 @@
             <a:r>
               <a:rPr lang="en-US" sz="1280" dirty="0">
                 <a:solidFill>
-                  <a:srgbClr val="212121"/>
+                  <a:srgbClr val="FFFFFF"/>
                 </a:solidFill>
                 <a:latin typeface="Consolas" pitchFamily="34" charset="0"/>
                 <a:ea typeface="Consolas" pitchFamily="34" charset="-122"/>
@@ -10127,7 +10127,7 @@
             <a:r>
               <a:rPr lang="en-US" sz="1280" i="1" dirty="0">
                 <a:solidFill>
-                  <a:srgbClr val="6B7280"/>
+                  <a:srgbClr val="666666"/>
                 </a:solidFill>
                 <a:latin typeface="Consolas" pitchFamily="34" charset="0"/>
                 <a:ea typeface="Consolas" pitchFamily="34" charset="-122"/>
@@ -11282,11 +11282,11 @@
             <a:avLst/>
           </a:prstGeom>
           <a:solidFill>
-            <a:srgbClr val="F3F4F6"/>
+            <a:srgbClr val="1D1E22"/>
           </a:solidFill>
-          <a:ln w="6350">
+          <a:ln w="9525">
             <a:solidFill>
-              <a:srgbClr val="D1D5DB"/>
+              <a:srgbClr val="2A2B2E"/>
             </a:solidFill>
             <a:prstDash val="solid"/>
           </a:ln>
@@ -11319,7 +11319,7 @@
             <a:r>
               <a:rPr lang="en-US" sz="1080" dirty="0">
                 <a:solidFill>
-                  <a:srgbClr val="212121"/>
+                  <a:srgbClr val="FFFFFF"/>
                 </a:solidFill>
                 <a:latin typeface="Consolas" pitchFamily="34" charset="0"/>
                 <a:ea typeface="Consolas" pitchFamily="34" charset="-122"/>
@@ -11336,7 +11336,7 @@
             <a:r>
               <a:rPr lang="en-US" sz="1080" dirty="0">
                 <a:solidFill>
-                  <a:srgbClr val="212121"/>
+                  <a:srgbClr val="FFFFFF"/>
                 </a:solidFill>
                 <a:latin typeface="Consolas" pitchFamily="34" charset="0"/>
                 <a:ea typeface="Consolas" pitchFamily="34" charset="-122"/>
@@ -11353,7 +11353,7 @@
             <a:r>
               <a:rPr lang="en-US" sz="1080" dirty="0">
                 <a:solidFill>
-                  <a:srgbClr val="212121"/>
+                  <a:srgbClr val="FFFFFF"/>
                 </a:solidFill>
                 <a:latin typeface="Consolas" pitchFamily="34" charset="0"/>
                 <a:ea typeface="Consolas" pitchFamily="34" charset="-122"/>
@@ -11370,7 +11370,7 @@
             <a:r>
               <a:rPr lang="en-US" sz="1080" dirty="0">
                 <a:solidFill>
-                  <a:srgbClr val="1E2761"/>
+                  <a:srgbClr val="A996B6"/>
                 </a:solidFill>
                 <a:latin typeface="Consolas" pitchFamily="34" charset="0"/>
                 <a:ea typeface="Consolas" pitchFamily="34" charset="-122"/>
@@ -11384,7 +11384,7 @@
             <a:r>
               <a:rPr lang="en-US" sz="1080" dirty="0">
                 <a:solidFill>
-                  <a:srgbClr val="212121"/>
+                  <a:srgbClr val="FFFFFF"/>
                 </a:solidFill>
                 <a:latin typeface="Consolas" pitchFamily="34" charset="0"/>
                 <a:ea typeface="Consolas" pitchFamily="34" charset="-122"/>
@@ -11401,7 +11401,7 @@
             <a:r>
               <a:rPr lang="en-US" sz="1080" dirty="0">
                 <a:solidFill>
-                  <a:srgbClr val="212121"/>
+                  <a:srgbClr val="FFFFFF"/>
                 </a:solidFill>
                 <a:latin typeface="Consolas" pitchFamily="34" charset="0"/>
                 <a:ea typeface="Consolas" pitchFamily="34" charset="-122"/>
@@ -11418,7 +11418,7 @@
             <a:r>
               <a:rPr lang="en-US" sz="1080" dirty="0">
                 <a:solidFill>
-                  <a:srgbClr val="212121"/>
+                  <a:srgbClr val="FFFFFF"/>
                 </a:solidFill>
                 <a:latin typeface="Consolas" pitchFamily="34" charset="0"/>
                 <a:ea typeface="Consolas" pitchFamily="34" charset="-122"/>
@@ -11435,7 +11435,7 @@
             <a:r>
               <a:rPr lang="en-US" sz="1080" dirty="0">
                 <a:solidFill>
-                  <a:srgbClr val="1F7A4D"/>
+                  <a:srgbClr val="E4C98A"/>
                 </a:solidFill>
                 <a:latin typeface="Consolas" pitchFamily="34" charset="0"/>
                 <a:ea typeface="Consolas" pitchFamily="34" charset="-122"/>
@@ -11449,7 +11449,7 @@
             <a:r>
               <a:rPr lang="en-US" sz="1080" dirty="0">
                 <a:solidFill>
-                  <a:srgbClr val="212121"/>
+                  <a:srgbClr val="FFFFFF"/>
                 </a:solidFill>
                 <a:latin typeface="Consolas" pitchFamily="34" charset="0"/>
                 <a:ea typeface="Consolas" pitchFamily="34" charset="-122"/>
@@ -11465,7 +11465,7 @@
             <a:r>
               <a:rPr lang="en-US" sz="1080" dirty="0">
                 <a:solidFill>
-                  <a:srgbClr val="1E2761"/>
+                  <a:srgbClr val="A996B6"/>
                 </a:solidFill>
                 <a:latin typeface="Consolas" pitchFamily="34" charset="0"/>
                 <a:ea typeface="Consolas" pitchFamily="34" charset="-122"/>
@@ -11479,7 +11479,7 @@
             <a:r>
               <a:rPr lang="en-US" sz="1080" dirty="0">
                 <a:solidFill>
-                  <a:srgbClr val="212121"/>
+                  <a:srgbClr val="FFFFFF"/>
                 </a:solidFill>
                 <a:latin typeface="Consolas" pitchFamily="34" charset="0"/>
                 <a:ea typeface="Consolas" pitchFamily="34" charset="-122"/>
@@ -11493,7 +11493,7 @@
             <a:r>
               <a:rPr lang="en-US" sz="1080" dirty="0">
                 <a:solidFill>
-                  <a:srgbClr val="1E2761"/>
+                  <a:srgbClr val="A996B6"/>
                 </a:solidFill>
                 <a:latin typeface="Consolas" pitchFamily="34" charset="0"/>
                 <a:ea typeface="Consolas" pitchFamily="34" charset="-122"/>
@@ -11507,7 +11507,7 @@
             <a:r>
               <a:rPr lang="en-US" sz="1080" dirty="0">
                 <a:solidFill>
-                  <a:srgbClr val="212121"/>
+                  <a:srgbClr val="FFFFFF"/>
                 </a:solidFill>
                 <a:latin typeface="Consolas" pitchFamily="34" charset="0"/>
                 <a:ea typeface="Consolas" pitchFamily="34" charset="-122"/>
@@ -11521,7 +11521,7 @@
             <a:r>
               <a:rPr lang="en-US" sz="1080" dirty="0">
                 <a:solidFill>
-                  <a:srgbClr val="1E2761"/>
+                  <a:srgbClr val="A996B6"/>
                 </a:solidFill>
                 <a:latin typeface="Consolas" pitchFamily="34" charset="0"/>
                 <a:ea typeface="Consolas" pitchFamily="34" charset="-122"/>
@@ -11535,7 +11535,7 @@
             <a:r>
               <a:rPr lang="en-US" sz="1080" dirty="0">
                 <a:solidFill>
-                  <a:srgbClr val="212121"/>
+                  <a:srgbClr val="FFFFFF"/>
                 </a:solidFill>
                 <a:latin typeface="Consolas" pitchFamily="34" charset="0"/>
                 <a:ea typeface="Consolas" pitchFamily="34" charset="-122"/>
@@ -11552,7 +11552,7 @@
             <a:r>
               <a:rPr lang="en-US" sz="1080" dirty="0">
                 <a:solidFill>
-                  <a:srgbClr val="212121"/>
+                  <a:srgbClr val="FFFFFF"/>
                 </a:solidFill>
                 <a:latin typeface="Consolas" pitchFamily="34" charset="0"/>
                 <a:ea typeface="Consolas" pitchFamily="34" charset="-122"/>
@@ -11569,7 +11569,7 @@
             <a:r>
               <a:rPr lang="en-US" sz="1080" dirty="0">
                 <a:solidFill>
-                  <a:srgbClr val="1E2761"/>
+                  <a:srgbClr val="A996B6"/>
                 </a:solidFill>
                 <a:latin typeface="Consolas" pitchFamily="34" charset="0"/>
                 <a:ea typeface="Consolas" pitchFamily="34" charset="-122"/>
@@ -11583,7 +11583,7 @@
             <a:r>
               <a:rPr lang="en-US" sz="1080" dirty="0">
                 <a:solidFill>
-                  <a:srgbClr val="212121"/>
+                  <a:srgbClr val="FFFFFF"/>
                 </a:solidFill>
                 <a:latin typeface="Consolas" pitchFamily="34" charset="0"/>
                 <a:ea typeface="Consolas" pitchFamily="34" charset="-122"/>
@@ -11600,7 +11600,7 @@
             <a:r>
               <a:rPr lang="en-US" sz="1080" dirty="0">
                 <a:solidFill>
-                  <a:srgbClr val="212121"/>
+                  <a:srgbClr val="FFFFFF"/>
                 </a:solidFill>
                 <a:latin typeface="Consolas" pitchFamily="34" charset="0"/>
                 <a:ea typeface="Consolas" pitchFamily="34" charset="-122"/>
@@ -11623,7 +11623,7 @@
             <a:r>
               <a:rPr lang="en-US" sz="1080" dirty="0">
                 <a:solidFill>
-                  <a:srgbClr val="212121"/>
+                  <a:srgbClr val="FFFFFF"/>
                 </a:solidFill>
                 <a:latin typeface="Consolas" pitchFamily="34" charset="0"/>
                 <a:ea typeface="Consolas" pitchFamily="34" charset="-122"/>
@@ -11640,7 +11640,7 @@
             <a:r>
               <a:rPr lang="en-US" sz="1080" dirty="0">
                 <a:solidFill>
-                  <a:srgbClr val="1E2761"/>
+                  <a:srgbClr val="A996B6"/>
                 </a:solidFill>
                 <a:latin typeface="Consolas" pitchFamily="34" charset="0"/>
                 <a:ea typeface="Consolas" pitchFamily="34" charset="-122"/>
@@ -11654,7 +11654,7 @@
             <a:r>
               <a:rPr lang="en-US" sz="1080" dirty="0">
                 <a:solidFill>
-                  <a:srgbClr val="212121"/>
+                  <a:srgbClr val="FFFFFF"/>
                 </a:solidFill>
                 <a:latin typeface="Consolas" pitchFamily="34" charset="0"/>
                 <a:ea typeface="Consolas" pitchFamily="34" charset="-122"/>
@@ -11671,7 +11671,7 @@
             <a:r>
               <a:rPr lang="en-US" sz="1080" dirty="0">
                 <a:solidFill>
-                  <a:srgbClr val="212121"/>
+                  <a:srgbClr val="FFFFFF"/>
                 </a:solidFill>
                 <a:latin typeface="Consolas" pitchFamily="34" charset="0"/>
                 <a:ea typeface="Consolas" pitchFamily="34" charset="-122"/>

--- a/decks/day3/module-2-streaming-structured.pptx
+++ b/decks/day3/module-2-streaming-structured.pptx
@@ -17,11 +17,9 @@
     <p:sldId id="265" r:id="rId11"/>
     <p:sldId id="266" r:id="rId12"/>
     <p:sldId id="267" r:id="rId13"/>
-    <p:sldId id="268" r:id="rId14"/>
-    <p:sldId id="269" r:id="rId15"/>
   </p:sldIdLst>
   <p:notesMasterIdLst>
-    <p:notesMasterId r:id="rId16"/>
+    <p:notesMasterId r:id="rId14"/>
   </p:notesMasterIdLst>
   <p:sldSz cx="9144000" cy="5143500"/>
   <p:notesSz cx="5143500" cy="9144000"/>
@@ -605,7 +603,7 @@
           <a:p>
             <a:r>
               <a:rPr lang="en-US" dirty="0"/>
-              <a:t>• Placeholder marker slide — the runbook has full narration, setup, and fallback plan. Runs the previous slide's exact combined pattern live against the Day 2 docs assistant, now returning a Day-3-shaped TriageResult.
+              <a:t>• A token prefix can be syntactically incomplete and semantically unstable. Do not parse or trigger business actions from partial JSON. Finalization assembles the response and applies structured-output parsing.
 • GROUNDING SOURCE: https://learn.microsoft.com/en-us/agent-framework/agents/structured-outputs?tabs=python</a:t>
             </a:r>
             <a:endParaRPr lang="en-US" dirty="0"/>
@@ -694,7 +692,8 @@
           <a:p>
             <a:r>
               <a:rPr lang="en-US" dirty="0"/>
-              <a:t>• A token prefix can be syntactically incomplete and semantically unstable. Do not parse or trigger business actions from partial JSON. Finalization assembles the response and applies structured-output parsing.
+              <a:t>• Ask which row fits each UI. A console can stream text; a workflow handoff should usually consume a structured final value; a rich UI can do both.
+• GROUNDING SOURCE: https://learn.microsoft.com/en-us/agent-framework/concepts/agents/running-agents?tabs=python
 • GROUNDING SOURCE: https://learn.microsoft.com/en-us/agent-framework/agents/structured-outputs?tabs=python</a:t>
             </a:r>
             <a:endParaRPr lang="en-US" dirty="0"/>
@@ -783,9 +782,8 @@
           <a:p>
             <a:r>
               <a:rPr lang="en-US" dirty="0"/>
-              <a:t>• Keep the claim narrow. Agent supports structured outputs when paired with a compatible chat client and model. Examples in this course use FoundryChatClient where documented; attendees must verify the selected deployment supports the requested format.
-• GROUNDING SOURCE: https://learn.microsoft.com/en-us/agent-framework/agents/structured-outputs?tabs=python
-• GROUNDING SOURCE: https://learn.microsoft.com/en-us/agent-framework/integrations/by-component/model-providers/microsoft-foundry?tabs=python</a:t>
+              <a:t>• Close with the two-contract model. Preview compaction as a separate concern: it changes which history reaches a self-managed agent, not how a response stream is consumed.
+• GROUNDING SOURCE: https://learn.microsoft.com/en-us/agent-framework/agents/structured-outputs?tabs=python</a:t>
             </a:r>
             <a:endParaRPr lang="en-US" dirty="0"/>
           </a:p>
@@ -809,185 +807,6 @@
             <a:fld id="{F7021451-1387-4CA6-816F-3879F97B5CBC}" type="slidenum">
               <a:rPr lang="en-US"/>
               <a:t>12</a:t>
-            </a:fld>
-            <a:endParaRPr lang="en-US"/>
-          </a:p>
-        </p:txBody>
-      </p:sp>
-    </p:spTree>
-    <p:extLst>
-      <p:ext uri="{BB962C8B-B14F-4D97-AF65-F5344CB8AC3E}">
-        <p14:creationId xmlns:p14="http://schemas.microsoft.com/office/powerpoint/2010/main" val="1024086991"/>
-      </p:ext>
-    </p:extLst>
-  </p:cSld>
-  <p:clrMapOvr>
-    <a:masterClrMapping/>
-  </p:clrMapOvr>
-</p:notes>
-</file>
-
-<file path=ppt/notesSlides/notesSlide13.xml><?xml version="1.0" encoding="utf-8"?>
-<p:notes xmlns:a="http://schemas.openxmlformats.org/drawingml/2006/main" xmlns:r="http://schemas.openxmlformats.org/officeDocument/2006/relationships" xmlns:p="http://schemas.openxmlformats.org/presentationml/2006/main">
-  <p:cSld>
-    <p:spTree>
-      <p:nvGrpSpPr>
-        <p:cNvPr id="1" name=""/>
-        <p:cNvGrpSpPr/>
-        <p:nvPr/>
-      </p:nvGrpSpPr>
-      <p:grpSpPr>
-        <a:xfrm>
-          <a:off x="0" y="0"/>
-          <a:ext cx="0" cy="0"/>
-          <a:chOff x="0" y="0"/>
-          <a:chExt cx="0" cy="0"/>
-        </a:xfrm>
-      </p:grpSpPr>
-      <p:sp>
-        <p:nvSpPr>
-          <p:cNvPr id="2" name="Slide Image Placeholder 1"/>
-          <p:cNvSpPr>
-            <a:spLocks noGrp="1" noRot="1" noChangeAspect="1"/>
-          </p:cNvSpPr>
-          <p:nvPr>
-            <p:ph type="sldImg"/>
-          </p:nvPr>
-        </p:nvSpPr>
-        <p:spPr/>
-      </p:sp>
-      <p:sp>
-        <p:nvSpPr>
-          <p:cNvPr id="3" name="Notes Placeholder 2"/>
-          <p:cNvSpPr>
-            <a:spLocks noGrp="1"/>
-          </p:cNvSpPr>
-          <p:nvPr>
-            <p:ph type="body" idx="1"/>
-          </p:nvPr>
-        </p:nvSpPr>
-        <p:spPr/>
-        <p:txBody>
-          <a:bodyPr/>
-          <a:lstStyle/>
-          <a:p>
-            <a:r>
-              <a:rPr lang="en-US" dirty="0"/>
-              <a:t>• Ask which row fits each UI. A console can stream text; a workflow handoff should usually consume a structured final value; a rich UI can do both.
-• GROUNDING SOURCE: https://learn.microsoft.com/en-us/agent-framework/concepts/agents/running-agents?tabs=python
-• GROUNDING SOURCE: https://learn.microsoft.com/en-us/agent-framework/agents/structured-outputs?tabs=python</a:t>
-            </a:r>
-            <a:endParaRPr lang="en-US" dirty="0"/>
-          </a:p>
-        </p:txBody>
-      </p:sp>
-      <p:sp>
-        <p:nvSpPr>
-          <p:cNvPr id="4" name="Slide Number Placeholder 3"/>
-          <p:cNvSpPr>
-            <a:spLocks noGrp="1"/>
-          </p:cNvSpPr>
-          <p:nvPr>
-            <p:ph type="sldNum" sz="quarter" idx="10"/>
-          </p:nvPr>
-        </p:nvSpPr>
-        <p:spPr/>
-        <p:txBody>
-          <a:bodyPr/>
-          <a:lstStyle/>
-          <a:p>
-            <a:fld id="{F7021451-1387-4CA6-816F-3879F97B5CBC}" type="slidenum">
-              <a:rPr lang="en-US"/>
-              <a:t>13</a:t>
-            </a:fld>
-            <a:endParaRPr lang="en-US"/>
-          </a:p>
-        </p:txBody>
-      </p:sp>
-    </p:spTree>
-    <p:extLst>
-      <p:ext uri="{BB962C8B-B14F-4D97-AF65-F5344CB8AC3E}">
-        <p14:creationId xmlns:p14="http://schemas.microsoft.com/office/powerpoint/2010/main" val="1024086991"/>
-      </p:ext>
-    </p:extLst>
-  </p:cSld>
-  <p:clrMapOvr>
-    <a:masterClrMapping/>
-  </p:clrMapOvr>
-</p:notes>
-</file>
-
-<file path=ppt/notesSlides/notesSlide14.xml><?xml version="1.0" encoding="utf-8"?>
-<p:notes xmlns:a="http://schemas.openxmlformats.org/drawingml/2006/main" xmlns:r="http://schemas.openxmlformats.org/officeDocument/2006/relationships" xmlns:p="http://schemas.openxmlformats.org/presentationml/2006/main">
-  <p:cSld>
-    <p:spTree>
-      <p:nvGrpSpPr>
-        <p:cNvPr id="1" name=""/>
-        <p:cNvGrpSpPr/>
-        <p:nvPr/>
-      </p:nvGrpSpPr>
-      <p:grpSpPr>
-        <a:xfrm>
-          <a:off x="0" y="0"/>
-          <a:ext cx="0" cy="0"/>
-          <a:chOff x="0" y="0"/>
-          <a:chExt cx="0" cy="0"/>
-        </a:xfrm>
-      </p:grpSpPr>
-      <p:sp>
-        <p:nvSpPr>
-          <p:cNvPr id="2" name="Slide Image Placeholder 1"/>
-          <p:cNvSpPr>
-            <a:spLocks noGrp="1" noRot="1" noChangeAspect="1"/>
-          </p:cNvSpPr>
-          <p:nvPr>
-            <p:ph type="sldImg"/>
-          </p:nvPr>
-        </p:nvSpPr>
-        <p:spPr/>
-      </p:sp>
-      <p:sp>
-        <p:nvSpPr>
-          <p:cNvPr id="3" name="Notes Placeholder 2"/>
-          <p:cNvSpPr>
-            <a:spLocks noGrp="1"/>
-          </p:cNvSpPr>
-          <p:nvPr>
-            <p:ph type="body" idx="1"/>
-          </p:nvPr>
-        </p:nvSpPr>
-        <p:spPr/>
-        <p:txBody>
-          <a:bodyPr/>
-          <a:lstStyle/>
-          <a:p>
-            <a:r>
-              <a:rPr lang="en-US" dirty="0"/>
-              <a:t>• Close with the two-contract model. Preview compaction as a separate concern: it changes which history reaches a self-managed agent, not how a response stream is consumed.
-• GROUNDING SOURCE: https://learn.microsoft.com/en-us/agent-framework/agents/structured-outputs?tabs=python</a:t>
-            </a:r>
-            <a:endParaRPr lang="en-US" dirty="0"/>
-          </a:p>
-        </p:txBody>
-      </p:sp>
-      <p:sp>
-        <p:nvSpPr>
-          <p:cNvPr id="4" name="Slide Number Placeholder 3"/>
-          <p:cNvSpPr>
-            <a:spLocks noGrp="1"/>
-          </p:cNvSpPr>
-          <p:nvPr>
-            <p:ph type="sldNum" sz="quarter" idx="10"/>
-          </p:nvPr>
-        </p:nvSpPr>
-        <p:spPr/>
-        <p:txBody>
-          <a:bodyPr/>
-          <a:lstStyle/>
-          <a:p>
-            <a:fld id="{F7021451-1387-4CA6-816F-3879F97B5CBC}" type="slidenum">
-              <a:rPr lang="en-US"/>
-              <a:t>14</a:t>
             </a:fld>
             <a:endParaRPr lang="en-US"/>
           </a:p>
@@ -1320,8 +1139,7 @@
           <a:p>
             <a:r>
               <a:rPr lang="en-US" dirty="0"/>
-              <a:t>• Correct a common SDK-shape mistake. response_format is nested in options. Instructions and tools are direct run kwargs when overriding them for one invocation.
-• GROUNDING SOURCE: https://learn.microsoft.com/en-us/agent-framework/concepts/agents/running-agents?tabs=python
+              <a:t>• The model class becomes the requested schema when the underlying client supports structured outputs. On success, response.value is a TriageResult instance. Do not promise support for every model or agent type.
 • GROUNDING SOURCE: https://learn.microsoft.com/en-us/agent-framework/agents/structured-outputs?tabs=python</a:t>
             </a:r>
             <a:endParaRPr lang="en-US" dirty="0"/>
@@ -1410,7 +1228,7 @@
           <a:p>
             <a:r>
               <a:rPr lang="en-US" dirty="0"/>
-              <a:t>• The model class becomes the requested schema when the underlying client supports structured outputs. On success, response.value is a TriageResult instance. Do not promise support for every model or agent type.
+              <a:t>• Use a mapping when the schema is dynamic or comes from configuration. In this mode response.value is parsed JSON, typically a dict or list, rather than a Pydantic instance.
 • GROUNDING SOURCE: https://learn.microsoft.com/en-us/agent-framework/agents/structured-outputs?tabs=python</a:t>
             </a:r>
             <a:endParaRPr lang="en-US" dirty="0"/>
@@ -1499,7 +1317,7 @@
           <a:p>
             <a:r>
               <a:rPr lang="en-US" dirty="0"/>
-              <a:t>• Use a mapping when the schema is dynamic or comes from configuration. In this mode response.value is parsed JSON, typically a dict or list, rather than a Pydantic instance.
+              <a:t>• Tie this to the workshop scenario. The assistant can answer from docs, request more information, or recommend an Azure DevOps work item. The typed result is an application contract, not permission to execute a write.
 • GROUNDING SOURCE: https://learn.microsoft.com/en-us/agent-framework/agents/structured-outputs?tabs=python</a:t>
             </a:r>
             <a:endParaRPr lang="en-US" dirty="0"/>
@@ -1588,7 +1406,7 @@
           <a:p>
             <a:r>
               <a:rPr lang="en-US" dirty="0"/>
-              <a:t>• Tie this to the workshop scenario. The assistant can answer from docs, request more information, or recommend an Azure DevOps work item. The typed result is an application contract, not permission to execute a write.
+              <a:t>• This is the canonical combined pattern. You may display update.text, but the value you trust comes from the final response after the stream has completed.
 • GROUNDING SOURCE: https://learn.microsoft.com/en-us/agent-framework/agents/structured-outputs?tabs=python</a:t>
             </a:r>
             <a:endParaRPr lang="en-US" dirty="0"/>
@@ -1677,7 +1495,7 @@
           <a:p>
             <a:r>
               <a:rPr lang="en-US" dirty="0"/>
-              <a:t>• This is the canonical combined pattern. You may display update.text, but the value you trust comes from the final response after the stream has completed.
+              <a:t>• Placeholder marker slide — the runbook has full narration, setup, and fallback plan. Runs the previous slide's exact combined pattern live against the Day 2 docs assistant, now returning a Day-3-shaped TriageResult.
 • GROUNDING SOURCE: https://learn.microsoft.com/en-us/agent-framework/agents/structured-outputs?tabs=python</a:t>
             </a:r>
             <a:endParaRPr lang="en-US" dirty="0"/>
@@ -2285,7 +2103,7 @@
     <p:bg>
       <p:bgPr>
         <a:solidFill>
-          <a:srgbClr val="CADCFC"/>
+          <a:srgbClr val="FFFFFF"/>
         </a:solidFill>
       </p:bgPr>
     </p:bg>
@@ -2312,7 +2130,7 @@
         <p:spPr>
           <a:xfrm>
             <a:off x="0" y="0"/>
-            <a:ext cx="146304" cy="5143500"/>
+            <a:ext cx="54864" cy="5143500"/>
           </a:xfrm>
           <a:prstGeom prst="rect">
             <a:avLst/>
@@ -2331,8 +2149,8 @@
         </p:nvSpPr>
         <p:spPr>
           <a:xfrm>
-            <a:off x="5669280" y="274320"/>
-            <a:ext cx="3291840" cy="274320"/>
+            <a:off x="5486400" y="256032"/>
+            <a:ext cx="3337560" cy="228600"/>
           </a:xfrm>
           <a:prstGeom prst="rect">
             <a:avLst/>
@@ -2341,14 +2159,16 @@
           <a:ln/>
         </p:spPr>
         <p:txBody>
-          <a:bodyPr wrap="square" lIns="0" tIns="0" rIns="0" bIns="0" rtlCol="0" anchor="ctr"/>
+          <a:bodyPr wrap="square" lIns="0" tIns="0" rIns="0" bIns="0" rtlCol="0" anchor="ctr">
+            <a:normAutofit/>
+          </a:bodyPr>
           <a:lstStyle/>
           <a:p>
             <a:pPr algn="r" indent="0" marL="0">
               <a:buNone/>
             </a:pPr>
             <a:r>
-              <a:rPr lang="en-US" sz="1000" dirty="0">
+              <a:rPr lang="en-US" sz="950" dirty="0">
                 <a:solidFill>
                   <a:srgbClr val="6B7280"/>
                 </a:solidFill>
@@ -2356,9 +2176,9 @@
                 <a:ea typeface="Calibri" pitchFamily="34" charset="-122"/>
                 <a:cs typeface="Calibri" pitchFamily="34" charset="-120"/>
               </a:rPr>
-              <a:t>Day 3 · Module 2 · Demo</a:t>
-            </a:r>
-            <a:endParaRPr lang="en-US" sz="1000" dirty="0"/>
+              <a:t>Day 3 · Module 2</a:t>
+            </a:r>
+            <a:endParaRPr lang="en-US" sz="950" dirty="0"/>
           </a:p>
         </p:txBody>
       </p:sp>
@@ -2370,8 +2190,8 @@
         </p:nvSpPr>
         <p:spPr>
           <a:xfrm>
-            <a:off x="548640" y="1051560"/>
-            <a:ext cx="5486400" cy="502920"/>
+            <a:off x="365760" y="310896"/>
+            <a:ext cx="6583680" cy="603504"/>
           </a:xfrm>
           <a:prstGeom prst="rect">
             <a:avLst/>
@@ -2380,14 +2200,16 @@
           <a:ln/>
         </p:spPr>
         <p:txBody>
-          <a:bodyPr wrap="square" lIns="0" tIns="0" rIns="0" bIns="0" rtlCol="0" anchor="ctr"/>
+          <a:bodyPr wrap="square" lIns="0" tIns="0" rIns="0" bIns="0" rtlCol="0" anchor="ctr">
+            <a:normAutofit/>
+          </a:bodyPr>
           <a:lstStyle/>
           <a:p>
             <a:pPr indent="0" marL="0">
               <a:buNone/>
             </a:pPr>
             <a:r>
-              <a:rPr lang="en-US" sz="3200" b="1" spc="800" kern="0" dirty="0">
+              <a:rPr lang="en-US" sz="2500" b="1" dirty="0">
                 <a:solidFill>
                   <a:srgbClr val="1E2761"/>
                 </a:solidFill>
@@ -2395,9 +2217,9 @@
                 <a:ea typeface="Calibri" pitchFamily="34" charset="-122"/>
                 <a:cs typeface="Calibri" pitchFamily="34" charset="-120"/>
               </a:rPr>
-              <a:t>DEMO</a:t>
-            </a:r>
-            <a:endParaRPr lang="en-US" sz="3200" dirty="0"/>
+              <a:t>Partial JSON is display data, not a value</a:t>
+            </a:r>
+            <a:endParaRPr lang="en-US" sz="2500" dirty="0"/>
           </a:p>
         </p:txBody>
       </p:sp>
@@ -2409,8 +2231,8 @@
         </p:nvSpPr>
         <p:spPr>
           <a:xfrm>
-            <a:off x="548640" y="1691640"/>
-            <a:ext cx="8046720" cy="914400"/>
+            <a:off x="502920" y="1170432"/>
+            <a:ext cx="7955280" cy="3520440"/>
           </a:xfrm>
           <a:prstGeom prst="rect">
             <a:avLst/>
@@ -2419,14 +2241,20 @@
           <a:ln/>
         </p:spPr>
         <p:txBody>
-          <a:bodyPr wrap="square" lIns="0" tIns="0" rIns="0" bIns="0" rtlCol="0" anchor="ctr"/>
+          <a:bodyPr wrap="square" lIns="0" tIns="0" rIns="0" bIns="0" rtlCol="0" anchor="t">
+            <a:normAutofit/>
+          </a:bodyPr>
           <a:lstStyle/>
           <a:p>
-            <a:pPr indent="0" marL="0">
-              <a:buNone/>
-            </a:pPr>
-            <a:r>
-              <a:rPr lang="en-US" sz="3000" b="1" dirty="0">
+            <a:pPr marL="342900" indent="-342900">
+              <a:spcAft>
+                <a:spcPts val="1000"/>
+              </a:spcAft>
+              <a:buSzPct val="100000"/>
+              <a:buChar char="•"/>
+            </a:pPr>
+            <a:r>
+              <a:rPr lang="en-US" sz="1600" b="1" dirty="0">
                 <a:solidFill>
                   <a:srgbClr val="1E2761"/>
                 </a:solidFill>
@@ -2434,77 +2262,38 @@
                 <a:ea typeface="Calibri" pitchFamily="34" charset="-122"/>
                 <a:cs typeface="Calibri" pitchFamily="34" charset="-120"/>
               </a:rPr>
-              <a:t>Watch it stream, then get the typed TriageResult</a:t>
-            </a:r>
-            <a:endParaRPr lang="en-US" sz="3000" dirty="0"/>
-          </a:p>
-        </p:txBody>
-      </p:sp>
-      <p:sp>
-        <p:nvSpPr>
-          <p:cNvPr id="6" name="Text 4"/>
-          <p:cNvSpPr/>
-          <p:nvPr/>
-        </p:nvSpPr>
-        <p:spPr>
-          <a:xfrm>
-            <a:off x="6583680" y="1051560"/>
-            <a:ext cx="2194560" cy="502920"/>
-          </a:xfrm>
-          <a:prstGeom prst="rect">
-            <a:avLst/>
-          </a:prstGeom>
-          <a:noFill/>
-          <a:ln/>
-        </p:spPr>
-        <p:txBody>
-          <a:bodyPr wrap="square" lIns="0" tIns="0" rIns="0" bIns="0" rtlCol="0" anchor="ctr"/>
-          <a:lstStyle/>
-          <a:p>
-            <a:pPr algn="r" indent="0" marL="0">
-              <a:buNone/>
-            </a:pPr>
-            <a:r>
-              <a:rPr lang="en-US" sz="1800" i="1" dirty="0">
-                <a:solidFill>
-                  <a:srgbClr val="6B7280"/>
+              <a:t>During the stream</a:t>
+            </a:r>
+            <a:endParaRPr lang="en-US" sz="1600" dirty="0"/>
+          </a:p>
+          <a:p>
+            <a:pPr lvl="1" marL="457200" indent="-228600">
+              <a:spcAft>
+                <a:spcPts val="1000"/>
+              </a:spcAft>
+              <a:buSzPct val="100000"/>
+              <a:buChar char="•"/>
+            </a:pPr>
+            <a:r>
+              <a:rPr lang="en-US" sz="1600" dirty="0">
+                <a:solidFill>
+                  <a:srgbClr val="212121"/>
                 </a:solidFill>
                 <a:latin typeface="Calibri" pitchFamily="34" charset="0"/>
                 <a:ea typeface="Calibri" pitchFamily="34" charset="-122"/>
                 <a:cs typeface="Calibri" pitchFamily="34" charset="-120"/>
               </a:rPr>
-              <a:t>~5 min</a:t>
-            </a:r>
-            <a:endParaRPr lang="en-US" sz="1800" dirty="0"/>
-          </a:p>
-        </p:txBody>
-      </p:sp>
-      <p:sp>
-        <p:nvSpPr>
-          <p:cNvPr id="7" name="Text 5"/>
-          <p:cNvSpPr/>
-          <p:nvPr/>
-        </p:nvSpPr>
-        <p:spPr>
-          <a:xfrm>
-            <a:off x="548640" y="2788920"/>
-            <a:ext cx="8046720" cy="1371600"/>
-          </a:xfrm>
-          <a:prstGeom prst="rect">
-            <a:avLst/>
-          </a:prstGeom>
-          <a:noFill/>
-          <a:ln/>
-        </p:spPr>
-        <p:txBody>
-          <a:bodyPr wrap="square" lIns="0" tIns="0" rIns="0" bIns="0" rtlCol="0" anchor="ctr"/>
-          <a:lstStyle/>
-          <a:p>
-            <a:pPr indent="0" marL="0">
+              <a:t>JSON may be incomplete</a:t>
+            </a:r>
+            <a:endParaRPr lang="en-US" sz="1600" dirty="0"/>
+          </a:p>
+          <a:p>
+            <a:pPr lvl="1" marL="457200" indent="-228600">
               <a:spcAft>
-                <a:spcPts val="600"/>
+                <a:spcPts val="1000"/>
               </a:spcAft>
-              <a:buNone/>
+              <a:buSzPct val="100000"/>
+              <a:buChar char="•"/>
             </a:pPr>
             <a:r>
               <a:rPr lang="en-US" sz="1600" dirty="0">
@@ -2515,54 +2304,120 @@
                 <a:ea typeface="Calibri" pitchFamily="34" charset="-122"/>
                 <a:cs typeface="Calibri" pitchFamily="34" charset="-120"/>
               </a:rPr>
-              <a:t>Run the previous slide's exact combined pattern live: text tokens render as they arrive, then stream.get_final_response().value prints a validated TriageResult — the two-contract model made concrete on the Day 2 docs assistant.</a:t>
+              <a:t>Fields may not have arrived</a:t>
             </a:r>
             <a:endParaRPr lang="en-US" sz="1600" dirty="0"/>
           </a:p>
-        </p:txBody>
-      </p:sp>
-      <p:sp>
-        <p:nvSpPr>
-          <p:cNvPr id="8" name="Text 6"/>
-          <p:cNvSpPr/>
-          <p:nvPr/>
-        </p:nvSpPr>
-        <p:spPr>
-          <a:xfrm>
-            <a:off x="548640" y="4434840"/>
-            <a:ext cx="8046720" cy="320040"/>
-          </a:xfrm>
-          <a:prstGeom prst="rect">
-            <a:avLst/>
-          </a:prstGeom>
-          <a:noFill/>
-          <a:ln/>
-        </p:spPr>
-        <p:txBody>
-          <a:bodyPr wrap="square" lIns="0" tIns="0" rIns="0" bIns="0" rtlCol="0" anchor="ctr"/>
-          <a:lstStyle/>
-          <a:p>
-            <a:pPr indent="0" marL="0">
-              <a:buNone/>
-            </a:pPr>
-            <a:r>
-              <a:rPr lang="en-US" sz="1100" i="1" dirty="0">
-                <a:solidFill>
-                  <a:srgbClr val="6B7280"/>
+          <a:p>
+            <a:pPr lvl="1" marL="457200" indent="-228600">
+              <a:spcAft>
+                <a:spcPts val="1000"/>
+              </a:spcAft>
+              <a:buSzPct val="100000"/>
+              <a:buChar char="•"/>
+            </a:pPr>
+            <a:r>
+              <a:rPr lang="en-US" sz="1600" dirty="0">
+                <a:solidFill>
+                  <a:srgbClr val="212121"/>
                 </a:solidFill>
                 <a:latin typeface="Calibri" pitchFamily="34" charset="0"/>
                 <a:ea typeface="Calibri" pitchFamily="34" charset="-122"/>
                 <a:cs typeface="Calibri" pitchFamily="34" charset="-120"/>
               </a:rPr>
-              <a:t>Runbook: demos/day3/module-2-demo-1-stream-then-triage.md</a:t>
-            </a:r>
-            <a:endParaRPr lang="en-US" sz="1100" dirty="0"/>
+              <a:t>Do not parse or act</a:t>
+            </a:r>
+            <a:endParaRPr lang="en-US" sz="1600" dirty="0"/>
+          </a:p>
+          <a:p>
+            <a:pPr marL="342900" indent="-342900">
+              <a:spcAft>
+                <a:spcPts val="1000"/>
+              </a:spcAft>
+              <a:buSzPct val="100000"/>
+              <a:buChar char="•"/>
+            </a:pPr>
+            <a:r>
+              <a:rPr lang="en-US" sz="1600" b="1" dirty="0">
+                <a:solidFill>
+                  <a:srgbClr val="1E2761"/>
+                </a:solidFill>
+                <a:latin typeface="Calibri" pitchFamily="34" charset="0"/>
+                <a:ea typeface="Calibri" pitchFamily="34" charset="-122"/>
+                <a:cs typeface="Calibri" pitchFamily="34" charset="-120"/>
+              </a:rPr>
+              <a:t>After completion</a:t>
+            </a:r>
+            <a:endParaRPr lang="en-US" sz="1600" dirty="0"/>
+          </a:p>
+          <a:p>
+            <a:pPr lvl="1" marL="457200" indent="-228600">
+              <a:spcAft>
+                <a:spcPts val="1000"/>
+              </a:spcAft>
+              <a:buSzPct val="100000"/>
+              <a:buChar char="•"/>
+            </a:pPr>
+            <a:r>
+              <a:rPr lang="en-US" sz="1600" dirty="0">
+                <a:solidFill>
+                  <a:srgbClr val="212121"/>
+                </a:solidFill>
+                <a:latin typeface="Calibri" pitchFamily="34" charset="0"/>
+                <a:ea typeface="Calibri" pitchFamily="34" charset="-122"/>
+                <a:cs typeface="Calibri" pitchFamily="34" charset="-120"/>
+              </a:rPr>
+              <a:t>Await get_final_response()</a:t>
+            </a:r>
+            <a:endParaRPr lang="en-US" sz="1600" dirty="0"/>
+          </a:p>
+          <a:p>
+            <a:pPr lvl="1" marL="457200" indent="-228600">
+              <a:spcAft>
+                <a:spcPts val="1000"/>
+              </a:spcAft>
+              <a:buSzPct val="100000"/>
+              <a:buChar char="•"/>
+            </a:pPr>
+            <a:r>
+              <a:rPr lang="en-US" sz="1600" dirty="0">
+                <a:solidFill>
+                  <a:srgbClr val="212121"/>
+                </a:solidFill>
+                <a:latin typeface="Calibri" pitchFamily="34" charset="0"/>
+                <a:ea typeface="Calibri" pitchFamily="34" charset="-122"/>
+                <a:cs typeface="Calibri" pitchFamily="34" charset="-120"/>
+              </a:rPr>
+              <a:t>Read validated .value</a:t>
+            </a:r>
+            <a:endParaRPr lang="en-US" sz="1600" dirty="0"/>
+          </a:p>
+          <a:p>
+            <a:pPr lvl="1" marL="457200" indent="-228600">
+              <a:spcAft>
+                <a:spcPts val="1000"/>
+              </a:spcAft>
+              <a:buSzPct val="100000"/>
+              <a:buChar char="•"/>
+            </a:pPr>
+            <a:r>
+              <a:rPr lang="en-US" sz="1600" dirty="0">
+                <a:solidFill>
+                  <a:srgbClr val="212121"/>
+                </a:solidFill>
+                <a:latin typeface="Calibri" pitchFamily="34" charset="0"/>
+                <a:ea typeface="Calibri" pitchFamily="34" charset="-122"/>
+                <a:cs typeface="Calibri" pitchFamily="34" charset="-120"/>
+              </a:rPr>
+              <a:t>Apply business rules and approvals</a:t>
+            </a:r>
+            <a:endParaRPr lang="en-US" sz="1600" dirty="0"/>
           </a:p>
         </p:txBody>
       </p:sp>
       <p:sp>
         <p:nvSpPr>
-          <p:cNvPr id="9" name="Shape 7"/>
+          <p:cNvPr id="6" name="Shape 4"/>
           <p:cNvSpPr/>
           <p:nvPr/>
         </p:nvSpPr>
@@ -2585,7 +2440,7 @@
       </p:sp>
       <p:sp>
         <p:nvSpPr>
-          <p:cNvPr id="10" name="Text 8"/>
+          <p:cNvPr id="7" name="Text 5"/>
           <p:cNvSpPr/>
           <p:nvPr/>
         </p:nvSpPr>
@@ -2744,7 +2599,7 @@
               <a:buNone/>
             </a:pPr>
             <a:r>
-              <a:rPr lang="en-US" sz="2500" b="1" dirty="0">
+              <a:rPr lang="en-US" sz="2800" b="1" dirty="0">
                 <a:solidFill>
                   <a:srgbClr val="1E2761"/>
                 </a:solidFill>
@@ -2752,1126 +2607,6 @@
                 <a:ea typeface="Calibri" pitchFamily="34" charset="-122"/>
                 <a:cs typeface="Calibri" pitchFamily="34" charset="-120"/>
               </a:rPr>
-              <a:t>Partial JSON is display data, not a value</a:t>
-            </a:r>
-            <a:endParaRPr lang="en-US" sz="2500" dirty="0"/>
-          </a:p>
-        </p:txBody>
-      </p:sp>
-      <p:sp>
-        <p:nvSpPr>
-          <p:cNvPr id="5" name="Shape 3"/>
-          <p:cNvSpPr/>
-          <p:nvPr/>
-        </p:nvSpPr>
-        <p:spPr>
-          <a:xfrm>
-            <a:off x="365760" y="1078992"/>
-            <a:ext cx="4114800" cy="3493008"/>
-          </a:xfrm>
-          <a:prstGeom prst="roundRect">
-            <a:avLst/>
-          </a:prstGeom>
-          <a:solidFill>
-            <a:srgbClr val="F3F4F6"/>
-          </a:solidFill>
-          <a:ln w="11430">
-            <a:solidFill>
-              <a:srgbClr val="D1D5DB"/>
-            </a:solidFill>
-            <a:prstDash val="solid"/>
-          </a:ln>
-        </p:spPr>
-      </p:sp>
-      <p:sp>
-        <p:nvSpPr>
-          <p:cNvPr id="6" name="Text 4"/>
-          <p:cNvSpPr/>
-          <p:nvPr/>
-        </p:nvSpPr>
-        <p:spPr>
-          <a:xfrm>
-            <a:off x="566928" y="1298448"/>
-            <a:ext cx="3712464" cy="411480"/>
-          </a:xfrm>
-          <a:prstGeom prst="rect">
-            <a:avLst/>
-          </a:prstGeom>
-          <a:noFill/>
-          <a:ln/>
-        </p:spPr>
-        <p:txBody>
-          <a:bodyPr wrap="square" lIns="0" tIns="0" rIns="0" bIns="0" rtlCol="0" anchor="ctr">
-            <a:normAutofit/>
-          </a:bodyPr>
-          <a:lstStyle/>
-          <a:p>
-            <a:pPr indent="0" marL="0">
-              <a:buNone/>
-            </a:pPr>
-            <a:r>
-              <a:rPr lang="en-US" sz="2000" b="1" dirty="0">
-                <a:solidFill>
-                  <a:srgbClr val="1E2761"/>
-                </a:solidFill>
-                <a:latin typeface="Calibri" pitchFamily="34" charset="0"/>
-                <a:ea typeface="Calibri" pitchFamily="34" charset="-122"/>
-                <a:cs typeface="Calibri" pitchFamily="34" charset="-120"/>
-              </a:rPr>
-              <a:t>During the stream</a:t>
-            </a:r>
-            <a:endParaRPr lang="en-US" sz="2000" dirty="0"/>
-          </a:p>
-        </p:txBody>
-      </p:sp>
-      <p:sp>
-        <p:nvSpPr>
-          <p:cNvPr id="7" name="Text 5"/>
-          <p:cNvSpPr/>
-          <p:nvPr/>
-        </p:nvSpPr>
-        <p:spPr>
-          <a:xfrm>
-            <a:off x="594360" y="1828800"/>
-            <a:ext cx="3639312" cy="2395728"/>
-          </a:xfrm>
-          <a:prstGeom prst="rect">
-            <a:avLst/>
-          </a:prstGeom>
-          <a:noFill/>
-          <a:ln/>
-        </p:spPr>
-        <p:txBody>
-          <a:bodyPr wrap="square" lIns="381" tIns="381" rIns="381" bIns="381" rtlCol="0" anchor="ctr">
-            <a:normAutofit/>
-          </a:bodyPr>
-          <a:lstStyle/>
-          <a:p>
-            <a:pPr marL="342900" indent="-342900">
-              <a:buSzPct val="100000"/>
-              <a:buChar char="•"/>
-            </a:pPr>
-            <a:r>
-              <a:rPr lang="en-US" sz="1300" dirty="0">
-                <a:solidFill>
-                  <a:srgbClr val="212121"/>
-                </a:solidFill>
-                <a:latin typeface="Calibri" pitchFamily="34" charset="0"/>
-                <a:ea typeface="Calibri" pitchFamily="34" charset="-122"/>
-                <a:cs typeface="Calibri" pitchFamily="34" charset="-120"/>
-              </a:rPr>
-              <a:t>JSON may be incomplete</a:t>
-            </a:r>
-            <a:endParaRPr lang="en-US" sz="1300" dirty="0"/>
-          </a:p>
-          <a:p>
-            <a:pPr marL="342900" indent="-342900">
-              <a:buSzPct val="100000"/>
-              <a:buChar char="•"/>
-            </a:pPr>
-            <a:r>
-              <a:rPr lang="en-US" sz="1300" dirty="0">
-                <a:solidFill>
-                  <a:srgbClr val="212121"/>
-                </a:solidFill>
-                <a:latin typeface="Calibri" pitchFamily="34" charset="0"/>
-                <a:ea typeface="Calibri" pitchFamily="34" charset="-122"/>
-                <a:cs typeface="Calibri" pitchFamily="34" charset="-120"/>
-              </a:rPr>
-              <a:t>Fields may not have arrived</a:t>
-            </a:r>
-            <a:endParaRPr lang="en-US" sz="1300" dirty="0"/>
-          </a:p>
-          <a:p>
-            <a:pPr marL="342900" indent="-342900">
-              <a:buSzPct val="100000"/>
-              <a:buChar char="•"/>
-            </a:pPr>
-            <a:r>
-              <a:rPr lang="en-US" sz="1300" dirty="0">
-                <a:solidFill>
-                  <a:srgbClr val="212121"/>
-                </a:solidFill>
-                <a:latin typeface="Calibri" pitchFamily="34" charset="0"/>
-                <a:ea typeface="Calibri" pitchFamily="34" charset="-122"/>
-                <a:cs typeface="Calibri" pitchFamily="34" charset="-120"/>
-              </a:rPr>
-              <a:t>Do not parse or act</a:t>
-            </a:r>
-            <a:endParaRPr lang="en-US" sz="1300" dirty="0"/>
-          </a:p>
-        </p:txBody>
-      </p:sp>
-      <p:sp>
-        <p:nvSpPr>
-          <p:cNvPr id="8" name="Shape 6"/>
-          <p:cNvSpPr/>
-          <p:nvPr/>
-        </p:nvSpPr>
-        <p:spPr>
-          <a:xfrm>
-            <a:off x="4663440" y="1078992"/>
-            <a:ext cx="4114800" cy="3493008"/>
-          </a:xfrm>
-          <a:prstGeom prst="roundRect">
-            <a:avLst/>
-          </a:prstGeom>
-          <a:solidFill>
-            <a:srgbClr val="CADCFC"/>
-          </a:solidFill>
-          <a:ln w="11430">
-            <a:solidFill>
-              <a:srgbClr val="1E2761"/>
-            </a:solidFill>
-            <a:prstDash val="solid"/>
-          </a:ln>
-        </p:spPr>
-      </p:sp>
-      <p:sp>
-        <p:nvSpPr>
-          <p:cNvPr id="9" name="Text 7"/>
-          <p:cNvSpPr/>
-          <p:nvPr/>
-        </p:nvSpPr>
-        <p:spPr>
-          <a:xfrm>
-            <a:off x="4864608" y="1298448"/>
-            <a:ext cx="3712464" cy="411480"/>
-          </a:xfrm>
-          <a:prstGeom prst="rect">
-            <a:avLst/>
-          </a:prstGeom>
-          <a:noFill/>
-          <a:ln/>
-        </p:spPr>
-        <p:txBody>
-          <a:bodyPr wrap="square" lIns="0" tIns="0" rIns="0" bIns="0" rtlCol="0" anchor="ctr">
-            <a:normAutofit/>
-          </a:bodyPr>
-          <a:lstStyle/>
-          <a:p>
-            <a:pPr indent="0" marL="0">
-              <a:buNone/>
-            </a:pPr>
-            <a:r>
-              <a:rPr lang="en-US" sz="2000" b="1" dirty="0">
-                <a:solidFill>
-                  <a:srgbClr val="1E2761"/>
-                </a:solidFill>
-                <a:latin typeface="Calibri" pitchFamily="34" charset="0"/>
-                <a:ea typeface="Calibri" pitchFamily="34" charset="-122"/>
-                <a:cs typeface="Calibri" pitchFamily="34" charset="-120"/>
-              </a:rPr>
-              <a:t>After completion</a:t>
-            </a:r>
-            <a:endParaRPr lang="en-US" sz="2000" dirty="0"/>
-          </a:p>
-        </p:txBody>
-      </p:sp>
-      <p:sp>
-        <p:nvSpPr>
-          <p:cNvPr id="10" name="Text 8"/>
-          <p:cNvSpPr/>
-          <p:nvPr/>
-        </p:nvSpPr>
-        <p:spPr>
-          <a:xfrm>
-            <a:off x="4892040" y="1828800"/>
-            <a:ext cx="3639312" cy="2395728"/>
-          </a:xfrm>
-          <a:prstGeom prst="rect">
-            <a:avLst/>
-          </a:prstGeom>
-          <a:noFill/>
-          <a:ln/>
-        </p:spPr>
-        <p:txBody>
-          <a:bodyPr wrap="square" lIns="381" tIns="381" rIns="381" bIns="381" rtlCol="0" anchor="ctr">
-            <a:normAutofit/>
-          </a:bodyPr>
-          <a:lstStyle/>
-          <a:p>
-            <a:pPr marL="342900" indent="-342900">
-              <a:buSzPct val="100000"/>
-              <a:buChar char="•"/>
-            </a:pPr>
-            <a:r>
-              <a:rPr lang="en-US" sz="1300" dirty="0">
-                <a:solidFill>
-                  <a:srgbClr val="212121"/>
-                </a:solidFill>
-                <a:latin typeface="Calibri" pitchFamily="34" charset="0"/>
-                <a:ea typeface="Calibri" pitchFamily="34" charset="-122"/>
-                <a:cs typeface="Calibri" pitchFamily="34" charset="-120"/>
-              </a:rPr>
-              <a:t>Await get_final_response()</a:t>
-            </a:r>
-            <a:endParaRPr lang="en-US" sz="1300" dirty="0"/>
-          </a:p>
-          <a:p>
-            <a:pPr marL="342900" indent="-342900">
-              <a:buSzPct val="100000"/>
-              <a:buChar char="•"/>
-            </a:pPr>
-            <a:r>
-              <a:rPr lang="en-US" sz="1300" dirty="0">
-                <a:solidFill>
-                  <a:srgbClr val="212121"/>
-                </a:solidFill>
-                <a:latin typeface="Calibri" pitchFamily="34" charset="0"/>
-                <a:ea typeface="Calibri" pitchFamily="34" charset="-122"/>
-                <a:cs typeface="Calibri" pitchFamily="34" charset="-120"/>
-              </a:rPr>
-              <a:t>Read validated .value</a:t>
-            </a:r>
-            <a:endParaRPr lang="en-US" sz="1300" dirty="0"/>
-          </a:p>
-          <a:p>
-            <a:pPr marL="342900" indent="-342900">
-              <a:buSzPct val="100000"/>
-              <a:buChar char="•"/>
-            </a:pPr>
-            <a:r>
-              <a:rPr lang="en-US" sz="1300" dirty="0">
-                <a:solidFill>
-                  <a:srgbClr val="212121"/>
-                </a:solidFill>
-                <a:latin typeface="Calibri" pitchFamily="34" charset="0"/>
-                <a:ea typeface="Calibri" pitchFamily="34" charset="-122"/>
-                <a:cs typeface="Calibri" pitchFamily="34" charset="-120"/>
-              </a:rPr>
-              <a:t>Apply business rules and approvals</a:t>
-            </a:r>
-            <a:endParaRPr lang="en-US" sz="1300" dirty="0"/>
-          </a:p>
-        </p:txBody>
-      </p:sp>
-      <p:sp>
-        <p:nvSpPr>
-          <p:cNvPr id="11" name="Shape 9"/>
-          <p:cNvSpPr/>
-          <p:nvPr/>
-        </p:nvSpPr>
-        <p:spPr>
-          <a:xfrm>
-            <a:off x="365760" y="4773168"/>
-            <a:ext cx="8412480" cy="0"/>
-          </a:xfrm>
-          <a:prstGeom prst="line">
-            <a:avLst/>
-          </a:prstGeom>
-          <a:noFill/>
-          <a:ln w="6350">
-            <a:solidFill>
-              <a:srgbClr val="D1D5DB"/>
-            </a:solidFill>
-            <a:prstDash val="solid"/>
-          </a:ln>
-        </p:spPr>
-      </p:sp>
-      <p:sp>
-        <p:nvSpPr>
-          <p:cNvPr id="12" name="Text 10"/>
-          <p:cNvSpPr/>
-          <p:nvPr/>
-        </p:nvSpPr>
-        <p:spPr>
-          <a:xfrm>
-            <a:off x="384048" y="4818888"/>
-            <a:ext cx="8275320" cy="182880"/>
-          </a:xfrm>
-          <a:prstGeom prst="rect">
-            <a:avLst/>
-          </a:prstGeom>
-          <a:noFill/>
-          <a:ln/>
-        </p:spPr>
-        <p:txBody>
-          <a:bodyPr wrap="square" lIns="0" tIns="0" rIns="0" bIns="0" rtlCol="0" anchor="ctr">
-            <a:normAutofit/>
-          </a:bodyPr>
-          <a:lstStyle/>
-          <a:p>
-            <a:pPr indent="0" marL="0">
-              <a:buNone/>
-            </a:pPr>
-            <a:r>
-              <a:rPr lang="en-US" sz="820" dirty="0">
-                <a:solidFill>
-                  <a:srgbClr val="6B7280"/>
-                </a:solidFill>
-                <a:latin typeface="Calibri" pitchFamily="34" charset="0"/>
-                <a:ea typeface="Calibri" pitchFamily="34" charset="-122"/>
-                <a:cs typeface="Calibri" pitchFamily="34" charset="-120"/>
-              </a:rPr>
-              <a:t>Source: https://learn.microsoft.com/en-us/agent-framework/agents/structured-outputs?tabs=python</a:t>
-            </a:r>
-            <a:endParaRPr lang="en-US" sz="820" dirty="0"/>
-          </a:p>
-        </p:txBody>
-      </p:sp>
-    </p:spTree>
-  </p:cSld>
-  <p:clrMapOvr>
-    <a:masterClrMapping/>
-  </p:clrMapOvr>
-</p:sld>
-</file>
-
-<file path=ppt/slides/slide12.xml><?xml version="1.0" encoding="utf-8"?>
-<p:sld xmlns:a="http://schemas.openxmlformats.org/drawingml/2006/main" xmlns:r="http://schemas.openxmlformats.org/officeDocument/2006/relationships" xmlns:p="http://schemas.openxmlformats.org/presentationml/2006/main">
-  <p:cSld name="Slide 12">
-    <p:bg>
-      <p:bgPr>
-        <a:solidFill>
-          <a:srgbClr val="FFFFFF"/>
-        </a:solidFill>
-      </p:bgPr>
-    </p:bg>
-    <p:spTree>
-      <p:nvGrpSpPr>
-        <p:cNvPr id="1" name=""/>
-        <p:cNvGrpSpPr/>
-        <p:nvPr/>
-      </p:nvGrpSpPr>
-      <p:grpSpPr>
-        <a:xfrm>
-          <a:off x="0" y="0"/>
-          <a:ext cx="0" cy="0"/>
-          <a:chOff x="0" y="0"/>
-          <a:chExt cx="0" cy="0"/>
-        </a:xfrm>
-      </p:grpSpPr>
-      <p:sp>
-        <p:nvSpPr>
-          <p:cNvPr id="2" name="Shape 0"/>
-          <p:cNvSpPr/>
-          <p:nvPr/>
-        </p:nvSpPr>
-        <p:spPr>
-          <a:xfrm>
-            <a:off x="0" y="0"/>
-            <a:ext cx="54864" cy="5143500"/>
-          </a:xfrm>
-          <a:prstGeom prst="rect">
-            <a:avLst/>
-          </a:prstGeom>
-          <a:solidFill>
-            <a:srgbClr val="1E2761"/>
-          </a:solidFill>
-          <a:ln/>
-        </p:spPr>
-      </p:sp>
-      <p:sp>
-        <p:nvSpPr>
-          <p:cNvPr id="3" name="Text 1"/>
-          <p:cNvSpPr/>
-          <p:nvPr/>
-        </p:nvSpPr>
-        <p:spPr>
-          <a:xfrm>
-            <a:off x="5486400" y="256032"/>
-            <a:ext cx="3337560" cy="228600"/>
-          </a:xfrm>
-          <a:prstGeom prst="rect">
-            <a:avLst/>
-          </a:prstGeom>
-          <a:noFill/>
-          <a:ln/>
-        </p:spPr>
-        <p:txBody>
-          <a:bodyPr wrap="square" lIns="0" tIns="0" rIns="0" bIns="0" rtlCol="0" anchor="ctr">
-            <a:normAutofit/>
-          </a:bodyPr>
-          <a:lstStyle/>
-          <a:p>
-            <a:pPr algn="r" indent="0" marL="0">
-              <a:buNone/>
-            </a:pPr>
-            <a:r>
-              <a:rPr lang="en-US" sz="950" dirty="0">
-                <a:solidFill>
-                  <a:srgbClr val="6B7280"/>
-                </a:solidFill>
-                <a:latin typeface="Calibri" pitchFamily="34" charset="0"/>
-                <a:ea typeface="Calibri" pitchFamily="34" charset="-122"/>
-                <a:cs typeface="Calibri" pitchFamily="34" charset="-120"/>
-              </a:rPr>
-              <a:t>Day 3 · Module 2</a:t>
-            </a:r>
-            <a:endParaRPr lang="en-US" sz="950" dirty="0"/>
-          </a:p>
-        </p:txBody>
-      </p:sp>
-      <p:sp>
-        <p:nvSpPr>
-          <p:cNvPr id="4" name="Text 2"/>
-          <p:cNvSpPr/>
-          <p:nvPr/>
-        </p:nvSpPr>
-        <p:spPr>
-          <a:xfrm>
-            <a:off x="365760" y="310896"/>
-            <a:ext cx="6583680" cy="603504"/>
-          </a:xfrm>
-          <a:prstGeom prst="rect">
-            <a:avLst/>
-          </a:prstGeom>
-          <a:noFill/>
-          <a:ln/>
-        </p:spPr>
-        <p:txBody>
-          <a:bodyPr wrap="square" lIns="0" tIns="0" rIns="0" bIns="0" rtlCol="0" anchor="ctr">
-            <a:normAutofit/>
-          </a:bodyPr>
-          <a:lstStyle/>
-          <a:p>
-            <a:pPr indent="0" marL="0">
-              <a:buNone/>
-            </a:pPr>
-            <a:r>
-              <a:rPr lang="en-US" sz="2500" b="1" dirty="0">
-                <a:solidFill>
-                  <a:srgbClr val="1E2761"/>
-                </a:solidFill>
-                <a:latin typeface="Calibri" pitchFamily="34" charset="0"/>
-                <a:ea typeface="Calibri" pitchFamily="34" charset="-122"/>
-                <a:cs typeface="Calibri" pitchFamily="34" charset="-120"/>
-              </a:rPr>
-              <a:t>Support follows the underlying client</a:t>
-            </a:r>
-            <a:endParaRPr lang="en-US" sz="2500" dirty="0"/>
-          </a:p>
-        </p:txBody>
-      </p:sp>
-      <p:sp>
-        <p:nvSpPr>
-          <p:cNvPr id="5" name="Shape 3"/>
-          <p:cNvSpPr/>
-          <p:nvPr/>
-        </p:nvSpPr>
-        <p:spPr>
-          <a:xfrm>
-            <a:off x="365760" y="1078992"/>
-            <a:ext cx="4105656" cy="1655064"/>
-          </a:xfrm>
-          <a:prstGeom prst="roundRect">
-            <a:avLst>
-              <a:gd name="adj" fmla="val 3315"/>
-            </a:avLst>
-          </a:prstGeom>
-          <a:solidFill>
-            <a:srgbClr val="CADCFC"/>
-          </a:solidFill>
-          <a:ln w="10160">
-            <a:solidFill>
-              <a:srgbClr val="1E2761"/>
-            </a:solidFill>
-            <a:prstDash val="solid"/>
-          </a:ln>
-        </p:spPr>
-      </p:sp>
-      <p:sp>
-        <p:nvSpPr>
-          <p:cNvPr id="6" name="Text 4"/>
-          <p:cNvSpPr/>
-          <p:nvPr/>
-        </p:nvSpPr>
-        <p:spPr>
-          <a:xfrm>
-            <a:off x="512064" y="1197864"/>
-            <a:ext cx="3813048" cy="310896"/>
-          </a:xfrm>
-          <a:prstGeom prst="rect">
-            <a:avLst/>
-          </a:prstGeom>
-          <a:noFill/>
-          <a:ln/>
-        </p:spPr>
-        <p:txBody>
-          <a:bodyPr wrap="square" lIns="0" tIns="0" rIns="0" bIns="0" rtlCol="0" anchor="ctr">
-            <a:normAutofit/>
-          </a:bodyPr>
-          <a:lstStyle/>
-          <a:p>
-            <a:pPr indent="0" marL="0">
-              <a:buNone/>
-            </a:pPr>
-            <a:r>
-              <a:rPr lang="en-US" sz="1500" b="1" dirty="0">
-                <a:solidFill>
-                  <a:srgbClr val="1E2761"/>
-                </a:solidFill>
-                <a:latin typeface="Calibri" pitchFamily="34" charset="0"/>
-                <a:ea typeface="Calibri" pitchFamily="34" charset="-122"/>
-                <a:cs typeface="Calibri" pitchFamily="34" charset="-120"/>
-              </a:rPr>
-              <a:t>Framework</a:t>
-            </a:r>
-            <a:endParaRPr lang="en-US" sz="1500" dirty="0"/>
-          </a:p>
-        </p:txBody>
-      </p:sp>
-      <p:sp>
-        <p:nvSpPr>
-          <p:cNvPr id="7" name="Text 5"/>
-          <p:cNvSpPr/>
-          <p:nvPr/>
-        </p:nvSpPr>
-        <p:spPr>
-          <a:xfrm>
-            <a:off x="512064" y="1581912"/>
-            <a:ext cx="3813048" cy="1033272"/>
-          </a:xfrm>
-          <a:prstGeom prst="rect">
-            <a:avLst/>
-          </a:prstGeom>
-          <a:noFill/>
-          <a:ln/>
-        </p:spPr>
-        <p:txBody>
-          <a:bodyPr wrap="square" lIns="0" tIns="0" rIns="0" bIns="0" rtlCol="0" anchor="t">
-            <a:normAutofit/>
-          </a:bodyPr>
-          <a:lstStyle/>
-          <a:p>
-            <a:pPr indent="0" marL="0">
-              <a:buNone/>
-            </a:pPr>
-            <a:r>
-              <a:rPr lang="en-US" sz="1150" dirty="0">
-                <a:solidFill>
-                  <a:srgbClr val="212121"/>
-                </a:solidFill>
-                <a:latin typeface="Calibri" pitchFamily="34" charset="0"/>
-                <a:ea typeface="Calibri" pitchFamily="34" charset="-122"/>
-                <a:cs typeface="Calibri" pitchFamily="34" charset="-120"/>
-              </a:rPr>
-              <a:t>Agent forwards the response format through the client</a:t>
-            </a:r>
-            <a:endParaRPr lang="en-US" sz="1150" dirty="0"/>
-          </a:p>
-        </p:txBody>
-      </p:sp>
-      <p:sp>
-        <p:nvSpPr>
-          <p:cNvPr id="8" name="Shape 6"/>
-          <p:cNvSpPr/>
-          <p:nvPr/>
-        </p:nvSpPr>
-        <p:spPr>
-          <a:xfrm>
-            <a:off x="4672584" y="1078992"/>
-            <a:ext cx="4105656" cy="1655064"/>
-          </a:xfrm>
-          <a:prstGeom prst="roundRect">
-            <a:avLst>
-              <a:gd name="adj" fmla="val 3315"/>
-            </a:avLst>
-          </a:prstGeom>
-          <a:solidFill>
-            <a:srgbClr val="F3F4F6"/>
-          </a:solidFill>
-          <a:ln w="10160">
-            <a:solidFill>
-              <a:srgbClr val="D1D5DB"/>
-            </a:solidFill>
-            <a:prstDash val="solid"/>
-          </a:ln>
-        </p:spPr>
-      </p:sp>
-      <p:sp>
-        <p:nvSpPr>
-          <p:cNvPr id="9" name="Text 7"/>
-          <p:cNvSpPr/>
-          <p:nvPr/>
-        </p:nvSpPr>
-        <p:spPr>
-          <a:xfrm>
-            <a:off x="4818888" y="1197864"/>
-            <a:ext cx="3813048" cy="310896"/>
-          </a:xfrm>
-          <a:prstGeom prst="rect">
-            <a:avLst/>
-          </a:prstGeom>
-          <a:noFill/>
-          <a:ln/>
-        </p:spPr>
-        <p:txBody>
-          <a:bodyPr wrap="square" lIns="0" tIns="0" rIns="0" bIns="0" rtlCol="0" anchor="ctr">
-            <a:normAutofit/>
-          </a:bodyPr>
-          <a:lstStyle/>
-          <a:p>
-            <a:pPr indent="0" marL="0">
-              <a:buNone/>
-            </a:pPr>
-            <a:r>
-              <a:rPr lang="en-US" sz="1500" b="1" dirty="0">
-                <a:solidFill>
-                  <a:srgbClr val="1E2761"/>
-                </a:solidFill>
-                <a:latin typeface="Calibri" pitchFamily="34" charset="0"/>
-                <a:ea typeface="Calibri" pitchFamily="34" charset="-122"/>
-                <a:cs typeface="Calibri" pitchFamily="34" charset="-120"/>
-              </a:rPr>
-              <a:t>Client</a:t>
-            </a:r>
-            <a:endParaRPr lang="en-US" sz="1500" dirty="0"/>
-          </a:p>
-        </p:txBody>
-      </p:sp>
-      <p:sp>
-        <p:nvSpPr>
-          <p:cNvPr id="10" name="Text 8"/>
-          <p:cNvSpPr/>
-          <p:nvPr/>
-        </p:nvSpPr>
-        <p:spPr>
-          <a:xfrm>
-            <a:off x="4818888" y="1581912"/>
-            <a:ext cx="3813048" cy="1033272"/>
-          </a:xfrm>
-          <a:prstGeom prst="rect">
-            <a:avLst/>
-          </a:prstGeom>
-          <a:noFill/>
-          <a:ln/>
-        </p:spPr>
-        <p:txBody>
-          <a:bodyPr wrap="square" lIns="0" tIns="0" rIns="0" bIns="0" rtlCol="0" anchor="t">
-            <a:normAutofit/>
-          </a:bodyPr>
-          <a:lstStyle/>
-          <a:p>
-            <a:pPr indent="0" marL="0">
-              <a:buNone/>
-            </a:pPr>
-            <a:r>
-              <a:rPr lang="en-US" sz="1150" dirty="0">
-                <a:solidFill>
-                  <a:srgbClr val="212121"/>
-                </a:solidFill>
-                <a:latin typeface="Calibri" pitchFamily="34" charset="0"/>
-                <a:ea typeface="Calibri" pitchFamily="34" charset="-122"/>
-                <a:cs typeface="Calibri" pitchFamily="34" charset="-120"/>
-              </a:rPr>
-              <a:t>Must implement compatible structured-output behavior</a:t>
-            </a:r>
-            <a:endParaRPr lang="en-US" sz="1150" dirty="0"/>
-          </a:p>
-        </p:txBody>
-      </p:sp>
-      <p:sp>
-        <p:nvSpPr>
-          <p:cNvPr id="11" name="Shape 9"/>
-          <p:cNvSpPr/>
-          <p:nvPr/>
-        </p:nvSpPr>
-        <p:spPr>
-          <a:xfrm>
-            <a:off x="365760" y="2935224"/>
-            <a:ext cx="4105656" cy="1655064"/>
-          </a:xfrm>
-          <a:prstGeom prst="roundRect">
-            <a:avLst>
-              <a:gd name="adj" fmla="val 3315"/>
-            </a:avLst>
-          </a:prstGeom>
-          <a:solidFill>
-            <a:srgbClr val="F3F4F6"/>
-          </a:solidFill>
-          <a:ln w="10160">
-            <a:solidFill>
-              <a:srgbClr val="D1D5DB"/>
-            </a:solidFill>
-            <a:prstDash val="solid"/>
-          </a:ln>
-        </p:spPr>
-      </p:sp>
-      <p:sp>
-        <p:nvSpPr>
-          <p:cNvPr id="12" name="Text 10"/>
-          <p:cNvSpPr/>
-          <p:nvPr/>
-        </p:nvSpPr>
-        <p:spPr>
-          <a:xfrm>
-            <a:off x="512064" y="3054096"/>
-            <a:ext cx="3813048" cy="310896"/>
-          </a:xfrm>
-          <a:prstGeom prst="rect">
-            <a:avLst/>
-          </a:prstGeom>
-          <a:noFill/>
-          <a:ln/>
-        </p:spPr>
-        <p:txBody>
-          <a:bodyPr wrap="square" lIns="0" tIns="0" rIns="0" bIns="0" rtlCol="0" anchor="ctr">
-            <a:normAutofit/>
-          </a:bodyPr>
-          <a:lstStyle/>
-          <a:p>
-            <a:pPr indent="0" marL="0">
-              <a:buNone/>
-            </a:pPr>
-            <a:r>
-              <a:rPr lang="en-US" sz="1500" b="1" dirty="0">
-                <a:solidFill>
-                  <a:srgbClr val="1E2761"/>
-                </a:solidFill>
-                <a:latin typeface="Calibri" pitchFamily="34" charset="0"/>
-                <a:ea typeface="Calibri" pitchFamily="34" charset="-122"/>
-                <a:cs typeface="Calibri" pitchFamily="34" charset="-120"/>
-              </a:rPr>
-              <a:t>Model</a:t>
-            </a:r>
-            <a:endParaRPr lang="en-US" sz="1500" dirty="0"/>
-          </a:p>
-        </p:txBody>
-      </p:sp>
-      <p:sp>
-        <p:nvSpPr>
-          <p:cNvPr id="13" name="Text 11"/>
-          <p:cNvSpPr/>
-          <p:nvPr/>
-        </p:nvSpPr>
-        <p:spPr>
-          <a:xfrm>
-            <a:off x="512064" y="3438144"/>
-            <a:ext cx="3813048" cy="1033272"/>
-          </a:xfrm>
-          <a:prstGeom prst="rect">
-            <a:avLst/>
-          </a:prstGeom>
-          <a:noFill/>
-          <a:ln/>
-        </p:spPr>
-        <p:txBody>
-          <a:bodyPr wrap="square" lIns="0" tIns="0" rIns="0" bIns="0" rtlCol="0" anchor="t">
-            <a:normAutofit/>
-          </a:bodyPr>
-          <a:lstStyle/>
-          <a:p>
-            <a:pPr indent="0" marL="0">
-              <a:buNone/>
-            </a:pPr>
-            <a:r>
-              <a:rPr lang="en-US" sz="1150" dirty="0">
-                <a:solidFill>
-                  <a:srgbClr val="212121"/>
-                </a:solidFill>
-                <a:latin typeface="Calibri" pitchFamily="34" charset="0"/>
-                <a:ea typeface="Calibri" pitchFamily="34" charset="-122"/>
-                <a:cs typeface="Calibri" pitchFamily="34" charset="-120"/>
-              </a:rPr>
-              <a:t>Must support the requested response format</a:t>
-            </a:r>
-            <a:endParaRPr lang="en-US" sz="1150" dirty="0"/>
-          </a:p>
-        </p:txBody>
-      </p:sp>
-      <p:sp>
-        <p:nvSpPr>
-          <p:cNvPr id="14" name="Shape 12"/>
-          <p:cNvSpPr/>
-          <p:nvPr/>
-        </p:nvSpPr>
-        <p:spPr>
-          <a:xfrm>
-            <a:off x="4672584" y="2935224"/>
-            <a:ext cx="4105656" cy="1655064"/>
-          </a:xfrm>
-          <a:prstGeom prst="roundRect">
-            <a:avLst>
-              <a:gd name="adj" fmla="val 3315"/>
-            </a:avLst>
-          </a:prstGeom>
-          <a:solidFill>
-            <a:srgbClr val="F3F4F6"/>
-          </a:solidFill>
-          <a:ln w="10160">
-            <a:solidFill>
-              <a:srgbClr val="D1D5DB"/>
-            </a:solidFill>
-            <a:prstDash val="solid"/>
-          </a:ln>
-        </p:spPr>
-      </p:sp>
-      <p:sp>
-        <p:nvSpPr>
-          <p:cNvPr id="15" name="Text 13"/>
-          <p:cNvSpPr/>
-          <p:nvPr/>
-        </p:nvSpPr>
-        <p:spPr>
-          <a:xfrm>
-            <a:off x="4818888" y="3054096"/>
-            <a:ext cx="3813048" cy="310896"/>
-          </a:xfrm>
-          <a:prstGeom prst="rect">
-            <a:avLst/>
-          </a:prstGeom>
-          <a:noFill/>
-          <a:ln/>
-        </p:spPr>
-        <p:txBody>
-          <a:bodyPr wrap="square" lIns="0" tIns="0" rIns="0" bIns="0" rtlCol="0" anchor="ctr">
-            <a:normAutofit/>
-          </a:bodyPr>
-          <a:lstStyle/>
-          <a:p>
-            <a:pPr indent="0" marL="0">
-              <a:buNone/>
-            </a:pPr>
-            <a:r>
-              <a:rPr lang="en-US" sz="1500" b="1" dirty="0">
-                <a:solidFill>
-                  <a:srgbClr val="1E2761"/>
-                </a:solidFill>
-                <a:latin typeface="Calibri" pitchFamily="34" charset="0"/>
-                <a:ea typeface="Calibri" pitchFamily="34" charset="-122"/>
-                <a:cs typeface="Calibri" pitchFamily="34" charset="-120"/>
-              </a:rPr>
-              <a:t>Practice</a:t>
-            </a:r>
-            <a:endParaRPr lang="en-US" sz="1500" dirty="0"/>
-          </a:p>
-        </p:txBody>
-      </p:sp>
-      <p:sp>
-        <p:nvSpPr>
-          <p:cNvPr id="16" name="Text 14"/>
-          <p:cNvSpPr/>
-          <p:nvPr/>
-        </p:nvSpPr>
-        <p:spPr>
-          <a:xfrm>
-            <a:off x="4818888" y="3438144"/>
-            <a:ext cx="3813048" cy="1033272"/>
-          </a:xfrm>
-          <a:prstGeom prst="rect">
-            <a:avLst/>
-          </a:prstGeom>
-          <a:noFill/>
-          <a:ln/>
-        </p:spPr>
-        <p:txBody>
-          <a:bodyPr wrap="square" lIns="0" tIns="0" rIns="0" bIns="0" rtlCol="0" anchor="t">
-            <a:normAutofit/>
-          </a:bodyPr>
-          <a:lstStyle/>
-          <a:p>
-            <a:pPr indent="0" marL="0">
-              <a:buNone/>
-            </a:pPr>
-            <a:r>
-              <a:rPr lang="en-US" sz="1150" dirty="0">
-                <a:solidFill>
-                  <a:srgbClr val="212121"/>
-                </a:solidFill>
-                <a:latin typeface="Calibri" pitchFamily="34" charset="0"/>
-                <a:ea typeface="Calibri" pitchFamily="34" charset="-122"/>
-                <a:cs typeface="Calibri" pitchFamily="34" charset="-120"/>
-              </a:rPr>
-              <a:t>Test the exact deployment and handle invalid values</a:t>
-            </a:r>
-            <a:endParaRPr lang="en-US" sz="1150" dirty="0"/>
-          </a:p>
-        </p:txBody>
-      </p:sp>
-      <p:sp>
-        <p:nvSpPr>
-          <p:cNvPr id="17" name="Shape 15"/>
-          <p:cNvSpPr/>
-          <p:nvPr/>
-        </p:nvSpPr>
-        <p:spPr>
-          <a:xfrm>
-            <a:off x="365760" y="4773168"/>
-            <a:ext cx="8412480" cy="0"/>
-          </a:xfrm>
-          <a:prstGeom prst="line">
-            <a:avLst/>
-          </a:prstGeom>
-          <a:noFill/>
-          <a:ln w="6350">
-            <a:solidFill>
-              <a:srgbClr val="D1D5DB"/>
-            </a:solidFill>
-            <a:prstDash val="solid"/>
-          </a:ln>
-        </p:spPr>
-      </p:sp>
-      <p:sp>
-        <p:nvSpPr>
-          <p:cNvPr id="18" name="Text 16"/>
-          <p:cNvSpPr/>
-          <p:nvPr/>
-        </p:nvSpPr>
-        <p:spPr>
-          <a:xfrm>
-            <a:off x="384048" y="4818888"/>
-            <a:ext cx="8275320" cy="182880"/>
-          </a:xfrm>
-          <a:prstGeom prst="rect">
-            <a:avLst/>
-          </a:prstGeom>
-          <a:noFill/>
-          <a:ln/>
-        </p:spPr>
-        <p:txBody>
-          <a:bodyPr wrap="square" lIns="0" tIns="0" rIns="0" bIns="0" rtlCol="0" anchor="ctr">
-            <a:normAutofit/>
-          </a:bodyPr>
-          <a:lstStyle/>
-          <a:p>
-            <a:pPr indent="0" marL="0">
-              <a:buNone/>
-            </a:pPr>
-            <a:r>
-              <a:rPr lang="en-US" sz="820" dirty="0">
-                <a:solidFill>
-                  <a:srgbClr val="6B7280"/>
-                </a:solidFill>
-                <a:latin typeface="Calibri" pitchFamily="34" charset="0"/>
-                <a:ea typeface="Calibri" pitchFamily="34" charset="-122"/>
-                <a:cs typeface="Calibri" pitchFamily="34" charset="-120"/>
-              </a:rPr>
-              <a:t>Source: https://learn.microsoft.com/en-us/agent-framework/agents/structured-outputs?tabs=python  ·  +1 in notes</a:t>
-            </a:r>
-            <a:endParaRPr lang="en-US" sz="820" dirty="0"/>
-          </a:p>
-        </p:txBody>
-      </p:sp>
-    </p:spTree>
-  </p:cSld>
-  <p:clrMapOvr>
-    <a:masterClrMapping/>
-  </p:clrMapOvr>
-</p:sld>
-</file>
-
-<file path=ppt/slides/slide13.xml><?xml version="1.0" encoding="utf-8"?>
-<p:sld xmlns:a="http://schemas.openxmlformats.org/drawingml/2006/main" xmlns:r="http://schemas.openxmlformats.org/officeDocument/2006/relationships" xmlns:p="http://schemas.openxmlformats.org/presentationml/2006/main">
-  <p:cSld name="Slide 13">
-    <p:bg>
-      <p:bgPr>
-        <a:solidFill>
-          <a:srgbClr val="FFFFFF"/>
-        </a:solidFill>
-      </p:bgPr>
-    </p:bg>
-    <p:spTree>
-      <p:nvGrpSpPr>
-        <p:cNvPr id="1" name=""/>
-        <p:cNvGrpSpPr/>
-        <p:nvPr/>
-      </p:nvGrpSpPr>
-      <p:grpSpPr>
-        <a:xfrm>
-          <a:off x="0" y="0"/>
-          <a:ext cx="0" cy="0"/>
-          <a:chOff x="0" y="0"/>
-          <a:chExt cx="0" cy="0"/>
-        </a:xfrm>
-      </p:grpSpPr>
-      <p:sp>
-        <p:nvSpPr>
-          <p:cNvPr id="2" name="Shape 0"/>
-          <p:cNvSpPr/>
-          <p:nvPr/>
-        </p:nvSpPr>
-        <p:spPr>
-          <a:xfrm>
-            <a:off x="0" y="0"/>
-            <a:ext cx="54864" cy="5143500"/>
-          </a:xfrm>
-          <a:prstGeom prst="rect">
-            <a:avLst/>
-          </a:prstGeom>
-          <a:solidFill>
-            <a:srgbClr val="1E2761"/>
-          </a:solidFill>
-          <a:ln/>
-        </p:spPr>
-      </p:sp>
-      <p:sp>
-        <p:nvSpPr>
-          <p:cNvPr id="3" name="Text 1"/>
-          <p:cNvSpPr/>
-          <p:nvPr/>
-        </p:nvSpPr>
-        <p:spPr>
-          <a:xfrm>
-            <a:off x="5486400" y="256032"/>
-            <a:ext cx="3337560" cy="228600"/>
-          </a:xfrm>
-          <a:prstGeom prst="rect">
-            <a:avLst/>
-          </a:prstGeom>
-          <a:noFill/>
-          <a:ln/>
-        </p:spPr>
-        <p:txBody>
-          <a:bodyPr wrap="square" lIns="0" tIns="0" rIns="0" bIns="0" rtlCol="0" anchor="ctr">
-            <a:normAutofit/>
-          </a:bodyPr>
-          <a:lstStyle/>
-          <a:p>
-            <a:pPr algn="r" indent="0" marL="0">
-              <a:buNone/>
-            </a:pPr>
-            <a:r>
-              <a:rPr lang="en-US" sz="950" dirty="0">
-                <a:solidFill>
-                  <a:srgbClr val="6B7280"/>
-                </a:solidFill>
-                <a:latin typeface="Calibri" pitchFamily="34" charset="0"/>
-                <a:ea typeface="Calibri" pitchFamily="34" charset="-122"/>
-                <a:cs typeface="Calibri" pitchFamily="34" charset="-120"/>
-              </a:rPr>
-              <a:t>Day 3 · Module 2</a:t>
-            </a:r>
-            <a:endParaRPr lang="en-US" sz="950" dirty="0"/>
-          </a:p>
-        </p:txBody>
-      </p:sp>
-      <p:sp>
-        <p:nvSpPr>
-          <p:cNvPr id="4" name="Text 2"/>
-          <p:cNvSpPr/>
-          <p:nvPr/>
-        </p:nvSpPr>
-        <p:spPr>
-          <a:xfrm>
-            <a:off x="365760" y="310896"/>
-            <a:ext cx="6583680" cy="603504"/>
-          </a:xfrm>
-          <a:prstGeom prst="rect">
-            <a:avLst/>
-          </a:prstGeom>
-          <a:noFill/>
-          <a:ln/>
-        </p:spPr>
-        <p:txBody>
-          <a:bodyPr wrap="square" lIns="0" tIns="0" rIns="0" bIns="0" rtlCol="0" anchor="ctr">
-            <a:normAutofit/>
-          </a:bodyPr>
-          <a:lstStyle/>
-          <a:p>
-            <a:pPr indent="0" marL="0">
-              <a:buNone/>
-            </a:pPr>
-            <a:r>
-              <a:rPr lang="en-US" sz="2800" b="1" dirty="0">
-                <a:solidFill>
-                  <a:srgbClr val="1E2761"/>
-                </a:solidFill>
-                <a:latin typeface="Calibri" pitchFamily="34" charset="0"/>
-                <a:ea typeface="Calibri" pitchFamily="34" charset="-122"/>
-                <a:cs typeface="Calibri" pitchFamily="34" charset="-120"/>
-              </a:rPr>
               <a:t>Choose the response contract</a:t>
             </a:r>
             <a:endParaRPr lang="en-US" sz="2800" dirty="0"/>
@@ -3880,7 +2615,7 @@
       </p:sp>
       <p:graphicFrame>
         <p:nvGraphicFramePr>
-          <p:cNvPr id="14" name="Table 0"/>
+          <p:cNvPr id="12" name="Table 0"/>
           <p:cNvGraphicFramePr>
             <a:graphicFrameLocks noGrp="1"/>
           </p:cNvGraphicFramePr>
@@ -4808,9 +3543,9 @@
 </p:sld>
 </file>
 
-<file path=ppt/slides/slide14.xml><?xml version="1.0" encoding="utf-8"?>
+<file path=ppt/slides/slide12.xml><?xml version="1.0" encoding="utf-8"?>
 <p:sld xmlns:a="http://schemas.openxmlformats.org/drawingml/2006/main" xmlns:r="http://schemas.openxmlformats.org/officeDocument/2006/relationships" xmlns:p="http://schemas.openxmlformats.org/presentationml/2006/main">
-  <p:cSld name="Slide 14">
+  <p:cSld name="Slide 12">
     <p:bg>
       <p:bgPr>
         <a:solidFill>
@@ -5449,7 +4184,7 @@
             <a:avLst/>
           </a:prstGeom>
           <a:solidFill>
-            <a:srgbClr val="CADCFC"/>
+            <a:srgbClr val="F3F4F6"/>
           </a:solidFill>
           <a:ln w="6350">
             <a:solidFill>
@@ -5759,24 +4494,132 @@
       </p:sp>
       <p:sp>
         <p:nvSpPr>
-          <p:cNvPr id="5" name="Shape 3"/>
+          <p:cNvPr id="5" name="Text 3"/>
           <p:cNvSpPr/>
           <p:nvPr/>
         </p:nvSpPr>
         <p:spPr>
           <a:xfrm>
             <a:off x="365760" y="1078992"/>
-            <a:ext cx="4114800" cy="3493008"/>
-          </a:xfrm>
-          <a:prstGeom prst="roundRect">
+            <a:ext cx="8412480" cy="1097552"/>
+          </a:xfrm>
+          <a:prstGeom prst="rect">
+            <a:avLst/>
+          </a:prstGeom>
+          <a:noFill/>
+          <a:ln/>
+        </p:spPr>
+        <p:txBody>
+          <a:bodyPr wrap="square" lIns="0" tIns="0" rIns="0" bIns="0" rtlCol="0" anchor="t">
+            <a:normAutofit/>
+          </a:bodyPr>
+          <a:lstStyle/>
+          <a:p>
+            <a:pPr marL="342900" indent="-342900">
+              <a:spcAft>
+                <a:spcPts val="1000"/>
+              </a:spcAft>
+              <a:buSzPct val="100000"/>
+              <a:buChar char="•"/>
+            </a:pPr>
+            <a:r>
+              <a:rPr lang="en-US" sz="1400" b="1" dirty="0">
+                <a:solidFill>
+                  <a:srgbClr val="1E2761"/>
+                </a:solidFill>
+                <a:latin typeface="Calibri" pitchFamily="34" charset="0"/>
+                <a:ea typeface="Calibri" pitchFamily="34" charset="-122"/>
+                <a:cs typeface="Calibri" pitchFamily="34" charset="-120"/>
+              </a:rPr>
+              <a:t>Non-streaming</a:t>
+            </a:r>
+            <a:endParaRPr lang="en-US" sz="1400" dirty="0"/>
+          </a:p>
+          <a:p>
+            <a:pPr lvl="1" marL="457200" indent="-228600">
+              <a:spcAft>
+                <a:spcPts val="1000"/>
+              </a:spcAft>
+              <a:buSzPct val="100000"/>
+              <a:buChar char="•"/>
+            </a:pPr>
+            <a:r>
+              <a:rPr lang="en-US" sz="1400" dirty="0">
+                <a:solidFill>
+                  <a:srgbClr val="212121"/>
+                </a:solidFill>
+                <a:latin typeface="Calibri" pitchFamily="34" charset="0"/>
+                <a:ea typeface="Calibri" pitchFamily="34" charset="-122"/>
+                <a:cs typeface="Calibri" pitchFamily="34" charset="-120"/>
+              </a:rPr>
+              <a:t>await agent.run(...)</a:t>
+            </a:r>
+            <a:endParaRPr lang="en-US" sz="1400" dirty="0"/>
+          </a:p>
+          <a:p>
+            <a:pPr lvl="1" marL="457200" indent="-228600">
+              <a:spcAft>
+                <a:spcPts val="1000"/>
+              </a:spcAft>
+              <a:buSzPct val="100000"/>
+              <a:buChar char="•"/>
+            </a:pPr>
+            <a:r>
+              <a:rPr lang="en-US" sz="1400" dirty="0">
+                <a:solidFill>
+                  <a:srgbClr val="212121"/>
+                </a:solidFill>
+                <a:latin typeface="Calibri" pitchFamily="34" charset="0"/>
+                <a:ea typeface="Calibri" pitchFamily="34" charset="-122"/>
+                <a:cs typeface="Calibri" pitchFamily="34" charset="-120"/>
+              </a:rPr>
+              <a:t>Returns AgentResponse</a:t>
+            </a:r>
+            <a:endParaRPr lang="en-US" sz="1400" dirty="0"/>
+          </a:p>
+          <a:p>
+            <a:pPr lvl="1" marL="457200" indent="-228600">
+              <a:spcAft>
+                <a:spcPts val="1000"/>
+              </a:spcAft>
+              <a:buSzPct val="100000"/>
+              <a:buChar char="•"/>
+            </a:pPr>
+            <a:r>
+              <a:rPr lang="en-US" sz="1400" dirty="0">
+                <a:solidFill>
+                  <a:srgbClr val="212121"/>
+                </a:solidFill>
+                <a:latin typeface="Calibri" pitchFamily="34" charset="0"/>
+                <a:ea typeface="Calibri" pitchFamily="34" charset="-122"/>
+                <a:cs typeface="Calibri" pitchFamily="34" charset="-120"/>
+              </a:rPr>
+              <a:t>Read .text, .value, and typed contents</a:t>
+            </a:r>
+            <a:endParaRPr lang="en-US" sz="1400" dirty="0"/>
+          </a:p>
+        </p:txBody>
+      </p:sp>
+      <p:sp>
+        <p:nvSpPr>
+          <p:cNvPr id="6" name="Shape 4"/>
+          <p:cNvSpPr/>
+          <p:nvPr/>
+        </p:nvSpPr>
+        <p:spPr>
+          <a:xfrm>
+            <a:off x="365760" y="2304560"/>
+            <a:ext cx="8412480" cy="493057"/>
+          </a:xfrm>
+          <a:prstGeom prst="rect">
             <a:avLst/>
           </a:prstGeom>
           <a:solidFill>
-            <a:srgbClr val="F3F4F6"/>
+            <a:srgbClr val="1D1E22"/>
           </a:solidFill>
-          <a:ln w="11430">
+          <a:ln w="9525">
             <a:solidFill>
-              <a:srgbClr val="D1D5DB"/>
+              <a:srgbClr val="2A2B2E"/>
             </a:solidFill>
             <a:prstDash val="solid"/>
           </a:ln>
@@ -5784,14 +4627,14 @@
       </p:sp>
       <p:sp>
         <p:nvSpPr>
-          <p:cNvPr id="6" name="Text 4"/>
-          <p:cNvSpPr/>
-          <p:nvPr/>
-        </p:nvSpPr>
-        <p:spPr>
-          <a:xfrm>
-            <a:off x="566928" y="1298448"/>
-            <a:ext cx="3712464" cy="411480"/>
+          <p:cNvPr id="7" name="Text 5"/>
+          <p:cNvSpPr/>
+          <p:nvPr/>
+        </p:nvSpPr>
+        <p:spPr>
+          <a:xfrm>
+            <a:off x="502920" y="2396000"/>
+            <a:ext cx="8138160" cy="310177"/>
           </a:xfrm>
           <a:prstGeom prst="rect">
             <a:avLst/>
@@ -5800,7 +4643,7 @@
           <a:ln/>
         </p:spPr>
         <p:txBody>
-          <a:bodyPr wrap="square" lIns="0" tIns="0" rIns="0" bIns="0" rtlCol="0" anchor="ctr">
+          <a:bodyPr wrap="square" lIns="0" tIns="0" rIns="0" bIns="0" rtlCol="0" anchor="t">
             <a:normAutofit/>
           </a:bodyPr>
           <a:lstStyle/>
@@ -5809,7 +4652,125 @@
               <a:buNone/>
             </a:pPr>
             <a:r>
-              <a:rPr lang="en-US" sz="2000" b="1" dirty="0">
+              <a:rPr lang="en-US" sz="1150" dirty="0">
+                <a:solidFill>
+                  <a:srgbClr val="FFFFFF"/>
+                </a:solidFill>
+                <a:latin typeface="Consolas" pitchFamily="34" charset="0"/>
+                <a:ea typeface="Consolas" pitchFamily="34" charset="-122"/>
+                <a:cs typeface="Consolas" pitchFamily="34" charset="-120"/>
+              </a:rPr>
+              <a:t>result = </a:t>
+            </a:r>
+            <a:pPr indent="0" marL="0">
+              <a:buNone/>
+            </a:pPr>
+            <a:r>
+              <a:rPr lang="en-US" sz="1150" dirty="0">
+                <a:solidFill>
+                  <a:srgbClr val="A996B6"/>
+                </a:solidFill>
+                <a:latin typeface="Consolas" pitchFamily="34" charset="0"/>
+                <a:ea typeface="Consolas" pitchFamily="34" charset="-122"/>
+                <a:cs typeface="Consolas" pitchFamily="34" charset="-120"/>
+              </a:rPr>
+              <a:t>await</a:t>
+            </a:r>
+            <a:pPr indent="0" marL="0">
+              <a:buNone/>
+            </a:pPr>
+            <a:r>
+              <a:rPr lang="en-US" sz="1150" dirty="0">
+                <a:solidFill>
+                  <a:srgbClr val="FFFFFF"/>
+                </a:solidFill>
+                <a:latin typeface="Consolas" pitchFamily="34" charset="0"/>
+                <a:ea typeface="Consolas" pitchFamily="34" charset="-122"/>
+                <a:cs typeface="Consolas" pitchFamily="34" charset="-120"/>
+              </a:rPr>
+              <a:t> agent.run(</a:t>
+            </a:r>
+            <a:pPr indent="0" marL="0">
+              <a:buNone/>
+            </a:pPr>
+            <a:r>
+              <a:rPr lang="en-US" sz="1150" dirty="0">
+                <a:solidFill>
+                  <a:srgbClr val="E4C98A"/>
+                </a:solidFill>
+                <a:latin typeface="Consolas" pitchFamily="34" charset="0"/>
+                <a:ea typeface="Consolas" pitchFamily="34" charset="-122"/>
+                <a:cs typeface="Consolas" pitchFamily="34" charset="-120"/>
+              </a:rPr>
+              <a:t>"What is the weather like in Amsterdam?"</a:t>
+            </a:r>
+            <a:pPr indent="0" marL="0">
+              <a:buNone/>
+            </a:pPr>
+            <a:r>
+              <a:rPr lang="en-US" sz="1150" dirty="0">
+                <a:solidFill>
+                  <a:srgbClr val="FFFFFF"/>
+                </a:solidFill>
+                <a:latin typeface="Consolas" pitchFamily="34" charset="0"/>
+                <a:ea typeface="Consolas" pitchFamily="34" charset="-122"/>
+                <a:cs typeface="Consolas" pitchFamily="34" charset="-120"/>
+              </a:rPr>
+              <a:t>)</a:t>
+            </a:r>
+            <a:endParaRPr lang="en-US" sz="1150" dirty="0"/>
+          </a:p>
+          <a:p>
+            <a:pPr indent="0" marL="0">
+              <a:buNone/>
+            </a:pPr>
+            <a:r>
+              <a:rPr lang="en-US" sz="1150" dirty="0">
+                <a:solidFill>
+                  <a:srgbClr val="FFFFFF"/>
+                </a:solidFill>
+                <a:latin typeface="Consolas" pitchFamily="34" charset="0"/>
+                <a:ea typeface="Consolas" pitchFamily="34" charset="-122"/>
+                <a:cs typeface="Consolas" pitchFamily="34" charset="-120"/>
+              </a:rPr>
+              <a:t>print(result.text)</a:t>
+            </a:r>
+            <a:endParaRPr lang="en-US" sz="1150" dirty="0"/>
+          </a:p>
+        </p:txBody>
+      </p:sp>
+      <p:sp>
+        <p:nvSpPr>
+          <p:cNvPr id="8" name="Text 6"/>
+          <p:cNvSpPr/>
+          <p:nvPr/>
+        </p:nvSpPr>
+        <p:spPr>
+          <a:xfrm>
+            <a:off x="365760" y="2925633"/>
+            <a:ext cx="8412480" cy="1097552"/>
+          </a:xfrm>
+          <a:prstGeom prst="rect">
+            <a:avLst/>
+          </a:prstGeom>
+          <a:noFill/>
+          <a:ln/>
+        </p:spPr>
+        <p:txBody>
+          <a:bodyPr wrap="square" lIns="0" tIns="0" rIns="0" bIns="0" rtlCol="0" anchor="t">
+            <a:normAutofit/>
+          </a:bodyPr>
+          <a:lstStyle/>
+          <a:p>
+            <a:pPr marL="342900" indent="-342900">
+              <a:spcAft>
+                <a:spcPts val="1000"/>
+              </a:spcAft>
+              <a:buSzPct val="100000"/>
+              <a:buChar char="•"/>
+            </a:pPr>
+            <a:r>
+              <a:rPr lang="en-US" sz="1400" b="1" dirty="0">
                 <a:solidFill>
                   <a:srgbClr val="1E2761"/>
                 </a:solidFill>
@@ -5817,22 +4778,110 @@
                 <a:ea typeface="Calibri" pitchFamily="34" charset="-122"/>
                 <a:cs typeface="Calibri" pitchFamily="34" charset="-120"/>
               </a:rPr>
-              <a:t>Non-streaming</a:t>
-            </a:r>
-            <a:endParaRPr lang="en-US" sz="2000" dirty="0"/>
+              <a:t>Streaming</a:t>
+            </a:r>
+            <a:endParaRPr lang="en-US" sz="1400" dirty="0"/>
+          </a:p>
+          <a:p>
+            <a:pPr lvl="1" marL="457200" indent="-228600">
+              <a:spcAft>
+                <a:spcPts val="1000"/>
+              </a:spcAft>
+              <a:buSzPct val="100000"/>
+              <a:buChar char="•"/>
+            </a:pPr>
+            <a:r>
+              <a:rPr lang="en-US" sz="1400" dirty="0">
+                <a:solidFill>
+                  <a:srgbClr val="212121"/>
+                </a:solidFill>
+                <a:latin typeface="Calibri" pitchFamily="34" charset="0"/>
+                <a:ea typeface="Calibri" pitchFamily="34" charset="-122"/>
+                <a:cs typeface="Calibri" pitchFamily="34" charset="-120"/>
+              </a:rPr>
+              <a:t>agent.run(..., stream=True)</a:t>
+            </a:r>
+            <a:endParaRPr lang="en-US" sz="1400" dirty="0"/>
+          </a:p>
+          <a:p>
+            <a:pPr lvl="1" marL="457200" indent="-228600">
+              <a:spcAft>
+                <a:spcPts val="1000"/>
+              </a:spcAft>
+              <a:buSzPct val="100000"/>
+              <a:buChar char="•"/>
+            </a:pPr>
+            <a:r>
+              <a:rPr lang="en-US" sz="1400" dirty="0">
+                <a:solidFill>
+                  <a:srgbClr val="212121"/>
+                </a:solidFill>
+                <a:latin typeface="Calibri" pitchFamily="34" charset="0"/>
+                <a:ea typeface="Calibri" pitchFamily="34" charset="-122"/>
+                <a:cs typeface="Calibri" pitchFamily="34" charset="-120"/>
+              </a:rPr>
+              <a:t>Returns ResponseStream</a:t>
+            </a:r>
+            <a:endParaRPr lang="en-US" sz="1400" dirty="0"/>
+          </a:p>
+          <a:p>
+            <a:pPr lvl="1" marL="457200" indent="-228600">
+              <a:spcAft>
+                <a:spcPts val="1000"/>
+              </a:spcAft>
+              <a:buSzPct val="100000"/>
+              <a:buChar char="•"/>
+            </a:pPr>
+            <a:r>
+              <a:rPr lang="en-US" sz="1400" dirty="0">
+                <a:solidFill>
+                  <a:srgbClr val="212121"/>
+                </a:solidFill>
+                <a:latin typeface="Calibri" pitchFamily="34" charset="0"/>
+                <a:ea typeface="Calibri" pitchFamily="34" charset="-122"/>
+                <a:cs typeface="Calibri" pitchFamily="34" charset="-120"/>
+              </a:rPr>
+              <a:t>Iterate AgentResponseUpdate values</a:t>
+            </a:r>
+            <a:endParaRPr lang="en-US" sz="1400" dirty="0"/>
           </a:p>
         </p:txBody>
       </p:sp>
       <p:sp>
         <p:nvSpPr>
-          <p:cNvPr id="7" name="Text 5"/>
-          <p:cNvSpPr/>
-          <p:nvPr/>
-        </p:nvSpPr>
-        <p:spPr>
-          <a:xfrm>
-            <a:off x="594360" y="1828800"/>
-            <a:ext cx="3639312" cy="2395728"/>
+          <p:cNvPr id="9" name="Shape 7"/>
+          <p:cNvSpPr/>
+          <p:nvPr/>
+        </p:nvSpPr>
+        <p:spPr>
+          <a:xfrm>
+            <a:off x="365760" y="4151200"/>
+            <a:ext cx="8412480" cy="557960"/>
+          </a:xfrm>
+          <a:prstGeom prst="rect">
+            <a:avLst/>
+          </a:prstGeom>
+          <a:solidFill>
+            <a:srgbClr val="1D1E22"/>
+          </a:solidFill>
+          <a:ln w="9525">
+            <a:solidFill>
+              <a:srgbClr val="2A2B2E"/>
+            </a:solidFill>
+            <a:prstDash val="solid"/>
+          </a:ln>
+        </p:spPr>
+      </p:sp>
+      <p:sp>
+        <p:nvSpPr>
+          <p:cNvPr id="10" name="Text 8"/>
+          <p:cNvSpPr/>
+          <p:nvPr/>
+        </p:nvSpPr>
+        <p:spPr>
+          <a:xfrm>
+            <a:off x="502920" y="4242640"/>
+            <a:ext cx="8138160" cy="375080"/>
           </a:xfrm>
           <a:prstGeom prst="rect">
             <a:avLst/>
@@ -5841,207 +4890,270 @@
           <a:ln/>
         </p:spPr>
         <p:txBody>
-          <a:bodyPr wrap="square" lIns="381" tIns="381" rIns="381" bIns="381" rtlCol="0" anchor="ctr">
+          <a:bodyPr wrap="square" lIns="0" tIns="0" rIns="0" bIns="0" rtlCol="0" anchor="t">
             <a:normAutofit/>
           </a:bodyPr>
           <a:lstStyle/>
           <a:p>
-            <a:pPr marL="342900" indent="-342900">
-              <a:buSzPct val="100000"/>
-              <a:buChar char="•"/>
-            </a:pPr>
-            <a:r>
-              <a:rPr lang="en-US" sz="1300" dirty="0">
-                <a:solidFill>
-                  <a:srgbClr val="212121"/>
-                </a:solidFill>
-                <a:latin typeface="Calibri" pitchFamily="34" charset="0"/>
-                <a:ea typeface="Calibri" pitchFamily="34" charset="-122"/>
-                <a:cs typeface="Calibri" pitchFamily="34" charset="-120"/>
-              </a:rPr>
-              <a:t>await agent.run(...)</a:t>
-            </a:r>
-            <a:endParaRPr lang="en-US" sz="1300" dirty="0"/>
-          </a:p>
-          <a:p>
-            <a:pPr marL="342900" indent="-342900">
-              <a:buSzPct val="100000"/>
-              <a:buChar char="•"/>
-            </a:pPr>
-            <a:r>
-              <a:rPr lang="en-US" sz="1300" dirty="0">
-                <a:solidFill>
-                  <a:srgbClr val="212121"/>
-                </a:solidFill>
-                <a:latin typeface="Calibri" pitchFamily="34" charset="0"/>
-                <a:ea typeface="Calibri" pitchFamily="34" charset="-122"/>
-                <a:cs typeface="Calibri" pitchFamily="34" charset="-120"/>
-              </a:rPr>
-              <a:t>Returns AgentResponse</a:t>
-            </a:r>
-            <a:endParaRPr lang="en-US" sz="1300" dirty="0"/>
-          </a:p>
-          <a:p>
-            <a:pPr marL="342900" indent="-342900">
-              <a:buSzPct val="100000"/>
-              <a:buChar char="•"/>
-            </a:pPr>
-            <a:r>
-              <a:rPr lang="en-US" sz="1300" dirty="0">
-                <a:solidFill>
-                  <a:srgbClr val="212121"/>
-                </a:solidFill>
-                <a:latin typeface="Calibri" pitchFamily="34" charset="0"/>
-                <a:ea typeface="Calibri" pitchFamily="34" charset="-122"/>
-                <a:cs typeface="Calibri" pitchFamily="34" charset="-120"/>
-              </a:rPr>
-              <a:t>Read .text, .value, and typed contents</a:t>
-            </a:r>
-            <a:endParaRPr lang="en-US" sz="1300" dirty="0"/>
-          </a:p>
-        </p:txBody>
-      </p:sp>
-      <p:sp>
-        <p:nvSpPr>
-          <p:cNvPr id="8" name="Shape 6"/>
-          <p:cNvSpPr/>
-          <p:nvPr/>
-        </p:nvSpPr>
-        <p:spPr>
-          <a:xfrm>
-            <a:off x="4663440" y="1078992"/>
-            <a:ext cx="4114800" cy="3493008"/>
-          </a:xfrm>
-          <a:prstGeom prst="roundRect">
-            <a:avLst/>
-          </a:prstGeom>
-          <a:solidFill>
-            <a:srgbClr val="CADCFC"/>
-          </a:solidFill>
-          <a:ln w="11430">
-            <a:solidFill>
-              <a:srgbClr val="1E2761"/>
-            </a:solidFill>
-            <a:prstDash val="solid"/>
-          </a:ln>
-        </p:spPr>
-      </p:sp>
-      <p:sp>
-        <p:nvSpPr>
-          <p:cNvPr id="9" name="Text 7"/>
-          <p:cNvSpPr/>
-          <p:nvPr/>
-        </p:nvSpPr>
-        <p:spPr>
-          <a:xfrm>
-            <a:off x="4864608" y="1298448"/>
-            <a:ext cx="3712464" cy="411480"/>
-          </a:xfrm>
-          <a:prstGeom prst="rect">
-            <a:avLst/>
-          </a:prstGeom>
-          <a:noFill/>
-          <a:ln/>
-        </p:spPr>
-        <p:txBody>
-          <a:bodyPr wrap="square" lIns="0" tIns="0" rIns="0" bIns="0" rtlCol="0" anchor="ctr">
-            <a:normAutofit/>
-          </a:bodyPr>
-          <a:lstStyle/>
-          <a:p>
-            <a:pPr indent="0" marL="0">
-              <a:buNone/>
-            </a:pPr>
-            <a:r>
-              <a:rPr lang="en-US" sz="2000" b="1" dirty="0">
-                <a:solidFill>
-                  <a:srgbClr val="1E2761"/>
-                </a:solidFill>
-                <a:latin typeface="Calibri" pitchFamily="34" charset="0"/>
-                <a:ea typeface="Calibri" pitchFamily="34" charset="-122"/>
-                <a:cs typeface="Calibri" pitchFamily="34" charset="-120"/>
-              </a:rPr>
-              <a:t>Streaming</a:t>
-            </a:r>
-            <a:endParaRPr lang="en-US" sz="2000" dirty="0"/>
-          </a:p>
-        </p:txBody>
-      </p:sp>
-      <p:sp>
-        <p:nvSpPr>
-          <p:cNvPr id="10" name="Text 8"/>
-          <p:cNvSpPr/>
-          <p:nvPr/>
-        </p:nvSpPr>
-        <p:spPr>
-          <a:xfrm>
-            <a:off x="4892040" y="1828800"/>
-            <a:ext cx="3639312" cy="2395728"/>
-          </a:xfrm>
-          <a:prstGeom prst="rect">
-            <a:avLst/>
-          </a:prstGeom>
-          <a:noFill/>
-          <a:ln/>
-        </p:spPr>
-        <p:txBody>
-          <a:bodyPr wrap="square" lIns="381" tIns="381" rIns="381" bIns="381" rtlCol="0" anchor="ctr">
-            <a:normAutofit/>
-          </a:bodyPr>
-          <a:lstStyle/>
-          <a:p>
-            <a:pPr marL="342900" indent="-342900">
-              <a:buSzPct val="100000"/>
-              <a:buChar char="•"/>
-            </a:pPr>
-            <a:r>
-              <a:rPr lang="en-US" sz="1300" dirty="0">
-                <a:solidFill>
-                  <a:srgbClr val="212121"/>
-                </a:solidFill>
-                <a:latin typeface="Calibri" pitchFamily="34" charset="0"/>
-                <a:ea typeface="Calibri" pitchFamily="34" charset="-122"/>
-                <a:cs typeface="Calibri" pitchFamily="34" charset="-120"/>
-              </a:rPr>
-              <a:t>agent.run(..., stream=True)</a:t>
-            </a:r>
-            <a:endParaRPr lang="en-US" sz="1300" dirty="0"/>
-          </a:p>
-          <a:p>
-            <a:pPr marL="342900" indent="-342900">
-              <a:buSzPct val="100000"/>
-              <a:buChar char="•"/>
-            </a:pPr>
-            <a:r>
-              <a:rPr lang="en-US" sz="1300" dirty="0">
-                <a:solidFill>
-                  <a:srgbClr val="212121"/>
-                </a:solidFill>
-                <a:latin typeface="Calibri" pitchFamily="34" charset="0"/>
-                <a:ea typeface="Calibri" pitchFamily="34" charset="-122"/>
-                <a:cs typeface="Calibri" pitchFamily="34" charset="-120"/>
-              </a:rPr>
-              <a:t>Returns ResponseStream</a:t>
-            </a:r>
-            <a:endParaRPr lang="en-US" sz="1300" dirty="0"/>
-          </a:p>
-          <a:p>
-            <a:pPr marL="342900" indent="-342900">
-              <a:buSzPct val="100000"/>
-              <a:buChar char="•"/>
-            </a:pPr>
-            <a:r>
-              <a:rPr lang="en-US" sz="1300" dirty="0">
-                <a:solidFill>
-                  <a:srgbClr val="212121"/>
-                </a:solidFill>
-                <a:latin typeface="Calibri" pitchFamily="34" charset="0"/>
-                <a:ea typeface="Calibri" pitchFamily="34" charset="-122"/>
-                <a:cs typeface="Calibri" pitchFamily="34" charset="-120"/>
-              </a:rPr>
-              <a:t>Iterate AgentResponseUpdate values</a:t>
-            </a:r>
-            <a:endParaRPr lang="en-US" sz="1300" dirty="0"/>
+            <a:pPr indent="0" marL="0">
+              <a:buNone/>
+            </a:pPr>
+            <a:r>
+              <a:rPr lang="en-US" sz="950" dirty="0">
+                <a:solidFill>
+                  <a:srgbClr val="A996B6"/>
+                </a:solidFill>
+                <a:latin typeface="Consolas" pitchFamily="34" charset="0"/>
+                <a:ea typeface="Consolas" pitchFamily="34" charset="-122"/>
+                <a:cs typeface="Consolas" pitchFamily="34" charset="-120"/>
+              </a:rPr>
+              <a:t>async</a:t>
+            </a:r>
+            <a:pPr indent="0" marL="0">
+              <a:buNone/>
+            </a:pPr>
+            <a:r>
+              <a:rPr lang="en-US" sz="950" dirty="0">
+                <a:solidFill>
+                  <a:srgbClr val="FFFFFF"/>
+                </a:solidFill>
+                <a:latin typeface="Consolas" pitchFamily="34" charset="0"/>
+                <a:ea typeface="Consolas" pitchFamily="34" charset="-122"/>
+                <a:cs typeface="Consolas" pitchFamily="34" charset="-120"/>
+              </a:rPr>
+              <a:t> </a:t>
+            </a:r>
+            <a:pPr indent="0" marL="0">
+              <a:buNone/>
+            </a:pPr>
+            <a:r>
+              <a:rPr lang="en-US" sz="950" dirty="0">
+                <a:solidFill>
+                  <a:srgbClr val="A996B6"/>
+                </a:solidFill>
+                <a:latin typeface="Consolas" pitchFamily="34" charset="0"/>
+                <a:ea typeface="Consolas" pitchFamily="34" charset="-122"/>
+                <a:cs typeface="Consolas" pitchFamily="34" charset="-120"/>
+              </a:rPr>
+              <a:t>for</a:t>
+            </a:r>
+            <a:pPr indent="0" marL="0">
+              <a:buNone/>
+            </a:pPr>
+            <a:r>
+              <a:rPr lang="en-US" sz="950" dirty="0">
+                <a:solidFill>
+                  <a:srgbClr val="FFFFFF"/>
+                </a:solidFill>
+                <a:latin typeface="Consolas" pitchFamily="34" charset="0"/>
+                <a:ea typeface="Consolas" pitchFamily="34" charset="-122"/>
+                <a:cs typeface="Consolas" pitchFamily="34" charset="-120"/>
+              </a:rPr>
+              <a:t> update </a:t>
+            </a:r>
+            <a:pPr indent="0" marL="0">
+              <a:buNone/>
+            </a:pPr>
+            <a:r>
+              <a:rPr lang="en-US" sz="950" dirty="0">
+                <a:solidFill>
+                  <a:srgbClr val="A996B6"/>
+                </a:solidFill>
+                <a:latin typeface="Consolas" pitchFamily="34" charset="0"/>
+                <a:ea typeface="Consolas" pitchFamily="34" charset="-122"/>
+                <a:cs typeface="Consolas" pitchFamily="34" charset="-120"/>
+              </a:rPr>
+              <a:t>in</a:t>
+            </a:r>
+            <a:pPr indent="0" marL="0">
+              <a:buNone/>
+            </a:pPr>
+            <a:r>
+              <a:rPr lang="en-US" sz="950" dirty="0">
+                <a:solidFill>
+                  <a:srgbClr val="FFFFFF"/>
+                </a:solidFill>
+                <a:latin typeface="Consolas" pitchFamily="34" charset="0"/>
+                <a:ea typeface="Consolas" pitchFamily="34" charset="-122"/>
+                <a:cs typeface="Consolas" pitchFamily="34" charset="-120"/>
+              </a:rPr>
+              <a:t> agent.run(</a:t>
+            </a:r>
+            <a:pPr indent="0" marL="0">
+              <a:buNone/>
+            </a:pPr>
+            <a:r>
+              <a:rPr lang="en-US" sz="950" dirty="0">
+                <a:solidFill>
+                  <a:srgbClr val="E4C98A"/>
+                </a:solidFill>
+                <a:latin typeface="Consolas" pitchFamily="34" charset="0"/>
+                <a:ea typeface="Consolas" pitchFamily="34" charset="-122"/>
+                <a:cs typeface="Consolas" pitchFamily="34" charset="-120"/>
+              </a:rPr>
+              <a:t>"What is the weather like in Amsterdam?"</a:t>
+            </a:r>
+            <a:pPr indent="0" marL="0">
+              <a:buNone/>
+            </a:pPr>
+            <a:r>
+              <a:rPr lang="en-US" sz="950" dirty="0">
+                <a:solidFill>
+                  <a:srgbClr val="FFFFFF"/>
+                </a:solidFill>
+                <a:latin typeface="Consolas" pitchFamily="34" charset="0"/>
+                <a:ea typeface="Consolas" pitchFamily="34" charset="-122"/>
+                <a:cs typeface="Consolas" pitchFamily="34" charset="-120"/>
+              </a:rPr>
+              <a:t>, stream=</a:t>
+            </a:r>
+            <a:pPr indent="0" marL="0">
+              <a:buNone/>
+            </a:pPr>
+            <a:r>
+              <a:rPr lang="en-US" sz="950" dirty="0">
+                <a:solidFill>
+                  <a:srgbClr val="A996B6"/>
+                </a:solidFill>
+                <a:latin typeface="Consolas" pitchFamily="34" charset="0"/>
+                <a:ea typeface="Consolas" pitchFamily="34" charset="-122"/>
+                <a:cs typeface="Consolas" pitchFamily="34" charset="-120"/>
+              </a:rPr>
+              <a:t>True</a:t>
+            </a:r>
+            <a:pPr indent="0" marL="0">
+              <a:buNone/>
+            </a:pPr>
+            <a:r>
+              <a:rPr lang="en-US" sz="950" dirty="0">
+                <a:solidFill>
+                  <a:srgbClr val="FFFFFF"/>
+                </a:solidFill>
+                <a:latin typeface="Consolas" pitchFamily="34" charset="0"/>
+                <a:ea typeface="Consolas" pitchFamily="34" charset="-122"/>
+                <a:cs typeface="Consolas" pitchFamily="34" charset="-120"/>
+              </a:rPr>
+              <a:t>):</a:t>
+            </a:r>
+            <a:endParaRPr lang="en-US" sz="950" dirty="0"/>
+          </a:p>
+          <a:p>
+            <a:pPr indent="0" marL="0">
+              <a:buNone/>
+            </a:pPr>
+            <a:r>
+              <a:rPr lang="en-US" sz="950" dirty="0">
+                <a:solidFill>
+                  <a:srgbClr val="FFFFFF"/>
+                </a:solidFill>
+                <a:latin typeface="Consolas" pitchFamily="34" charset="0"/>
+                <a:ea typeface="Consolas" pitchFamily="34" charset="-122"/>
+                <a:cs typeface="Consolas" pitchFamily="34" charset="-120"/>
+              </a:rPr>
+              <a:t>    </a:t>
+            </a:r>
+            <a:pPr indent="0" marL="0">
+              <a:buNone/>
+            </a:pPr>
+            <a:r>
+              <a:rPr lang="en-US" sz="950" dirty="0">
+                <a:solidFill>
+                  <a:srgbClr val="A996B6"/>
+                </a:solidFill>
+                <a:latin typeface="Consolas" pitchFamily="34" charset="0"/>
+                <a:ea typeface="Consolas" pitchFamily="34" charset="-122"/>
+                <a:cs typeface="Consolas" pitchFamily="34" charset="-120"/>
+              </a:rPr>
+              <a:t>if</a:t>
+            </a:r>
+            <a:pPr indent="0" marL="0">
+              <a:buNone/>
+            </a:pPr>
+            <a:r>
+              <a:rPr lang="en-US" sz="950" dirty="0">
+                <a:solidFill>
+                  <a:srgbClr val="FFFFFF"/>
+                </a:solidFill>
+                <a:latin typeface="Consolas" pitchFamily="34" charset="0"/>
+                <a:ea typeface="Consolas" pitchFamily="34" charset="-122"/>
+                <a:cs typeface="Consolas" pitchFamily="34" charset="-120"/>
+              </a:rPr>
+              <a:t> update.text:</a:t>
+            </a:r>
+            <a:endParaRPr lang="en-US" sz="950" dirty="0"/>
+          </a:p>
+          <a:p>
+            <a:pPr indent="0" marL="0">
+              <a:buNone/>
+            </a:pPr>
+            <a:r>
+              <a:rPr lang="en-US" sz="950" dirty="0">
+                <a:solidFill>
+                  <a:srgbClr val="FFFFFF"/>
+                </a:solidFill>
+                <a:latin typeface="Consolas" pitchFamily="34" charset="0"/>
+                <a:ea typeface="Consolas" pitchFamily="34" charset="-122"/>
+                <a:cs typeface="Consolas" pitchFamily="34" charset="-120"/>
+              </a:rPr>
+              <a:t>        print(update.text, end=</a:t>
+            </a:r>
+            <a:pPr indent="0" marL="0">
+              <a:buNone/>
+            </a:pPr>
+            <a:r>
+              <a:rPr lang="en-US" sz="950" dirty="0">
+                <a:solidFill>
+                  <a:srgbClr val="E4C98A"/>
+                </a:solidFill>
+                <a:latin typeface="Consolas" pitchFamily="34" charset="0"/>
+                <a:ea typeface="Consolas" pitchFamily="34" charset="-122"/>
+                <a:cs typeface="Consolas" pitchFamily="34" charset="-120"/>
+              </a:rPr>
+              <a:t>""</a:t>
+            </a:r>
+            <a:pPr indent="0" marL="0">
+              <a:buNone/>
+            </a:pPr>
+            <a:r>
+              <a:rPr lang="en-US" sz="950" dirty="0">
+                <a:solidFill>
+                  <a:srgbClr val="FFFFFF"/>
+                </a:solidFill>
+                <a:latin typeface="Consolas" pitchFamily="34" charset="0"/>
+                <a:ea typeface="Consolas" pitchFamily="34" charset="-122"/>
+                <a:cs typeface="Consolas" pitchFamily="34" charset="-120"/>
+              </a:rPr>
+              <a:t>, flush=</a:t>
+            </a:r>
+            <a:pPr indent="0" marL="0">
+              <a:buNone/>
+            </a:pPr>
+            <a:r>
+              <a:rPr lang="en-US" sz="950" dirty="0">
+                <a:solidFill>
+                  <a:srgbClr val="A996B6"/>
+                </a:solidFill>
+                <a:latin typeface="Consolas" pitchFamily="34" charset="0"/>
+                <a:ea typeface="Consolas" pitchFamily="34" charset="-122"/>
+                <a:cs typeface="Consolas" pitchFamily="34" charset="-120"/>
+              </a:rPr>
+              <a:t>True</a:t>
+            </a:r>
+            <a:pPr indent="0" marL="0">
+              <a:buNone/>
+            </a:pPr>
+            <a:r>
+              <a:rPr lang="en-US" sz="950" dirty="0">
+                <a:solidFill>
+                  <a:srgbClr val="FFFFFF"/>
+                </a:solidFill>
+                <a:latin typeface="Consolas" pitchFamily="34" charset="0"/>
+                <a:ea typeface="Consolas" pitchFamily="34" charset="-122"/>
+                <a:cs typeface="Consolas" pitchFamily="34" charset="-120"/>
+              </a:rPr>
+              <a:t>)</a:t>
+            </a:r>
+            <a:endParaRPr lang="en-US" sz="950" dirty="0"/>
           </a:p>
         </p:txBody>
       </p:sp>
@@ -6245,141 +5357,14 @@
       </p:sp>
       <p:sp>
         <p:nvSpPr>
-          <p:cNvPr id="5" name="Shape 3"/>
-          <p:cNvSpPr/>
-          <p:nvPr/>
-        </p:nvSpPr>
-        <p:spPr>
-          <a:xfrm>
-            <a:off x="365760" y="1216152"/>
-            <a:ext cx="2633472" cy="2148840"/>
-          </a:xfrm>
-          <a:prstGeom prst="roundRect">
-            <a:avLst>
-              <a:gd name="adj" fmla="val 2553"/>
-            </a:avLst>
-          </a:prstGeom>
-          <a:solidFill>
-            <a:srgbClr val="CADCFC"/>
-          </a:solidFill>
-          <a:ln w="10160">
-            <a:solidFill>
-              <a:srgbClr val="1E2761"/>
-            </a:solidFill>
-            <a:prstDash val="solid"/>
-          </a:ln>
-        </p:spPr>
-      </p:sp>
-      <p:sp>
-        <p:nvSpPr>
-          <p:cNvPr id="6" name="Shape 4"/>
-          <p:cNvSpPr/>
-          <p:nvPr/>
-        </p:nvSpPr>
-        <p:spPr>
-          <a:xfrm>
-            <a:off x="475488" y="1335024"/>
-            <a:ext cx="320040" cy="320040"/>
-          </a:xfrm>
-          <a:prstGeom prst="ellipse">
-            <a:avLst/>
-          </a:prstGeom>
-          <a:solidFill>
-            <a:srgbClr val="1E2761"/>
-          </a:solidFill>
-          <a:ln/>
-        </p:spPr>
-      </p:sp>
-      <p:sp>
-        <p:nvSpPr>
-          <p:cNvPr id="7" name="Text 5"/>
-          <p:cNvSpPr/>
-          <p:nvPr/>
-        </p:nvSpPr>
-        <p:spPr>
-          <a:xfrm>
-            <a:off x="475488" y="1385316"/>
-            <a:ext cx="320040" cy="146304"/>
-          </a:xfrm>
-          <a:prstGeom prst="rect">
-            <a:avLst/>
-          </a:prstGeom>
-          <a:noFill/>
-          <a:ln/>
-        </p:spPr>
-        <p:txBody>
-          <a:bodyPr wrap="square" lIns="0" tIns="0" rIns="0" bIns="0" rtlCol="0" anchor="ctr"/>
-          <a:lstStyle/>
-          <a:p>
-            <a:pPr algn="ctr" indent="0" marL="0">
-              <a:buNone/>
-            </a:pPr>
-            <a:r>
-              <a:rPr lang="en-US" sz="900" b="1" dirty="0">
-                <a:solidFill>
-                  <a:srgbClr val="FFFFFF"/>
-                </a:solidFill>
-                <a:latin typeface="Calibri" pitchFamily="34" charset="0"/>
-                <a:ea typeface="Calibri" pitchFamily="34" charset="-122"/>
-                <a:cs typeface="Calibri" pitchFamily="34" charset="-120"/>
-              </a:rPr>
-              <a:t>1</a:t>
-            </a:r>
-            <a:endParaRPr lang="en-US" sz="900" dirty="0"/>
-          </a:p>
-        </p:txBody>
-      </p:sp>
-      <p:sp>
-        <p:nvSpPr>
-          <p:cNvPr id="8" name="Text 6"/>
-          <p:cNvSpPr/>
-          <p:nvPr/>
-        </p:nvSpPr>
-        <p:spPr>
-          <a:xfrm>
-            <a:off x="896112" y="1335024"/>
-            <a:ext cx="1975104" cy="310896"/>
-          </a:xfrm>
-          <a:prstGeom prst="rect">
-            <a:avLst/>
-          </a:prstGeom>
-          <a:noFill/>
-          <a:ln/>
-        </p:spPr>
-        <p:txBody>
-          <a:bodyPr wrap="square" lIns="0" tIns="0" rIns="0" bIns="0" rtlCol="0" anchor="ctr">
-            <a:normAutofit/>
-          </a:bodyPr>
-          <a:lstStyle/>
-          <a:p>
-            <a:pPr indent="0" marL="0">
-              <a:buNone/>
-            </a:pPr>
-            <a:r>
-              <a:rPr lang="en-US" sz="1500" b="1" dirty="0">
-                <a:solidFill>
-                  <a:srgbClr val="1E2761"/>
-                </a:solidFill>
-                <a:latin typeface="Calibri" pitchFamily="34" charset="0"/>
-                <a:ea typeface="Calibri" pitchFamily="34" charset="-122"/>
-                <a:cs typeface="Calibri" pitchFamily="34" charset="-120"/>
-              </a:rPr>
-              <a:t>Iterate only</a:t>
-            </a:r>
-            <a:endParaRPr lang="en-US" sz="1500" dirty="0"/>
-          </a:p>
-        </p:txBody>
-      </p:sp>
-      <p:sp>
-        <p:nvSpPr>
-          <p:cNvPr id="9" name="Text 7"/>
-          <p:cNvSpPr/>
-          <p:nvPr/>
-        </p:nvSpPr>
-        <p:spPr>
-          <a:xfrm>
-            <a:off x="512064" y="1719072"/>
-            <a:ext cx="2340864" cy="1527048"/>
+          <p:cNvPr id="5" name="Text 3"/>
+          <p:cNvSpPr/>
+          <p:nvPr/>
+        </p:nvSpPr>
+        <p:spPr>
+          <a:xfrm>
+            <a:off x="502920" y="1170432"/>
+            <a:ext cx="7955280" cy="3520440"/>
           </a:xfrm>
           <a:prstGeom prst="rect">
             <a:avLst/>
@@ -6393,158 +5378,53 @@
           </a:bodyPr>
           <a:lstStyle/>
           <a:p>
-            <a:pPr indent="0" marL="0">
-              <a:buNone/>
-            </a:pPr>
-            <a:r>
-              <a:rPr lang="en-US" sz="1150" dirty="0">
-                <a:solidFill>
-                  <a:srgbClr val="212121"/>
+            <a:pPr marL="342900" indent="-342900">
+              <a:spcAft>
+                <a:spcPts val="1000"/>
+              </a:spcAft>
+              <a:buSzPct val="100000"/>
+              <a:buChar char="•"/>
+            </a:pPr>
+            <a:r>
+              <a:rPr lang="en-US" sz="1600" b="1" dirty="0">
+                <a:solidFill>
+                  <a:srgbClr val="1E2761"/>
                 </a:solidFill>
                 <a:latin typeface="Calibri" pitchFamily="34" charset="0"/>
                 <a:ea typeface="Calibri" pitchFamily="34" charset="-122"/>
                 <a:cs typeface="Calibri" pitchFamily="34" charset="-120"/>
               </a:rPr>
-              <a:t>Render each update as it arrives</a:t>
-            </a:r>
-            <a:endParaRPr lang="en-US" sz="1150" dirty="0"/>
-          </a:p>
-        </p:txBody>
-      </p:sp>
-      <p:sp>
-        <p:nvSpPr>
-          <p:cNvPr id="10" name="Shape 8"/>
-          <p:cNvSpPr/>
-          <p:nvPr/>
-        </p:nvSpPr>
-        <p:spPr>
-          <a:xfrm>
-            <a:off x="3035808" y="2180844"/>
-            <a:ext cx="164592" cy="219456"/>
-          </a:xfrm>
-          <a:prstGeom prst="chevron">
-            <a:avLst/>
-          </a:prstGeom>
-          <a:solidFill>
-            <a:srgbClr val="E8A87C"/>
-          </a:solidFill>
-          <a:ln/>
-        </p:spPr>
-      </p:sp>
-      <p:sp>
-        <p:nvSpPr>
-          <p:cNvPr id="11" name="Shape 9"/>
-          <p:cNvSpPr/>
-          <p:nvPr/>
-        </p:nvSpPr>
-        <p:spPr>
-          <a:xfrm>
-            <a:off x="3255264" y="1216152"/>
-            <a:ext cx="2633472" cy="2148840"/>
-          </a:xfrm>
-          <a:prstGeom prst="roundRect">
-            <a:avLst>
-              <a:gd name="adj" fmla="val 2553"/>
-            </a:avLst>
-          </a:prstGeom>
-          <a:solidFill>
-            <a:srgbClr val="F3F4F6"/>
-          </a:solidFill>
-          <a:ln w="10160">
-            <a:solidFill>
-              <a:srgbClr val="D1D5DB"/>
-            </a:solidFill>
-            <a:prstDash val="solid"/>
-          </a:ln>
-        </p:spPr>
-      </p:sp>
-      <p:sp>
-        <p:nvSpPr>
-          <p:cNvPr id="12" name="Shape 10"/>
-          <p:cNvSpPr/>
-          <p:nvPr/>
-        </p:nvSpPr>
-        <p:spPr>
-          <a:xfrm>
-            <a:off x="3364992" y="1335024"/>
-            <a:ext cx="320040" cy="320040"/>
-          </a:xfrm>
-          <a:prstGeom prst="ellipse">
-            <a:avLst/>
-          </a:prstGeom>
-          <a:solidFill>
-            <a:srgbClr val="1E2761"/>
-          </a:solidFill>
-          <a:ln/>
-        </p:spPr>
-      </p:sp>
-      <p:sp>
-        <p:nvSpPr>
-          <p:cNvPr id="13" name="Text 11"/>
-          <p:cNvSpPr/>
-          <p:nvPr/>
-        </p:nvSpPr>
-        <p:spPr>
-          <a:xfrm>
-            <a:off x="3364992" y="1385316"/>
-            <a:ext cx="320040" cy="146304"/>
-          </a:xfrm>
-          <a:prstGeom prst="rect">
-            <a:avLst/>
-          </a:prstGeom>
-          <a:noFill/>
-          <a:ln/>
-        </p:spPr>
-        <p:txBody>
-          <a:bodyPr wrap="square" lIns="0" tIns="0" rIns="0" bIns="0" rtlCol="0" anchor="ctr"/>
-          <a:lstStyle/>
-          <a:p>
-            <a:pPr algn="ctr" indent="0" marL="0">
-              <a:buNone/>
-            </a:pPr>
-            <a:r>
-              <a:rPr lang="en-US" sz="900" b="1" dirty="0">
-                <a:solidFill>
-                  <a:srgbClr val="FFFFFF"/>
+              <a:t>Iterate only</a:t>
+            </a:r>
+            <a:pPr indent="0" marL="0">
+              <a:spcAft>
+                <a:spcPts val="1000"/>
+              </a:spcAft>
+              <a:buNone/>
+            </a:pPr>
+            <a:r>
+              <a:rPr lang="en-US" sz="1600" dirty="0">
+                <a:solidFill>
+                  <a:srgbClr val="212121"/>
                 </a:solidFill>
                 <a:latin typeface="Calibri" pitchFamily="34" charset="0"/>
                 <a:ea typeface="Calibri" pitchFamily="34" charset="-122"/>
                 <a:cs typeface="Calibri" pitchFamily="34" charset="-120"/>
               </a:rPr>
-              <a:t>2</a:t>
-            </a:r>
-            <a:endParaRPr lang="en-US" sz="900" dirty="0"/>
-          </a:p>
-        </p:txBody>
-      </p:sp>
-      <p:sp>
-        <p:nvSpPr>
-          <p:cNvPr id="14" name="Text 12"/>
-          <p:cNvSpPr/>
-          <p:nvPr/>
-        </p:nvSpPr>
-        <p:spPr>
-          <a:xfrm>
-            <a:off x="3785616" y="1335024"/>
-            <a:ext cx="1975104" cy="310896"/>
-          </a:xfrm>
-          <a:prstGeom prst="rect">
-            <a:avLst/>
-          </a:prstGeom>
-          <a:noFill/>
-          <a:ln/>
-        </p:spPr>
-        <p:txBody>
-          <a:bodyPr wrap="square" lIns="0" tIns="0" rIns="0" bIns="0" rtlCol="0" anchor="ctr">
-            <a:normAutofit/>
-          </a:bodyPr>
-          <a:lstStyle/>
-          <a:p>
-            <a:pPr indent="0" marL="0">
-              <a:buNone/>
-            </a:pPr>
-            <a:r>
-              <a:rPr lang="en-US" sz="1500" b="1" dirty="0">
+              <a:t>  —  Render each update as it arrives</a:t>
+            </a:r>
+            <a:endParaRPr lang="en-US" sz="1600" dirty="0"/>
+          </a:p>
+          <a:p>
+            <a:pPr marL="342900" indent="-342900">
+              <a:spcAft>
+                <a:spcPts val="1000"/>
+              </a:spcAft>
+              <a:buSzPct val="100000"/>
+              <a:buChar char="•"/>
+            </a:pPr>
+            <a:r>
+              <a:rPr lang="en-US" sz="1600" b="1" dirty="0">
                 <a:solidFill>
                   <a:srgbClr val="1E2761"/>
                 </a:solidFill>
@@ -6552,40 +5432,16 @@
                 <a:ea typeface="Calibri" pitchFamily="34" charset="-122"/>
                 <a:cs typeface="Calibri" pitchFamily="34" charset="-120"/>
               </a:rPr>
-              <a:t>Iterate + finalize</a:t>
-            </a:r>
-            <a:endParaRPr lang="en-US" sz="1500" dirty="0"/>
-          </a:p>
-        </p:txBody>
-      </p:sp>
-      <p:sp>
-        <p:nvSpPr>
-          <p:cNvPr id="15" name="Text 13"/>
-          <p:cNvSpPr/>
-          <p:nvPr/>
-        </p:nvSpPr>
-        <p:spPr>
-          <a:xfrm>
-            <a:off x="3401568" y="1719072"/>
-            <a:ext cx="2340864" cy="1527048"/>
-          </a:xfrm>
-          <a:prstGeom prst="rect">
-            <a:avLst/>
-          </a:prstGeom>
-          <a:noFill/>
-          <a:ln/>
-        </p:spPr>
-        <p:txBody>
-          <a:bodyPr wrap="square" lIns="0" tIns="0" rIns="0" bIns="0" rtlCol="0" anchor="t">
-            <a:normAutofit/>
-          </a:bodyPr>
-          <a:lstStyle/>
-          <a:p>
-            <a:pPr indent="0" marL="0">
-              <a:buNone/>
-            </a:pPr>
-            <a:r>
-              <a:rPr lang="en-US" sz="1150" dirty="0">
+              <a:t>Finalize only</a:t>
+            </a:r>
+            <a:pPr indent="0" marL="0">
+              <a:spcAft>
+                <a:spcPts val="1000"/>
+              </a:spcAft>
+              <a:buNone/>
+            </a:pPr>
+            <a:r>
+              <a:rPr lang="en-US" sz="1600" dirty="0">
                 <a:solidFill>
                   <a:srgbClr val="212121"/>
                 </a:solidFill>
@@ -6593,203 +5449,53 @@
                 <a:ea typeface="Calibri" pitchFamily="34" charset="-122"/>
                 <a:cs typeface="Calibri" pitchFamily="34" charset="-120"/>
               </a:rPr>
-              <a:t>Render updates, then await get_final_response()</a:t>
-            </a:r>
-            <a:endParaRPr lang="en-US" sz="1150" dirty="0"/>
-          </a:p>
-        </p:txBody>
-      </p:sp>
-      <p:sp>
-        <p:nvSpPr>
-          <p:cNvPr id="16" name="Shape 14"/>
-          <p:cNvSpPr/>
-          <p:nvPr/>
-        </p:nvSpPr>
-        <p:spPr>
-          <a:xfrm>
-            <a:off x="5925312" y="2180844"/>
-            <a:ext cx="164592" cy="219456"/>
-          </a:xfrm>
-          <a:prstGeom prst="chevron">
-            <a:avLst/>
-          </a:prstGeom>
-          <a:solidFill>
-            <a:srgbClr val="E8A87C"/>
-          </a:solidFill>
-          <a:ln/>
-        </p:spPr>
-      </p:sp>
-      <p:sp>
-        <p:nvSpPr>
-          <p:cNvPr id="17" name="Shape 15"/>
-          <p:cNvSpPr/>
-          <p:nvPr/>
-        </p:nvSpPr>
-        <p:spPr>
-          <a:xfrm>
-            <a:off x="6144768" y="1216152"/>
-            <a:ext cx="2633472" cy="2148840"/>
-          </a:xfrm>
-          <a:prstGeom prst="roundRect">
-            <a:avLst>
-              <a:gd name="adj" fmla="val 2553"/>
-            </a:avLst>
-          </a:prstGeom>
-          <a:solidFill>
-            <a:srgbClr val="CADCFC"/>
-          </a:solidFill>
-          <a:ln w="10160">
-            <a:solidFill>
-              <a:srgbClr val="1E2761"/>
-            </a:solidFill>
-            <a:prstDash val="solid"/>
-          </a:ln>
-        </p:spPr>
-      </p:sp>
-      <p:sp>
-        <p:nvSpPr>
-          <p:cNvPr id="18" name="Shape 16"/>
-          <p:cNvSpPr/>
-          <p:nvPr/>
-        </p:nvSpPr>
-        <p:spPr>
-          <a:xfrm>
-            <a:off x="6254496" y="1335024"/>
-            <a:ext cx="320040" cy="320040"/>
-          </a:xfrm>
-          <a:prstGeom prst="ellipse">
-            <a:avLst/>
-          </a:prstGeom>
-          <a:solidFill>
-            <a:srgbClr val="1E2761"/>
-          </a:solidFill>
-          <a:ln/>
-        </p:spPr>
-      </p:sp>
-      <p:sp>
-        <p:nvSpPr>
-          <p:cNvPr id="19" name="Text 17"/>
-          <p:cNvSpPr/>
-          <p:nvPr/>
-        </p:nvSpPr>
-        <p:spPr>
-          <a:xfrm>
-            <a:off x="6254496" y="1385316"/>
-            <a:ext cx="320040" cy="146304"/>
-          </a:xfrm>
-          <a:prstGeom prst="rect">
-            <a:avLst/>
-          </a:prstGeom>
-          <a:noFill/>
-          <a:ln/>
-        </p:spPr>
-        <p:txBody>
-          <a:bodyPr wrap="square" lIns="0" tIns="0" rIns="0" bIns="0" rtlCol="0" anchor="ctr"/>
-          <a:lstStyle/>
-          <a:p>
-            <a:pPr algn="ctr" indent="0" marL="0">
-              <a:buNone/>
-            </a:pPr>
-            <a:r>
-              <a:rPr lang="en-US" sz="900" b="1" dirty="0">
-                <a:solidFill>
-                  <a:srgbClr val="FFFFFF"/>
+              <a:t>  —  Skip iteration; finalizer consumes the stream</a:t>
+            </a:r>
+            <a:endParaRPr lang="en-US" sz="1600" dirty="0"/>
+          </a:p>
+          <a:p>
+            <a:pPr marL="342900" indent="-342900">
+              <a:spcAft>
+                <a:spcPts val="1000"/>
+              </a:spcAft>
+              <a:buSzPct val="100000"/>
+              <a:buChar char="•"/>
+            </a:pPr>
+            <a:r>
+              <a:rPr lang="en-US" sz="1600" b="1" dirty="0">
+                <a:solidFill>
+                  <a:srgbClr val="1E2761"/>
                 </a:solidFill>
                 <a:latin typeface="Calibri" pitchFamily="34" charset="0"/>
                 <a:ea typeface="Calibri" pitchFamily="34" charset="-122"/>
                 <a:cs typeface="Calibri" pitchFamily="34" charset="-120"/>
               </a:rPr>
-              <a:t>3</a:t>
-            </a:r>
-            <a:endParaRPr lang="en-US" sz="900" dirty="0"/>
-          </a:p>
-        </p:txBody>
-      </p:sp>
-      <p:sp>
-        <p:nvSpPr>
-          <p:cNvPr id="20" name="Text 18"/>
-          <p:cNvSpPr/>
-          <p:nvPr/>
-        </p:nvSpPr>
-        <p:spPr>
-          <a:xfrm>
-            <a:off x="6675120" y="1335024"/>
-            <a:ext cx="1975104" cy="310896"/>
-          </a:xfrm>
-          <a:prstGeom prst="rect">
-            <a:avLst/>
-          </a:prstGeom>
-          <a:noFill/>
-          <a:ln/>
-        </p:spPr>
-        <p:txBody>
-          <a:bodyPr wrap="square" lIns="0" tIns="0" rIns="0" bIns="0" rtlCol="0" anchor="ctr">
-            <a:normAutofit/>
-          </a:bodyPr>
-          <a:lstStyle/>
-          <a:p>
-            <a:pPr indent="0" marL="0">
-              <a:buNone/>
-            </a:pPr>
-            <a:r>
-              <a:rPr lang="en-US" sz="1500" b="1" dirty="0">
-                <a:solidFill>
-                  <a:srgbClr val="1E2761"/>
+              <a:t>Iterate + finalize</a:t>
+            </a:r>
+            <a:pPr indent="0" marL="0">
+              <a:spcAft>
+                <a:spcPts val="1000"/>
+              </a:spcAft>
+              <a:buNone/>
+            </a:pPr>
+            <a:r>
+              <a:rPr lang="en-US" sz="1600" dirty="0">
+                <a:solidFill>
+                  <a:srgbClr val="212121"/>
                 </a:solidFill>
                 <a:latin typeface="Calibri" pitchFamily="34" charset="0"/>
                 <a:ea typeface="Calibri" pitchFamily="34" charset="-122"/>
                 <a:cs typeface="Calibri" pitchFamily="34" charset="-120"/>
               </a:rPr>
-              <a:t>Finalize only</a:t>
-            </a:r>
-            <a:endParaRPr lang="en-US" sz="1500" dirty="0"/>
+              <a:t>  —  Render updates, then await get_final_response()</a:t>
+            </a:r>
+            <a:endParaRPr lang="en-US" sz="1600" dirty="0"/>
           </a:p>
         </p:txBody>
       </p:sp>
       <p:sp>
         <p:nvSpPr>
-          <p:cNvPr id="21" name="Text 19"/>
-          <p:cNvSpPr/>
-          <p:nvPr/>
-        </p:nvSpPr>
-        <p:spPr>
-          <a:xfrm>
-            <a:off x="6291072" y="1719072"/>
-            <a:ext cx="2340864" cy="1527048"/>
-          </a:xfrm>
-          <a:prstGeom prst="rect">
-            <a:avLst/>
-          </a:prstGeom>
-          <a:noFill/>
-          <a:ln/>
-        </p:spPr>
-        <p:txBody>
-          <a:bodyPr wrap="square" lIns="0" tIns="0" rIns="0" bIns="0" rtlCol="0" anchor="t">
-            <a:normAutofit/>
-          </a:bodyPr>
-          <a:lstStyle/>
-          <a:p>
-            <a:pPr indent="0" marL="0">
-              <a:buNone/>
-            </a:pPr>
-            <a:r>
-              <a:rPr lang="en-US" sz="1150" dirty="0">
-                <a:solidFill>
-                  <a:srgbClr val="212121"/>
-                </a:solidFill>
-                <a:latin typeface="Calibri" pitchFamily="34" charset="0"/>
-                <a:ea typeface="Calibri" pitchFamily="34" charset="-122"/>
-                <a:cs typeface="Calibri" pitchFamily="34" charset="-120"/>
-              </a:rPr>
-              <a:t>Skip iteration; finalizer consumes the stream</a:t>
-            </a:r>
-            <a:endParaRPr lang="en-US" sz="1150" dirty="0"/>
-          </a:p>
-        </p:txBody>
-      </p:sp>
-      <p:sp>
-        <p:nvSpPr>
-          <p:cNvPr id="22" name="Shape 20"/>
+          <p:cNvPr id="6" name="Shape 4"/>
           <p:cNvSpPr/>
           <p:nvPr/>
         </p:nvSpPr>
@@ -6812,7 +5518,7 @@
       </p:sp>
       <p:sp>
         <p:nvSpPr>
-          <p:cNvPr id="23" name="Text 21"/>
+          <p:cNvPr id="7" name="Text 5"/>
           <p:cNvSpPr/>
           <p:nvPr/>
         </p:nvSpPr>
@@ -6987,82 +5693,14 @@
       </p:sp>
       <p:sp>
         <p:nvSpPr>
-          <p:cNvPr id="5" name="Shape 3"/>
+          <p:cNvPr id="5" name="Text 3"/>
           <p:cNvSpPr/>
           <p:nvPr/>
         </p:nvSpPr>
         <p:spPr>
           <a:xfrm>
             <a:off x="365760" y="1078992"/>
-            <a:ext cx="4105656" cy="1655064"/>
-          </a:xfrm>
-          <a:prstGeom prst="roundRect">
-            <a:avLst>
-              <a:gd name="adj" fmla="val 3315"/>
-            </a:avLst>
-          </a:prstGeom>
-          <a:solidFill>
-            <a:srgbClr val="CADCFC"/>
-          </a:solidFill>
-          <a:ln w="10160">
-            <a:solidFill>
-              <a:srgbClr val="1E2761"/>
-            </a:solidFill>
-            <a:prstDash val="solid"/>
-          </a:ln>
-        </p:spPr>
-      </p:sp>
-      <p:sp>
-        <p:nvSpPr>
-          <p:cNvPr id="6" name="Text 4"/>
-          <p:cNvSpPr/>
-          <p:nvPr/>
-        </p:nvSpPr>
-        <p:spPr>
-          <a:xfrm>
-            <a:off x="512064" y="1197864"/>
-            <a:ext cx="3813048" cy="310896"/>
-          </a:xfrm>
-          <a:prstGeom prst="rect">
-            <a:avLst/>
-          </a:prstGeom>
-          <a:noFill/>
-          <a:ln/>
-        </p:spPr>
-        <p:txBody>
-          <a:bodyPr wrap="square" lIns="0" tIns="0" rIns="0" bIns="0" rtlCol="0" anchor="ctr">
-            <a:normAutofit/>
-          </a:bodyPr>
-          <a:lstStyle/>
-          <a:p>
-            <a:pPr indent="0" marL="0">
-              <a:buNone/>
-            </a:pPr>
-            <a:r>
-              <a:rPr lang="en-US" sz="1500" b="1" dirty="0">
-                <a:solidFill>
-                  <a:srgbClr val="1E2761"/>
-                </a:solidFill>
-                <a:latin typeface="Calibri" pitchFamily="34" charset="0"/>
-                <a:ea typeface="Calibri" pitchFamily="34" charset="-122"/>
-                <a:cs typeface="Calibri" pitchFamily="34" charset="-120"/>
-              </a:rPr>
-              <a:t>Text</a:t>
-            </a:r>
-            <a:endParaRPr lang="en-US" sz="1500" dirty="0"/>
-          </a:p>
-        </p:txBody>
-      </p:sp>
-      <p:sp>
-        <p:nvSpPr>
-          <p:cNvPr id="7" name="Text 5"/>
-          <p:cNvSpPr/>
-          <p:nvPr/>
-        </p:nvSpPr>
-        <p:spPr>
-          <a:xfrm>
-            <a:off x="512064" y="1581912"/>
-            <a:ext cx="3813048" cy="1033272"/>
+            <a:ext cx="8412480" cy="1502508"/>
           </a:xfrm>
           <a:prstGeom prst="rect">
             <a:avLst/>
@@ -7076,46 +5714,179 @@
           </a:bodyPr>
           <a:lstStyle/>
           <a:p>
-            <a:pPr indent="0" marL="0">
-              <a:buNone/>
-            </a:pPr>
-            <a:r>
-              <a:rPr lang="en-US" sz="1150" dirty="0">
-                <a:solidFill>
-                  <a:srgbClr val="212121"/>
+            <a:pPr marL="342900" indent="-342900">
+              <a:spcAft>
+                <a:spcPts val="1000"/>
+              </a:spcAft>
+              <a:buSzPct val="100000"/>
+              <a:buChar char="•"/>
+            </a:pPr>
+            <a:r>
+              <a:rPr lang="en-US" sz="1400" b="1" dirty="0">
+                <a:solidFill>
+                  <a:srgbClr val="1E2761"/>
                 </a:solidFill>
                 <a:latin typeface="Calibri" pitchFamily="34" charset="0"/>
                 <a:ea typeface="Calibri" pitchFamily="34" charset="-122"/>
                 <a:cs typeface="Calibri" pitchFamily="34" charset="-120"/>
               </a:rPr>
-              <a:t>Convenient update.text for display</a:t>
-            </a:r>
-            <a:endParaRPr lang="en-US" sz="1150" dirty="0"/>
+              <a:t>Text</a:t>
+            </a:r>
+            <a:pPr indent="0" marL="0">
+              <a:spcAft>
+                <a:spcPts val="1000"/>
+              </a:spcAft>
+              <a:buNone/>
+            </a:pPr>
+            <a:r>
+              <a:rPr lang="en-US" sz="1400" dirty="0">
+                <a:solidFill>
+                  <a:srgbClr val="212121"/>
+                </a:solidFill>
+                <a:latin typeface="Calibri" pitchFamily="34" charset="0"/>
+                <a:ea typeface="Calibri" pitchFamily="34" charset="-122"/>
+                <a:cs typeface="Calibri" pitchFamily="34" charset="-120"/>
+              </a:rPr>
+              <a:t>  —  Convenient update.text for display</a:t>
+            </a:r>
+            <a:endParaRPr lang="en-US" sz="1400" dirty="0"/>
+          </a:p>
+          <a:p>
+            <a:pPr marL="342900" indent="-342900">
+              <a:spcAft>
+                <a:spcPts val="1000"/>
+              </a:spcAft>
+              <a:buSzPct val="100000"/>
+              <a:buChar char="•"/>
+            </a:pPr>
+            <a:r>
+              <a:rPr lang="en-US" sz="1400" b="1" dirty="0">
+                <a:solidFill>
+                  <a:srgbClr val="1E2761"/>
+                </a:solidFill>
+                <a:latin typeface="Calibri" pitchFamily="34" charset="0"/>
+                <a:ea typeface="Calibri" pitchFamily="34" charset="-122"/>
+                <a:cs typeface="Calibri" pitchFamily="34" charset="-120"/>
+              </a:rPr>
+              <a:t>Function activity</a:t>
+            </a:r>
+            <a:pPr indent="0" marL="0">
+              <a:spcAft>
+                <a:spcPts val="1000"/>
+              </a:spcAft>
+              <a:buNone/>
+            </a:pPr>
+            <a:r>
+              <a:rPr lang="en-US" sz="1400" dirty="0">
+                <a:solidFill>
+                  <a:srgbClr val="212121"/>
+                </a:solidFill>
+                <a:latin typeface="Calibri" pitchFamily="34" charset="0"/>
+                <a:ea typeface="Calibri" pitchFamily="34" charset="-122"/>
+                <a:cs typeface="Calibri" pitchFamily="34" charset="-120"/>
+              </a:rPr>
+              <a:t>  —  Calls and results can arrive as typed contents</a:t>
+            </a:r>
+            <a:endParaRPr lang="en-US" sz="1400" dirty="0"/>
+          </a:p>
+          <a:p>
+            <a:pPr marL="342900" indent="-342900">
+              <a:spcAft>
+                <a:spcPts val="1000"/>
+              </a:spcAft>
+              <a:buSzPct val="100000"/>
+              <a:buChar char="•"/>
+            </a:pPr>
+            <a:r>
+              <a:rPr lang="en-US" sz="1400" b="1" dirty="0">
+                <a:solidFill>
+                  <a:srgbClr val="1E2761"/>
+                </a:solidFill>
+                <a:latin typeface="Calibri" pitchFamily="34" charset="0"/>
+                <a:ea typeface="Calibri" pitchFamily="34" charset="-122"/>
+                <a:cs typeface="Calibri" pitchFamily="34" charset="-120"/>
+              </a:rPr>
+              <a:t>Metadata</a:t>
+            </a:r>
+            <a:pPr indent="0" marL="0">
+              <a:spcAft>
+                <a:spcPts val="1000"/>
+              </a:spcAft>
+              <a:buNone/>
+            </a:pPr>
+            <a:r>
+              <a:rPr lang="en-US" sz="1400" dirty="0">
+                <a:solidFill>
+                  <a:srgbClr val="212121"/>
+                </a:solidFill>
+                <a:latin typeface="Calibri" pitchFamily="34" charset="0"/>
+                <a:ea typeface="Calibri" pitchFamily="34" charset="-122"/>
+                <a:cs typeface="Calibri" pitchFamily="34" charset="-120"/>
+              </a:rPr>
+              <a:t>  —  Response IDs, roles, usage, and provider data may be present</a:t>
+            </a:r>
+            <a:endParaRPr lang="en-US" sz="1400" dirty="0"/>
+          </a:p>
+          <a:p>
+            <a:pPr marL="342900" indent="-342900">
+              <a:spcAft>
+                <a:spcPts val="1000"/>
+              </a:spcAft>
+              <a:buSzPct val="100000"/>
+              <a:buChar char="•"/>
+            </a:pPr>
+            <a:r>
+              <a:rPr lang="en-US" sz="1400" b="1" dirty="0">
+                <a:solidFill>
+                  <a:srgbClr val="1E2761"/>
+                </a:solidFill>
+                <a:latin typeface="Calibri" pitchFamily="34" charset="0"/>
+                <a:ea typeface="Calibri" pitchFamily="34" charset="-122"/>
+                <a:cs typeface="Calibri" pitchFamily="34" charset="-120"/>
+              </a:rPr>
+              <a:t>Rule</a:t>
+            </a:r>
+            <a:pPr indent="0" marL="0">
+              <a:spcAft>
+                <a:spcPts val="1000"/>
+              </a:spcAft>
+              <a:buNone/>
+            </a:pPr>
+            <a:r>
+              <a:rPr lang="en-US" sz="1400" dirty="0">
+                <a:solidFill>
+                  <a:srgbClr val="212121"/>
+                </a:solidFill>
+                <a:latin typeface="Calibri" pitchFamily="34" charset="0"/>
+                <a:ea typeface="Calibri" pitchFamily="34" charset="-122"/>
+                <a:cs typeface="Calibri" pitchFamily="34" charset="-120"/>
+              </a:rPr>
+              <a:t>  —  Ignore unknown types safely; do not flatten every event into text</a:t>
+            </a:r>
+            <a:endParaRPr lang="en-US" sz="1400" dirty="0"/>
           </a:p>
         </p:txBody>
       </p:sp>
       <p:sp>
         <p:nvSpPr>
-          <p:cNvPr id="8" name="Shape 6"/>
-          <p:cNvSpPr/>
-          <p:nvPr/>
-        </p:nvSpPr>
-        <p:spPr>
-          <a:xfrm>
-            <a:off x="4672584" y="1078992"/>
-            <a:ext cx="4105656" cy="1655064"/>
-          </a:xfrm>
-          <a:prstGeom prst="roundRect">
-            <a:avLst>
-              <a:gd name="adj" fmla="val 3315"/>
-            </a:avLst>
+          <p:cNvPr id="6" name="Shape 4"/>
+          <p:cNvSpPr/>
+          <p:nvPr/>
+        </p:nvSpPr>
+        <p:spPr>
+          <a:xfrm>
+            <a:off x="365760" y="2709516"/>
+            <a:ext cx="8412480" cy="1999644"/>
+          </a:xfrm>
+          <a:prstGeom prst="rect">
+            <a:avLst/>
           </a:prstGeom>
           <a:solidFill>
-            <a:srgbClr val="F3F4F6"/>
+            <a:srgbClr val="1D1E22"/>
           </a:solidFill>
-          <a:ln w="10160">
+          <a:ln w="9525">
             <a:solidFill>
-              <a:srgbClr val="D1D5DB"/>
+              <a:srgbClr val="2A2B2E"/>
             </a:solidFill>
             <a:prstDash val="solid"/>
           </a:ln>
@@ -7123,55 +5894,14 @@
       </p:sp>
       <p:sp>
         <p:nvSpPr>
-          <p:cNvPr id="9" name="Text 7"/>
-          <p:cNvSpPr/>
-          <p:nvPr/>
-        </p:nvSpPr>
-        <p:spPr>
-          <a:xfrm>
-            <a:off x="4818888" y="1197864"/>
-            <a:ext cx="3813048" cy="310896"/>
-          </a:xfrm>
-          <a:prstGeom prst="rect">
-            <a:avLst/>
-          </a:prstGeom>
-          <a:noFill/>
-          <a:ln/>
-        </p:spPr>
-        <p:txBody>
-          <a:bodyPr wrap="square" lIns="0" tIns="0" rIns="0" bIns="0" rtlCol="0" anchor="ctr">
-            <a:normAutofit/>
-          </a:bodyPr>
-          <a:lstStyle/>
-          <a:p>
-            <a:pPr indent="0" marL="0">
-              <a:buNone/>
-            </a:pPr>
-            <a:r>
-              <a:rPr lang="en-US" sz="1500" b="1" dirty="0">
-                <a:solidFill>
-                  <a:srgbClr val="1E2761"/>
-                </a:solidFill>
-                <a:latin typeface="Calibri" pitchFamily="34" charset="0"/>
-                <a:ea typeface="Calibri" pitchFamily="34" charset="-122"/>
-                <a:cs typeface="Calibri" pitchFamily="34" charset="-120"/>
-              </a:rPr>
-              <a:t>Function activity</a:t>
-            </a:r>
-            <a:endParaRPr lang="en-US" sz="1500" dirty="0"/>
-          </a:p>
-        </p:txBody>
-      </p:sp>
-      <p:sp>
-        <p:nvSpPr>
-          <p:cNvPr id="10" name="Text 8"/>
-          <p:cNvSpPr/>
-          <p:nvPr/>
-        </p:nvSpPr>
-        <p:spPr>
-          <a:xfrm>
-            <a:off x="4818888" y="1581912"/>
-            <a:ext cx="3813048" cy="1033272"/>
+          <p:cNvPr id="7" name="Text 5"/>
+          <p:cNvSpPr/>
+          <p:nvPr/>
+        </p:nvSpPr>
+        <p:spPr>
+          <a:xfrm>
+            <a:off x="502920" y="2800956"/>
+            <a:ext cx="8138160" cy="1816764"/>
           </a:xfrm>
           <a:prstGeom prst="rect">
             <a:avLst/>
@@ -7189,241 +5919,582 @@
               <a:buNone/>
             </a:pPr>
             <a:r>
-              <a:rPr lang="en-US" sz="1150" dirty="0">
-                <a:solidFill>
-                  <a:srgbClr val="212121"/>
-                </a:solidFill>
-                <a:latin typeface="Calibri" pitchFamily="34" charset="0"/>
-                <a:ea typeface="Calibri" pitchFamily="34" charset="-122"/>
-                <a:cs typeface="Calibri" pitchFamily="34" charset="-120"/>
-              </a:rPr>
-              <a:t>Calls and results can arrive as typed contents</a:t>
-            </a:r>
-            <a:endParaRPr lang="en-US" sz="1150" dirty="0"/>
+              <a:rPr lang="en-US" sz="1050" i="1" dirty="0">
+                <a:solidFill>
+                  <a:srgbClr val="666666"/>
+                </a:solidFill>
+                <a:latin typeface="Consolas" pitchFamily="34" charset="0"/>
+                <a:ea typeface="Consolas" pitchFamily="34" charset="-122"/>
+                <a:cs typeface="Consolas" pitchFamily="34" charset="-120"/>
+              </a:rPr>
+              <a:t># Access content from responses</a:t>
+            </a:r>
+            <a:endParaRPr lang="en-US" sz="1050" dirty="0"/>
+          </a:p>
+          <a:p>
+            <a:pPr indent="0" marL="0">
+              <a:buNone/>
+            </a:pPr>
+            <a:r>
+              <a:rPr lang="en-US" sz="1050" dirty="0">
+                <a:solidFill>
+                  <a:srgbClr val="FFFFFF"/>
+                </a:solidFill>
+                <a:latin typeface="Consolas" pitchFamily="34" charset="0"/>
+                <a:ea typeface="Consolas" pitchFamily="34" charset="-122"/>
+                <a:cs typeface="Consolas" pitchFamily="34" charset="-120"/>
+              </a:rPr>
+              <a:t>response = </a:t>
+            </a:r>
+            <a:pPr indent="0" marL="0">
+              <a:buNone/>
+            </a:pPr>
+            <a:r>
+              <a:rPr lang="en-US" sz="1050" dirty="0">
+                <a:solidFill>
+                  <a:srgbClr val="A996B6"/>
+                </a:solidFill>
+                <a:latin typeface="Consolas" pitchFamily="34" charset="0"/>
+                <a:ea typeface="Consolas" pitchFamily="34" charset="-122"/>
+                <a:cs typeface="Consolas" pitchFamily="34" charset="-120"/>
+              </a:rPr>
+              <a:t>await</a:t>
+            </a:r>
+            <a:pPr indent="0" marL="0">
+              <a:buNone/>
+            </a:pPr>
+            <a:r>
+              <a:rPr lang="en-US" sz="1050" dirty="0">
+                <a:solidFill>
+                  <a:srgbClr val="FFFFFF"/>
+                </a:solidFill>
+                <a:latin typeface="Consolas" pitchFamily="34" charset="0"/>
+                <a:ea typeface="Consolas" pitchFamily="34" charset="-122"/>
+                <a:cs typeface="Consolas" pitchFamily="34" charset="-120"/>
+              </a:rPr>
+              <a:t> agent.run(</a:t>
+            </a:r>
+            <a:pPr indent="0" marL="0">
+              <a:buNone/>
+            </a:pPr>
+            <a:r>
+              <a:rPr lang="en-US" sz="1050" dirty="0">
+                <a:solidFill>
+                  <a:srgbClr val="E4C98A"/>
+                </a:solidFill>
+                <a:latin typeface="Consolas" pitchFamily="34" charset="0"/>
+                <a:ea typeface="Consolas" pitchFamily="34" charset="-122"/>
+                <a:cs typeface="Consolas" pitchFamily="34" charset="-120"/>
+              </a:rPr>
+              <a:t>"Describe the image"</a:t>
+            </a:r>
+            <a:pPr indent="0" marL="0">
+              <a:buNone/>
+            </a:pPr>
+            <a:r>
+              <a:rPr lang="en-US" sz="1050" dirty="0">
+                <a:solidFill>
+                  <a:srgbClr val="FFFFFF"/>
+                </a:solidFill>
+                <a:latin typeface="Consolas" pitchFamily="34" charset="0"/>
+                <a:ea typeface="Consolas" pitchFamily="34" charset="-122"/>
+                <a:cs typeface="Consolas" pitchFamily="34" charset="-120"/>
+              </a:rPr>
+              <a:t>)</a:t>
+            </a:r>
+            <a:endParaRPr lang="en-US" sz="1050" dirty="0"/>
+          </a:p>
+          <a:p>
+            <a:pPr indent="0" marL="0">
+              <a:buNone/>
+            </a:pPr>
+            <a:r>
+              <a:rPr lang="en-US" sz="1050" dirty="0">
+                <a:solidFill>
+                  <a:srgbClr val="A996B6"/>
+                </a:solidFill>
+                <a:latin typeface="Consolas" pitchFamily="34" charset="0"/>
+                <a:ea typeface="Consolas" pitchFamily="34" charset="-122"/>
+                <a:cs typeface="Consolas" pitchFamily="34" charset="-120"/>
+              </a:rPr>
+              <a:t>for</a:t>
+            </a:r>
+            <a:pPr indent="0" marL="0">
+              <a:buNone/>
+            </a:pPr>
+            <a:r>
+              <a:rPr lang="en-US" sz="1050" dirty="0">
+                <a:solidFill>
+                  <a:srgbClr val="FFFFFF"/>
+                </a:solidFill>
+                <a:latin typeface="Consolas" pitchFamily="34" charset="0"/>
+                <a:ea typeface="Consolas" pitchFamily="34" charset="-122"/>
+                <a:cs typeface="Consolas" pitchFamily="34" charset="-120"/>
+              </a:rPr>
+              <a:t> message </a:t>
+            </a:r>
+            <a:pPr indent="0" marL="0">
+              <a:buNone/>
+            </a:pPr>
+            <a:r>
+              <a:rPr lang="en-US" sz="1050" dirty="0">
+                <a:solidFill>
+                  <a:srgbClr val="A996B6"/>
+                </a:solidFill>
+                <a:latin typeface="Consolas" pitchFamily="34" charset="0"/>
+                <a:ea typeface="Consolas" pitchFamily="34" charset="-122"/>
+                <a:cs typeface="Consolas" pitchFamily="34" charset="-120"/>
+              </a:rPr>
+              <a:t>in</a:t>
+            </a:r>
+            <a:pPr indent="0" marL="0">
+              <a:buNone/>
+            </a:pPr>
+            <a:r>
+              <a:rPr lang="en-US" sz="1050" dirty="0">
+                <a:solidFill>
+                  <a:srgbClr val="FFFFFF"/>
+                </a:solidFill>
+                <a:latin typeface="Consolas" pitchFamily="34" charset="0"/>
+                <a:ea typeface="Consolas" pitchFamily="34" charset="-122"/>
+                <a:cs typeface="Consolas" pitchFamily="34" charset="-120"/>
+              </a:rPr>
+              <a:t> response.messages:</a:t>
+            </a:r>
+            <a:endParaRPr lang="en-US" sz="1050" dirty="0"/>
+          </a:p>
+          <a:p>
+            <a:pPr indent="0" marL="0">
+              <a:buNone/>
+            </a:pPr>
+            <a:r>
+              <a:rPr lang="en-US" sz="1050" dirty="0">
+                <a:solidFill>
+                  <a:srgbClr val="FFFFFF"/>
+                </a:solidFill>
+                <a:latin typeface="Consolas" pitchFamily="34" charset="0"/>
+                <a:ea typeface="Consolas" pitchFamily="34" charset="-122"/>
+                <a:cs typeface="Consolas" pitchFamily="34" charset="-120"/>
+              </a:rPr>
+              <a:t>    </a:t>
+            </a:r>
+            <a:pPr indent="0" marL="0">
+              <a:buNone/>
+            </a:pPr>
+            <a:r>
+              <a:rPr lang="en-US" sz="1050" dirty="0">
+                <a:solidFill>
+                  <a:srgbClr val="A996B6"/>
+                </a:solidFill>
+                <a:latin typeface="Consolas" pitchFamily="34" charset="0"/>
+                <a:ea typeface="Consolas" pitchFamily="34" charset="-122"/>
+                <a:cs typeface="Consolas" pitchFamily="34" charset="-120"/>
+              </a:rPr>
+              <a:t>for</a:t>
+            </a:r>
+            <a:pPr indent="0" marL="0">
+              <a:buNone/>
+            </a:pPr>
+            <a:r>
+              <a:rPr lang="en-US" sz="1050" dirty="0">
+                <a:solidFill>
+                  <a:srgbClr val="FFFFFF"/>
+                </a:solidFill>
+                <a:latin typeface="Consolas" pitchFamily="34" charset="0"/>
+                <a:ea typeface="Consolas" pitchFamily="34" charset="-122"/>
+                <a:cs typeface="Consolas" pitchFamily="34" charset="-120"/>
+              </a:rPr>
+              <a:t> content </a:t>
+            </a:r>
+            <a:pPr indent="0" marL="0">
+              <a:buNone/>
+            </a:pPr>
+            <a:r>
+              <a:rPr lang="en-US" sz="1050" dirty="0">
+                <a:solidFill>
+                  <a:srgbClr val="A996B6"/>
+                </a:solidFill>
+                <a:latin typeface="Consolas" pitchFamily="34" charset="0"/>
+                <a:ea typeface="Consolas" pitchFamily="34" charset="-122"/>
+                <a:cs typeface="Consolas" pitchFamily="34" charset="-120"/>
+              </a:rPr>
+              <a:t>in</a:t>
+            </a:r>
+            <a:pPr indent="0" marL="0">
+              <a:buNone/>
+            </a:pPr>
+            <a:r>
+              <a:rPr lang="en-US" sz="1050" dirty="0">
+                <a:solidFill>
+                  <a:srgbClr val="FFFFFF"/>
+                </a:solidFill>
+                <a:latin typeface="Consolas" pitchFamily="34" charset="0"/>
+                <a:ea typeface="Consolas" pitchFamily="34" charset="-122"/>
+                <a:cs typeface="Consolas" pitchFamily="34" charset="-120"/>
+              </a:rPr>
+              <a:t> message.contents:</a:t>
+            </a:r>
+            <a:endParaRPr lang="en-US" sz="1050" dirty="0"/>
+          </a:p>
+          <a:p>
+            <a:pPr indent="0" marL="0">
+              <a:buNone/>
+            </a:pPr>
+            <a:r>
+              <a:rPr lang="en-US" sz="1050" dirty="0">
+                <a:solidFill>
+                  <a:srgbClr val="FFFFFF"/>
+                </a:solidFill>
+                <a:latin typeface="Consolas" pitchFamily="34" charset="0"/>
+                <a:ea typeface="Consolas" pitchFamily="34" charset="-122"/>
+                <a:cs typeface="Consolas" pitchFamily="34" charset="-120"/>
+              </a:rPr>
+              <a:t>        </a:t>
+            </a:r>
+            <a:pPr indent="0" marL="0">
+              <a:buNone/>
+            </a:pPr>
+            <a:r>
+              <a:rPr lang="en-US" sz="1050" dirty="0">
+                <a:solidFill>
+                  <a:srgbClr val="A996B6"/>
+                </a:solidFill>
+                <a:latin typeface="Consolas" pitchFamily="34" charset="0"/>
+                <a:ea typeface="Consolas" pitchFamily="34" charset="-122"/>
+                <a:cs typeface="Consolas" pitchFamily="34" charset="-120"/>
+              </a:rPr>
+              <a:t>if</a:t>
+            </a:r>
+            <a:pPr indent="0" marL="0">
+              <a:buNone/>
+            </a:pPr>
+            <a:r>
+              <a:rPr lang="en-US" sz="1050" dirty="0">
+                <a:solidFill>
+                  <a:srgbClr val="FFFFFF"/>
+                </a:solidFill>
+                <a:latin typeface="Consolas" pitchFamily="34" charset="0"/>
+                <a:ea typeface="Consolas" pitchFamily="34" charset="-122"/>
+                <a:cs typeface="Consolas" pitchFamily="34" charset="-120"/>
+              </a:rPr>
+              <a:t> content.type == </a:t>
+            </a:r>
+            <a:pPr indent="0" marL="0">
+              <a:buNone/>
+            </a:pPr>
+            <a:r>
+              <a:rPr lang="en-US" sz="1050" dirty="0">
+                <a:solidFill>
+                  <a:srgbClr val="E4C98A"/>
+                </a:solidFill>
+                <a:latin typeface="Consolas" pitchFamily="34" charset="0"/>
+                <a:ea typeface="Consolas" pitchFamily="34" charset="-122"/>
+                <a:cs typeface="Consolas" pitchFamily="34" charset="-120"/>
+              </a:rPr>
+              <a:t>"text"</a:t>
+            </a:r>
+            <a:pPr indent="0" marL="0">
+              <a:buNone/>
+            </a:pPr>
+            <a:r>
+              <a:rPr lang="en-US" sz="1050" dirty="0">
+                <a:solidFill>
+                  <a:srgbClr val="FFFFFF"/>
+                </a:solidFill>
+                <a:latin typeface="Consolas" pitchFamily="34" charset="0"/>
+                <a:ea typeface="Consolas" pitchFamily="34" charset="-122"/>
+                <a:cs typeface="Consolas" pitchFamily="34" charset="-120"/>
+              </a:rPr>
+              <a:t>:</a:t>
+            </a:r>
+            <a:endParaRPr lang="en-US" sz="1050" dirty="0"/>
+          </a:p>
+          <a:p>
+            <a:pPr indent="0" marL="0">
+              <a:buNone/>
+            </a:pPr>
+            <a:r>
+              <a:rPr lang="en-US" sz="1050" dirty="0">
+                <a:solidFill>
+                  <a:srgbClr val="FFFFFF"/>
+                </a:solidFill>
+                <a:latin typeface="Consolas" pitchFamily="34" charset="0"/>
+                <a:ea typeface="Consolas" pitchFamily="34" charset="-122"/>
+                <a:cs typeface="Consolas" pitchFamily="34" charset="-120"/>
+              </a:rPr>
+              <a:t>            print(</a:t>
+            </a:r>
+            <a:pPr indent="0" marL="0">
+              <a:buNone/>
+            </a:pPr>
+            <a:r>
+              <a:rPr lang="en-US" sz="1050" dirty="0">
+                <a:solidFill>
+                  <a:srgbClr val="E4C98A"/>
+                </a:solidFill>
+                <a:latin typeface="Consolas" pitchFamily="34" charset="0"/>
+                <a:ea typeface="Consolas" pitchFamily="34" charset="-122"/>
+                <a:cs typeface="Consolas" pitchFamily="34" charset="-120"/>
+              </a:rPr>
+              <a:t>f"Text: {content.text}"</a:t>
+            </a:r>
+            <a:pPr indent="0" marL="0">
+              <a:buNone/>
+            </a:pPr>
+            <a:r>
+              <a:rPr lang="en-US" sz="1050" dirty="0">
+                <a:solidFill>
+                  <a:srgbClr val="FFFFFF"/>
+                </a:solidFill>
+                <a:latin typeface="Consolas" pitchFamily="34" charset="0"/>
+                <a:ea typeface="Consolas" pitchFamily="34" charset="-122"/>
+                <a:cs typeface="Consolas" pitchFamily="34" charset="-120"/>
+              </a:rPr>
+              <a:t>)</a:t>
+            </a:r>
+            <a:endParaRPr lang="en-US" sz="1050" dirty="0"/>
+          </a:p>
+          <a:p>
+            <a:pPr indent="0" marL="0">
+              <a:buNone/>
+            </a:pPr>
+            <a:r>
+              <a:rPr lang="en-US" sz="1050" dirty="0">
+                <a:solidFill>
+                  <a:srgbClr val="FFFFFF"/>
+                </a:solidFill>
+                <a:latin typeface="Consolas" pitchFamily="34" charset="0"/>
+                <a:ea typeface="Consolas" pitchFamily="34" charset="-122"/>
+                <a:cs typeface="Consolas" pitchFamily="34" charset="-120"/>
+              </a:rPr>
+              <a:t>        </a:t>
+            </a:r>
+            <a:pPr indent="0" marL="0">
+              <a:buNone/>
+            </a:pPr>
+            <a:r>
+              <a:rPr lang="en-US" sz="1050" dirty="0">
+                <a:solidFill>
+                  <a:srgbClr val="A996B6"/>
+                </a:solidFill>
+                <a:latin typeface="Consolas" pitchFamily="34" charset="0"/>
+                <a:ea typeface="Consolas" pitchFamily="34" charset="-122"/>
+                <a:cs typeface="Consolas" pitchFamily="34" charset="-120"/>
+              </a:rPr>
+              <a:t>elif</a:t>
+            </a:r>
+            <a:pPr indent="0" marL="0">
+              <a:buNone/>
+            </a:pPr>
+            <a:r>
+              <a:rPr lang="en-US" sz="1050" dirty="0">
+                <a:solidFill>
+                  <a:srgbClr val="FFFFFF"/>
+                </a:solidFill>
+                <a:latin typeface="Consolas" pitchFamily="34" charset="0"/>
+                <a:ea typeface="Consolas" pitchFamily="34" charset="-122"/>
+                <a:cs typeface="Consolas" pitchFamily="34" charset="-120"/>
+              </a:rPr>
+              <a:t> content.type == </a:t>
+            </a:r>
+            <a:pPr indent="0" marL="0">
+              <a:buNone/>
+            </a:pPr>
+            <a:r>
+              <a:rPr lang="en-US" sz="1050" dirty="0">
+                <a:solidFill>
+                  <a:srgbClr val="E4C98A"/>
+                </a:solidFill>
+                <a:latin typeface="Consolas" pitchFamily="34" charset="0"/>
+                <a:ea typeface="Consolas" pitchFamily="34" charset="-122"/>
+                <a:cs typeface="Consolas" pitchFamily="34" charset="-120"/>
+              </a:rPr>
+              <a:t>"data"</a:t>
+            </a:r>
+            <a:pPr indent="0" marL="0">
+              <a:buNone/>
+            </a:pPr>
+            <a:r>
+              <a:rPr lang="en-US" sz="1050" dirty="0">
+                <a:solidFill>
+                  <a:srgbClr val="FFFFFF"/>
+                </a:solidFill>
+                <a:latin typeface="Consolas" pitchFamily="34" charset="0"/>
+                <a:ea typeface="Consolas" pitchFamily="34" charset="-122"/>
+                <a:cs typeface="Consolas" pitchFamily="34" charset="-120"/>
+              </a:rPr>
+              <a:t>:</a:t>
+            </a:r>
+            <a:endParaRPr lang="en-US" sz="1050" dirty="0"/>
+          </a:p>
+          <a:p>
+            <a:pPr indent="0" marL="0">
+              <a:buNone/>
+            </a:pPr>
+            <a:r>
+              <a:rPr lang="en-US" sz="1050" dirty="0">
+                <a:solidFill>
+                  <a:srgbClr val="FFFFFF"/>
+                </a:solidFill>
+                <a:latin typeface="Consolas" pitchFamily="34" charset="0"/>
+                <a:ea typeface="Consolas" pitchFamily="34" charset="-122"/>
+                <a:cs typeface="Consolas" pitchFamily="34" charset="-120"/>
+              </a:rPr>
+              <a:t>            print(</a:t>
+            </a:r>
+            <a:pPr indent="0" marL="0">
+              <a:buNone/>
+            </a:pPr>
+            <a:r>
+              <a:rPr lang="en-US" sz="1050" dirty="0">
+                <a:solidFill>
+                  <a:srgbClr val="E4C98A"/>
+                </a:solidFill>
+                <a:latin typeface="Consolas" pitchFamily="34" charset="0"/>
+                <a:ea typeface="Consolas" pitchFamily="34" charset="-122"/>
+                <a:cs typeface="Consolas" pitchFamily="34" charset="-120"/>
+              </a:rPr>
+              <a:t>f"Data URI: {content.from_data}"</a:t>
+            </a:r>
+            <a:pPr indent="0" marL="0">
+              <a:buNone/>
+            </a:pPr>
+            <a:r>
+              <a:rPr lang="en-US" sz="1050" dirty="0">
+                <a:solidFill>
+                  <a:srgbClr val="FFFFFF"/>
+                </a:solidFill>
+                <a:latin typeface="Consolas" pitchFamily="34" charset="0"/>
+                <a:ea typeface="Consolas" pitchFamily="34" charset="-122"/>
+                <a:cs typeface="Consolas" pitchFamily="34" charset="-120"/>
+              </a:rPr>
+              <a:t>)</a:t>
+            </a:r>
+            <a:endParaRPr lang="en-US" sz="1050" dirty="0"/>
+          </a:p>
+          <a:p>
+            <a:pPr indent="0" marL="0">
+              <a:buNone/>
+            </a:pPr>
+            <a:r>
+              <a:rPr lang="en-US" sz="1050" dirty="0">
+                <a:solidFill>
+                  <a:srgbClr val="FFFFFF"/>
+                </a:solidFill>
+                <a:latin typeface="Consolas" pitchFamily="34" charset="0"/>
+                <a:ea typeface="Consolas" pitchFamily="34" charset="-122"/>
+                <a:cs typeface="Consolas" pitchFamily="34" charset="-120"/>
+              </a:rPr>
+              <a:t>        </a:t>
+            </a:r>
+            <a:pPr indent="0" marL="0">
+              <a:buNone/>
+            </a:pPr>
+            <a:r>
+              <a:rPr lang="en-US" sz="1050" dirty="0">
+                <a:solidFill>
+                  <a:srgbClr val="A996B6"/>
+                </a:solidFill>
+                <a:latin typeface="Consolas" pitchFamily="34" charset="0"/>
+                <a:ea typeface="Consolas" pitchFamily="34" charset="-122"/>
+                <a:cs typeface="Consolas" pitchFamily="34" charset="-120"/>
+              </a:rPr>
+              <a:t>elif</a:t>
+            </a:r>
+            <a:pPr indent="0" marL="0">
+              <a:buNone/>
+            </a:pPr>
+            <a:r>
+              <a:rPr lang="en-US" sz="1050" dirty="0">
+                <a:solidFill>
+                  <a:srgbClr val="FFFFFF"/>
+                </a:solidFill>
+                <a:latin typeface="Consolas" pitchFamily="34" charset="0"/>
+                <a:ea typeface="Consolas" pitchFamily="34" charset="-122"/>
+                <a:cs typeface="Consolas" pitchFamily="34" charset="-120"/>
+              </a:rPr>
+              <a:t> content.type == </a:t>
+            </a:r>
+            <a:pPr indent="0" marL="0">
+              <a:buNone/>
+            </a:pPr>
+            <a:r>
+              <a:rPr lang="en-US" sz="1050" dirty="0">
+                <a:solidFill>
+                  <a:srgbClr val="E4C98A"/>
+                </a:solidFill>
+                <a:latin typeface="Consolas" pitchFamily="34" charset="0"/>
+                <a:ea typeface="Consolas" pitchFamily="34" charset="-122"/>
+                <a:cs typeface="Consolas" pitchFamily="34" charset="-120"/>
+              </a:rPr>
+              <a:t>"uri"</a:t>
+            </a:r>
+            <a:pPr indent="0" marL="0">
+              <a:buNone/>
+            </a:pPr>
+            <a:r>
+              <a:rPr lang="en-US" sz="1050" dirty="0">
+                <a:solidFill>
+                  <a:srgbClr val="FFFFFF"/>
+                </a:solidFill>
+                <a:latin typeface="Consolas" pitchFamily="34" charset="0"/>
+                <a:ea typeface="Consolas" pitchFamily="34" charset="-122"/>
+                <a:cs typeface="Consolas" pitchFamily="34" charset="-120"/>
+              </a:rPr>
+              <a:t>:</a:t>
+            </a:r>
+            <a:endParaRPr lang="en-US" sz="1050" dirty="0"/>
+          </a:p>
+          <a:p>
+            <a:pPr indent="0" marL="0">
+              <a:buNone/>
+            </a:pPr>
+            <a:r>
+              <a:rPr lang="en-US" sz="1050" dirty="0">
+                <a:solidFill>
+                  <a:srgbClr val="FFFFFF"/>
+                </a:solidFill>
+                <a:latin typeface="Consolas" pitchFamily="34" charset="0"/>
+                <a:ea typeface="Consolas" pitchFamily="34" charset="-122"/>
+                <a:cs typeface="Consolas" pitchFamily="34" charset="-120"/>
+              </a:rPr>
+              <a:t>            print(</a:t>
+            </a:r>
+            <a:pPr indent="0" marL="0">
+              <a:buNone/>
+            </a:pPr>
+            <a:r>
+              <a:rPr lang="en-US" sz="1050" dirty="0">
+                <a:solidFill>
+                  <a:srgbClr val="E4C98A"/>
+                </a:solidFill>
+                <a:latin typeface="Consolas" pitchFamily="34" charset="0"/>
+                <a:ea typeface="Consolas" pitchFamily="34" charset="-122"/>
+                <a:cs typeface="Consolas" pitchFamily="34" charset="-120"/>
+              </a:rPr>
+              <a:t>f"External URI: {content.uri}"</a:t>
+            </a:r>
+            <a:pPr indent="0" marL="0">
+              <a:buNone/>
+            </a:pPr>
+            <a:r>
+              <a:rPr lang="en-US" sz="1050" dirty="0">
+                <a:solidFill>
+                  <a:srgbClr val="FFFFFF"/>
+                </a:solidFill>
+                <a:latin typeface="Consolas" pitchFamily="34" charset="0"/>
+                <a:ea typeface="Consolas" pitchFamily="34" charset="-122"/>
+                <a:cs typeface="Consolas" pitchFamily="34" charset="-120"/>
+              </a:rPr>
+              <a:t>)</a:t>
+            </a:r>
+            <a:endParaRPr lang="en-US" sz="1050" dirty="0"/>
           </a:p>
         </p:txBody>
       </p:sp>
       <p:sp>
         <p:nvSpPr>
-          <p:cNvPr id="11" name="Shape 9"/>
-          <p:cNvSpPr/>
-          <p:nvPr/>
-        </p:nvSpPr>
-        <p:spPr>
-          <a:xfrm>
-            <a:off x="365760" y="2935224"/>
-            <a:ext cx="4105656" cy="1655064"/>
-          </a:xfrm>
-          <a:prstGeom prst="roundRect">
-            <a:avLst>
-              <a:gd name="adj" fmla="val 3315"/>
-            </a:avLst>
-          </a:prstGeom>
-          <a:solidFill>
-            <a:srgbClr val="F3F4F6"/>
-          </a:solidFill>
-          <a:ln w="10160">
-            <a:solidFill>
-              <a:srgbClr val="D1D5DB"/>
-            </a:solidFill>
-            <a:prstDash val="solid"/>
-          </a:ln>
-        </p:spPr>
-      </p:sp>
-      <p:sp>
-        <p:nvSpPr>
-          <p:cNvPr id="12" name="Text 10"/>
-          <p:cNvSpPr/>
-          <p:nvPr/>
-        </p:nvSpPr>
-        <p:spPr>
-          <a:xfrm>
-            <a:off x="512064" y="3054096"/>
-            <a:ext cx="3813048" cy="310896"/>
-          </a:xfrm>
-          <a:prstGeom prst="rect">
-            <a:avLst/>
-          </a:prstGeom>
-          <a:noFill/>
-          <a:ln/>
-        </p:spPr>
-        <p:txBody>
-          <a:bodyPr wrap="square" lIns="0" tIns="0" rIns="0" bIns="0" rtlCol="0" anchor="ctr">
-            <a:normAutofit/>
-          </a:bodyPr>
-          <a:lstStyle/>
-          <a:p>
-            <a:pPr indent="0" marL="0">
-              <a:buNone/>
-            </a:pPr>
-            <a:r>
-              <a:rPr lang="en-US" sz="1500" b="1" dirty="0">
-                <a:solidFill>
-                  <a:srgbClr val="1E2761"/>
-                </a:solidFill>
-                <a:latin typeface="Calibri" pitchFamily="34" charset="0"/>
-                <a:ea typeface="Calibri" pitchFamily="34" charset="-122"/>
-                <a:cs typeface="Calibri" pitchFamily="34" charset="-120"/>
-              </a:rPr>
-              <a:t>Metadata</a:t>
-            </a:r>
-            <a:endParaRPr lang="en-US" sz="1500" dirty="0"/>
-          </a:p>
-        </p:txBody>
-      </p:sp>
-      <p:sp>
-        <p:nvSpPr>
-          <p:cNvPr id="13" name="Text 11"/>
-          <p:cNvSpPr/>
-          <p:nvPr/>
-        </p:nvSpPr>
-        <p:spPr>
-          <a:xfrm>
-            <a:off x="512064" y="3438144"/>
-            <a:ext cx="3813048" cy="1033272"/>
-          </a:xfrm>
-          <a:prstGeom prst="rect">
-            <a:avLst/>
-          </a:prstGeom>
-          <a:noFill/>
-          <a:ln/>
-        </p:spPr>
-        <p:txBody>
-          <a:bodyPr wrap="square" lIns="0" tIns="0" rIns="0" bIns="0" rtlCol="0" anchor="t">
-            <a:normAutofit/>
-          </a:bodyPr>
-          <a:lstStyle/>
-          <a:p>
-            <a:pPr indent="0" marL="0">
-              <a:buNone/>
-            </a:pPr>
-            <a:r>
-              <a:rPr lang="en-US" sz="1150" dirty="0">
-                <a:solidFill>
-                  <a:srgbClr val="212121"/>
-                </a:solidFill>
-                <a:latin typeface="Calibri" pitchFamily="34" charset="0"/>
-                <a:ea typeface="Calibri" pitchFamily="34" charset="-122"/>
-                <a:cs typeface="Calibri" pitchFamily="34" charset="-120"/>
-              </a:rPr>
-              <a:t>Response IDs, roles, usage, and provider data may be present</a:t>
-            </a:r>
-            <a:endParaRPr lang="en-US" sz="1150" dirty="0"/>
-          </a:p>
-        </p:txBody>
-      </p:sp>
-      <p:sp>
-        <p:nvSpPr>
-          <p:cNvPr id="14" name="Shape 12"/>
-          <p:cNvSpPr/>
-          <p:nvPr/>
-        </p:nvSpPr>
-        <p:spPr>
-          <a:xfrm>
-            <a:off x="4672584" y="2935224"/>
-            <a:ext cx="4105656" cy="1655064"/>
-          </a:xfrm>
-          <a:prstGeom prst="roundRect">
-            <a:avLst>
-              <a:gd name="adj" fmla="val 3315"/>
-            </a:avLst>
-          </a:prstGeom>
-          <a:solidFill>
-            <a:srgbClr val="F3F4F6"/>
-          </a:solidFill>
-          <a:ln w="10160">
-            <a:solidFill>
-              <a:srgbClr val="D1D5DB"/>
-            </a:solidFill>
-            <a:prstDash val="solid"/>
-          </a:ln>
-        </p:spPr>
-      </p:sp>
-      <p:sp>
-        <p:nvSpPr>
-          <p:cNvPr id="15" name="Text 13"/>
-          <p:cNvSpPr/>
-          <p:nvPr/>
-        </p:nvSpPr>
-        <p:spPr>
-          <a:xfrm>
-            <a:off x="4818888" y="3054096"/>
-            <a:ext cx="3813048" cy="310896"/>
-          </a:xfrm>
-          <a:prstGeom prst="rect">
-            <a:avLst/>
-          </a:prstGeom>
-          <a:noFill/>
-          <a:ln/>
-        </p:spPr>
-        <p:txBody>
-          <a:bodyPr wrap="square" lIns="0" tIns="0" rIns="0" bIns="0" rtlCol="0" anchor="ctr">
-            <a:normAutofit/>
-          </a:bodyPr>
-          <a:lstStyle/>
-          <a:p>
-            <a:pPr indent="0" marL="0">
-              <a:buNone/>
-            </a:pPr>
-            <a:r>
-              <a:rPr lang="en-US" sz="1500" b="1" dirty="0">
-                <a:solidFill>
-                  <a:srgbClr val="1E2761"/>
-                </a:solidFill>
-                <a:latin typeface="Calibri" pitchFamily="34" charset="0"/>
-                <a:ea typeface="Calibri" pitchFamily="34" charset="-122"/>
-                <a:cs typeface="Calibri" pitchFamily="34" charset="-120"/>
-              </a:rPr>
-              <a:t>Rule</a:t>
-            </a:r>
-            <a:endParaRPr lang="en-US" sz="1500" dirty="0"/>
-          </a:p>
-        </p:txBody>
-      </p:sp>
-      <p:sp>
-        <p:nvSpPr>
-          <p:cNvPr id="16" name="Text 14"/>
-          <p:cNvSpPr/>
-          <p:nvPr/>
-        </p:nvSpPr>
-        <p:spPr>
-          <a:xfrm>
-            <a:off x="4818888" y="3438144"/>
-            <a:ext cx="3813048" cy="1033272"/>
-          </a:xfrm>
-          <a:prstGeom prst="rect">
-            <a:avLst/>
-          </a:prstGeom>
-          <a:noFill/>
-          <a:ln/>
-        </p:spPr>
-        <p:txBody>
-          <a:bodyPr wrap="square" lIns="0" tIns="0" rIns="0" bIns="0" rtlCol="0" anchor="t">
-            <a:normAutofit/>
-          </a:bodyPr>
-          <a:lstStyle/>
-          <a:p>
-            <a:pPr indent="0" marL="0">
-              <a:buNone/>
-            </a:pPr>
-            <a:r>
-              <a:rPr lang="en-US" sz="1150" dirty="0">
-                <a:solidFill>
-                  <a:srgbClr val="212121"/>
-                </a:solidFill>
-                <a:latin typeface="Calibri" pitchFamily="34" charset="0"/>
-                <a:ea typeface="Calibri" pitchFamily="34" charset="-122"/>
-                <a:cs typeface="Calibri" pitchFamily="34" charset="-120"/>
-              </a:rPr>
-              <a:t>Ignore unknown types safely; do not flatten every event into text</a:t>
-            </a:r>
-            <a:endParaRPr lang="en-US" sz="1150" dirty="0"/>
-          </a:p>
-        </p:txBody>
-      </p:sp>
-      <p:sp>
-        <p:nvSpPr>
-          <p:cNvPr id="17" name="Shape 15"/>
+          <p:cNvPr id="8" name="Shape 6"/>
           <p:cNvSpPr/>
           <p:nvPr/>
         </p:nvSpPr>
@@ -7446,7 +6517,7 @@
       </p:sp>
       <p:sp>
         <p:nvSpPr>
-          <p:cNvPr id="18" name="Text 16"/>
+          <p:cNvPr id="9" name="Text 7"/>
           <p:cNvSpPr/>
           <p:nvPr/>
         </p:nvSpPr>
@@ -7613,1282 +6684,358 @@
                 <a:ea typeface="Calibri" pitchFamily="34" charset="-122"/>
                 <a:cs typeface="Calibri" pitchFamily="34" charset="-120"/>
               </a:rPr>
-              <a:t>Put each option in the right lane</a:t>
+              <a:t>Pydantic gives you a typed value</a:t>
             </a:r>
             <a:endParaRPr lang="en-US" sz="2800" dirty="0"/>
           </a:p>
         </p:txBody>
       </p:sp>
-      <p:graphicFrame>
-        <p:nvGraphicFramePr>
-          <p:cNvPr id="6" name="Table 0"/>
-          <p:cNvGraphicFramePr>
-            <a:graphicFrameLocks noGrp="1"/>
-          </p:cNvGraphicFramePr>
-          <p:nvPr>
-            <p:extLst>
-              <p:ext uri="{D42A27DB-BD31-4B8C-83A1-F6EECF244321}">
-                <p14:modId xmlns:p14="http://schemas.microsoft.com/office/powerpoint/2010/main" val="1579011935"/>
-              </p:ext>
-            </p:extLst>
-          </p:nvPr>
-        </p:nvGraphicFramePr>
-        <p:xfrm>
-          <a:off x="365760" y="1078992"/>
-          <a:ext cx="8412480" cy="914400"/>
-        </p:xfrm>
-        <a:graphic>
-          <a:graphicData uri="http://schemas.openxmlformats.org/drawingml/2006/table">
-            <a:tbl>
-              <a:tblPr/>
-              <a:tblGrid>
-                <a:gridCol w="2804160"/>
-                <a:gridCol w="2804160"/>
-                <a:gridCol w="2804160"/>
-              </a:tblGrid>
-              <a:tr h="586740">
-                <a:tc>
-                  <a:txBody>
-                    <a:bodyPr/>
-                    <a:lstStyle/>
-                    <a:p>
-                      <a:pPr indent="0" marL="0">
-                        <a:buNone/>
-                      </a:pPr>
-                      <a:r>
-                        <a:rPr lang="en-US" sz="1100" b="1" dirty="0">
-                          <a:solidFill>
-                            <a:srgbClr val="FFFFFF"/>
-                          </a:solidFill>
-                          <a:latin typeface="Calibri" pitchFamily="34" charset="0"/>
-                          <a:ea typeface="Calibri" pitchFamily="34" charset="-122"/>
-                          <a:cs typeface="Calibri" pitchFamily="34" charset="-120"/>
-                        </a:rPr>
-                        <a:t>Concern</a:t>
-                      </a:r>
-                      <a:endParaRPr lang="en-US" sz="1100" dirty="0">
-                        <a:latin typeface="Calibri" charset="0"/>
-                        <a:ea typeface="Calibri" charset="0"/>
-                        <a:cs typeface="Calibri" charset="0"/>
-                      </a:endParaRPr>
-                    </a:p>
-                  </a:txBody>
-                  <a:tcPr marL="54864" marR="54864" marT="54864" marB="54864" anchor="ctr">
-                    <a:lnL w="6350" cap="flat" cmpd="sng" algn="ctr">
-                      <a:solidFill>
-                        <a:srgbClr val="D1D5DB"/>
-                      </a:solidFill>
-                      <a:prstDash val="solid"/>
-                      <a:round/>
-                      <a:headEnd type="none" w="med" len="med"/>
-                      <a:tailEnd type="none" w="med" len="med"/>
-                    </a:lnL>
-                    <a:lnR w="6350" cap="flat" cmpd="sng" algn="ctr">
-                      <a:solidFill>
-                        <a:srgbClr val="D1D5DB"/>
-                      </a:solidFill>
-                      <a:prstDash val="solid"/>
-                      <a:round/>
-                      <a:headEnd type="none" w="med" len="med"/>
-                      <a:tailEnd type="none" w="med" len="med"/>
-                    </a:lnR>
-                    <a:lnT w="6350" cap="flat" cmpd="sng" algn="ctr">
-                      <a:solidFill>
-                        <a:srgbClr val="D1D5DB"/>
-                      </a:solidFill>
-                      <a:prstDash val="solid"/>
-                      <a:round/>
-                      <a:headEnd type="none" w="med" len="med"/>
-                      <a:tailEnd type="none" w="med" len="med"/>
-                    </a:lnT>
-                    <a:lnB w="6350" cap="flat" cmpd="sng" algn="ctr">
-                      <a:solidFill>
-                        <a:srgbClr val="D1D5DB"/>
-                      </a:solidFill>
-                      <a:prstDash val="solid"/>
-                      <a:round/>
-                      <a:headEnd type="none" w="med" len="med"/>
-                      <a:tailEnd type="none" w="med" len="med"/>
-                    </a:lnB>
-                    <a:solidFill>
-                      <a:srgbClr val="1E2761"/>
-                    </a:solidFill>
-                  </a:tcPr>
-                </a:tc>
-                <a:tc>
-                  <a:txBody>
-                    <a:bodyPr/>
-                    <a:lstStyle/>
-                    <a:p>
-                      <a:pPr indent="0" marL="0">
-                        <a:buNone/>
-                      </a:pPr>
-                      <a:r>
-                        <a:rPr lang="en-US" sz="1100" b="1" dirty="0">
-                          <a:solidFill>
-                            <a:srgbClr val="FFFFFF"/>
-                          </a:solidFill>
-                          <a:latin typeface="Calibri" pitchFamily="34" charset="0"/>
-                          <a:ea typeface="Calibri" pitchFamily="34" charset="-122"/>
-                          <a:cs typeface="Calibri" pitchFamily="34" charset="-120"/>
-                        </a:rPr>
-                        <a:t>Run shape</a:t>
-                      </a:r>
-                      <a:endParaRPr lang="en-US" sz="1100" dirty="0">
-                        <a:latin typeface="Calibri" charset="0"/>
-                        <a:ea typeface="Calibri" charset="0"/>
-                        <a:cs typeface="Calibri" charset="0"/>
-                      </a:endParaRPr>
-                    </a:p>
-                  </a:txBody>
-                  <a:tcPr marL="54864" marR="54864" marT="54864" marB="54864" anchor="ctr">
-                    <a:lnL w="6350" cap="flat" cmpd="sng" algn="ctr">
-                      <a:solidFill>
-                        <a:srgbClr val="D1D5DB"/>
-                      </a:solidFill>
-                      <a:prstDash val="solid"/>
-                      <a:round/>
-                      <a:headEnd type="none" w="med" len="med"/>
-                      <a:tailEnd type="none" w="med" len="med"/>
-                    </a:lnL>
-                    <a:lnR w="6350" cap="flat" cmpd="sng" algn="ctr">
-                      <a:solidFill>
-                        <a:srgbClr val="D1D5DB"/>
-                      </a:solidFill>
-                      <a:prstDash val="solid"/>
-                      <a:round/>
-                      <a:headEnd type="none" w="med" len="med"/>
-                      <a:tailEnd type="none" w="med" len="med"/>
-                    </a:lnR>
-                    <a:lnT w="6350" cap="flat" cmpd="sng" algn="ctr">
-                      <a:solidFill>
-                        <a:srgbClr val="D1D5DB"/>
-                      </a:solidFill>
-                      <a:prstDash val="solid"/>
-                      <a:round/>
-                      <a:headEnd type="none" w="med" len="med"/>
-                      <a:tailEnd type="none" w="med" len="med"/>
-                    </a:lnT>
-                    <a:lnB w="6350" cap="flat" cmpd="sng" algn="ctr">
-                      <a:solidFill>
-                        <a:srgbClr val="D1D5DB"/>
-                      </a:solidFill>
-                      <a:prstDash val="solid"/>
-                      <a:round/>
-                      <a:headEnd type="none" w="med" len="med"/>
-                      <a:tailEnd type="none" w="med" len="med"/>
-                    </a:lnB>
-                    <a:solidFill>
-                      <a:srgbClr val="1E2761"/>
-                    </a:solidFill>
-                  </a:tcPr>
-                </a:tc>
-                <a:tc>
-                  <a:txBody>
-                    <a:bodyPr/>
-                    <a:lstStyle/>
-                    <a:p>
-                      <a:pPr indent="0" marL="0">
-                        <a:buNone/>
-                      </a:pPr>
-                      <a:r>
-                        <a:rPr lang="en-US" sz="1100" b="1" dirty="0">
-                          <a:solidFill>
-                            <a:srgbClr val="FFFFFF"/>
-                          </a:solidFill>
-                          <a:latin typeface="Calibri" pitchFamily="34" charset="0"/>
-                          <a:ea typeface="Calibri" pitchFamily="34" charset="-122"/>
-                          <a:cs typeface="Calibri" pitchFamily="34" charset="-120"/>
-                        </a:rPr>
-                        <a:t>Why</a:t>
-                      </a:r>
-                      <a:endParaRPr lang="en-US" sz="1100" dirty="0">
-                        <a:latin typeface="Calibri" charset="0"/>
-                        <a:ea typeface="Calibri" charset="0"/>
-                        <a:cs typeface="Calibri" charset="0"/>
-                      </a:endParaRPr>
-                    </a:p>
-                  </a:txBody>
-                  <a:tcPr marL="54864" marR="54864" marT="54864" marB="54864" anchor="ctr">
-                    <a:lnL w="6350" cap="flat" cmpd="sng" algn="ctr">
-                      <a:solidFill>
-                        <a:srgbClr val="D1D5DB"/>
-                      </a:solidFill>
-                      <a:prstDash val="solid"/>
-                      <a:round/>
-                      <a:headEnd type="none" w="med" len="med"/>
-                      <a:tailEnd type="none" w="med" len="med"/>
-                    </a:lnL>
-                    <a:lnR w="6350" cap="flat" cmpd="sng" algn="ctr">
-                      <a:solidFill>
-                        <a:srgbClr val="D1D5DB"/>
-                      </a:solidFill>
-                      <a:prstDash val="solid"/>
-                      <a:round/>
-                      <a:headEnd type="none" w="med" len="med"/>
-                      <a:tailEnd type="none" w="med" len="med"/>
-                    </a:lnR>
-                    <a:lnT w="6350" cap="flat" cmpd="sng" algn="ctr">
-                      <a:solidFill>
-                        <a:srgbClr val="D1D5DB"/>
-                      </a:solidFill>
-                      <a:prstDash val="solid"/>
-                      <a:round/>
-                      <a:headEnd type="none" w="med" len="med"/>
-                      <a:tailEnd type="none" w="med" len="med"/>
-                    </a:lnT>
-                    <a:lnB w="6350" cap="flat" cmpd="sng" algn="ctr">
-                      <a:solidFill>
-                        <a:srgbClr val="D1D5DB"/>
-                      </a:solidFill>
-                      <a:prstDash val="solid"/>
-                      <a:round/>
-                      <a:headEnd type="none" w="med" len="med"/>
-                      <a:tailEnd type="none" w="med" len="med"/>
-                    </a:lnB>
-                    <a:solidFill>
-                      <a:srgbClr val="1E2761"/>
-                    </a:solidFill>
-                  </a:tcPr>
-                </a:tc>
-              </a:tr>
-              <a:tr h="586740">
-                <a:tc>
-                  <a:txBody>
-                    <a:bodyPr/>
-                    <a:lstStyle/>
-                    <a:p>
-                      <a:pPr indent="0" marL="0">
-                        <a:buNone/>
-                      </a:pPr>
-                      <a:r>
-                        <a:rPr lang="en-US" sz="1100" dirty="0">
-                          <a:solidFill>
-                            <a:srgbClr val="212121"/>
-                          </a:solidFill>
-                          <a:latin typeface="Calibri" pitchFamily="34" charset="0"/>
-                          <a:ea typeface="Calibri" pitchFamily="34" charset="-122"/>
-                          <a:cs typeface="Calibri" pitchFamily="34" charset="-120"/>
-                        </a:rPr>
-                        <a:t>Structured schema</a:t>
-                      </a:r>
-                      <a:endParaRPr lang="en-US" sz="1100" dirty="0">
-                        <a:latin typeface="Calibri" charset="0"/>
-                        <a:ea typeface="Calibri" charset="0"/>
-                        <a:cs typeface="Calibri" charset="0"/>
-                      </a:endParaRPr>
-                    </a:p>
-                  </a:txBody>
-                  <a:tcPr marL="54864" marR="54864" marT="54864" marB="54864" anchor="ctr">
-                    <a:lnL w="6350" cap="flat" cmpd="sng" algn="ctr">
-                      <a:solidFill>
-                        <a:srgbClr val="D1D5DB"/>
-                      </a:solidFill>
-                      <a:prstDash val="solid"/>
-                      <a:round/>
-                      <a:headEnd type="none" w="med" len="med"/>
-                      <a:tailEnd type="none" w="med" len="med"/>
-                    </a:lnL>
-                    <a:lnR w="6350" cap="flat" cmpd="sng" algn="ctr">
-                      <a:solidFill>
-                        <a:srgbClr val="D1D5DB"/>
-                      </a:solidFill>
-                      <a:prstDash val="solid"/>
-                      <a:round/>
-                      <a:headEnd type="none" w="med" len="med"/>
-                      <a:tailEnd type="none" w="med" len="med"/>
-                    </a:lnR>
-                    <a:lnT w="6350" cap="flat" cmpd="sng" algn="ctr">
-                      <a:solidFill>
-                        <a:srgbClr val="D1D5DB"/>
-                      </a:solidFill>
-                      <a:prstDash val="solid"/>
-                      <a:round/>
-                      <a:headEnd type="none" w="med" len="med"/>
-                      <a:tailEnd type="none" w="med" len="med"/>
-                    </a:lnT>
-                    <a:lnB w="6350" cap="flat" cmpd="sng" algn="ctr">
-                      <a:solidFill>
-                        <a:srgbClr val="D1D5DB"/>
-                      </a:solidFill>
-                      <a:prstDash val="solid"/>
-                      <a:round/>
-                      <a:headEnd type="none" w="med" len="med"/>
-                      <a:tailEnd type="none" w="med" len="med"/>
-                    </a:lnB>
-                    <a:solidFill>
-                      <a:srgbClr val="FFFFFF"/>
-                    </a:solidFill>
-                  </a:tcPr>
-                </a:tc>
-                <a:tc>
-                  <a:txBody>
-                    <a:bodyPr/>
-                    <a:lstStyle/>
-                    <a:p>
-                      <a:pPr indent="0" marL="0">
-                        <a:buNone/>
-                      </a:pPr>
-                      <a:r>
-                        <a:rPr lang="en-US" sz="1100" dirty="0">
-                          <a:solidFill>
-                            <a:srgbClr val="212121"/>
-                          </a:solidFill>
-                          <a:latin typeface="Calibri" pitchFamily="34" charset="0"/>
-                          <a:ea typeface="Calibri" pitchFamily="34" charset="-122"/>
-                          <a:cs typeface="Calibri" pitchFamily="34" charset="-120"/>
-                        </a:rPr>
-                        <a:t>options={"response_format": TriageResult}</a:t>
-                      </a:r>
-                      <a:endParaRPr lang="en-US" sz="1100" dirty="0">
-                        <a:latin typeface="Calibri" charset="0"/>
-                        <a:ea typeface="Calibri" charset="0"/>
-                        <a:cs typeface="Calibri" charset="0"/>
-                      </a:endParaRPr>
-                    </a:p>
-                  </a:txBody>
-                  <a:tcPr marL="54864" marR="54864" marT="54864" marB="54864" anchor="ctr">
-                    <a:lnL w="6350" cap="flat" cmpd="sng" algn="ctr">
-                      <a:solidFill>
-                        <a:srgbClr val="D1D5DB"/>
-                      </a:solidFill>
-                      <a:prstDash val="solid"/>
-                      <a:round/>
-                      <a:headEnd type="none" w="med" len="med"/>
-                      <a:tailEnd type="none" w="med" len="med"/>
-                    </a:lnL>
-                    <a:lnR w="6350" cap="flat" cmpd="sng" algn="ctr">
-                      <a:solidFill>
-                        <a:srgbClr val="D1D5DB"/>
-                      </a:solidFill>
-                      <a:prstDash val="solid"/>
-                      <a:round/>
-                      <a:headEnd type="none" w="med" len="med"/>
-                      <a:tailEnd type="none" w="med" len="med"/>
-                    </a:lnR>
-                    <a:lnT w="6350" cap="flat" cmpd="sng" algn="ctr">
-                      <a:solidFill>
-                        <a:srgbClr val="D1D5DB"/>
-                      </a:solidFill>
-                      <a:prstDash val="solid"/>
-                      <a:round/>
-                      <a:headEnd type="none" w="med" len="med"/>
-                      <a:tailEnd type="none" w="med" len="med"/>
-                    </a:lnT>
-                    <a:lnB w="6350" cap="flat" cmpd="sng" algn="ctr">
-                      <a:solidFill>
-                        <a:srgbClr val="D1D5DB"/>
-                      </a:solidFill>
-                      <a:prstDash val="solid"/>
-                      <a:round/>
-                      <a:headEnd type="none" w="med" len="med"/>
-                      <a:tailEnd type="none" w="med" len="med"/>
-                    </a:lnB>
-                    <a:solidFill>
-                      <a:srgbClr val="FFFFFF"/>
-                    </a:solidFill>
-                  </a:tcPr>
-                </a:tc>
-                <a:tc>
-                  <a:txBody>
-                    <a:bodyPr/>
-                    <a:lstStyle/>
-                    <a:p>
-                      <a:pPr indent="0" marL="0">
-                        <a:buNone/>
-                      </a:pPr>
-                      <a:r>
-                        <a:rPr lang="en-US" sz="1100" dirty="0">
-                          <a:solidFill>
-                            <a:srgbClr val="212121"/>
-                          </a:solidFill>
-                          <a:latin typeface="Calibri" pitchFamily="34" charset="0"/>
-                          <a:ea typeface="Calibri" pitchFamily="34" charset="-122"/>
-                          <a:cs typeface="Calibri" pitchFamily="34" charset="-120"/>
-                        </a:rPr>
-                        <a:t>Chat-client option</a:t>
-                      </a:r>
-                      <a:endParaRPr lang="en-US" sz="1100" dirty="0">
-                        <a:latin typeface="Calibri" charset="0"/>
-                        <a:ea typeface="Calibri" charset="0"/>
-                        <a:cs typeface="Calibri" charset="0"/>
-                      </a:endParaRPr>
-                    </a:p>
-                  </a:txBody>
-                  <a:tcPr marL="54864" marR="54864" marT="54864" marB="54864" anchor="ctr">
-                    <a:lnL w="6350" cap="flat" cmpd="sng" algn="ctr">
-                      <a:solidFill>
-                        <a:srgbClr val="D1D5DB"/>
-                      </a:solidFill>
-                      <a:prstDash val="solid"/>
-                      <a:round/>
-                      <a:headEnd type="none" w="med" len="med"/>
-                      <a:tailEnd type="none" w="med" len="med"/>
-                    </a:lnL>
-                    <a:lnR w="6350" cap="flat" cmpd="sng" algn="ctr">
-                      <a:solidFill>
-                        <a:srgbClr val="D1D5DB"/>
-                      </a:solidFill>
-                      <a:prstDash val="solid"/>
-                      <a:round/>
-                      <a:headEnd type="none" w="med" len="med"/>
-                      <a:tailEnd type="none" w="med" len="med"/>
-                    </a:lnR>
-                    <a:lnT w="6350" cap="flat" cmpd="sng" algn="ctr">
-                      <a:solidFill>
-                        <a:srgbClr val="D1D5DB"/>
-                      </a:solidFill>
-                      <a:prstDash val="solid"/>
-                      <a:round/>
-                      <a:headEnd type="none" w="med" len="med"/>
-                      <a:tailEnd type="none" w="med" len="med"/>
-                    </a:lnT>
-                    <a:lnB w="6350" cap="flat" cmpd="sng" algn="ctr">
-                      <a:solidFill>
-                        <a:srgbClr val="D1D5DB"/>
-                      </a:solidFill>
-                      <a:prstDash val="solid"/>
-                      <a:round/>
-                      <a:headEnd type="none" w="med" len="med"/>
-                      <a:tailEnd type="none" w="med" len="med"/>
-                    </a:lnB>
-                    <a:solidFill>
-                      <a:srgbClr val="FFFFFF"/>
-                    </a:solidFill>
-                  </a:tcPr>
-                </a:tc>
-              </a:tr>
-              <a:tr h="586740">
-                <a:tc>
-                  <a:txBody>
-                    <a:bodyPr/>
-                    <a:lstStyle/>
-                    <a:p>
-                      <a:pPr indent="0" marL="0">
-                        <a:buNone/>
-                      </a:pPr>
-                      <a:r>
-                        <a:rPr lang="en-US" sz="1100" dirty="0">
-                          <a:solidFill>
-                            <a:srgbClr val="212121"/>
-                          </a:solidFill>
-                          <a:latin typeface="Calibri" pitchFamily="34" charset="0"/>
-                          <a:ea typeface="Calibri" pitchFamily="34" charset="-122"/>
-                          <a:cs typeface="Calibri" pitchFamily="34" charset="-120"/>
-                        </a:rPr>
-                        <a:t>Per-run tools</a:t>
-                      </a:r>
-                      <a:endParaRPr lang="en-US" sz="1100" dirty="0">
-                        <a:latin typeface="Calibri" charset="0"/>
-                        <a:ea typeface="Calibri" charset="0"/>
-                        <a:cs typeface="Calibri" charset="0"/>
-                      </a:endParaRPr>
-                    </a:p>
-                  </a:txBody>
-                  <a:tcPr marL="54864" marR="54864" marT="54864" marB="54864" anchor="ctr">
-                    <a:lnL w="6350" cap="flat" cmpd="sng" algn="ctr">
-                      <a:solidFill>
-                        <a:srgbClr val="D1D5DB"/>
-                      </a:solidFill>
-                      <a:prstDash val="solid"/>
-                      <a:round/>
-                      <a:headEnd type="none" w="med" len="med"/>
-                      <a:tailEnd type="none" w="med" len="med"/>
-                    </a:lnL>
-                    <a:lnR w="6350" cap="flat" cmpd="sng" algn="ctr">
-                      <a:solidFill>
-                        <a:srgbClr val="D1D5DB"/>
-                      </a:solidFill>
-                      <a:prstDash val="solid"/>
-                      <a:round/>
-                      <a:headEnd type="none" w="med" len="med"/>
-                      <a:tailEnd type="none" w="med" len="med"/>
-                    </a:lnR>
-                    <a:lnT w="6350" cap="flat" cmpd="sng" algn="ctr">
-                      <a:solidFill>
-                        <a:srgbClr val="D1D5DB"/>
-                      </a:solidFill>
-                      <a:prstDash val="solid"/>
-                      <a:round/>
-                      <a:headEnd type="none" w="med" len="med"/>
-                      <a:tailEnd type="none" w="med" len="med"/>
-                    </a:lnT>
-                    <a:lnB w="6350" cap="flat" cmpd="sng" algn="ctr">
-                      <a:solidFill>
-                        <a:srgbClr val="D1D5DB"/>
-                      </a:solidFill>
-                      <a:prstDash val="solid"/>
-                      <a:round/>
-                      <a:headEnd type="none" w="med" len="med"/>
-                      <a:tailEnd type="none" w="med" len="med"/>
-                    </a:lnB>
-                    <a:solidFill>
-                      <a:srgbClr val="F3F4F6"/>
-                    </a:solidFill>
-                  </a:tcPr>
-                </a:tc>
-                <a:tc>
-                  <a:txBody>
-                    <a:bodyPr/>
-                    <a:lstStyle/>
-                    <a:p>
-                      <a:pPr indent="0" marL="0">
-                        <a:buNone/>
-                      </a:pPr>
-                      <a:r>
-                        <a:rPr lang="en-US" sz="1100" dirty="0">
-                          <a:solidFill>
-                            <a:srgbClr val="212121"/>
-                          </a:solidFill>
-                          <a:latin typeface="Calibri" pitchFamily="34" charset="0"/>
-                          <a:ea typeface="Calibri" pitchFamily="34" charset="-122"/>
-                          <a:cs typeface="Calibri" pitchFamily="34" charset="-120"/>
-                        </a:rPr>
-                        <a:t>tools=[...]</a:t>
-                      </a:r>
-                      <a:endParaRPr lang="en-US" sz="1100" dirty="0">
-                        <a:latin typeface="Calibri" charset="0"/>
-                        <a:ea typeface="Calibri" charset="0"/>
-                        <a:cs typeface="Calibri" charset="0"/>
-                      </a:endParaRPr>
-                    </a:p>
-                  </a:txBody>
-                  <a:tcPr marL="54864" marR="54864" marT="54864" marB="54864" anchor="ctr">
-                    <a:lnL w="6350" cap="flat" cmpd="sng" algn="ctr">
-                      <a:solidFill>
-                        <a:srgbClr val="D1D5DB"/>
-                      </a:solidFill>
-                      <a:prstDash val="solid"/>
-                      <a:round/>
-                      <a:headEnd type="none" w="med" len="med"/>
-                      <a:tailEnd type="none" w="med" len="med"/>
-                    </a:lnL>
-                    <a:lnR w="6350" cap="flat" cmpd="sng" algn="ctr">
-                      <a:solidFill>
-                        <a:srgbClr val="D1D5DB"/>
-                      </a:solidFill>
-                      <a:prstDash val="solid"/>
-                      <a:round/>
-                      <a:headEnd type="none" w="med" len="med"/>
-                      <a:tailEnd type="none" w="med" len="med"/>
-                    </a:lnR>
-                    <a:lnT w="6350" cap="flat" cmpd="sng" algn="ctr">
-                      <a:solidFill>
-                        <a:srgbClr val="D1D5DB"/>
-                      </a:solidFill>
-                      <a:prstDash val="solid"/>
-                      <a:round/>
-                      <a:headEnd type="none" w="med" len="med"/>
-                      <a:tailEnd type="none" w="med" len="med"/>
-                    </a:lnT>
-                    <a:lnB w="6350" cap="flat" cmpd="sng" algn="ctr">
-                      <a:solidFill>
-                        <a:srgbClr val="D1D5DB"/>
-                      </a:solidFill>
-                      <a:prstDash val="solid"/>
-                      <a:round/>
-                      <a:headEnd type="none" w="med" len="med"/>
-                      <a:tailEnd type="none" w="med" len="med"/>
-                    </a:lnB>
-                    <a:solidFill>
-                      <a:srgbClr val="F3F4F6"/>
-                    </a:solidFill>
-                  </a:tcPr>
-                </a:tc>
-                <a:tc>
-                  <a:txBody>
-                    <a:bodyPr/>
-                    <a:lstStyle/>
-                    <a:p>
-                      <a:pPr indent="0" marL="0">
-                        <a:buNone/>
-                      </a:pPr>
-                      <a:r>
-                        <a:rPr lang="en-US" sz="1100" dirty="0">
-                          <a:solidFill>
-                            <a:srgbClr val="212121"/>
-                          </a:solidFill>
-                          <a:latin typeface="Calibri" pitchFamily="34" charset="0"/>
-                          <a:ea typeface="Calibri" pitchFamily="34" charset="-122"/>
-                          <a:cs typeface="Calibri" pitchFamily="34" charset="-120"/>
-                        </a:rPr>
-                        <a:t>Direct agent run kwarg</a:t>
-                      </a:r>
-                      <a:endParaRPr lang="en-US" sz="1100" dirty="0">
-                        <a:latin typeface="Calibri" charset="0"/>
-                        <a:ea typeface="Calibri" charset="0"/>
-                        <a:cs typeface="Calibri" charset="0"/>
-                      </a:endParaRPr>
-                    </a:p>
-                  </a:txBody>
-                  <a:tcPr marL="54864" marR="54864" marT="54864" marB="54864" anchor="ctr">
-                    <a:lnL w="6350" cap="flat" cmpd="sng" algn="ctr">
-                      <a:solidFill>
-                        <a:srgbClr val="D1D5DB"/>
-                      </a:solidFill>
-                      <a:prstDash val="solid"/>
-                      <a:round/>
-                      <a:headEnd type="none" w="med" len="med"/>
-                      <a:tailEnd type="none" w="med" len="med"/>
-                    </a:lnL>
-                    <a:lnR w="6350" cap="flat" cmpd="sng" algn="ctr">
-                      <a:solidFill>
-                        <a:srgbClr val="D1D5DB"/>
-                      </a:solidFill>
-                      <a:prstDash val="solid"/>
-                      <a:round/>
-                      <a:headEnd type="none" w="med" len="med"/>
-                      <a:tailEnd type="none" w="med" len="med"/>
-                    </a:lnR>
-                    <a:lnT w="6350" cap="flat" cmpd="sng" algn="ctr">
-                      <a:solidFill>
-                        <a:srgbClr val="D1D5DB"/>
-                      </a:solidFill>
-                      <a:prstDash val="solid"/>
-                      <a:round/>
-                      <a:headEnd type="none" w="med" len="med"/>
-                      <a:tailEnd type="none" w="med" len="med"/>
-                    </a:lnT>
-                    <a:lnB w="6350" cap="flat" cmpd="sng" algn="ctr">
-                      <a:solidFill>
-                        <a:srgbClr val="D1D5DB"/>
-                      </a:solidFill>
-                      <a:prstDash val="solid"/>
-                      <a:round/>
-                      <a:headEnd type="none" w="med" len="med"/>
-                      <a:tailEnd type="none" w="med" len="med"/>
-                    </a:lnB>
-                    <a:solidFill>
-                      <a:srgbClr val="F3F4F6"/>
-                    </a:solidFill>
-                  </a:tcPr>
-                </a:tc>
-              </a:tr>
-              <a:tr h="586740">
-                <a:tc>
-                  <a:txBody>
-                    <a:bodyPr/>
-                    <a:lstStyle/>
-                    <a:p>
-                      <a:pPr indent="0" marL="0">
-                        <a:buNone/>
-                      </a:pPr>
-                      <a:r>
-                        <a:rPr lang="en-US" sz="1100" dirty="0">
-                          <a:solidFill>
-                            <a:srgbClr val="212121"/>
-                          </a:solidFill>
-                          <a:latin typeface="Calibri" pitchFamily="34" charset="0"/>
-                          <a:ea typeface="Calibri" pitchFamily="34" charset="-122"/>
-                          <a:cs typeface="Calibri" pitchFamily="34" charset="-120"/>
-                        </a:rPr>
-                        <a:t>Per-run instructions</a:t>
-                      </a:r>
-                      <a:endParaRPr lang="en-US" sz="1100" dirty="0">
-                        <a:latin typeface="Calibri" charset="0"/>
-                        <a:ea typeface="Calibri" charset="0"/>
-                        <a:cs typeface="Calibri" charset="0"/>
-                      </a:endParaRPr>
-                    </a:p>
-                  </a:txBody>
-                  <a:tcPr marL="54864" marR="54864" marT="54864" marB="54864" anchor="ctr">
-                    <a:lnL w="6350" cap="flat" cmpd="sng" algn="ctr">
-                      <a:solidFill>
-                        <a:srgbClr val="D1D5DB"/>
-                      </a:solidFill>
-                      <a:prstDash val="solid"/>
-                      <a:round/>
-                      <a:headEnd type="none" w="med" len="med"/>
-                      <a:tailEnd type="none" w="med" len="med"/>
-                    </a:lnL>
-                    <a:lnR w="6350" cap="flat" cmpd="sng" algn="ctr">
-                      <a:solidFill>
-                        <a:srgbClr val="D1D5DB"/>
-                      </a:solidFill>
-                      <a:prstDash val="solid"/>
-                      <a:round/>
-                      <a:headEnd type="none" w="med" len="med"/>
-                      <a:tailEnd type="none" w="med" len="med"/>
-                    </a:lnR>
-                    <a:lnT w="6350" cap="flat" cmpd="sng" algn="ctr">
-                      <a:solidFill>
-                        <a:srgbClr val="D1D5DB"/>
-                      </a:solidFill>
-                      <a:prstDash val="solid"/>
-                      <a:round/>
-                      <a:headEnd type="none" w="med" len="med"/>
-                      <a:tailEnd type="none" w="med" len="med"/>
-                    </a:lnT>
-                    <a:lnB w="6350" cap="flat" cmpd="sng" algn="ctr">
-                      <a:solidFill>
-                        <a:srgbClr val="D1D5DB"/>
-                      </a:solidFill>
-                      <a:prstDash val="solid"/>
-                      <a:round/>
-                      <a:headEnd type="none" w="med" len="med"/>
-                      <a:tailEnd type="none" w="med" len="med"/>
-                    </a:lnB>
-                    <a:solidFill>
-                      <a:srgbClr val="FFFFFF"/>
-                    </a:solidFill>
-                  </a:tcPr>
-                </a:tc>
-                <a:tc>
-                  <a:txBody>
-                    <a:bodyPr/>
-                    <a:lstStyle/>
-                    <a:p>
-                      <a:pPr indent="0" marL="0">
-                        <a:buNone/>
-                      </a:pPr>
-                      <a:r>
-                        <a:rPr lang="en-US" sz="1100" dirty="0">
-                          <a:solidFill>
-                            <a:srgbClr val="212121"/>
-                          </a:solidFill>
-                          <a:latin typeface="Calibri" pitchFamily="34" charset="0"/>
-                          <a:ea typeface="Calibri" pitchFamily="34" charset="-122"/>
-                          <a:cs typeface="Calibri" pitchFamily="34" charset="-120"/>
-                        </a:rPr>
-                        <a:t>instructions="..."</a:t>
-                      </a:r>
-                      <a:endParaRPr lang="en-US" sz="1100" dirty="0">
-                        <a:latin typeface="Calibri" charset="0"/>
-                        <a:ea typeface="Calibri" charset="0"/>
-                        <a:cs typeface="Calibri" charset="0"/>
-                      </a:endParaRPr>
-                    </a:p>
-                  </a:txBody>
-                  <a:tcPr marL="54864" marR="54864" marT="54864" marB="54864" anchor="ctr">
-                    <a:lnL w="6350" cap="flat" cmpd="sng" algn="ctr">
-                      <a:solidFill>
-                        <a:srgbClr val="D1D5DB"/>
-                      </a:solidFill>
-                      <a:prstDash val="solid"/>
-                      <a:round/>
-                      <a:headEnd type="none" w="med" len="med"/>
-                      <a:tailEnd type="none" w="med" len="med"/>
-                    </a:lnL>
-                    <a:lnR w="6350" cap="flat" cmpd="sng" algn="ctr">
-                      <a:solidFill>
-                        <a:srgbClr val="D1D5DB"/>
-                      </a:solidFill>
-                      <a:prstDash val="solid"/>
-                      <a:round/>
-                      <a:headEnd type="none" w="med" len="med"/>
-                      <a:tailEnd type="none" w="med" len="med"/>
-                    </a:lnR>
-                    <a:lnT w="6350" cap="flat" cmpd="sng" algn="ctr">
-                      <a:solidFill>
-                        <a:srgbClr val="D1D5DB"/>
-                      </a:solidFill>
-                      <a:prstDash val="solid"/>
-                      <a:round/>
-                      <a:headEnd type="none" w="med" len="med"/>
-                      <a:tailEnd type="none" w="med" len="med"/>
-                    </a:lnT>
-                    <a:lnB w="6350" cap="flat" cmpd="sng" algn="ctr">
-                      <a:solidFill>
-                        <a:srgbClr val="D1D5DB"/>
-                      </a:solidFill>
-                      <a:prstDash val="solid"/>
-                      <a:round/>
-                      <a:headEnd type="none" w="med" len="med"/>
-                      <a:tailEnd type="none" w="med" len="med"/>
-                    </a:lnB>
-                    <a:solidFill>
-                      <a:srgbClr val="FFFFFF"/>
-                    </a:solidFill>
-                  </a:tcPr>
-                </a:tc>
-                <a:tc>
-                  <a:txBody>
-                    <a:bodyPr/>
-                    <a:lstStyle/>
-                    <a:p>
-                      <a:pPr indent="0" marL="0">
-                        <a:buNone/>
-                      </a:pPr>
-                      <a:r>
-                        <a:rPr lang="en-US" sz="1100" dirty="0">
-                          <a:solidFill>
-                            <a:srgbClr val="212121"/>
-                          </a:solidFill>
-                          <a:latin typeface="Calibri" pitchFamily="34" charset="0"/>
-                          <a:ea typeface="Calibri" pitchFamily="34" charset="-122"/>
-                          <a:cs typeface="Calibri" pitchFamily="34" charset="-120"/>
-                        </a:rPr>
-                        <a:t>Direct agent run kwarg</a:t>
-                      </a:r>
-                      <a:endParaRPr lang="en-US" sz="1100" dirty="0">
-                        <a:latin typeface="Calibri" charset="0"/>
-                        <a:ea typeface="Calibri" charset="0"/>
-                        <a:cs typeface="Calibri" charset="0"/>
-                      </a:endParaRPr>
-                    </a:p>
-                  </a:txBody>
-                  <a:tcPr marL="54864" marR="54864" marT="54864" marB="54864" anchor="ctr">
-                    <a:lnL w="6350" cap="flat" cmpd="sng" algn="ctr">
-                      <a:solidFill>
-                        <a:srgbClr val="D1D5DB"/>
-                      </a:solidFill>
-                      <a:prstDash val="solid"/>
-                      <a:round/>
-                      <a:headEnd type="none" w="med" len="med"/>
-                      <a:tailEnd type="none" w="med" len="med"/>
-                    </a:lnL>
-                    <a:lnR w="6350" cap="flat" cmpd="sng" algn="ctr">
-                      <a:solidFill>
-                        <a:srgbClr val="D1D5DB"/>
-                      </a:solidFill>
-                      <a:prstDash val="solid"/>
-                      <a:round/>
-                      <a:headEnd type="none" w="med" len="med"/>
-                      <a:tailEnd type="none" w="med" len="med"/>
-                    </a:lnR>
-                    <a:lnT w="6350" cap="flat" cmpd="sng" algn="ctr">
-                      <a:solidFill>
-                        <a:srgbClr val="D1D5DB"/>
-                      </a:solidFill>
-                      <a:prstDash val="solid"/>
-                      <a:round/>
-                      <a:headEnd type="none" w="med" len="med"/>
-                      <a:tailEnd type="none" w="med" len="med"/>
-                    </a:lnT>
-                    <a:lnB w="6350" cap="flat" cmpd="sng" algn="ctr">
-                      <a:solidFill>
-                        <a:srgbClr val="D1D5DB"/>
-                      </a:solidFill>
-                      <a:prstDash val="solid"/>
-                      <a:round/>
-                      <a:headEnd type="none" w="med" len="med"/>
-                      <a:tailEnd type="none" w="med" len="med"/>
-                    </a:lnB>
-                    <a:solidFill>
-                      <a:srgbClr val="FFFFFF"/>
-                    </a:solidFill>
-                  </a:tcPr>
-                </a:tc>
-              </a:tr>
-              <a:tr h="586740">
-                <a:tc>
-                  <a:txBody>
-                    <a:bodyPr/>
-                    <a:lstStyle/>
-                    <a:p>
-                      <a:pPr indent="0" marL="0">
-                        <a:buNone/>
-                      </a:pPr>
-                      <a:r>
-                        <a:rPr lang="en-US" sz="1100" dirty="0">
-                          <a:solidFill>
-                            <a:srgbClr val="212121"/>
-                          </a:solidFill>
-                          <a:latin typeface="Calibri" pitchFamily="34" charset="0"/>
-                          <a:ea typeface="Calibri" pitchFamily="34" charset="-122"/>
-                          <a:cs typeface="Calibri" pitchFamily="34" charset="-120"/>
-                        </a:rPr>
-                        <a:t>Streaming</a:t>
-                      </a:r>
-                      <a:endParaRPr lang="en-US" sz="1100" dirty="0">
-                        <a:latin typeface="Calibri" charset="0"/>
-                        <a:ea typeface="Calibri" charset="0"/>
-                        <a:cs typeface="Calibri" charset="0"/>
-                      </a:endParaRPr>
-                    </a:p>
-                  </a:txBody>
-                  <a:tcPr marL="54864" marR="54864" marT="54864" marB="54864" anchor="ctr">
-                    <a:lnL w="6350" cap="flat" cmpd="sng" algn="ctr">
-                      <a:solidFill>
-                        <a:srgbClr val="D1D5DB"/>
-                      </a:solidFill>
-                      <a:prstDash val="solid"/>
-                      <a:round/>
-                      <a:headEnd type="none" w="med" len="med"/>
-                      <a:tailEnd type="none" w="med" len="med"/>
-                    </a:lnL>
-                    <a:lnR w="6350" cap="flat" cmpd="sng" algn="ctr">
-                      <a:solidFill>
-                        <a:srgbClr val="D1D5DB"/>
-                      </a:solidFill>
-                      <a:prstDash val="solid"/>
-                      <a:round/>
-                      <a:headEnd type="none" w="med" len="med"/>
-                      <a:tailEnd type="none" w="med" len="med"/>
-                    </a:lnR>
-                    <a:lnT w="6350" cap="flat" cmpd="sng" algn="ctr">
-                      <a:solidFill>
-                        <a:srgbClr val="D1D5DB"/>
-                      </a:solidFill>
-                      <a:prstDash val="solid"/>
-                      <a:round/>
-                      <a:headEnd type="none" w="med" len="med"/>
-                      <a:tailEnd type="none" w="med" len="med"/>
-                    </a:lnT>
-                    <a:lnB w="6350" cap="flat" cmpd="sng" algn="ctr">
-                      <a:solidFill>
-                        <a:srgbClr val="D1D5DB"/>
-                      </a:solidFill>
-                      <a:prstDash val="solid"/>
-                      <a:round/>
-                      <a:headEnd type="none" w="med" len="med"/>
-                      <a:tailEnd type="none" w="med" len="med"/>
-                    </a:lnB>
-                    <a:solidFill>
-                      <a:srgbClr val="F3F4F6"/>
-                    </a:solidFill>
-                  </a:tcPr>
-                </a:tc>
-                <a:tc>
-                  <a:txBody>
-                    <a:bodyPr/>
-                    <a:lstStyle/>
-                    <a:p>
-                      <a:pPr indent="0" marL="0">
-                        <a:buNone/>
-                      </a:pPr>
-                      <a:r>
-                        <a:rPr lang="en-US" sz="1100" dirty="0">
-                          <a:solidFill>
-                            <a:srgbClr val="212121"/>
-                          </a:solidFill>
-                          <a:latin typeface="Calibri" pitchFamily="34" charset="0"/>
-                          <a:ea typeface="Calibri" pitchFamily="34" charset="-122"/>
-                          <a:cs typeface="Calibri" pitchFamily="34" charset="-120"/>
-                        </a:rPr>
-                        <a:t>stream=True</a:t>
-                      </a:r>
-                      <a:endParaRPr lang="en-US" sz="1100" dirty="0">
-                        <a:latin typeface="Calibri" charset="0"/>
-                        <a:ea typeface="Calibri" charset="0"/>
-                        <a:cs typeface="Calibri" charset="0"/>
-                      </a:endParaRPr>
-                    </a:p>
-                  </a:txBody>
-                  <a:tcPr marL="54864" marR="54864" marT="54864" marB="54864" anchor="ctr">
-                    <a:lnL w="6350" cap="flat" cmpd="sng" algn="ctr">
-                      <a:solidFill>
-                        <a:srgbClr val="D1D5DB"/>
-                      </a:solidFill>
-                      <a:prstDash val="solid"/>
-                      <a:round/>
-                      <a:headEnd type="none" w="med" len="med"/>
-                      <a:tailEnd type="none" w="med" len="med"/>
-                    </a:lnL>
-                    <a:lnR w="6350" cap="flat" cmpd="sng" algn="ctr">
-                      <a:solidFill>
-                        <a:srgbClr val="D1D5DB"/>
-                      </a:solidFill>
-                      <a:prstDash val="solid"/>
-                      <a:round/>
-                      <a:headEnd type="none" w="med" len="med"/>
-                      <a:tailEnd type="none" w="med" len="med"/>
-                    </a:lnR>
-                    <a:lnT w="6350" cap="flat" cmpd="sng" algn="ctr">
-                      <a:solidFill>
-                        <a:srgbClr val="D1D5DB"/>
-                      </a:solidFill>
-                      <a:prstDash val="solid"/>
-                      <a:round/>
-                      <a:headEnd type="none" w="med" len="med"/>
-                      <a:tailEnd type="none" w="med" len="med"/>
-                    </a:lnT>
-                    <a:lnB w="6350" cap="flat" cmpd="sng" algn="ctr">
-                      <a:solidFill>
-                        <a:srgbClr val="D1D5DB"/>
-                      </a:solidFill>
-                      <a:prstDash val="solid"/>
-                      <a:round/>
-                      <a:headEnd type="none" w="med" len="med"/>
-                      <a:tailEnd type="none" w="med" len="med"/>
-                    </a:lnB>
-                    <a:solidFill>
-                      <a:srgbClr val="F3F4F6"/>
-                    </a:solidFill>
-                  </a:tcPr>
-                </a:tc>
-                <a:tc>
-                  <a:txBody>
-                    <a:bodyPr/>
-                    <a:lstStyle/>
-                    <a:p>
-                      <a:pPr indent="0" marL="0">
-                        <a:buNone/>
-                      </a:pPr>
-                      <a:r>
-                        <a:rPr lang="en-US" sz="1100" dirty="0">
-                          <a:solidFill>
-                            <a:srgbClr val="212121"/>
-                          </a:solidFill>
-                          <a:latin typeface="Calibri" pitchFamily="34" charset="0"/>
-                          <a:ea typeface="Calibri" pitchFamily="34" charset="-122"/>
-                          <a:cs typeface="Calibri" pitchFamily="34" charset="-120"/>
-                        </a:rPr>
-                        <a:t>Selects ResponseStream</a:t>
-                      </a:r>
-                      <a:endParaRPr lang="en-US" sz="1100" dirty="0">
-                        <a:latin typeface="Calibri" charset="0"/>
-                        <a:ea typeface="Calibri" charset="0"/>
-                        <a:cs typeface="Calibri" charset="0"/>
-                      </a:endParaRPr>
-                    </a:p>
-                  </a:txBody>
-                  <a:tcPr marL="54864" marR="54864" marT="54864" marB="54864" anchor="ctr">
-                    <a:lnL w="6350" cap="flat" cmpd="sng" algn="ctr">
-                      <a:solidFill>
-                        <a:srgbClr val="D1D5DB"/>
-                      </a:solidFill>
-                      <a:prstDash val="solid"/>
-                      <a:round/>
-                      <a:headEnd type="none" w="med" len="med"/>
-                      <a:tailEnd type="none" w="med" len="med"/>
-                    </a:lnL>
-                    <a:lnR w="6350" cap="flat" cmpd="sng" algn="ctr">
-                      <a:solidFill>
-                        <a:srgbClr val="D1D5DB"/>
-                      </a:solidFill>
-                      <a:prstDash val="solid"/>
-                      <a:round/>
-                      <a:headEnd type="none" w="med" len="med"/>
-                      <a:tailEnd type="none" w="med" len="med"/>
-                    </a:lnR>
-                    <a:lnT w="6350" cap="flat" cmpd="sng" algn="ctr">
-                      <a:solidFill>
-                        <a:srgbClr val="D1D5DB"/>
-                      </a:solidFill>
-                      <a:prstDash val="solid"/>
-                      <a:round/>
-                      <a:headEnd type="none" w="med" len="med"/>
-                      <a:tailEnd type="none" w="med" len="med"/>
-                    </a:lnT>
-                    <a:lnB w="6350" cap="flat" cmpd="sng" algn="ctr">
-                      <a:solidFill>
-                        <a:srgbClr val="D1D5DB"/>
-                      </a:solidFill>
-                      <a:prstDash val="solid"/>
-                      <a:round/>
-                      <a:headEnd type="none" w="med" len="med"/>
-                      <a:tailEnd type="none" w="med" len="med"/>
-                    </a:lnB>
-                    <a:solidFill>
-                      <a:srgbClr val="F3F4F6"/>
-                    </a:solidFill>
-                  </a:tcPr>
-                </a:tc>
-              </a:tr>
-              <a:tr h="586740">
-                <a:tc>
-                  <a:txBody>
-                    <a:bodyPr/>
-                    <a:lstStyle/>
-                    <a:p>
-                      <a:pPr indent="0" marL="0">
-                        <a:buNone/>
-                      </a:pPr>
-                      <a:r>
-                        <a:rPr lang="en-US" sz="1100" dirty="0">
-                          <a:solidFill>
-                            <a:srgbClr val="212121"/>
-                          </a:solidFill>
-                          <a:latin typeface="Calibri" pitchFamily="34" charset="0"/>
-                          <a:ea typeface="Calibri" pitchFamily="34" charset="-122"/>
-                          <a:cs typeface="Calibri" pitchFamily="34" charset="-120"/>
-                        </a:rPr>
-                        <a:t>Conversation continuity</a:t>
-                      </a:r>
-                      <a:endParaRPr lang="en-US" sz="1100" dirty="0">
-                        <a:latin typeface="Calibri" charset="0"/>
-                        <a:ea typeface="Calibri" charset="0"/>
-                        <a:cs typeface="Calibri" charset="0"/>
-                      </a:endParaRPr>
-                    </a:p>
-                  </a:txBody>
-                  <a:tcPr marL="54864" marR="54864" marT="54864" marB="54864" anchor="ctr">
-                    <a:lnL w="6350" cap="flat" cmpd="sng" algn="ctr">
-                      <a:solidFill>
-                        <a:srgbClr val="D1D5DB"/>
-                      </a:solidFill>
-                      <a:prstDash val="solid"/>
-                      <a:round/>
-                      <a:headEnd type="none" w="med" len="med"/>
-                      <a:tailEnd type="none" w="med" len="med"/>
-                    </a:lnL>
-                    <a:lnR w="6350" cap="flat" cmpd="sng" algn="ctr">
-                      <a:solidFill>
-                        <a:srgbClr val="D1D5DB"/>
-                      </a:solidFill>
-                      <a:prstDash val="solid"/>
-                      <a:round/>
-                      <a:headEnd type="none" w="med" len="med"/>
-                      <a:tailEnd type="none" w="med" len="med"/>
-                    </a:lnR>
-                    <a:lnT w="6350" cap="flat" cmpd="sng" algn="ctr">
-                      <a:solidFill>
-                        <a:srgbClr val="D1D5DB"/>
-                      </a:solidFill>
-                      <a:prstDash val="solid"/>
-                      <a:round/>
-                      <a:headEnd type="none" w="med" len="med"/>
-                      <a:tailEnd type="none" w="med" len="med"/>
-                    </a:lnT>
-                    <a:lnB w="6350" cap="flat" cmpd="sng" algn="ctr">
-                      <a:solidFill>
-                        <a:srgbClr val="D1D5DB"/>
-                      </a:solidFill>
-                      <a:prstDash val="solid"/>
-                      <a:round/>
-                      <a:headEnd type="none" w="med" len="med"/>
-                      <a:tailEnd type="none" w="med" len="med"/>
-                    </a:lnB>
-                    <a:solidFill>
-                      <a:srgbClr val="FFFFFF"/>
-                    </a:solidFill>
-                  </a:tcPr>
-                </a:tc>
-                <a:tc>
-                  <a:txBody>
-                    <a:bodyPr/>
-                    <a:lstStyle/>
-                    <a:p>
-                      <a:pPr indent="0" marL="0">
-                        <a:buNone/>
-                      </a:pPr>
-                      <a:r>
-                        <a:rPr lang="en-US" sz="1100" dirty="0">
-                          <a:solidFill>
-                            <a:srgbClr val="212121"/>
-                          </a:solidFill>
-                          <a:latin typeface="Calibri" pitchFamily="34" charset="0"/>
-                          <a:ea typeface="Calibri" pitchFamily="34" charset="-122"/>
-                          <a:cs typeface="Calibri" pitchFamily="34" charset="-120"/>
-                        </a:rPr>
-                        <a:t>session=session</a:t>
-                      </a:r>
-                      <a:endParaRPr lang="en-US" sz="1100" dirty="0">
-                        <a:latin typeface="Calibri" charset="0"/>
-                        <a:ea typeface="Calibri" charset="0"/>
-                        <a:cs typeface="Calibri" charset="0"/>
-                      </a:endParaRPr>
-                    </a:p>
-                  </a:txBody>
-                  <a:tcPr marL="54864" marR="54864" marT="54864" marB="54864" anchor="ctr">
-                    <a:lnL w="6350" cap="flat" cmpd="sng" algn="ctr">
-                      <a:solidFill>
-                        <a:srgbClr val="D1D5DB"/>
-                      </a:solidFill>
-                      <a:prstDash val="solid"/>
-                      <a:round/>
-                      <a:headEnd type="none" w="med" len="med"/>
-                      <a:tailEnd type="none" w="med" len="med"/>
-                    </a:lnL>
-                    <a:lnR w="6350" cap="flat" cmpd="sng" algn="ctr">
-                      <a:solidFill>
-                        <a:srgbClr val="D1D5DB"/>
-                      </a:solidFill>
-                      <a:prstDash val="solid"/>
-                      <a:round/>
-                      <a:headEnd type="none" w="med" len="med"/>
-                      <a:tailEnd type="none" w="med" len="med"/>
-                    </a:lnR>
-                    <a:lnT w="6350" cap="flat" cmpd="sng" algn="ctr">
-                      <a:solidFill>
-                        <a:srgbClr val="D1D5DB"/>
-                      </a:solidFill>
-                      <a:prstDash val="solid"/>
-                      <a:round/>
-                      <a:headEnd type="none" w="med" len="med"/>
-                      <a:tailEnd type="none" w="med" len="med"/>
-                    </a:lnT>
-                    <a:lnB w="6350" cap="flat" cmpd="sng" algn="ctr">
-                      <a:solidFill>
-                        <a:srgbClr val="D1D5DB"/>
-                      </a:solidFill>
-                      <a:prstDash val="solid"/>
-                      <a:round/>
-                      <a:headEnd type="none" w="med" len="med"/>
-                      <a:tailEnd type="none" w="med" len="med"/>
-                    </a:lnB>
-                    <a:solidFill>
-                      <a:srgbClr val="FFFFFF"/>
-                    </a:solidFill>
-                  </a:tcPr>
-                </a:tc>
-                <a:tc>
-                  <a:txBody>
-                    <a:bodyPr/>
-                    <a:lstStyle/>
-                    <a:p>
-                      <a:pPr indent="0" marL="0">
-                        <a:buNone/>
-                      </a:pPr>
-                      <a:r>
-                        <a:rPr lang="en-US" sz="1100" dirty="0">
-                          <a:solidFill>
-                            <a:srgbClr val="212121"/>
-                          </a:solidFill>
-                          <a:latin typeface="Calibri" pitchFamily="34" charset="0"/>
-                          <a:ea typeface="Calibri" pitchFamily="34" charset="-122"/>
-                          <a:cs typeface="Calibri" pitchFamily="34" charset="-120"/>
-                        </a:rPr>
-                        <a:t>Reuses AgentSession</a:t>
-                      </a:r>
-                      <a:endParaRPr lang="en-US" sz="1100" dirty="0">
-                        <a:latin typeface="Calibri" charset="0"/>
-                        <a:ea typeface="Calibri" charset="0"/>
-                        <a:cs typeface="Calibri" charset="0"/>
-                      </a:endParaRPr>
-                    </a:p>
-                  </a:txBody>
-                  <a:tcPr marL="54864" marR="54864" marT="54864" marB="54864" anchor="ctr">
-                    <a:lnL w="6350" cap="flat" cmpd="sng" algn="ctr">
-                      <a:solidFill>
-                        <a:srgbClr val="D1D5DB"/>
-                      </a:solidFill>
-                      <a:prstDash val="solid"/>
-                      <a:round/>
-                      <a:headEnd type="none" w="med" len="med"/>
-                      <a:tailEnd type="none" w="med" len="med"/>
-                    </a:lnL>
-                    <a:lnR w="6350" cap="flat" cmpd="sng" algn="ctr">
-                      <a:solidFill>
-                        <a:srgbClr val="D1D5DB"/>
-                      </a:solidFill>
-                      <a:prstDash val="solid"/>
-                      <a:round/>
-                      <a:headEnd type="none" w="med" len="med"/>
-                      <a:tailEnd type="none" w="med" len="med"/>
-                    </a:lnR>
-                    <a:lnT w="6350" cap="flat" cmpd="sng" algn="ctr">
-                      <a:solidFill>
-                        <a:srgbClr val="D1D5DB"/>
-                      </a:solidFill>
-                      <a:prstDash val="solid"/>
-                      <a:round/>
-                      <a:headEnd type="none" w="med" len="med"/>
-                      <a:tailEnd type="none" w="med" len="med"/>
-                    </a:lnT>
-                    <a:lnB w="6350" cap="flat" cmpd="sng" algn="ctr">
-                      <a:solidFill>
-                        <a:srgbClr val="D1D5DB"/>
-                      </a:solidFill>
-                      <a:prstDash val="solid"/>
-                      <a:round/>
-                      <a:headEnd type="none" w="med" len="med"/>
-                      <a:tailEnd type="none" w="med" len="med"/>
-                    </a:lnB>
-                    <a:solidFill>
-                      <a:srgbClr val="FFFFFF"/>
-                    </a:solidFill>
-                  </a:tcPr>
-                </a:tc>
-              </a:tr>
-            </a:tbl>
-          </a:graphicData>
-        </a:graphic>
-      </p:graphicFrame>
-      <p:sp>
-        <p:nvSpPr>
-          <p:cNvPr id="6" name="Shape 3"/>
+      <p:sp>
+        <p:nvSpPr>
+          <p:cNvPr id="5" name="Shape 3"/>
+          <p:cNvSpPr/>
+          <p:nvPr/>
+        </p:nvSpPr>
+        <p:spPr>
+          <a:xfrm>
+            <a:off x="365760" y="1115568"/>
+            <a:ext cx="8412480" cy="2980944"/>
+          </a:xfrm>
+          <a:prstGeom prst="rect">
+            <a:avLst/>
+          </a:prstGeom>
+          <a:solidFill>
+            <a:srgbClr val="1D1E22"/>
+          </a:solidFill>
+          <a:ln w="9525">
+            <a:solidFill>
+              <a:srgbClr val="2A2B2E"/>
+            </a:solidFill>
+            <a:prstDash val="solid"/>
+          </a:ln>
+        </p:spPr>
+      </p:sp>
+      <p:sp>
+        <p:nvSpPr>
+          <p:cNvPr id="6" name="Text 4"/>
+          <p:cNvSpPr/>
+          <p:nvPr/>
+        </p:nvSpPr>
+        <p:spPr>
+          <a:xfrm>
+            <a:off x="502920" y="1207008"/>
+            <a:ext cx="8138160" cy="2798064"/>
+          </a:xfrm>
+          <a:prstGeom prst="rect">
+            <a:avLst/>
+          </a:prstGeom>
+          <a:noFill/>
+          <a:ln/>
+        </p:spPr>
+        <p:txBody>
+          <a:bodyPr wrap="square" lIns="0" tIns="0" rIns="0" bIns="0" rtlCol="0" anchor="t">
+            <a:normAutofit/>
+          </a:bodyPr>
+          <a:lstStyle/>
+          <a:p>
+            <a:pPr indent="0" marL="0">
+              <a:buNone/>
+            </a:pPr>
+            <a:r>
+              <a:rPr lang="en-US" sz="1280" dirty="0">
+                <a:solidFill>
+                  <a:srgbClr val="A996B6"/>
+                </a:solidFill>
+                <a:latin typeface="Consolas" pitchFamily="34" charset="0"/>
+                <a:ea typeface="Consolas" pitchFamily="34" charset="-122"/>
+                <a:cs typeface="Consolas" pitchFamily="34" charset="-120"/>
+              </a:rPr>
+              <a:t>from</a:t>
+            </a:r>
+            <a:pPr indent="0" marL="0">
+              <a:buNone/>
+            </a:pPr>
+            <a:r>
+              <a:rPr lang="en-US" sz="1280" dirty="0">
+                <a:solidFill>
+                  <a:srgbClr val="FFFFFF"/>
+                </a:solidFill>
+                <a:latin typeface="Consolas" pitchFamily="34" charset="0"/>
+                <a:ea typeface="Consolas" pitchFamily="34" charset="-122"/>
+                <a:cs typeface="Consolas" pitchFamily="34" charset="-120"/>
+              </a:rPr>
+              <a:t> pydantic </a:t>
+            </a:r>
+            <a:pPr indent="0" marL="0">
+              <a:buNone/>
+            </a:pPr>
+            <a:r>
+              <a:rPr lang="en-US" sz="1280" dirty="0">
+                <a:solidFill>
+                  <a:srgbClr val="A996B6"/>
+                </a:solidFill>
+                <a:latin typeface="Consolas" pitchFamily="34" charset="0"/>
+                <a:ea typeface="Consolas" pitchFamily="34" charset="-122"/>
+                <a:cs typeface="Consolas" pitchFamily="34" charset="-120"/>
+              </a:rPr>
+              <a:t>import</a:t>
+            </a:r>
+            <a:pPr indent="0" marL="0">
+              <a:buNone/>
+            </a:pPr>
+            <a:r>
+              <a:rPr lang="en-US" sz="1280" dirty="0">
+                <a:solidFill>
+                  <a:srgbClr val="FFFFFF"/>
+                </a:solidFill>
+                <a:latin typeface="Consolas" pitchFamily="34" charset="0"/>
+                <a:ea typeface="Consolas" pitchFamily="34" charset="-122"/>
+                <a:cs typeface="Consolas" pitchFamily="34" charset="-120"/>
+              </a:rPr>
+              <a:t> BaseModel</a:t>
+            </a:r>
+            <a:endParaRPr lang="en-US" sz="1280" dirty="0"/>
+          </a:p>
+          <a:p>
+            <a:pPr indent="0" marL="0">
+              <a:buNone/>
+            </a:pPr>
+            <a:endParaRPr lang="en-US" sz="1280" dirty="0"/>
+          </a:p>
+          <a:p>
+            <a:pPr indent="0" marL="0">
+              <a:buNone/>
+            </a:pPr>
+            <a:r>
+              <a:rPr lang="en-US" sz="1280" dirty="0">
+                <a:solidFill>
+                  <a:srgbClr val="A996B6"/>
+                </a:solidFill>
+                <a:latin typeface="Consolas" pitchFamily="34" charset="0"/>
+                <a:ea typeface="Consolas" pitchFamily="34" charset="-122"/>
+                <a:cs typeface="Consolas" pitchFamily="34" charset="-120"/>
+              </a:rPr>
+              <a:t>class</a:t>
+            </a:r>
+            <a:pPr indent="0" marL="0">
+              <a:buNone/>
+            </a:pPr>
+            <a:r>
+              <a:rPr lang="en-US" sz="1280" dirty="0">
+                <a:solidFill>
+                  <a:srgbClr val="FFFFFF"/>
+                </a:solidFill>
+                <a:latin typeface="Consolas" pitchFamily="34" charset="0"/>
+                <a:ea typeface="Consolas" pitchFamily="34" charset="-122"/>
+                <a:cs typeface="Consolas" pitchFamily="34" charset="-120"/>
+              </a:rPr>
+              <a:t> TriageResult(BaseModel):</a:t>
+            </a:r>
+            <a:endParaRPr lang="en-US" sz="1280" dirty="0"/>
+          </a:p>
+          <a:p>
+            <a:pPr indent="0" marL="0">
+              <a:buNone/>
+            </a:pPr>
+            <a:r>
+              <a:rPr lang="en-US" sz="1280" dirty="0">
+                <a:solidFill>
+                  <a:srgbClr val="FFFFFF"/>
+                </a:solidFill>
+                <a:latin typeface="Consolas" pitchFamily="34" charset="0"/>
+                <a:ea typeface="Consolas" pitchFamily="34" charset="-122"/>
+                <a:cs typeface="Consolas" pitchFamily="34" charset="-120"/>
+              </a:rPr>
+              <a:t>    route: str</a:t>
+            </a:r>
+            <a:endParaRPr lang="en-US" sz="1280" dirty="0"/>
+          </a:p>
+          <a:p>
+            <a:pPr indent="0" marL="0">
+              <a:buNone/>
+            </a:pPr>
+            <a:r>
+              <a:rPr lang="en-US" sz="1280" dirty="0">
+                <a:solidFill>
+                  <a:srgbClr val="FFFFFF"/>
+                </a:solidFill>
+                <a:latin typeface="Consolas" pitchFamily="34" charset="0"/>
+                <a:ea typeface="Consolas" pitchFamily="34" charset="-122"/>
+                <a:cs typeface="Consolas" pitchFamily="34" charset="-120"/>
+              </a:rPr>
+              <a:t>    summary: str</a:t>
+            </a:r>
+            <a:endParaRPr lang="en-US" sz="1280" dirty="0"/>
+          </a:p>
+          <a:p>
+            <a:pPr indent="0" marL="0">
+              <a:buNone/>
+            </a:pPr>
+            <a:r>
+              <a:rPr lang="en-US" sz="1280" dirty="0">
+                <a:solidFill>
+                  <a:srgbClr val="FFFFFF"/>
+                </a:solidFill>
+                <a:latin typeface="Consolas" pitchFamily="34" charset="0"/>
+                <a:ea typeface="Consolas" pitchFamily="34" charset="-122"/>
+                <a:cs typeface="Consolas" pitchFamily="34" charset="-120"/>
+              </a:rPr>
+              <a:t>    needs_work_item: bool</a:t>
+            </a:r>
+            <a:endParaRPr lang="en-US" sz="1280" dirty="0"/>
+          </a:p>
+          <a:p>
+            <a:pPr indent="0" marL="0">
+              <a:buNone/>
+            </a:pPr>
+            <a:endParaRPr lang="en-US" sz="1280" dirty="0"/>
+          </a:p>
+          <a:p>
+            <a:pPr indent="0" marL="0">
+              <a:buNone/>
+            </a:pPr>
+            <a:r>
+              <a:rPr lang="en-US" sz="1280" dirty="0">
+                <a:solidFill>
+                  <a:srgbClr val="FFFFFF"/>
+                </a:solidFill>
+                <a:latin typeface="Consolas" pitchFamily="34" charset="0"/>
+                <a:ea typeface="Consolas" pitchFamily="34" charset="-122"/>
+                <a:cs typeface="Consolas" pitchFamily="34" charset="-120"/>
+              </a:rPr>
+              <a:t>response = </a:t>
+            </a:r>
+            <a:pPr indent="0" marL="0">
+              <a:buNone/>
+            </a:pPr>
+            <a:r>
+              <a:rPr lang="en-US" sz="1280" dirty="0">
+                <a:solidFill>
+                  <a:srgbClr val="A996B6"/>
+                </a:solidFill>
+                <a:latin typeface="Consolas" pitchFamily="34" charset="0"/>
+                <a:ea typeface="Consolas" pitchFamily="34" charset="-122"/>
+                <a:cs typeface="Consolas" pitchFamily="34" charset="-120"/>
+              </a:rPr>
+              <a:t>await</a:t>
+            </a:r>
+            <a:pPr indent="0" marL="0">
+              <a:buNone/>
+            </a:pPr>
+            <a:r>
+              <a:rPr lang="en-US" sz="1280" dirty="0">
+                <a:solidFill>
+                  <a:srgbClr val="FFFFFF"/>
+                </a:solidFill>
+                <a:latin typeface="Consolas" pitchFamily="34" charset="0"/>
+                <a:ea typeface="Consolas" pitchFamily="34" charset="-122"/>
+                <a:cs typeface="Consolas" pitchFamily="34" charset="-120"/>
+              </a:rPr>
+              <a:t> agent.run(</a:t>
+            </a:r>
+            <a:endParaRPr lang="en-US" sz="1280" dirty="0"/>
+          </a:p>
+          <a:p>
+            <a:pPr indent="0" marL="0">
+              <a:buNone/>
+            </a:pPr>
+            <a:r>
+              <a:rPr lang="en-US" sz="1280" dirty="0">
+                <a:solidFill>
+                  <a:srgbClr val="FFFFFF"/>
+                </a:solidFill>
+                <a:latin typeface="Consolas" pitchFamily="34" charset="0"/>
+                <a:ea typeface="Consolas" pitchFamily="34" charset="-122"/>
+                <a:cs typeface="Consolas" pitchFamily="34" charset="-120"/>
+              </a:rPr>
+              <a:t>    request,</a:t>
+            </a:r>
+            <a:endParaRPr lang="en-US" sz="1280" dirty="0"/>
+          </a:p>
+          <a:p>
+            <a:pPr indent="0" marL="0">
+              <a:buNone/>
+            </a:pPr>
+            <a:r>
+              <a:rPr lang="en-US" sz="1280" dirty="0">
+                <a:solidFill>
+                  <a:srgbClr val="FFFFFF"/>
+                </a:solidFill>
+                <a:latin typeface="Consolas" pitchFamily="34" charset="0"/>
+                <a:ea typeface="Consolas" pitchFamily="34" charset="-122"/>
+                <a:cs typeface="Consolas" pitchFamily="34" charset="-120"/>
+              </a:rPr>
+              <a:t>    options={</a:t>
+            </a:r>
+            <a:pPr indent="0" marL="0">
+              <a:buNone/>
+            </a:pPr>
+            <a:r>
+              <a:rPr lang="en-US" sz="1280" dirty="0">
+                <a:solidFill>
+                  <a:srgbClr val="E4C98A"/>
+                </a:solidFill>
+                <a:latin typeface="Consolas" pitchFamily="34" charset="0"/>
+                <a:ea typeface="Consolas" pitchFamily="34" charset="-122"/>
+                <a:cs typeface="Consolas" pitchFamily="34" charset="-120"/>
+              </a:rPr>
+              <a:t>"response_format"</a:t>
+            </a:r>
+            <a:pPr indent="0" marL="0">
+              <a:buNone/>
+            </a:pPr>
+            <a:r>
+              <a:rPr lang="en-US" sz="1280" dirty="0">
+                <a:solidFill>
+                  <a:srgbClr val="FFFFFF"/>
+                </a:solidFill>
+                <a:latin typeface="Consolas" pitchFamily="34" charset="0"/>
+                <a:ea typeface="Consolas" pitchFamily="34" charset="-122"/>
+                <a:cs typeface="Consolas" pitchFamily="34" charset="-120"/>
+              </a:rPr>
+              <a:t>: TriageResult},</a:t>
+            </a:r>
+            <a:endParaRPr lang="en-US" sz="1280" dirty="0"/>
+          </a:p>
+          <a:p>
+            <a:pPr indent="0" marL="0">
+              <a:buNone/>
+            </a:pPr>
+            <a:r>
+              <a:rPr lang="en-US" sz="1280" dirty="0">
+                <a:solidFill>
+                  <a:srgbClr val="FFFFFF"/>
+                </a:solidFill>
+                <a:latin typeface="Consolas" pitchFamily="34" charset="0"/>
+                <a:ea typeface="Consolas" pitchFamily="34" charset="-122"/>
+                <a:cs typeface="Consolas" pitchFamily="34" charset="-120"/>
+              </a:rPr>
+              <a:t>)</a:t>
+            </a:r>
+            <a:endParaRPr lang="en-US" sz="1280" dirty="0"/>
+          </a:p>
+          <a:p>
+            <a:pPr indent="0" marL="0">
+              <a:buNone/>
+            </a:pPr>
+            <a:r>
+              <a:rPr lang="en-US" sz="1280" dirty="0">
+                <a:solidFill>
+                  <a:srgbClr val="FFFFFF"/>
+                </a:solidFill>
+                <a:latin typeface="Consolas" pitchFamily="34" charset="0"/>
+                <a:ea typeface="Consolas" pitchFamily="34" charset="-122"/>
+                <a:cs typeface="Consolas" pitchFamily="34" charset="-120"/>
+              </a:rPr>
+              <a:t>triage: TriageResult = response.value</a:t>
+            </a:r>
+            <a:endParaRPr lang="en-US" sz="1280" dirty="0"/>
+          </a:p>
+        </p:txBody>
+      </p:sp>
+      <p:sp>
+        <p:nvSpPr>
+          <p:cNvPr id="7" name="Shape 5"/>
           <p:cNvSpPr/>
           <p:nvPr/>
         </p:nvSpPr>
@@ -8911,7 +7058,7 @@
       </p:sp>
       <p:sp>
         <p:nvSpPr>
-          <p:cNvPr id="7" name="Text 4"/>
+          <p:cNvPr id="8" name="Text 6"/>
           <p:cNvSpPr/>
           <p:nvPr/>
         </p:nvSpPr>
@@ -8944,7 +7091,7 @@
                 <a:ea typeface="Calibri" pitchFamily="34" charset="-122"/>
                 <a:cs typeface="Calibri" pitchFamily="34" charset="-120"/>
               </a:rPr>
-              <a:t>Source: https://learn.microsoft.com/en-us/agent-framework/concepts/agents/running-agents?tabs=python  ·  +1 in notes</a:t>
+              <a:t>Source: https://learn.microsoft.com/en-us/agent-framework/agents/structured-outputs?tabs=python</a:t>
             </a:r>
             <a:endParaRPr lang="en-US" sz="820" dirty="0"/>
           </a:p>
@@ -9070,7 +7217,7 @@
               <a:buNone/>
             </a:pPr>
             <a:r>
-              <a:rPr lang="en-US" sz="2800" b="1" dirty="0">
+              <a:rPr lang="en-US" sz="2500" b="1" dirty="0">
                 <a:solidFill>
                   <a:srgbClr val="1E2761"/>
                 </a:solidFill>
@@ -9078,9 +7225,9 @@
                 <a:ea typeface="Calibri" pitchFamily="34" charset="-122"/>
                 <a:cs typeface="Calibri" pitchFamily="34" charset="-120"/>
               </a:rPr>
-              <a:t>Pydantic gives you a typed value</a:t>
-            </a:r>
-            <a:endParaRPr lang="en-US" sz="2800" dirty="0"/>
+              <a:t>JSON Schema works without a model class</a:t>
+            </a:r>
+            <a:endParaRPr lang="en-US" sz="2500" dirty="0"/>
           </a:p>
         </p:txBody>
       </p:sp>
@@ -9093,7 +7240,7 @@
         <p:spPr>
           <a:xfrm>
             <a:off x="365760" y="1115568"/>
-            <a:ext cx="8412480" cy="2980944"/>
+            <a:ext cx="8412480" cy="2560320"/>
           </a:xfrm>
           <a:prstGeom prst="rect">
             <a:avLst/>
@@ -9118,7 +7265,7 @@
         <p:spPr>
           <a:xfrm>
             <a:off x="502920" y="1207008"/>
-            <a:ext cx="8138160" cy="2798064"/>
+            <a:ext cx="8138160" cy="2377440"/>
           </a:xfrm>
           <a:prstGeom prst="rect">
             <a:avLst/>
@@ -9127,7 +7274,9 @@
           <a:ln/>
         </p:spPr>
         <p:txBody>
-          <a:bodyPr wrap="square" lIns="0" tIns="0" rIns="0" bIns="0" rtlCol="0" anchor="t"/>
+          <a:bodyPr wrap="square" lIns="0" tIns="0" rIns="0" bIns="0" rtlCol="0" anchor="t">
+            <a:normAutofit/>
+          </a:bodyPr>
           <a:lstStyle/>
           <a:p>
             <a:pPr indent="0" marL="0">
@@ -9136,13 +7285,342 @@
             <a:r>
               <a:rPr lang="en-US" sz="1280" dirty="0">
                 <a:solidFill>
+                  <a:srgbClr val="FFFFFF"/>
+                </a:solidFill>
+                <a:latin typeface="Consolas" pitchFamily="34" charset="0"/>
+                <a:ea typeface="Consolas" pitchFamily="34" charset="-122"/>
+                <a:cs typeface="Consolas" pitchFamily="34" charset="-120"/>
+              </a:rPr>
+              <a:t>schema = {</a:t>
+            </a:r>
+            <a:endParaRPr lang="en-US" sz="1280" dirty="0"/>
+          </a:p>
+          <a:p>
+            <a:pPr indent="0" marL="0">
+              <a:buNone/>
+            </a:pPr>
+            <a:r>
+              <a:rPr lang="en-US" sz="1280" dirty="0">
+                <a:solidFill>
+                  <a:srgbClr val="FFFFFF"/>
+                </a:solidFill>
+                <a:latin typeface="Consolas" pitchFamily="34" charset="0"/>
+                <a:ea typeface="Consolas" pitchFamily="34" charset="-122"/>
+                <a:cs typeface="Consolas" pitchFamily="34" charset="-120"/>
+              </a:rPr>
+              <a:t>    </a:t>
+            </a:r>
+            <a:pPr indent="0" marL="0">
+              <a:buNone/>
+            </a:pPr>
+            <a:r>
+              <a:rPr lang="en-US" sz="1280" dirty="0">
+                <a:solidFill>
+                  <a:srgbClr val="E4C98A"/>
+                </a:solidFill>
+                <a:latin typeface="Consolas" pitchFamily="34" charset="0"/>
+                <a:ea typeface="Consolas" pitchFamily="34" charset="-122"/>
+                <a:cs typeface="Consolas" pitchFamily="34" charset="-120"/>
+              </a:rPr>
+              <a:t>"type"</a:t>
+            </a:r>
+            <a:pPr indent="0" marL="0">
+              <a:buNone/>
+            </a:pPr>
+            <a:r>
+              <a:rPr lang="en-US" sz="1280" dirty="0">
+                <a:solidFill>
+                  <a:srgbClr val="FFFFFF"/>
+                </a:solidFill>
+                <a:latin typeface="Consolas" pitchFamily="34" charset="0"/>
+                <a:ea typeface="Consolas" pitchFamily="34" charset="-122"/>
+                <a:cs typeface="Consolas" pitchFamily="34" charset="-120"/>
+              </a:rPr>
+              <a:t>: </a:t>
+            </a:r>
+            <a:pPr indent="0" marL="0">
+              <a:buNone/>
+            </a:pPr>
+            <a:r>
+              <a:rPr lang="en-US" sz="1280" dirty="0">
+                <a:solidFill>
+                  <a:srgbClr val="E4C98A"/>
+                </a:solidFill>
+                <a:latin typeface="Consolas" pitchFamily="34" charset="0"/>
+                <a:ea typeface="Consolas" pitchFamily="34" charset="-122"/>
+                <a:cs typeface="Consolas" pitchFamily="34" charset="-120"/>
+              </a:rPr>
+              <a:t>"object"</a:t>
+            </a:r>
+            <a:pPr indent="0" marL="0">
+              <a:buNone/>
+            </a:pPr>
+            <a:r>
+              <a:rPr lang="en-US" sz="1280" dirty="0">
+                <a:solidFill>
+                  <a:srgbClr val="FFFFFF"/>
+                </a:solidFill>
+                <a:latin typeface="Consolas" pitchFamily="34" charset="0"/>
+                <a:ea typeface="Consolas" pitchFamily="34" charset="-122"/>
+                <a:cs typeface="Consolas" pitchFamily="34" charset="-120"/>
+              </a:rPr>
+              <a:t>,</a:t>
+            </a:r>
+            <a:endParaRPr lang="en-US" sz="1280" dirty="0"/>
+          </a:p>
+          <a:p>
+            <a:pPr indent="0" marL="0">
+              <a:buNone/>
+            </a:pPr>
+            <a:r>
+              <a:rPr lang="en-US" sz="1280" dirty="0">
+                <a:solidFill>
+                  <a:srgbClr val="FFFFFF"/>
+                </a:solidFill>
+                <a:latin typeface="Consolas" pitchFamily="34" charset="0"/>
+                <a:ea typeface="Consolas" pitchFamily="34" charset="-122"/>
+                <a:cs typeface="Consolas" pitchFamily="34" charset="-120"/>
+              </a:rPr>
+              <a:t>    </a:t>
+            </a:r>
+            <a:pPr indent="0" marL="0">
+              <a:buNone/>
+            </a:pPr>
+            <a:r>
+              <a:rPr lang="en-US" sz="1280" dirty="0">
+                <a:solidFill>
+                  <a:srgbClr val="E4C98A"/>
+                </a:solidFill>
+                <a:latin typeface="Consolas" pitchFamily="34" charset="0"/>
+                <a:ea typeface="Consolas" pitchFamily="34" charset="-122"/>
+                <a:cs typeface="Consolas" pitchFamily="34" charset="-120"/>
+              </a:rPr>
+              <a:t>"properties"</a:t>
+            </a:r>
+            <a:pPr indent="0" marL="0">
+              <a:buNone/>
+            </a:pPr>
+            <a:r>
+              <a:rPr lang="en-US" sz="1280" dirty="0">
+                <a:solidFill>
+                  <a:srgbClr val="FFFFFF"/>
+                </a:solidFill>
+                <a:latin typeface="Consolas" pitchFamily="34" charset="0"/>
+                <a:ea typeface="Consolas" pitchFamily="34" charset="-122"/>
+                <a:cs typeface="Consolas" pitchFamily="34" charset="-120"/>
+              </a:rPr>
+              <a:t>: {</a:t>
+            </a:r>
+            <a:pPr indent="0" marL="0">
+              <a:buNone/>
+            </a:pPr>
+            <a:r>
+              <a:rPr lang="en-US" sz="1280" dirty="0">
+                <a:solidFill>
+                  <a:srgbClr val="E4C98A"/>
+                </a:solidFill>
+                <a:latin typeface="Consolas" pitchFamily="34" charset="0"/>
+                <a:ea typeface="Consolas" pitchFamily="34" charset="-122"/>
+                <a:cs typeface="Consolas" pitchFamily="34" charset="-120"/>
+              </a:rPr>
+              <a:t>"route"</a:t>
+            </a:r>
+            <a:pPr indent="0" marL="0">
+              <a:buNone/>
+            </a:pPr>
+            <a:r>
+              <a:rPr lang="en-US" sz="1280" dirty="0">
+                <a:solidFill>
+                  <a:srgbClr val="FFFFFF"/>
+                </a:solidFill>
+                <a:latin typeface="Consolas" pitchFamily="34" charset="0"/>
+                <a:ea typeface="Consolas" pitchFamily="34" charset="-122"/>
+                <a:cs typeface="Consolas" pitchFamily="34" charset="-120"/>
+              </a:rPr>
+              <a:t>: {</a:t>
+            </a:r>
+            <a:pPr indent="0" marL="0">
+              <a:buNone/>
+            </a:pPr>
+            <a:r>
+              <a:rPr lang="en-US" sz="1280" dirty="0">
+                <a:solidFill>
+                  <a:srgbClr val="E4C98A"/>
+                </a:solidFill>
+                <a:latin typeface="Consolas" pitchFamily="34" charset="0"/>
+                <a:ea typeface="Consolas" pitchFamily="34" charset="-122"/>
+                <a:cs typeface="Consolas" pitchFamily="34" charset="-120"/>
+              </a:rPr>
+              <a:t>"type"</a:t>
+            </a:r>
+            <a:pPr indent="0" marL="0">
+              <a:buNone/>
+            </a:pPr>
+            <a:r>
+              <a:rPr lang="en-US" sz="1280" dirty="0">
+                <a:solidFill>
+                  <a:srgbClr val="FFFFFF"/>
+                </a:solidFill>
+                <a:latin typeface="Consolas" pitchFamily="34" charset="0"/>
+                <a:ea typeface="Consolas" pitchFamily="34" charset="-122"/>
+                <a:cs typeface="Consolas" pitchFamily="34" charset="-120"/>
+              </a:rPr>
+              <a:t>: </a:t>
+            </a:r>
+            <a:pPr indent="0" marL="0">
+              <a:buNone/>
+            </a:pPr>
+            <a:r>
+              <a:rPr lang="en-US" sz="1280" dirty="0">
+                <a:solidFill>
+                  <a:srgbClr val="E4C98A"/>
+                </a:solidFill>
+                <a:latin typeface="Consolas" pitchFamily="34" charset="0"/>
+                <a:ea typeface="Consolas" pitchFamily="34" charset="-122"/>
+                <a:cs typeface="Consolas" pitchFamily="34" charset="-120"/>
+              </a:rPr>
+              <a:t>"string"</a:t>
+            </a:r>
+            <a:pPr indent="0" marL="0">
+              <a:buNone/>
+            </a:pPr>
+            <a:r>
+              <a:rPr lang="en-US" sz="1280" dirty="0">
+                <a:solidFill>
+                  <a:srgbClr val="FFFFFF"/>
+                </a:solidFill>
+                <a:latin typeface="Consolas" pitchFamily="34" charset="0"/>
+                <a:ea typeface="Consolas" pitchFamily="34" charset="-122"/>
+                <a:cs typeface="Consolas" pitchFamily="34" charset="-120"/>
+              </a:rPr>
+              <a:t>}},</a:t>
+            </a:r>
+            <a:endParaRPr lang="en-US" sz="1280" dirty="0"/>
+          </a:p>
+          <a:p>
+            <a:pPr indent="0" marL="0">
+              <a:buNone/>
+            </a:pPr>
+            <a:r>
+              <a:rPr lang="en-US" sz="1280" dirty="0">
+                <a:solidFill>
+                  <a:srgbClr val="FFFFFF"/>
+                </a:solidFill>
+                <a:latin typeface="Consolas" pitchFamily="34" charset="0"/>
+                <a:ea typeface="Consolas" pitchFamily="34" charset="-122"/>
+                <a:cs typeface="Consolas" pitchFamily="34" charset="-120"/>
+              </a:rPr>
+              <a:t>    </a:t>
+            </a:r>
+            <a:pPr indent="0" marL="0">
+              <a:buNone/>
+            </a:pPr>
+            <a:r>
+              <a:rPr lang="en-US" sz="1280" dirty="0">
+                <a:solidFill>
+                  <a:srgbClr val="E4C98A"/>
+                </a:solidFill>
+                <a:latin typeface="Consolas" pitchFamily="34" charset="0"/>
+                <a:ea typeface="Consolas" pitchFamily="34" charset="-122"/>
+                <a:cs typeface="Consolas" pitchFamily="34" charset="-120"/>
+              </a:rPr>
+              <a:t>"required"</a:t>
+            </a:r>
+            <a:pPr indent="0" marL="0">
+              <a:buNone/>
+            </a:pPr>
+            <a:r>
+              <a:rPr lang="en-US" sz="1280" dirty="0">
+                <a:solidFill>
+                  <a:srgbClr val="FFFFFF"/>
+                </a:solidFill>
+                <a:latin typeface="Consolas" pitchFamily="34" charset="0"/>
+                <a:ea typeface="Consolas" pitchFamily="34" charset="-122"/>
+                <a:cs typeface="Consolas" pitchFamily="34" charset="-120"/>
+              </a:rPr>
+              <a:t>: [</a:t>
+            </a:r>
+            <a:pPr indent="0" marL="0">
+              <a:buNone/>
+            </a:pPr>
+            <a:r>
+              <a:rPr lang="en-US" sz="1280" dirty="0">
+                <a:solidFill>
+                  <a:srgbClr val="E4C98A"/>
+                </a:solidFill>
+                <a:latin typeface="Consolas" pitchFamily="34" charset="0"/>
+                <a:ea typeface="Consolas" pitchFamily="34" charset="-122"/>
+                <a:cs typeface="Consolas" pitchFamily="34" charset="-120"/>
+              </a:rPr>
+              <a:t>"route"</a:t>
+            </a:r>
+            <a:pPr indent="0" marL="0">
+              <a:buNone/>
+            </a:pPr>
+            <a:r>
+              <a:rPr lang="en-US" sz="1280" dirty="0">
+                <a:solidFill>
+                  <a:srgbClr val="FFFFFF"/>
+                </a:solidFill>
+                <a:latin typeface="Consolas" pitchFamily="34" charset="0"/>
+                <a:ea typeface="Consolas" pitchFamily="34" charset="-122"/>
+                <a:cs typeface="Consolas" pitchFamily="34" charset="-120"/>
+              </a:rPr>
+              <a:t>],</a:t>
+            </a:r>
+            <a:endParaRPr lang="en-US" sz="1280" dirty="0"/>
+          </a:p>
+          <a:p>
+            <a:pPr indent="0" marL="0">
+              <a:buNone/>
+            </a:pPr>
+            <a:r>
+              <a:rPr lang="en-US" sz="1280" dirty="0">
+                <a:solidFill>
+                  <a:srgbClr val="FFFFFF"/>
+                </a:solidFill>
+                <a:latin typeface="Consolas" pitchFamily="34" charset="0"/>
+                <a:ea typeface="Consolas" pitchFamily="34" charset="-122"/>
+                <a:cs typeface="Consolas" pitchFamily="34" charset="-120"/>
+              </a:rPr>
+              <a:t>}</a:t>
+            </a:r>
+            <a:endParaRPr lang="en-US" sz="1280" dirty="0"/>
+          </a:p>
+          <a:p>
+            <a:pPr indent="0" marL="0">
+              <a:buNone/>
+            </a:pPr>
+            <a:endParaRPr lang="en-US" sz="1280" dirty="0"/>
+          </a:p>
+          <a:p>
+            <a:pPr indent="0" marL="0">
+              <a:buNone/>
+            </a:pPr>
+            <a:r>
+              <a:rPr lang="en-US" sz="1280" dirty="0">
+                <a:solidFill>
+                  <a:srgbClr val="FFFFFF"/>
+                </a:solidFill>
+                <a:latin typeface="Consolas" pitchFamily="34" charset="0"/>
+                <a:ea typeface="Consolas" pitchFamily="34" charset="-122"/>
+                <a:cs typeface="Consolas" pitchFamily="34" charset="-120"/>
+              </a:rPr>
+              <a:t>response = </a:t>
+            </a:r>
+            <a:pPr indent="0" marL="0">
+              <a:buNone/>
+            </a:pPr>
+            <a:r>
+              <a:rPr lang="en-US" sz="1280" dirty="0">
+                <a:solidFill>
                   <a:srgbClr val="A996B6"/>
                 </a:solidFill>
                 <a:latin typeface="Consolas" pitchFamily="34" charset="0"/>
                 <a:ea typeface="Consolas" pitchFamily="34" charset="-122"/>
                 <a:cs typeface="Consolas" pitchFamily="34" charset="-120"/>
               </a:rPr>
-              <a:t>from</a:t>
+              <a:t>await</a:t>
             </a:r>
             <a:pPr indent="0" marL="0">
               <a:buNone/>
@@ -9156,21 +7634,24 @@
                 <a:ea typeface="Consolas" pitchFamily="34" charset="-122"/>
                 <a:cs typeface="Consolas" pitchFamily="34" charset="-120"/>
               </a:rPr>
-              <a:t> pydantic </a:t>
-            </a:r>
+              <a:t> agent.run(</a:t>
+            </a:r>
+            <a:endParaRPr lang="en-US" sz="1280" dirty="0"/>
+          </a:p>
+          <a:p>
             <a:pPr indent="0" marL="0">
               <a:buNone/>
             </a:pPr>
             <a:r>
               <a:rPr lang="en-US" sz="1280" dirty="0">
                 <a:solidFill>
-                  <a:srgbClr val="A996B6"/>
-                </a:solidFill>
-                <a:latin typeface="Consolas" pitchFamily="34" charset="0"/>
-                <a:ea typeface="Consolas" pitchFamily="34" charset="-122"/>
-                <a:cs typeface="Consolas" pitchFamily="34" charset="-120"/>
-              </a:rPr>
-              <a:t>import</a:t>
+                  <a:srgbClr val="FFFFFF"/>
+                </a:solidFill>
+                <a:latin typeface="Consolas" pitchFamily="34" charset="0"/>
+                <a:ea typeface="Consolas" pitchFamily="34" charset="-122"/>
+                <a:cs typeface="Consolas" pitchFamily="34" charset="-120"/>
+              </a:rPr>
+              <a:t>    request, options={</a:t>
             </a:r>
             <a:pPr indent="0" marL="0">
               <a:buNone/>
@@ -9178,29 +7659,48 @@
             <a:r>
               <a:rPr lang="en-US" sz="1280" dirty="0">
                 <a:solidFill>
+                  <a:srgbClr val="E4C98A"/>
+                </a:solidFill>
+                <a:latin typeface="Consolas" pitchFamily="34" charset="0"/>
+                <a:ea typeface="Consolas" pitchFamily="34" charset="-122"/>
+                <a:cs typeface="Consolas" pitchFamily="34" charset="-120"/>
+              </a:rPr>
+              <a:t>"response_format"</a:t>
+            </a:r>
+            <a:pPr indent="0" marL="0">
+              <a:buNone/>
+            </a:pPr>
+            <a:r>
+              <a:rPr lang="en-US" sz="1280" dirty="0">
+                <a:solidFill>
                   <a:srgbClr val="FFFFFF"/>
                 </a:solidFill>
                 <a:latin typeface="Consolas" pitchFamily="34" charset="0"/>
                 <a:ea typeface="Consolas" pitchFamily="34" charset="-122"/>
                 <a:cs typeface="Consolas" pitchFamily="34" charset="-120"/>
               </a:rPr>
-              <a:t> BaseModel
-</a:t>
-            </a:r>
+              <a:t>: schema}</a:t>
+            </a:r>
+            <a:endParaRPr lang="en-US" sz="1280" dirty="0"/>
+          </a:p>
+          <a:p>
             <a:pPr indent="0" marL="0">
               <a:buNone/>
             </a:pPr>
             <a:r>
               <a:rPr lang="en-US" sz="1280" dirty="0">
                 <a:solidFill>
-                  <a:srgbClr val="A996B6"/>
-                </a:solidFill>
-                <a:latin typeface="Consolas" pitchFamily="34" charset="0"/>
-                <a:ea typeface="Consolas" pitchFamily="34" charset="-122"/>
-                <a:cs typeface="Consolas" pitchFamily="34" charset="-120"/>
-              </a:rPr>
-              <a:t>class</a:t>
-            </a:r>
+                  <a:srgbClr val="FFFFFF"/>
+                </a:solidFill>
+                <a:latin typeface="Consolas" pitchFamily="34" charset="0"/>
+                <a:ea typeface="Consolas" pitchFamily="34" charset="-122"/>
+                <a:cs typeface="Consolas" pitchFamily="34" charset="-120"/>
+              </a:rPr>
+              <a:t>)</a:t>
+            </a:r>
+            <a:endParaRPr lang="en-US" sz="1280" dirty="0"/>
+          </a:p>
+          <a:p>
             <a:pPr indent="0" marL="0">
               <a:buNone/>
             </a:pPr>
@@ -9213,211 +7713,21 @@
                 <a:ea typeface="Consolas" pitchFamily="34" charset="-122"/>
                 <a:cs typeface="Consolas" pitchFamily="34" charset="-120"/>
               </a:rPr>
-              <a:t> TriageResult(BaseModel):</a:t>
-            </a:r>
-            <a:endParaRPr lang="en-US" sz="1280" dirty="0"/>
-          </a:p>
-          <a:p>
-            <a:pPr indent="0" marL="0">
-              <a:buNone/>
-            </a:pPr>
-            <a:r>
-              <a:rPr lang="en-US" sz="1280" dirty="0">
-                <a:solidFill>
-                  <a:srgbClr val="FFFFFF"/>
-                </a:solidFill>
-                <a:latin typeface="Consolas" pitchFamily="34" charset="0"/>
-                <a:ea typeface="Consolas" pitchFamily="34" charset="-122"/>
-                <a:cs typeface="Consolas" pitchFamily="34" charset="-120"/>
-              </a:rPr>
-              <a:t>    route: str</a:t>
-            </a:r>
-            <a:endParaRPr lang="en-US" sz="1280" dirty="0"/>
-          </a:p>
-          <a:p>
-            <a:pPr indent="0" marL="0">
-              <a:buNone/>
-            </a:pPr>
-            <a:r>
-              <a:rPr lang="en-US" sz="1280" dirty="0">
-                <a:solidFill>
-                  <a:srgbClr val="FFFFFF"/>
-                </a:solidFill>
-                <a:latin typeface="Consolas" pitchFamily="34" charset="0"/>
-                <a:ea typeface="Consolas" pitchFamily="34" charset="-122"/>
-                <a:cs typeface="Consolas" pitchFamily="34" charset="-120"/>
-              </a:rPr>
-              <a:t>    summary: str</a:t>
-            </a:r>
-            <a:endParaRPr lang="en-US" sz="1280" dirty="0"/>
-          </a:p>
-          <a:p>
-            <a:pPr indent="0" marL="0">
-              <a:buNone/>
-            </a:pPr>
-            <a:r>
-              <a:rPr lang="en-US" sz="1280" dirty="0">
-                <a:solidFill>
-                  <a:srgbClr val="FFFFFF"/>
-                </a:solidFill>
-                <a:latin typeface="Consolas" pitchFamily="34" charset="0"/>
-                <a:ea typeface="Consolas" pitchFamily="34" charset="-122"/>
-                <a:cs typeface="Consolas" pitchFamily="34" charset="-120"/>
-              </a:rPr>
-              <a:t>    needs_work_item: bool</a:t>
-            </a:r>
-            <a:endParaRPr lang="en-US" sz="1280" dirty="0"/>
-          </a:p>
-          <a:p>
-            <a:pPr indent="0" marL="0">
-              <a:buNone/>
-            </a:pPr>
-            <a:endParaRPr lang="en-US" sz="1280" dirty="0"/>
-          </a:p>
-          <a:p>
-            <a:pPr indent="0" marL="0">
-              <a:buNone/>
-            </a:pPr>
-            <a:r>
-              <a:rPr lang="en-US" sz="1280" dirty="0">
-                <a:solidFill>
-                  <a:srgbClr val="FFFFFF"/>
-                </a:solidFill>
-                <a:latin typeface="Consolas" pitchFamily="34" charset="0"/>
-                <a:ea typeface="Consolas" pitchFamily="34" charset="-122"/>
-                <a:cs typeface="Consolas" pitchFamily="34" charset="-120"/>
-              </a:rPr>
-              <a:t>response = </a:t>
-            </a:r>
-            <a:endParaRPr lang="en-US" sz="1280" dirty="0"/>
-          </a:p>
-          <a:p>
-            <a:pPr indent="0" marL="0">
-              <a:buNone/>
-            </a:pPr>
-            <a:r>
-              <a:rPr lang="en-US" sz="1280" dirty="0">
-                <a:solidFill>
-                  <a:srgbClr val="A996B6"/>
-                </a:solidFill>
-                <a:latin typeface="Consolas" pitchFamily="34" charset="0"/>
-                <a:ea typeface="Consolas" pitchFamily="34" charset="-122"/>
-                <a:cs typeface="Consolas" pitchFamily="34" charset="-120"/>
-              </a:rPr>
-              <a:t>await</a:t>
-            </a:r>
-            <a:pPr indent="0" marL="0">
-              <a:buNone/>
-            </a:pPr>
-            <a:r>
-              <a:rPr lang="en-US" sz="1280" dirty="0">
-                <a:solidFill>
-                  <a:srgbClr val="FFFFFF"/>
-                </a:solidFill>
-                <a:latin typeface="Consolas" pitchFamily="34" charset="0"/>
-                <a:ea typeface="Consolas" pitchFamily="34" charset="-122"/>
-                <a:cs typeface="Consolas" pitchFamily="34" charset="-120"/>
-              </a:rPr>
-              <a:t> agent.run(</a:t>
-            </a:r>
-            <a:endParaRPr lang="en-US" sz="1280" dirty="0"/>
-          </a:p>
-          <a:p>
-            <a:pPr indent="0" marL="0">
-              <a:buNone/>
-            </a:pPr>
-            <a:r>
-              <a:rPr lang="en-US" sz="1280" dirty="0">
-                <a:solidFill>
-                  <a:srgbClr val="FFFFFF"/>
-                </a:solidFill>
-                <a:latin typeface="Consolas" pitchFamily="34" charset="0"/>
-                <a:ea typeface="Consolas" pitchFamily="34" charset="-122"/>
-                <a:cs typeface="Consolas" pitchFamily="34" charset="-120"/>
-              </a:rPr>
-              <a:t>    request,</a:t>
-            </a:r>
-            <a:endParaRPr lang="en-US" sz="1280" dirty="0"/>
-          </a:p>
-          <a:p>
-            <a:pPr indent="0" marL="0">
-              <a:buNone/>
-            </a:pPr>
-            <a:r>
-              <a:rPr lang="en-US" sz="1280" dirty="0">
-                <a:solidFill>
-                  <a:srgbClr val="FFFFFF"/>
-                </a:solidFill>
-                <a:latin typeface="Consolas" pitchFamily="34" charset="0"/>
-                <a:ea typeface="Consolas" pitchFamily="34" charset="-122"/>
-                <a:cs typeface="Consolas" pitchFamily="34" charset="-120"/>
-              </a:rPr>
-              <a:t>    options={</a:t>
-            </a:r>
-            <a:endParaRPr lang="en-US" sz="1280" dirty="0"/>
-          </a:p>
-          <a:p>
-            <a:pPr indent="0" marL="0">
-              <a:buNone/>
-            </a:pPr>
-            <a:r>
-              <a:rPr lang="en-US" sz="1280" dirty="0">
-                <a:solidFill>
-                  <a:srgbClr val="E4C98A"/>
-                </a:solidFill>
-                <a:latin typeface="Consolas" pitchFamily="34" charset="0"/>
-                <a:ea typeface="Consolas" pitchFamily="34" charset="-122"/>
-                <a:cs typeface="Consolas" pitchFamily="34" charset="-120"/>
-              </a:rPr>
-              <a:t>"response_format"</a:t>
-            </a:r>
-            <a:pPr indent="0" marL="0">
-              <a:buNone/>
-            </a:pPr>
-            <a:r>
-              <a:rPr lang="en-US" sz="1280" dirty="0">
-                <a:solidFill>
-                  <a:srgbClr val="FFFFFF"/>
-                </a:solidFill>
-                <a:latin typeface="Consolas" pitchFamily="34" charset="0"/>
-                <a:ea typeface="Consolas" pitchFamily="34" charset="-122"/>
-                <a:cs typeface="Consolas" pitchFamily="34" charset="-120"/>
-              </a:rPr>
-              <a:t>: TriageResult},</a:t>
-            </a:r>
-            <a:endParaRPr lang="en-US" sz="1280" dirty="0"/>
-          </a:p>
-          <a:p>
-            <a:pPr indent="0" marL="0">
-              <a:buNone/>
-            </a:pPr>
-            <a:r>
-              <a:rPr lang="en-US" sz="1280" dirty="0">
-                <a:solidFill>
-                  <a:srgbClr val="FFFFFF"/>
-                </a:solidFill>
-                <a:latin typeface="Consolas" pitchFamily="34" charset="0"/>
-                <a:ea typeface="Consolas" pitchFamily="34" charset="-122"/>
-                <a:cs typeface="Consolas" pitchFamily="34" charset="-120"/>
-              </a:rPr>
-              <a:t>)</a:t>
-            </a:r>
-            <a:endParaRPr lang="en-US" sz="1280" dirty="0"/>
-          </a:p>
-          <a:p>
-            <a:pPr indent="0" marL="0">
-              <a:buNone/>
-            </a:pPr>
-            <a:r>
-              <a:rPr lang="en-US" sz="1280" dirty="0">
-                <a:solidFill>
-                  <a:srgbClr val="FFFFFF"/>
-                </a:solidFill>
-                <a:latin typeface="Consolas" pitchFamily="34" charset="0"/>
-                <a:ea typeface="Consolas" pitchFamily="34" charset="-122"/>
-                <a:cs typeface="Consolas" pitchFamily="34" charset="-120"/>
-              </a:rPr>
-              <a:t>triage: TriageResult = response.value</a:t>
+              <a:t>result = response.value  </a:t>
+            </a:r>
+            <a:pPr indent="0" marL="0">
+              <a:buNone/>
+            </a:pPr>
+            <a:r>
+              <a:rPr lang="en-US" sz="1280" i="1" dirty="0">
+                <a:solidFill>
+                  <a:srgbClr val="666666"/>
+                </a:solidFill>
+                <a:latin typeface="Consolas" pitchFamily="34" charset="0"/>
+                <a:ea typeface="Consolas" pitchFamily="34" charset="-122"/>
+                <a:cs typeface="Consolas" pitchFamily="34" charset="-120"/>
+              </a:rPr>
+              <a:t># parsed JSON</a:t>
             </a:r>
             <a:endParaRPr lang="en-US" sz="1280" dirty="0"/>
           </a:p>
@@ -9607,7 +7917,7 @@
               <a:buNone/>
             </a:pPr>
             <a:r>
-              <a:rPr lang="en-US" sz="2500" b="1" dirty="0">
+              <a:rPr lang="en-US" sz="2300" b="1" dirty="0">
                 <a:solidFill>
                   <a:srgbClr val="1E2761"/>
                 </a:solidFill>
@@ -9615,47 +7925,22 @@
                 <a:ea typeface="Calibri" pitchFamily="34" charset="-122"/>
                 <a:cs typeface="Calibri" pitchFamily="34" charset="-120"/>
               </a:rPr>
-              <a:t>JSON Schema works without a model class</a:t>
-            </a:r>
-            <a:endParaRPr lang="en-US" sz="2500" dirty="0"/>
+              <a:t>Example: TriageResult fits your docs assistant</a:t>
+            </a:r>
+            <a:endParaRPr lang="en-US" sz="2300" dirty="0"/>
           </a:p>
         </p:txBody>
       </p:sp>
       <p:sp>
         <p:nvSpPr>
-          <p:cNvPr id="5" name="Shape 3"/>
-          <p:cNvSpPr/>
-          <p:nvPr/>
-        </p:nvSpPr>
-        <p:spPr>
-          <a:xfrm>
-            <a:off x="365760" y="1115568"/>
-            <a:ext cx="8412480" cy="2560320"/>
-          </a:xfrm>
-          <a:prstGeom prst="rect">
-            <a:avLst/>
-          </a:prstGeom>
-          <a:solidFill>
-            <a:srgbClr val="1D1E22"/>
-          </a:solidFill>
-          <a:ln w="9525">
-            <a:solidFill>
-              <a:srgbClr val="2A2B2E"/>
-            </a:solidFill>
-            <a:prstDash val="solid"/>
-          </a:ln>
-        </p:spPr>
-      </p:sp>
-      <p:sp>
-        <p:nvSpPr>
-          <p:cNvPr id="6" name="Text 4"/>
-          <p:cNvSpPr/>
-          <p:nvPr/>
-        </p:nvSpPr>
-        <p:spPr>
-          <a:xfrm>
-            <a:off x="502920" y="1207008"/>
-            <a:ext cx="8138160" cy="2377440"/>
+          <p:cNvPr id="5" name="Text 3"/>
+          <p:cNvSpPr/>
+          <p:nvPr/>
+        </p:nvSpPr>
+        <p:spPr>
+          <a:xfrm>
+            <a:off x="502920" y="1170432"/>
+            <a:ext cx="7955280" cy="3520440"/>
           </a:xfrm>
           <a:prstGeom prst="rect">
             <a:avLst/>
@@ -9664,484 +7949,167 @@
           <a:ln/>
         </p:spPr>
         <p:txBody>
-          <a:bodyPr wrap="square" lIns="0" tIns="0" rIns="0" bIns="0" rtlCol="0" anchor="t"/>
+          <a:bodyPr wrap="square" lIns="0" tIns="0" rIns="0" bIns="0" rtlCol="0" anchor="t">
+            <a:normAutofit/>
+          </a:bodyPr>
           <a:lstStyle/>
           <a:p>
-            <a:pPr indent="0" marL="0">
-              <a:buNone/>
-            </a:pPr>
-            <a:r>
-              <a:rPr lang="en-US" sz="1280" dirty="0">
-                <a:solidFill>
-                  <a:srgbClr val="FFFFFF"/>
-                </a:solidFill>
-                <a:latin typeface="Consolas" pitchFamily="34" charset="0"/>
-                <a:ea typeface="Consolas" pitchFamily="34" charset="-122"/>
-                <a:cs typeface="Consolas" pitchFamily="34" charset="-120"/>
-              </a:rPr>
-              <a:t>schema = {</a:t>
-            </a:r>
-            <a:endParaRPr lang="en-US" sz="1280" dirty="0"/>
-          </a:p>
-          <a:p>
-            <a:pPr indent="0" marL="0">
-              <a:buNone/>
-            </a:pPr>
-            <a:r>
-              <a:rPr lang="en-US" sz="1280" dirty="0">
-                <a:solidFill>
-                  <a:srgbClr val="FFFFFF"/>
-                </a:solidFill>
-                <a:latin typeface="Consolas" pitchFamily="34" charset="0"/>
-                <a:ea typeface="Consolas" pitchFamily="34" charset="-122"/>
-                <a:cs typeface="Consolas" pitchFamily="34" charset="-120"/>
-              </a:rPr>
-              <a:t>    </a:t>
-            </a:r>
-            <a:endParaRPr lang="en-US" sz="1280" dirty="0"/>
-          </a:p>
-          <a:p>
-            <a:pPr indent="0" marL="0">
-              <a:buNone/>
-            </a:pPr>
-            <a:r>
-              <a:rPr lang="en-US" sz="1280" dirty="0">
-                <a:solidFill>
-                  <a:srgbClr val="E4C98A"/>
-                </a:solidFill>
-                <a:latin typeface="Consolas" pitchFamily="34" charset="0"/>
-                <a:ea typeface="Consolas" pitchFamily="34" charset="-122"/>
-                <a:cs typeface="Consolas" pitchFamily="34" charset="-120"/>
-              </a:rPr>
-              <a:t>"type"</a:t>
-            </a:r>
-            <a:pPr indent="0" marL="0">
-              <a:buNone/>
-            </a:pPr>
-            <a:r>
-              <a:rPr lang="en-US" sz="1280" dirty="0">
-                <a:solidFill>
-                  <a:srgbClr val="FFFFFF"/>
-                </a:solidFill>
-                <a:latin typeface="Consolas" pitchFamily="34" charset="0"/>
-                <a:ea typeface="Consolas" pitchFamily="34" charset="-122"/>
-                <a:cs typeface="Consolas" pitchFamily="34" charset="-120"/>
-              </a:rPr>
-              <a:t>: </a:t>
-            </a:r>
-            <a:pPr indent="0" marL="0">
-              <a:buNone/>
-            </a:pPr>
-            <a:r>
-              <a:rPr lang="en-US" sz="1280" dirty="0">
-                <a:solidFill>
-                  <a:srgbClr val="E4C98A"/>
-                </a:solidFill>
-                <a:latin typeface="Consolas" pitchFamily="34" charset="0"/>
-                <a:ea typeface="Consolas" pitchFamily="34" charset="-122"/>
-                <a:cs typeface="Consolas" pitchFamily="34" charset="-120"/>
-              </a:rPr>
-              <a:t>"object"</a:t>
-            </a:r>
-            <a:pPr indent="0" marL="0">
-              <a:buNone/>
-            </a:pPr>
-            <a:r>
-              <a:rPr lang="en-US" sz="1280" dirty="0">
-                <a:solidFill>
-                  <a:srgbClr val="FFFFFF"/>
-                </a:solidFill>
-                <a:latin typeface="Consolas" pitchFamily="34" charset="0"/>
-                <a:ea typeface="Consolas" pitchFamily="34" charset="-122"/>
-                <a:cs typeface="Consolas" pitchFamily="34" charset="-120"/>
-              </a:rPr>
-              <a:t>,</a:t>
-            </a:r>
-            <a:endParaRPr lang="en-US" sz="1280" dirty="0"/>
-          </a:p>
-          <a:p>
-            <a:pPr indent="0" marL="0">
-              <a:buNone/>
-            </a:pPr>
-            <a:r>
-              <a:rPr lang="en-US" sz="1280" dirty="0">
-                <a:solidFill>
-                  <a:srgbClr val="FFFFFF"/>
-                </a:solidFill>
-                <a:latin typeface="Consolas" pitchFamily="34" charset="0"/>
-                <a:ea typeface="Consolas" pitchFamily="34" charset="-122"/>
-                <a:cs typeface="Consolas" pitchFamily="34" charset="-120"/>
-              </a:rPr>
-              <a:t>    </a:t>
-            </a:r>
-            <a:endParaRPr lang="en-US" sz="1280" dirty="0"/>
-          </a:p>
-          <a:p>
-            <a:pPr indent="0" marL="0">
-              <a:buNone/>
-            </a:pPr>
-            <a:r>
-              <a:rPr lang="en-US" sz="1280" dirty="0">
-                <a:solidFill>
-                  <a:srgbClr val="E4C98A"/>
-                </a:solidFill>
-                <a:latin typeface="Consolas" pitchFamily="34" charset="0"/>
-                <a:ea typeface="Consolas" pitchFamily="34" charset="-122"/>
-                <a:cs typeface="Consolas" pitchFamily="34" charset="-120"/>
-              </a:rPr>
-              <a:t>"properties"</a:t>
-            </a:r>
-            <a:pPr indent="0" marL="0">
-              <a:buNone/>
-            </a:pPr>
-            <a:r>
-              <a:rPr lang="en-US" sz="1280" dirty="0">
-                <a:solidFill>
-                  <a:srgbClr val="FFFFFF"/>
-                </a:solidFill>
-                <a:latin typeface="Consolas" pitchFamily="34" charset="0"/>
-                <a:ea typeface="Consolas" pitchFamily="34" charset="-122"/>
-                <a:cs typeface="Consolas" pitchFamily="34" charset="-120"/>
-              </a:rPr>
-              <a:t>: {</a:t>
-            </a:r>
-            <a:pPr indent="0" marL="0">
-              <a:buNone/>
-            </a:pPr>
-            <a:r>
-              <a:rPr lang="en-US" sz="1280" dirty="0">
-                <a:solidFill>
-                  <a:srgbClr val="E4C98A"/>
-                </a:solidFill>
-                <a:latin typeface="Consolas" pitchFamily="34" charset="0"/>
-                <a:ea typeface="Consolas" pitchFamily="34" charset="-122"/>
-                <a:cs typeface="Consolas" pitchFamily="34" charset="-120"/>
-              </a:rPr>
-              <a:t>"route"</a:t>
-            </a:r>
-            <a:pPr indent="0" marL="0">
-              <a:buNone/>
-            </a:pPr>
-            <a:r>
-              <a:rPr lang="en-US" sz="1280" dirty="0">
-                <a:solidFill>
-                  <a:srgbClr val="FFFFFF"/>
-                </a:solidFill>
-                <a:latin typeface="Consolas" pitchFamily="34" charset="0"/>
-                <a:ea typeface="Consolas" pitchFamily="34" charset="-122"/>
-                <a:cs typeface="Consolas" pitchFamily="34" charset="-120"/>
-              </a:rPr>
-              <a:t>: {</a:t>
-            </a:r>
-            <a:pPr indent="0" marL="0">
-              <a:buNone/>
-            </a:pPr>
-            <a:r>
-              <a:rPr lang="en-US" sz="1280" dirty="0">
-                <a:solidFill>
-                  <a:srgbClr val="E4C98A"/>
-                </a:solidFill>
-                <a:latin typeface="Consolas" pitchFamily="34" charset="0"/>
-                <a:ea typeface="Consolas" pitchFamily="34" charset="-122"/>
-                <a:cs typeface="Consolas" pitchFamily="34" charset="-120"/>
-              </a:rPr>
-              <a:t>"type"</a:t>
-            </a:r>
-            <a:pPr indent="0" marL="0">
-              <a:buNone/>
-            </a:pPr>
-            <a:r>
-              <a:rPr lang="en-US" sz="1280" dirty="0">
-                <a:solidFill>
-                  <a:srgbClr val="FFFFFF"/>
-                </a:solidFill>
-                <a:latin typeface="Consolas" pitchFamily="34" charset="0"/>
-                <a:ea typeface="Consolas" pitchFamily="34" charset="-122"/>
-                <a:cs typeface="Consolas" pitchFamily="34" charset="-120"/>
-              </a:rPr>
-              <a:t>: </a:t>
-            </a:r>
-            <a:pPr indent="0" marL="0">
-              <a:buNone/>
-            </a:pPr>
-            <a:r>
-              <a:rPr lang="en-US" sz="1280" dirty="0">
-                <a:solidFill>
-                  <a:srgbClr val="E4C98A"/>
-                </a:solidFill>
-                <a:latin typeface="Consolas" pitchFamily="34" charset="0"/>
-                <a:ea typeface="Consolas" pitchFamily="34" charset="-122"/>
-                <a:cs typeface="Consolas" pitchFamily="34" charset="-120"/>
-              </a:rPr>
-              <a:t>"string"</a:t>
-            </a:r>
-            <a:pPr indent="0" marL="0">
-              <a:buNone/>
-            </a:pPr>
-            <a:r>
-              <a:rPr lang="en-US" sz="1280" dirty="0">
-                <a:solidFill>
-                  <a:srgbClr val="FFFFFF"/>
-                </a:solidFill>
-                <a:latin typeface="Consolas" pitchFamily="34" charset="0"/>
-                <a:ea typeface="Consolas" pitchFamily="34" charset="-122"/>
-                <a:cs typeface="Consolas" pitchFamily="34" charset="-120"/>
-              </a:rPr>
-              <a:t>}},</a:t>
-            </a:r>
-            <a:endParaRPr lang="en-US" sz="1280" dirty="0"/>
-          </a:p>
-          <a:p>
-            <a:pPr indent="0" marL="0">
-              <a:buNone/>
-            </a:pPr>
-            <a:r>
-              <a:rPr lang="en-US" sz="1280" dirty="0">
-                <a:solidFill>
-                  <a:srgbClr val="FFFFFF"/>
-                </a:solidFill>
-                <a:latin typeface="Consolas" pitchFamily="34" charset="0"/>
-                <a:ea typeface="Consolas" pitchFamily="34" charset="-122"/>
-                <a:cs typeface="Consolas" pitchFamily="34" charset="-120"/>
-              </a:rPr>
-              <a:t>    </a:t>
-            </a:r>
-            <a:endParaRPr lang="en-US" sz="1280" dirty="0"/>
-          </a:p>
-          <a:p>
-            <a:pPr indent="0" marL="0">
-              <a:buNone/>
-            </a:pPr>
-            <a:r>
-              <a:rPr lang="en-US" sz="1280" dirty="0">
-                <a:solidFill>
-                  <a:srgbClr val="E4C98A"/>
-                </a:solidFill>
-                <a:latin typeface="Consolas" pitchFamily="34" charset="0"/>
-                <a:ea typeface="Consolas" pitchFamily="34" charset="-122"/>
-                <a:cs typeface="Consolas" pitchFamily="34" charset="-120"/>
-              </a:rPr>
-              <a:t>"required"</a:t>
-            </a:r>
-            <a:pPr indent="0" marL="0">
-              <a:buNone/>
-            </a:pPr>
-            <a:r>
-              <a:rPr lang="en-US" sz="1280" dirty="0">
-                <a:solidFill>
-                  <a:srgbClr val="FFFFFF"/>
-                </a:solidFill>
-                <a:latin typeface="Consolas" pitchFamily="34" charset="0"/>
-                <a:ea typeface="Consolas" pitchFamily="34" charset="-122"/>
-                <a:cs typeface="Consolas" pitchFamily="34" charset="-120"/>
-              </a:rPr>
-              <a:t>: [</a:t>
-            </a:r>
-            <a:pPr indent="0" marL="0">
-              <a:buNone/>
-            </a:pPr>
-            <a:r>
-              <a:rPr lang="en-US" sz="1280" dirty="0">
-                <a:solidFill>
-                  <a:srgbClr val="E4C98A"/>
-                </a:solidFill>
-                <a:latin typeface="Consolas" pitchFamily="34" charset="0"/>
-                <a:ea typeface="Consolas" pitchFamily="34" charset="-122"/>
-                <a:cs typeface="Consolas" pitchFamily="34" charset="-120"/>
-              </a:rPr>
-              <a:t>"route"</a:t>
-            </a:r>
-            <a:pPr indent="0" marL="0">
-              <a:buNone/>
-            </a:pPr>
-            <a:r>
-              <a:rPr lang="en-US" sz="1280" dirty="0">
-                <a:solidFill>
-                  <a:srgbClr val="FFFFFF"/>
-                </a:solidFill>
-                <a:latin typeface="Consolas" pitchFamily="34" charset="0"/>
-                <a:ea typeface="Consolas" pitchFamily="34" charset="-122"/>
-                <a:cs typeface="Consolas" pitchFamily="34" charset="-120"/>
-              </a:rPr>
-              <a:t>],</a:t>
-            </a:r>
-            <a:endParaRPr lang="en-US" sz="1280" dirty="0"/>
-          </a:p>
-          <a:p>
-            <a:pPr indent="0" marL="0">
-              <a:buNone/>
-            </a:pPr>
-            <a:r>
-              <a:rPr lang="en-US" sz="1280" dirty="0">
-                <a:solidFill>
-                  <a:srgbClr val="FFFFFF"/>
-                </a:solidFill>
-                <a:latin typeface="Consolas" pitchFamily="34" charset="0"/>
-                <a:ea typeface="Consolas" pitchFamily="34" charset="-122"/>
-                <a:cs typeface="Consolas" pitchFamily="34" charset="-120"/>
-              </a:rPr>
-              <a:t>}</a:t>
-            </a:r>
-            <a:endParaRPr lang="en-US" sz="1280" dirty="0"/>
-          </a:p>
-          <a:p>
-            <a:pPr indent="0" marL="0">
-              <a:buNone/>
-            </a:pPr>
-            <a:endParaRPr lang="en-US" sz="1280" dirty="0"/>
-          </a:p>
-          <a:p>
-            <a:pPr indent="0" marL="0">
-              <a:buNone/>
-            </a:pPr>
-            <a:r>
-              <a:rPr lang="en-US" sz="1280" dirty="0">
-                <a:solidFill>
-                  <a:srgbClr val="FFFFFF"/>
-                </a:solidFill>
-                <a:latin typeface="Consolas" pitchFamily="34" charset="0"/>
-                <a:ea typeface="Consolas" pitchFamily="34" charset="-122"/>
-                <a:cs typeface="Consolas" pitchFamily="34" charset="-120"/>
-              </a:rPr>
-              <a:t>response = </a:t>
-            </a:r>
-            <a:endParaRPr lang="en-US" sz="1280" dirty="0"/>
-          </a:p>
-          <a:p>
-            <a:pPr indent="0" marL="0">
-              <a:buNone/>
-            </a:pPr>
-            <a:r>
-              <a:rPr lang="en-US" sz="1280" dirty="0">
-                <a:solidFill>
-                  <a:srgbClr val="A996B6"/>
-                </a:solidFill>
-                <a:latin typeface="Consolas" pitchFamily="34" charset="0"/>
-                <a:ea typeface="Consolas" pitchFamily="34" charset="-122"/>
-                <a:cs typeface="Consolas" pitchFamily="34" charset="-120"/>
-              </a:rPr>
-              <a:t>await</a:t>
-            </a:r>
-            <a:pPr indent="0" marL="0">
-              <a:buNone/>
-            </a:pPr>
-            <a:r>
-              <a:rPr lang="en-US" sz="1280" dirty="0">
-                <a:solidFill>
-                  <a:srgbClr val="FFFFFF"/>
-                </a:solidFill>
-                <a:latin typeface="Consolas" pitchFamily="34" charset="0"/>
-                <a:ea typeface="Consolas" pitchFamily="34" charset="-122"/>
-                <a:cs typeface="Consolas" pitchFamily="34" charset="-120"/>
-              </a:rPr>
-              <a:t> agent.run(</a:t>
-            </a:r>
-            <a:endParaRPr lang="en-US" sz="1280" dirty="0"/>
-          </a:p>
-          <a:p>
-            <a:pPr indent="0" marL="0">
-              <a:buNone/>
-            </a:pPr>
-            <a:r>
-              <a:rPr lang="en-US" sz="1280" dirty="0">
-                <a:solidFill>
-                  <a:srgbClr val="FFFFFF"/>
-                </a:solidFill>
-                <a:latin typeface="Consolas" pitchFamily="34" charset="0"/>
-                <a:ea typeface="Consolas" pitchFamily="34" charset="-122"/>
-                <a:cs typeface="Consolas" pitchFamily="34" charset="-120"/>
-              </a:rPr>
-              <a:t>    request, options={</a:t>
-            </a:r>
-            <a:endParaRPr lang="en-US" sz="1280" dirty="0"/>
-          </a:p>
-          <a:p>
-            <a:pPr indent="0" marL="0">
-              <a:buNone/>
-            </a:pPr>
-            <a:r>
-              <a:rPr lang="en-US" sz="1280" dirty="0">
-                <a:solidFill>
-                  <a:srgbClr val="E4C98A"/>
-                </a:solidFill>
-                <a:latin typeface="Consolas" pitchFamily="34" charset="0"/>
-                <a:ea typeface="Consolas" pitchFamily="34" charset="-122"/>
-                <a:cs typeface="Consolas" pitchFamily="34" charset="-120"/>
-              </a:rPr>
-              <a:t>"response_format"</a:t>
-            </a:r>
-            <a:pPr indent="0" marL="0">
-              <a:buNone/>
-            </a:pPr>
-            <a:r>
-              <a:rPr lang="en-US" sz="1280" dirty="0">
-                <a:solidFill>
-                  <a:srgbClr val="FFFFFF"/>
-                </a:solidFill>
-                <a:latin typeface="Consolas" pitchFamily="34" charset="0"/>
-                <a:ea typeface="Consolas" pitchFamily="34" charset="-122"/>
-                <a:cs typeface="Consolas" pitchFamily="34" charset="-120"/>
-              </a:rPr>
-              <a:t>: schema}</a:t>
-            </a:r>
-            <a:endParaRPr lang="en-US" sz="1280" dirty="0"/>
-          </a:p>
-          <a:p>
-            <a:pPr indent="0" marL="0">
-              <a:buNone/>
-            </a:pPr>
-            <a:r>
-              <a:rPr lang="en-US" sz="1280" dirty="0">
-                <a:solidFill>
-                  <a:srgbClr val="FFFFFF"/>
-                </a:solidFill>
-                <a:latin typeface="Consolas" pitchFamily="34" charset="0"/>
-                <a:ea typeface="Consolas" pitchFamily="34" charset="-122"/>
-                <a:cs typeface="Consolas" pitchFamily="34" charset="-120"/>
-              </a:rPr>
-              <a:t>)</a:t>
-            </a:r>
-            <a:endParaRPr lang="en-US" sz="1280" dirty="0"/>
-          </a:p>
-          <a:p>
-            <a:pPr indent="0" marL="0">
-              <a:buNone/>
-            </a:pPr>
-            <a:r>
-              <a:rPr lang="en-US" sz="1280" dirty="0">
-                <a:solidFill>
-                  <a:srgbClr val="FFFFFF"/>
-                </a:solidFill>
-                <a:latin typeface="Consolas" pitchFamily="34" charset="0"/>
-                <a:ea typeface="Consolas" pitchFamily="34" charset="-122"/>
-                <a:cs typeface="Consolas" pitchFamily="34" charset="-120"/>
-              </a:rPr>
-              <a:t>result = response.value  </a:t>
-            </a:r>
-            <a:endParaRPr lang="en-US" sz="1280" dirty="0"/>
-          </a:p>
-          <a:p>
-            <a:pPr indent="0" marL="0">
-              <a:buNone/>
-            </a:pPr>
-            <a:r>
-              <a:rPr lang="en-US" sz="1280" i="1" dirty="0">
-                <a:solidFill>
-                  <a:srgbClr val="666666"/>
-                </a:solidFill>
-                <a:latin typeface="Consolas" pitchFamily="34" charset="0"/>
-                <a:ea typeface="Consolas" pitchFamily="34" charset="-122"/>
-                <a:cs typeface="Consolas" pitchFamily="34" charset="-120"/>
-              </a:rPr>
-              <a:t># parsed JSON</a:t>
-            </a:r>
-            <a:endParaRPr lang="en-US" sz="1280" dirty="0"/>
+            <a:pPr marL="342900" indent="-342900">
+              <a:spcAft>
+                <a:spcPts val="1000"/>
+              </a:spcAft>
+              <a:buSzPct val="100000"/>
+              <a:buChar char="•"/>
+            </a:pPr>
+            <a:r>
+              <a:rPr lang="en-US" sz="1600" b="1" dirty="0">
+                <a:solidFill>
+                  <a:srgbClr val="1E2761"/>
+                </a:solidFill>
+                <a:latin typeface="Calibri" pitchFamily="34" charset="0"/>
+                <a:ea typeface="Calibri" pitchFamily="34" charset="-122"/>
+                <a:cs typeface="Calibri" pitchFamily="34" charset="-120"/>
+              </a:rPr>
+              <a:t>Classify</a:t>
+            </a:r>
+            <a:pPr indent="0" marL="0">
+              <a:spcAft>
+                <a:spcPts val="1000"/>
+              </a:spcAft>
+              <a:buNone/>
+            </a:pPr>
+            <a:r>
+              <a:rPr lang="en-US" sz="1600" dirty="0">
+                <a:solidFill>
+                  <a:srgbClr val="212121"/>
+                </a:solidFill>
+                <a:latin typeface="Calibri" pitchFamily="34" charset="0"/>
+                <a:ea typeface="Calibri" pitchFamily="34" charset="-122"/>
+                <a:cs typeface="Calibri" pitchFamily="34" charset="-120"/>
+              </a:rPr>
+              <a:t>  —  route: answer, clarify, or work_item</a:t>
+            </a:r>
+            <a:endParaRPr lang="en-US" sz="1600" dirty="0"/>
+          </a:p>
+          <a:p>
+            <a:pPr marL="342900" indent="-342900">
+              <a:spcAft>
+                <a:spcPts val="1000"/>
+              </a:spcAft>
+              <a:buSzPct val="100000"/>
+              <a:buChar char="•"/>
+            </a:pPr>
+            <a:r>
+              <a:rPr lang="en-US" sz="1600" b="1" dirty="0">
+                <a:solidFill>
+                  <a:srgbClr val="1E2761"/>
+                </a:solidFill>
+                <a:latin typeface="Calibri" pitchFamily="34" charset="0"/>
+                <a:ea typeface="Calibri" pitchFamily="34" charset="-122"/>
+                <a:cs typeface="Calibri" pitchFamily="34" charset="-120"/>
+              </a:rPr>
+              <a:t>Summarize</a:t>
+            </a:r>
+            <a:pPr indent="0" marL="0">
+              <a:spcAft>
+                <a:spcPts val="1000"/>
+              </a:spcAft>
+              <a:buNone/>
+            </a:pPr>
+            <a:r>
+              <a:rPr lang="en-US" sz="1600" dirty="0">
+                <a:solidFill>
+                  <a:srgbClr val="212121"/>
+                </a:solidFill>
+                <a:latin typeface="Calibri" pitchFamily="34" charset="0"/>
+                <a:ea typeface="Calibri" pitchFamily="34" charset="-122"/>
+                <a:cs typeface="Calibri" pitchFamily="34" charset="-120"/>
+              </a:rPr>
+              <a:t>  —  concise issue statement for your UI</a:t>
+            </a:r>
+            <a:endParaRPr lang="en-US" sz="1600" dirty="0"/>
+          </a:p>
+          <a:p>
+            <a:pPr marL="342900" indent="-342900">
+              <a:spcAft>
+                <a:spcPts val="1000"/>
+              </a:spcAft>
+              <a:buSzPct val="100000"/>
+              <a:buChar char="•"/>
+            </a:pPr>
+            <a:r>
+              <a:rPr lang="en-US" sz="1600" b="1" dirty="0">
+                <a:solidFill>
+                  <a:srgbClr val="1E2761"/>
+                </a:solidFill>
+                <a:latin typeface="Calibri" pitchFamily="34" charset="0"/>
+                <a:ea typeface="Calibri" pitchFamily="34" charset="-122"/>
+                <a:cs typeface="Calibri" pitchFamily="34" charset="-120"/>
+              </a:rPr>
+              <a:t>Signal</a:t>
+            </a:r>
+            <a:pPr indent="0" marL="0">
+              <a:spcAft>
+                <a:spcPts val="1000"/>
+              </a:spcAft>
+              <a:buNone/>
+            </a:pPr>
+            <a:r>
+              <a:rPr lang="en-US" sz="1600" dirty="0">
+                <a:solidFill>
+                  <a:srgbClr val="212121"/>
+                </a:solidFill>
+                <a:latin typeface="Calibri" pitchFamily="34" charset="0"/>
+                <a:ea typeface="Calibri" pitchFamily="34" charset="-122"/>
+                <a:cs typeface="Calibri" pitchFamily="34" charset="-120"/>
+              </a:rPr>
+              <a:t>  —  needs_work_item is a recommendation</a:t>
+            </a:r>
+            <a:endParaRPr lang="en-US" sz="1600" dirty="0"/>
+          </a:p>
+          <a:p>
+            <a:pPr marL="342900" indent="-342900">
+              <a:spcAft>
+                <a:spcPts val="1000"/>
+              </a:spcAft>
+              <a:buSzPct val="100000"/>
+              <a:buChar char="•"/>
+            </a:pPr>
+            <a:r>
+              <a:rPr lang="en-US" sz="1600" b="1" dirty="0">
+                <a:solidFill>
+                  <a:srgbClr val="1E2761"/>
+                </a:solidFill>
+                <a:latin typeface="Calibri" pitchFamily="34" charset="0"/>
+                <a:ea typeface="Calibri" pitchFamily="34" charset="-122"/>
+                <a:cs typeface="Calibri" pitchFamily="34" charset="-120"/>
+              </a:rPr>
+              <a:t>Authorize</a:t>
+            </a:r>
+            <a:pPr indent="0" marL="0">
+              <a:spcAft>
+                <a:spcPts val="1000"/>
+              </a:spcAft>
+              <a:buNone/>
+            </a:pPr>
+            <a:r>
+              <a:rPr lang="en-US" sz="1600" dirty="0">
+                <a:solidFill>
+                  <a:srgbClr val="212121"/>
+                </a:solidFill>
+                <a:latin typeface="Calibri" pitchFamily="34" charset="0"/>
+                <a:ea typeface="Calibri" pitchFamily="34" charset="-122"/>
+                <a:cs typeface="Calibri" pitchFamily="34" charset="-120"/>
+              </a:rPr>
+              <a:t>  —  your app still controls whether a write is offered or approved</a:t>
+            </a:r>
+            <a:endParaRPr lang="en-US" sz="1600" dirty="0"/>
           </a:p>
         </p:txBody>
       </p:sp>
       <p:sp>
         <p:nvSpPr>
-          <p:cNvPr id="7" name="Shape 5"/>
+          <p:cNvPr id="6" name="Shape 4"/>
           <p:cNvSpPr/>
           <p:nvPr/>
         </p:nvSpPr>
@@ -10164,7 +8132,7 @@
       </p:sp>
       <p:sp>
         <p:nvSpPr>
-          <p:cNvPr id="8" name="Text 6"/>
+          <p:cNvPr id="7" name="Text 5"/>
           <p:cNvSpPr/>
           <p:nvPr/>
         </p:nvSpPr>
@@ -10323,7 +8291,7 @@
               <a:buNone/>
             </a:pPr>
             <a:r>
-              <a:rPr lang="en-US" sz="2500" b="1" dirty="0">
+              <a:rPr lang="en-US" sz="2800" b="1" dirty="0">
                 <a:solidFill>
                   <a:srgbClr val="1E2761"/>
                 </a:solidFill>
@@ -10331,9 +8299,9 @@
                 <a:ea typeface="Calibri" pitchFamily="34" charset="-122"/>
                 <a:cs typeface="Calibri" pitchFamily="34" charset="-120"/>
               </a:rPr>
-              <a:t>TriageResult fits your docs assistant</a:t>
-            </a:r>
-            <a:endParaRPr lang="en-US" sz="2500" dirty="0"/>
+              <a:t>Combine streaming and structure</a:t>
+            </a:r>
+            <a:endParaRPr lang="en-US" sz="2800" dirty="0"/>
           </a:p>
         </p:txBody>
       </p:sp>
@@ -10345,20 +8313,18 @@
         </p:nvSpPr>
         <p:spPr>
           <a:xfrm>
-            <a:off x="365760" y="1216152"/>
-            <a:ext cx="1911096" cy="2148840"/>
-          </a:xfrm>
-          <a:prstGeom prst="roundRect">
-            <a:avLst>
-              <a:gd name="adj" fmla="val 2871"/>
-            </a:avLst>
+            <a:off x="365760" y="1115568"/>
+            <a:ext cx="8412480" cy="3191256"/>
+          </a:xfrm>
+          <a:prstGeom prst="rect">
+            <a:avLst/>
           </a:prstGeom>
           <a:solidFill>
-            <a:srgbClr val="CADCFC"/>
+            <a:srgbClr val="1D1E22"/>
           </a:solidFill>
-          <a:ln w="10160">
+          <a:ln w="9525">
             <a:solidFill>
-              <a:srgbClr val="1E2761"/>
+              <a:srgbClr val="2A2B2E"/>
             </a:solidFill>
             <a:prstDash val="solid"/>
           </a:ln>
@@ -10366,114 +8332,14 @@
       </p:sp>
       <p:sp>
         <p:nvSpPr>
-          <p:cNvPr id="6" name="Shape 4"/>
-          <p:cNvSpPr/>
-          <p:nvPr/>
-        </p:nvSpPr>
-        <p:spPr>
-          <a:xfrm>
-            <a:off x="475488" y="1335024"/>
-            <a:ext cx="320040" cy="320040"/>
-          </a:xfrm>
-          <a:prstGeom prst="ellipse">
-            <a:avLst/>
-          </a:prstGeom>
-          <a:solidFill>
-            <a:srgbClr val="1E2761"/>
-          </a:solidFill>
-          <a:ln/>
-        </p:spPr>
-      </p:sp>
-      <p:sp>
-        <p:nvSpPr>
-          <p:cNvPr id="7" name="Text 5"/>
-          <p:cNvSpPr/>
-          <p:nvPr/>
-        </p:nvSpPr>
-        <p:spPr>
-          <a:xfrm>
-            <a:off x="475488" y="1385316"/>
-            <a:ext cx="320040" cy="146304"/>
-          </a:xfrm>
-          <a:prstGeom prst="rect">
-            <a:avLst/>
-          </a:prstGeom>
-          <a:noFill/>
-          <a:ln/>
-        </p:spPr>
-        <p:txBody>
-          <a:bodyPr wrap="square" lIns="0" tIns="0" rIns="0" bIns="0" rtlCol="0" anchor="ctr"/>
-          <a:lstStyle/>
-          <a:p>
-            <a:pPr algn="ctr" indent="0" marL="0">
-              <a:buNone/>
-            </a:pPr>
-            <a:r>
-              <a:rPr lang="en-US" sz="900" b="1" dirty="0">
-                <a:solidFill>
-                  <a:srgbClr val="FFFFFF"/>
-                </a:solidFill>
-                <a:latin typeface="Calibri" pitchFamily="34" charset="0"/>
-                <a:ea typeface="Calibri" pitchFamily="34" charset="-122"/>
-                <a:cs typeface="Calibri" pitchFamily="34" charset="-120"/>
-              </a:rPr>
-              <a:t>1</a:t>
-            </a:r>
-            <a:endParaRPr lang="en-US" sz="900" dirty="0"/>
-          </a:p>
-        </p:txBody>
-      </p:sp>
-      <p:sp>
-        <p:nvSpPr>
-          <p:cNvPr id="8" name="Text 6"/>
-          <p:cNvSpPr/>
-          <p:nvPr/>
-        </p:nvSpPr>
-        <p:spPr>
-          <a:xfrm>
-            <a:off x="896112" y="1335024"/>
-            <a:ext cx="1252728" cy="310896"/>
-          </a:xfrm>
-          <a:prstGeom prst="rect">
-            <a:avLst/>
-          </a:prstGeom>
-          <a:noFill/>
-          <a:ln/>
-        </p:spPr>
-        <p:txBody>
-          <a:bodyPr wrap="square" lIns="0" tIns="0" rIns="0" bIns="0" rtlCol="0" anchor="ctr">
-            <a:normAutofit/>
-          </a:bodyPr>
-          <a:lstStyle/>
-          <a:p>
-            <a:pPr indent="0" marL="0">
-              <a:buNone/>
-            </a:pPr>
-            <a:r>
-              <a:rPr lang="en-US" sz="1500" b="1" dirty="0">
-                <a:solidFill>
-                  <a:srgbClr val="1E2761"/>
-                </a:solidFill>
-                <a:latin typeface="Calibri" pitchFamily="34" charset="0"/>
-                <a:ea typeface="Calibri" pitchFamily="34" charset="-122"/>
-                <a:cs typeface="Calibri" pitchFamily="34" charset="-120"/>
-              </a:rPr>
-              <a:t>Classify</a:t>
-            </a:r>
-            <a:endParaRPr lang="en-US" sz="1500" dirty="0"/>
-          </a:p>
-        </p:txBody>
-      </p:sp>
-      <p:sp>
-        <p:nvSpPr>
-          <p:cNvPr id="9" name="Text 7"/>
-          <p:cNvSpPr/>
-          <p:nvPr/>
-        </p:nvSpPr>
-        <p:spPr>
-          <a:xfrm>
-            <a:off x="512064" y="1719072"/>
-            <a:ext cx="1618488" cy="1527048"/>
+          <p:cNvPr id="6" name="Text 4"/>
+          <p:cNvSpPr/>
+          <p:nvPr/>
+        </p:nvSpPr>
+        <p:spPr>
+          <a:xfrm>
+            <a:off x="502920" y="1207008"/>
+            <a:ext cx="8138160" cy="3008376"/>
           </a:xfrm>
           <a:prstGeom prst="rect">
             <a:avLst/>
@@ -10491,587 +8357,387 @@
               <a:buNone/>
             </a:pPr>
             <a:r>
-              <a:rPr lang="en-US" sz="1150" dirty="0">
-                <a:solidFill>
-                  <a:srgbClr val="212121"/>
-                </a:solidFill>
-                <a:latin typeface="Calibri" pitchFamily="34" charset="0"/>
-                <a:ea typeface="Calibri" pitchFamily="34" charset="-122"/>
-                <a:cs typeface="Calibri" pitchFamily="34" charset="-120"/>
-              </a:rPr>
-              <a:t>route: answer, clarify, or work_item</a:t>
-            </a:r>
-            <a:endParaRPr lang="en-US" sz="1150" dirty="0"/>
+              <a:rPr lang="en-US" sz="1080" dirty="0">
+                <a:solidFill>
+                  <a:srgbClr val="FFFFFF"/>
+                </a:solidFill>
+                <a:latin typeface="Consolas" pitchFamily="34" charset="0"/>
+                <a:ea typeface="Consolas" pitchFamily="34" charset="-122"/>
+                <a:cs typeface="Consolas" pitchFamily="34" charset="-120"/>
+              </a:rPr>
+              <a:t>stream = agent.run(</a:t>
+            </a:r>
+            <a:endParaRPr lang="en-US" sz="1080" dirty="0"/>
+          </a:p>
+          <a:p>
+            <a:pPr indent="0" marL="0">
+              <a:buNone/>
+            </a:pPr>
+            <a:r>
+              <a:rPr lang="en-US" sz="1080" dirty="0">
+                <a:solidFill>
+                  <a:srgbClr val="FFFFFF"/>
+                </a:solidFill>
+                <a:latin typeface="Consolas" pitchFamily="34" charset="0"/>
+                <a:ea typeface="Consolas" pitchFamily="34" charset="-122"/>
+                <a:cs typeface="Consolas" pitchFamily="34" charset="-120"/>
+              </a:rPr>
+              <a:t>    request,</a:t>
+            </a:r>
+            <a:endParaRPr lang="en-US" sz="1080" dirty="0"/>
+          </a:p>
+          <a:p>
+            <a:pPr indent="0" marL="0">
+              <a:buNone/>
+            </a:pPr>
+            <a:r>
+              <a:rPr lang="en-US" sz="1080" dirty="0">
+                <a:solidFill>
+                  <a:srgbClr val="FFFFFF"/>
+                </a:solidFill>
+                <a:latin typeface="Consolas" pitchFamily="34" charset="0"/>
+                <a:ea typeface="Consolas" pitchFamily="34" charset="-122"/>
+                <a:cs typeface="Consolas" pitchFamily="34" charset="-120"/>
+              </a:rPr>
+              <a:t>    stream=</a:t>
+            </a:r>
+            <a:pPr indent="0" marL="0">
+              <a:buNone/>
+            </a:pPr>
+            <a:r>
+              <a:rPr lang="en-US" sz="1080" dirty="0">
+                <a:solidFill>
+                  <a:srgbClr val="A996B6"/>
+                </a:solidFill>
+                <a:latin typeface="Consolas" pitchFamily="34" charset="0"/>
+                <a:ea typeface="Consolas" pitchFamily="34" charset="-122"/>
+                <a:cs typeface="Consolas" pitchFamily="34" charset="-120"/>
+              </a:rPr>
+              <a:t>True</a:t>
+            </a:r>
+            <a:pPr indent="0" marL="0">
+              <a:buNone/>
+            </a:pPr>
+            <a:r>
+              <a:rPr lang="en-US" sz="1080" dirty="0">
+                <a:solidFill>
+                  <a:srgbClr val="FFFFFF"/>
+                </a:solidFill>
+                <a:latin typeface="Consolas" pitchFamily="34" charset="0"/>
+                <a:ea typeface="Consolas" pitchFamily="34" charset="-122"/>
+                <a:cs typeface="Consolas" pitchFamily="34" charset="-120"/>
+              </a:rPr>
+              <a:t>,</a:t>
+            </a:r>
+            <a:endParaRPr lang="en-US" sz="1080" dirty="0"/>
+          </a:p>
+          <a:p>
+            <a:pPr indent="0" marL="0">
+              <a:buNone/>
+            </a:pPr>
+            <a:r>
+              <a:rPr lang="en-US" sz="1080" dirty="0">
+                <a:solidFill>
+                  <a:srgbClr val="FFFFFF"/>
+                </a:solidFill>
+                <a:latin typeface="Consolas" pitchFamily="34" charset="0"/>
+                <a:ea typeface="Consolas" pitchFamily="34" charset="-122"/>
+                <a:cs typeface="Consolas" pitchFamily="34" charset="-120"/>
+              </a:rPr>
+              <a:t>    session=session,</a:t>
+            </a:r>
+            <a:endParaRPr lang="en-US" sz="1080" dirty="0"/>
+          </a:p>
+          <a:p>
+            <a:pPr indent="0" marL="0">
+              <a:buNone/>
+            </a:pPr>
+            <a:r>
+              <a:rPr lang="en-US" sz="1080" dirty="0">
+                <a:solidFill>
+                  <a:srgbClr val="FFFFFF"/>
+                </a:solidFill>
+                <a:latin typeface="Consolas" pitchFamily="34" charset="0"/>
+                <a:ea typeface="Consolas" pitchFamily="34" charset="-122"/>
+                <a:cs typeface="Consolas" pitchFamily="34" charset="-120"/>
+              </a:rPr>
+              <a:t>    options={</a:t>
+            </a:r>
+            <a:pPr indent="0" marL="0">
+              <a:buNone/>
+            </a:pPr>
+            <a:r>
+              <a:rPr lang="en-US" sz="1080" dirty="0">
+                <a:solidFill>
+                  <a:srgbClr val="E4C98A"/>
+                </a:solidFill>
+                <a:latin typeface="Consolas" pitchFamily="34" charset="0"/>
+                <a:ea typeface="Consolas" pitchFamily="34" charset="-122"/>
+                <a:cs typeface="Consolas" pitchFamily="34" charset="-120"/>
+              </a:rPr>
+              <a:t>"response_format"</a:t>
+            </a:r>
+            <a:pPr indent="0" marL="0">
+              <a:buNone/>
+            </a:pPr>
+            <a:r>
+              <a:rPr lang="en-US" sz="1080" dirty="0">
+                <a:solidFill>
+                  <a:srgbClr val="FFFFFF"/>
+                </a:solidFill>
+                <a:latin typeface="Consolas" pitchFamily="34" charset="0"/>
+                <a:ea typeface="Consolas" pitchFamily="34" charset="-122"/>
+                <a:cs typeface="Consolas" pitchFamily="34" charset="-120"/>
+              </a:rPr>
+              <a:t>: TriageResult},</a:t>
+            </a:r>
+            <a:endParaRPr lang="en-US" sz="1080" dirty="0"/>
+          </a:p>
+          <a:p>
+            <a:pPr indent="0" marL="0">
+              <a:buNone/>
+            </a:pPr>
+            <a:r>
+              <a:rPr lang="en-US" sz="1080" dirty="0">
+                <a:solidFill>
+                  <a:srgbClr val="FFFFFF"/>
+                </a:solidFill>
+                <a:latin typeface="Consolas" pitchFamily="34" charset="0"/>
+                <a:ea typeface="Consolas" pitchFamily="34" charset="-122"/>
+                <a:cs typeface="Consolas" pitchFamily="34" charset="-120"/>
+              </a:rPr>
+              <a:t>)</a:t>
+            </a:r>
+            <a:endParaRPr lang="en-US" sz="1080" dirty="0"/>
+          </a:p>
+          <a:p>
+            <a:pPr indent="0" marL="0">
+              <a:buNone/>
+            </a:pPr>
+            <a:endParaRPr lang="en-US" sz="1080" dirty="0"/>
+          </a:p>
+          <a:p>
+            <a:pPr indent="0" marL="0">
+              <a:buNone/>
+            </a:pPr>
+            <a:r>
+              <a:rPr lang="en-US" sz="1080" dirty="0">
+                <a:solidFill>
+                  <a:srgbClr val="A996B6"/>
+                </a:solidFill>
+                <a:latin typeface="Consolas" pitchFamily="34" charset="0"/>
+                <a:ea typeface="Consolas" pitchFamily="34" charset="-122"/>
+                <a:cs typeface="Consolas" pitchFamily="34" charset="-120"/>
+              </a:rPr>
+              <a:t>async</a:t>
+            </a:r>
+            <a:pPr indent="0" marL="0">
+              <a:buNone/>
+            </a:pPr>
+            <a:r>
+              <a:rPr lang="en-US" sz="1080" dirty="0">
+                <a:solidFill>
+                  <a:srgbClr val="FFFFFF"/>
+                </a:solidFill>
+                <a:latin typeface="Consolas" pitchFamily="34" charset="0"/>
+                <a:ea typeface="Consolas" pitchFamily="34" charset="-122"/>
+                <a:cs typeface="Consolas" pitchFamily="34" charset="-120"/>
+              </a:rPr>
+              <a:t> </a:t>
+            </a:r>
+            <a:pPr indent="0" marL="0">
+              <a:buNone/>
+            </a:pPr>
+            <a:r>
+              <a:rPr lang="en-US" sz="1080" dirty="0">
+                <a:solidFill>
+                  <a:srgbClr val="A996B6"/>
+                </a:solidFill>
+                <a:latin typeface="Consolas" pitchFamily="34" charset="0"/>
+                <a:ea typeface="Consolas" pitchFamily="34" charset="-122"/>
+                <a:cs typeface="Consolas" pitchFamily="34" charset="-120"/>
+              </a:rPr>
+              <a:t>for</a:t>
+            </a:r>
+            <a:pPr indent="0" marL="0">
+              <a:buNone/>
+            </a:pPr>
+            <a:r>
+              <a:rPr lang="en-US" sz="1080" dirty="0">
+                <a:solidFill>
+                  <a:srgbClr val="FFFFFF"/>
+                </a:solidFill>
+                <a:latin typeface="Consolas" pitchFamily="34" charset="0"/>
+                <a:ea typeface="Consolas" pitchFamily="34" charset="-122"/>
+                <a:cs typeface="Consolas" pitchFamily="34" charset="-120"/>
+              </a:rPr>
+              <a:t> update </a:t>
+            </a:r>
+            <a:pPr indent="0" marL="0">
+              <a:buNone/>
+            </a:pPr>
+            <a:r>
+              <a:rPr lang="en-US" sz="1080" dirty="0">
+                <a:solidFill>
+                  <a:srgbClr val="A996B6"/>
+                </a:solidFill>
+                <a:latin typeface="Consolas" pitchFamily="34" charset="0"/>
+                <a:ea typeface="Consolas" pitchFamily="34" charset="-122"/>
+                <a:cs typeface="Consolas" pitchFamily="34" charset="-120"/>
+              </a:rPr>
+              <a:t>in</a:t>
+            </a:r>
+            <a:pPr indent="0" marL="0">
+              <a:buNone/>
+            </a:pPr>
+            <a:r>
+              <a:rPr lang="en-US" sz="1080" dirty="0">
+                <a:solidFill>
+                  <a:srgbClr val="FFFFFF"/>
+                </a:solidFill>
+                <a:latin typeface="Consolas" pitchFamily="34" charset="0"/>
+                <a:ea typeface="Consolas" pitchFamily="34" charset="-122"/>
+                <a:cs typeface="Consolas" pitchFamily="34" charset="-120"/>
+              </a:rPr>
+              <a:t> stream:</a:t>
+            </a:r>
+            <a:endParaRPr lang="en-US" sz="1080" dirty="0"/>
+          </a:p>
+          <a:p>
+            <a:pPr indent="0" marL="0">
+              <a:buNone/>
+            </a:pPr>
+            <a:r>
+              <a:rPr lang="en-US" sz="1080" dirty="0">
+                <a:solidFill>
+                  <a:srgbClr val="FFFFFF"/>
+                </a:solidFill>
+                <a:latin typeface="Consolas" pitchFamily="34" charset="0"/>
+                <a:ea typeface="Consolas" pitchFamily="34" charset="-122"/>
+                <a:cs typeface="Consolas" pitchFamily="34" charset="-120"/>
+              </a:rPr>
+              <a:t>    </a:t>
+            </a:r>
+            <a:pPr indent="0" marL="0">
+              <a:buNone/>
+            </a:pPr>
+            <a:r>
+              <a:rPr lang="en-US" sz="1080" dirty="0">
+                <a:solidFill>
+                  <a:srgbClr val="A996B6"/>
+                </a:solidFill>
+                <a:latin typeface="Consolas" pitchFamily="34" charset="0"/>
+                <a:ea typeface="Consolas" pitchFamily="34" charset="-122"/>
+                <a:cs typeface="Consolas" pitchFamily="34" charset="-120"/>
+              </a:rPr>
+              <a:t>if</a:t>
+            </a:r>
+            <a:pPr indent="0" marL="0">
+              <a:buNone/>
+            </a:pPr>
+            <a:r>
+              <a:rPr lang="en-US" sz="1080" dirty="0">
+                <a:solidFill>
+                  <a:srgbClr val="FFFFFF"/>
+                </a:solidFill>
+                <a:latin typeface="Consolas" pitchFamily="34" charset="0"/>
+                <a:ea typeface="Consolas" pitchFamily="34" charset="-122"/>
+                <a:cs typeface="Consolas" pitchFamily="34" charset="-120"/>
+              </a:rPr>
+              <a:t> update.text:</a:t>
+            </a:r>
+            <a:endParaRPr lang="en-US" sz="1080" dirty="0"/>
+          </a:p>
+          <a:p>
+            <a:pPr indent="0" marL="0">
+              <a:buNone/>
+            </a:pPr>
+            <a:r>
+              <a:rPr lang="en-US" sz="1080" dirty="0">
+                <a:solidFill>
+                  <a:srgbClr val="FFFFFF"/>
+                </a:solidFill>
+                <a:latin typeface="Consolas" pitchFamily="34" charset="0"/>
+                <a:ea typeface="Consolas" pitchFamily="34" charset="-122"/>
+                <a:cs typeface="Consolas" pitchFamily="34" charset="-120"/>
+              </a:rPr>
+              <a:t>        render(update.text)</a:t>
+            </a:r>
+            <a:endParaRPr lang="en-US" sz="1080" dirty="0"/>
+          </a:p>
+          <a:p>
+            <a:pPr indent="0" marL="0">
+              <a:buNone/>
+            </a:pPr>
+            <a:endParaRPr lang="en-US" sz="1080" dirty="0"/>
+          </a:p>
+          <a:p>
+            <a:pPr indent="0" marL="0">
+              <a:buNone/>
+            </a:pPr>
+            <a:r>
+              <a:rPr lang="en-US" sz="1080" dirty="0">
+                <a:solidFill>
+                  <a:srgbClr val="FFFFFF"/>
+                </a:solidFill>
+                <a:latin typeface="Consolas" pitchFamily="34" charset="0"/>
+                <a:ea typeface="Consolas" pitchFamily="34" charset="-122"/>
+                <a:cs typeface="Consolas" pitchFamily="34" charset="-120"/>
+              </a:rPr>
+              <a:t>final = </a:t>
+            </a:r>
+            <a:pPr indent="0" marL="0">
+              <a:buNone/>
+            </a:pPr>
+            <a:r>
+              <a:rPr lang="en-US" sz="1080" dirty="0">
+                <a:solidFill>
+                  <a:srgbClr val="A996B6"/>
+                </a:solidFill>
+                <a:latin typeface="Consolas" pitchFamily="34" charset="0"/>
+                <a:ea typeface="Consolas" pitchFamily="34" charset="-122"/>
+                <a:cs typeface="Consolas" pitchFamily="34" charset="-120"/>
+              </a:rPr>
+              <a:t>await</a:t>
+            </a:r>
+            <a:pPr indent="0" marL="0">
+              <a:buNone/>
+            </a:pPr>
+            <a:r>
+              <a:rPr lang="en-US" sz="1080" dirty="0">
+                <a:solidFill>
+                  <a:srgbClr val="FFFFFF"/>
+                </a:solidFill>
+                <a:latin typeface="Consolas" pitchFamily="34" charset="0"/>
+                <a:ea typeface="Consolas" pitchFamily="34" charset="-122"/>
+                <a:cs typeface="Consolas" pitchFamily="34" charset="-120"/>
+              </a:rPr>
+              <a:t> stream.get_final_response()</a:t>
+            </a:r>
+            <a:endParaRPr lang="en-US" sz="1080" dirty="0"/>
+          </a:p>
+          <a:p>
+            <a:pPr indent="0" marL="0">
+              <a:buNone/>
+            </a:pPr>
+            <a:r>
+              <a:rPr lang="en-US" sz="1080" dirty="0">
+                <a:solidFill>
+                  <a:srgbClr val="FFFFFF"/>
+                </a:solidFill>
+                <a:latin typeface="Consolas" pitchFamily="34" charset="0"/>
+                <a:ea typeface="Consolas" pitchFamily="34" charset="-122"/>
+                <a:cs typeface="Consolas" pitchFamily="34" charset="-120"/>
+              </a:rPr>
+              <a:t>triage = final.value</a:t>
+            </a:r>
+            <a:endParaRPr lang="en-US" sz="1080" dirty="0"/>
           </a:p>
         </p:txBody>
       </p:sp>
       <p:sp>
         <p:nvSpPr>
-          <p:cNvPr id="10" name="Shape 8"/>
-          <p:cNvSpPr/>
-          <p:nvPr/>
-        </p:nvSpPr>
-        <p:spPr>
-          <a:xfrm>
-            <a:off x="2313432" y="2180844"/>
-            <a:ext cx="164592" cy="219456"/>
-          </a:xfrm>
-          <a:prstGeom prst="chevron">
-            <a:avLst/>
-          </a:prstGeom>
-          <a:solidFill>
-            <a:srgbClr val="E8A87C"/>
-          </a:solidFill>
-          <a:ln/>
-        </p:spPr>
-      </p:sp>
-      <p:sp>
-        <p:nvSpPr>
-          <p:cNvPr id="11" name="Shape 9"/>
-          <p:cNvSpPr/>
-          <p:nvPr/>
-        </p:nvSpPr>
-        <p:spPr>
-          <a:xfrm>
-            <a:off x="2532888" y="1216152"/>
-            <a:ext cx="1911096" cy="2148840"/>
-          </a:xfrm>
-          <a:prstGeom prst="roundRect">
-            <a:avLst>
-              <a:gd name="adj" fmla="val 2871"/>
-            </a:avLst>
-          </a:prstGeom>
-          <a:solidFill>
-            <a:srgbClr val="F3F4F6"/>
-          </a:solidFill>
-          <a:ln w="10160">
-            <a:solidFill>
-              <a:srgbClr val="D1D5DB"/>
-            </a:solidFill>
-            <a:prstDash val="solid"/>
-          </a:ln>
-        </p:spPr>
-      </p:sp>
-      <p:sp>
-        <p:nvSpPr>
-          <p:cNvPr id="12" name="Shape 10"/>
-          <p:cNvSpPr/>
-          <p:nvPr/>
-        </p:nvSpPr>
-        <p:spPr>
-          <a:xfrm>
-            <a:off x="2642616" y="1335024"/>
-            <a:ext cx="320040" cy="320040"/>
-          </a:xfrm>
-          <a:prstGeom prst="ellipse">
-            <a:avLst/>
-          </a:prstGeom>
-          <a:solidFill>
-            <a:srgbClr val="1E2761"/>
-          </a:solidFill>
-          <a:ln/>
-        </p:spPr>
-      </p:sp>
-      <p:sp>
-        <p:nvSpPr>
-          <p:cNvPr id="13" name="Text 11"/>
-          <p:cNvSpPr/>
-          <p:nvPr/>
-        </p:nvSpPr>
-        <p:spPr>
-          <a:xfrm>
-            <a:off x="2642616" y="1385316"/>
-            <a:ext cx="320040" cy="146304"/>
-          </a:xfrm>
-          <a:prstGeom prst="rect">
-            <a:avLst/>
-          </a:prstGeom>
-          <a:noFill/>
-          <a:ln/>
-        </p:spPr>
-        <p:txBody>
-          <a:bodyPr wrap="square" lIns="0" tIns="0" rIns="0" bIns="0" rtlCol="0" anchor="ctr"/>
-          <a:lstStyle/>
-          <a:p>
-            <a:pPr algn="ctr" indent="0" marL="0">
-              <a:buNone/>
-            </a:pPr>
-            <a:r>
-              <a:rPr lang="en-US" sz="900" b="1" dirty="0">
-                <a:solidFill>
-                  <a:srgbClr val="FFFFFF"/>
-                </a:solidFill>
-                <a:latin typeface="Calibri" pitchFamily="34" charset="0"/>
-                <a:ea typeface="Calibri" pitchFamily="34" charset="-122"/>
-                <a:cs typeface="Calibri" pitchFamily="34" charset="-120"/>
-              </a:rPr>
-              <a:t>2</a:t>
-            </a:r>
-            <a:endParaRPr lang="en-US" sz="900" dirty="0"/>
-          </a:p>
-        </p:txBody>
-      </p:sp>
-      <p:sp>
-        <p:nvSpPr>
-          <p:cNvPr id="14" name="Text 12"/>
-          <p:cNvSpPr/>
-          <p:nvPr/>
-        </p:nvSpPr>
-        <p:spPr>
-          <a:xfrm>
-            <a:off x="3063240" y="1335024"/>
-            <a:ext cx="1252728" cy="310896"/>
-          </a:xfrm>
-          <a:prstGeom prst="rect">
-            <a:avLst/>
-          </a:prstGeom>
-          <a:noFill/>
-          <a:ln/>
-        </p:spPr>
-        <p:txBody>
-          <a:bodyPr wrap="square" lIns="0" tIns="0" rIns="0" bIns="0" rtlCol="0" anchor="ctr">
-            <a:normAutofit/>
-          </a:bodyPr>
-          <a:lstStyle/>
-          <a:p>
-            <a:pPr indent="0" marL="0">
-              <a:buNone/>
-            </a:pPr>
-            <a:r>
-              <a:rPr lang="en-US" sz="1500" b="1" dirty="0">
-                <a:solidFill>
-                  <a:srgbClr val="1E2761"/>
-                </a:solidFill>
-                <a:latin typeface="Calibri" pitchFamily="34" charset="0"/>
-                <a:ea typeface="Calibri" pitchFamily="34" charset="-122"/>
-                <a:cs typeface="Calibri" pitchFamily="34" charset="-120"/>
-              </a:rPr>
-              <a:t>Summarize</a:t>
-            </a:r>
-            <a:endParaRPr lang="en-US" sz="1500" dirty="0"/>
-          </a:p>
-        </p:txBody>
-      </p:sp>
-      <p:sp>
-        <p:nvSpPr>
-          <p:cNvPr id="15" name="Text 13"/>
-          <p:cNvSpPr/>
-          <p:nvPr/>
-        </p:nvSpPr>
-        <p:spPr>
-          <a:xfrm>
-            <a:off x="2679192" y="1719072"/>
-            <a:ext cx="1618488" cy="1527048"/>
-          </a:xfrm>
-          <a:prstGeom prst="rect">
-            <a:avLst/>
-          </a:prstGeom>
-          <a:noFill/>
-          <a:ln/>
-        </p:spPr>
-        <p:txBody>
-          <a:bodyPr wrap="square" lIns="0" tIns="0" rIns="0" bIns="0" rtlCol="0" anchor="t">
-            <a:normAutofit/>
-          </a:bodyPr>
-          <a:lstStyle/>
-          <a:p>
-            <a:pPr indent="0" marL="0">
-              <a:buNone/>
-            </a:pPr>
-            <a:r>
-              <a:rPr lang="en-US" sz="1150" dirty="0">
-                <a:solidFill>
-                  <a:srgbClr val="212121"/>
-                </a:solidFill>
-                <a:latin typeface="Calibri" pitchFamily="34" charset="0"/>
-                <a:ea typeface="Calibri" pitchFamily="34" charset="-122"/>
-                <a:cs typeface="Calibri" pitchFamily="34" charset="-120"/>
-              </a:rPr>
-              <a:t>concise issue statement for your UI</a:t>
-            </a:r>
-            <a:endParaRPr lang="en-US" sz="1150" dirty="0"/>
-          </a:p>
-        </p:txBody>
-      </p:sp>
-      <p:sp>
-        <p:nvSpPr>
-          <p:cNvPr id="16" name="Shape 14"/>
-          <p:cNvSpPr/>
-          <p:nvPr/>
-        </p:nvSpPr>
-        <p:spPr>
-          <a:xfrm>
-            <a:off x="4480560" y="2180844"/>
-            <a:ext cx="164592" cy="219456"/>
-          </a:xfrm>
-          <a:prstGeom prst="chevron">
-            <a:avLst/>
-          </a:prstGeom>
-          <a:solidFill>
-            <a:srgbClr val="E8A87C"/>
-          </a:solidFill>
-          <a:ln/>
-        </p:spPr>
-      </p:sp>
-      <p:sp>
-        <p:nvSpPr>
-          <p:cNvPr id="17" name="Shape 15"/>
-          <p:cNvSpPr/>
-          <p:nvPr/>
-        </p:nvSpPr>
-        <p:spPr>
-          <a:xfrm>
-            <a:off x="4700016" y="1216152"/>
-            <a:ext cx="1911096" cy="2148840"/>
-          </a:xfrm>
-          <a:prstGeom prst="roundRect">
-            <a:avLst>
-              <a:gd name="adj" fmla="val 2871"/>
-            </a:avLst>
-          </a:prstGeom>
-          <a:solidFill>
-            <a:srgbClr val="F3F4F6"/>
-          </a:solidFill>
-          <a:ln w="10160">
-            <a:solidFill>
-              <a:srgbClr val="D1D5DB"/>
-            </a:solidFill>
-            <a:prstDash val="solid"/>
-          </a:ln>
-        </p:spPr>
-      </p:sp>
-      <p:sp>
-        <p:nvSpPr>
-          <p:cNvPr id="18" name="Shape 16"/>
-          <p:cNvSpPr/>
-          <p:nvPr/>
-        </p:nvSpPr>
-        <p:spPr>
-          <a:xfrm>
-            <a:off x="4809744" y="1335024"/>
-            <a:ext cx="320040" cy="320040"/>
-          </a:xfrm>
-          <a:prstGeom prst="ellipse">
-            <a:avLst/>
-          </a:prstGeom>
-          <a:solidFill>
-            <a:srgbClr val="1E2761"/>
-          </a:solidFill>
-          <a:ln/>
-        </p:spPr>
-      </p:sp>
-      <p:sp>
-        <p:nvSpPr>
-          <p:cNvPr id="19" name="Text 17"/>
-          <p:cNvSpPr/>
-          <p:nvPr/>
-        </p:nvSpPr>
-        <p:spPr>
-          <a:xfrm>
-            <a:off x="4809744" y="1385316"/>
-            <a:ext cx="320040" cy="146304"/>
-          </a:xfrm>
-          <a:prstGeom prst="rect">
-            <a:avLst/>
-          </a:prstGeom>
-          <a:noFill/>
-          <a:ln/>
-        </p:spPr>
-        <p:txBody>
-          <a:bodyPr wrap="square" lIns="0" tIns="0" rIns="0" bIns="0" rtlCol="0" anchor="ctr"/>
-          <a:lstStyle/>
-          <a:p>
-            <a:pPr algn="ctr" indent="0" marL="0">
-              <a:buNone/>
-            </a:pPr>
-            <a:r>
-              <a:rPr lang="en-US" sz="900" b="1" dirty="0">
-                <a:solidFill>
-                  <a:srgbClr val="FFFFFF"/>
-                </a:solidFill>
-                <a:latin typeface="Calibri" pitchFamily="34" charset="0"/>
-                <a:ea typeface="Calibri" pitchFamily="34" charset="-122"/>
-                <a:cs typeface="Calibri" pitchFamily="34" charset="-120"/>
-              </a:rPr>
-              <a:t>3</a:t>
-            </a:r>
-            <a:endParaRPr lang="en-US" sz="900" dirty="0"/>
-          </a:p>
-        </p:txBody>
-      </p:sp>
-      <p:sp>
-        <p:nvSpPr>
-          <p:cNvPr id="20" name="Text 18"/>
-          <p:cNvSpPr/>
-          <p:nvPr/>
-        </p:nvSpPr>
-        <p:spPr>
-          <a:xfrm>
-            <a:off x="5230368" y="1335024"/>
-            <a:ext cx="1252728" cy="310896"/>
-          </a:xfrm>
-          <a:prstGeom prst="rect">
-            <a:avLst/>
-          </a:prstGeom>
-          <a:noFill/>
-          <a:ln/>
-        </p:spPr>
-        <p:txBody>
-          <a:bodyPr wrap="square" lIns="0" tIns="0" rIns="0" bIns="0" rtlCol="0" anchor="ctr">
-            <a:normAutofit/>
-          </a:bodyPr>
-          <a:lstStyle/>
-          <a:p>
-            <a:pPr indent="0" marL="0">
-              <a:buNone/>
-            </a:pPr>
-            <a:r>
-              <a:rPr lang="en-US" sz="1500" b="1" dirty="0">
-                <a:solidFill>
-                  <a:srgbClr val="1E2761"/>
-                </a:solidFill>
-                <a:latin typeface="Calibri" pitchFamily="34" charset="0"/>
-                <a:ea typeface="Calibri" pitchFamily="34" charset="-122"/>
-                <a:cs typeface="Calibri" pitchFamily="34" charset="-120"/>
-              </a:rPr>
-              <a:t>Signal</a:t>
-            </a:r>
-            <a:endParaRPr lang="en-US" sz="1500" dirty="0"/>
-          </a:p>
-        </p:txBody>
-      </p:sp>
-      <p:sp>
-        <p:nvSpPr>
-          <p:cNvPr id="21" name="Text 19"/>
-          <p:cNvSpPr/>
-          <p:nvPr/>
-        </p:nvSpPr>
-        <p:spPr>
-          <a:xfrm>
-            <a:off x="4846320" y="1719072"/>
-            <a:ext cx="1618488" cy="1527048"/>
-          </a:xfrm>
-          <a:prstGeom prst="rect">
-            <a:avLst/>
-          </a:prstGeom>
-          <a:noFill/>
-          <a:ln/>
-        </p:spPr>
-        <p:txBody>
-          <a:bodyPr wrap="square" lIns="0" tIns="0" rIns="0" bIns="0" rtlCol="0" anchor="t">
-            <a:normAutofit/>
-          </a:bodyPr>
-          <a:lstStyle/>
-          <a:p>
-            <a:pPr indent="0" marL="0">
-              <a:buNone/>
-            </a:pPr>
-            <a:r>
-              <a:rPr lang="en-US" sz="1150" dirty="0">
-                <a:solidFill>
-                  <a:srgbClr val="212121"/>
-                </a:solidFill>
-                <a:latin typeface="Calibri" pitchFamily="34" charset="0"/>
-                <a:ea typeface="Calibri" pitchFamily="34" charset="-122"/>
-                <a:cs typeface="Calibri" pitchFamily="34" charset="-120"/>
-              </a:rPr>
-              <a:t>needs_work_item is a recommendation</a:t>
-            </a:r>
-            <a:endParaRPr lang="en-US" sz="1150" dirty="0"/>
-          </a:p>
-        </p:txBody>
-      </p:sp>
-      <p:sp>
-        <p:nvSpPr>
-          <p:cNvPr id="22" name="Shape 20"/>
-          <p:cNvSpPr/>
-          <p:nvPr/>
-        </p:nvSpPr>
-        <p:spPr>
-          <a:xfrm>
-            <a:off x="6647688" y="2180844"/>
-            <a:ext cx="164592" cy="219456"/>
-          </a:xfrm>
-          <a:prstGeom prst="chevron">
-            <a:avLst/>
-          </a:prstGeom>
-          <a:solidFill>
-            <a:srgbClr val="E8A87C"/>
-          </a:solidFill>
-          <a:ln/>
-        </p:spPr>
-      </p:sp>
-      <p:sp>
-        <p:nvSpPr>
-          <p:cNvPr id="23" name="Shape 21"/>
-          <p:cNvSpPr/>
-          <p:nvPr/>
-        </p:nvSpPr>
-        <p:spPr>
-          <a:xfrm>
-            <a:off x="6867144" y="1216152"/>
-            <a:ext cx="1911096" cy="2148840"/>
-          </a:xfrm>
-          <a:prstGeom prst="roundRect">
-            <a:avLst>
-              <a:gd name="adj" fmla="val 2871"/>
-            </a:avLst>
-          </a:prstGeom>
-          <a:solidFill>
-            <a:srgbClr val="CADCFC"/>
-          </a:solidFill>
-          <a:ln w="10160">
-            <a:solidFill>
-              <a:srgbClr val="1E2761"/>
-            </a:solidFill>
-            <a:prstDash val="solid"/>
-          </a:ln>
-        </p:spPr>
-      </p:sp>
-      <p:sp>
-        <p:nvSpPr>
-          <p:cNvPr id="24" name="Shape 22"/>
-          <p:cNvSpPr/>
-          <p:nvPr/>
-        </p:nvSpPr>
-        <p:spPr>
-          <a:xfrm>
-            <a:off x="6976872" y="1335024"/>
-            <a:ext cx="320040" cy="320040"/>
-          </a:xfrm>
-          <a:prstGeom prst="ellipse">
-            <a:avLst/>
-          </a:prstGeom>
-          <a:solidFill>
-            <a:srgbClr val="1E2761"/>
-          </a:solidFill>
-          <a:ln/>
-        </p:spPr>
-      </p:sp>
-      <p:sp>
-        <p:nvSpPr>
-          <p:cNvPr id="25" name="Text 23"/>
-          <p:cNvSpPr/>
-          <p:nvPr/>
-        </p:nvSpPr>
-        <p:spPr>
-          <a:xfrm>
-            <a:off x="6976872" y="1385316"/>
-            <a:ext cx="320040" cy="146304"/>
-          </a:xfrm>
-          <a:prstGeom prst="rect">
-            <a:avLst/>
-          </a:prstGeom>
-          <a:noFill/>
-          <a:ln/>
-        </p:spPr>
-        <p:txBody>
-          <a:bodyPr wrap="square" lIns="0" tIns="0" rIns="0" bIns="0" rtlCol="0" anchor="ctr"/>
-          <a:lstStyle/>
-          <a:p>
-            <a:pPr algn="ctr" indent="0" marL="0">
-              <a:buNone/>
-            </a:pPr>
-            <a:r>
-              <a:rPr lang="en-US" sz="900" b="1" dirty="0">
-                <a:solidFill>
-                  <a:srgbClr val="FFFFFF"/>
-                </a:solidFill>
-                <a:latin typeface="Calibri" pitchFamily="34" charset="0"/>
-                <a:ea typeface="Calibri" pitchFamily="34" charset="-122"/>
-                <a:cs typeface="Calibri" pitchFamily="34" charset="-120"/>
-              </a:rPr>
-              <a:t>4</a:t>
-            </a:r>
-            <a:endParaRPr lang="en-US" sz="900" dirty="0"/>
-          </a:p>
-        </p:txBody>
-      </p:sp>
-      <p:sp>
-        <p:nvSpPr>
-          <p:cNvPr id="26" name="Text 24"/>
-          <p:cNvSpPr/>
-          <p:nvPr/>
-        </p:nvSpPr>
-        <p:spPr>
-          <a:xfrm>
-            <a:off x="7397496" y="1335024"/>
-            <a:ext cx="1252728" cy="310896"/>
-          </a:xfrm>
-          <a:prstGeom prst="rect">
-            <a:avLst/>
-          </a:prstGeom>
-          <a:noFill/>
-          <a:ln/>
-        </p:spPr>
-        <p:txBody>
-          <a:bodyPr wrap="square" lIns="0" tIns="0" rIns="0" bIns="0" rtlCol="0" anchor="ctr">
-            <a:normAutofit/>
-          </a:bodyPr>
-          <a:lstStyle/>
-          <a:p>
-            <a:pPr indent="0" marL="0">
-              <a:buNone/>
-            </a:pPr>
-            <a:r>
-              <a:rPr lang="en-US" sz="1500" b="1" dirty="0">
-                <a:solidFill>
-                  <a:srgbClr val="1E2761"/>
-                </a:solidFill>
-                <a:latin typeface="Calibri" pitchFamily="34" charset="0"/>
-                <a:ea typeface="Calibri" pitchFamily="34" charset="-122"/>
-                <a:cs typeface="Calibri" pitchFamily="34" charset="-120"/>
-              </a:rPr>
-              <a:t>Authorize</a:t>
-            </a:r>
-            <a:endParaRPr lang="en-US" sz="1500" dirty="0"/>
-          </a:p>
-        </p:txBody>
-      </p:sp>
-      <p:sp>
-        <p:nvSpPr>
-          <p:cNvPr id="27" name="Text 25"/>
-          <p:cNvSpPr/>
-          <p:nvPr/>
-        </p:nvSpPr>
-        <p:spPr>
-          <a:xfrm>
-            <a:off x="7013448" y="1719072"/>
-            <a:ext cx="1618488" cy="1527048"/>
-          </a:xfrm>
-          <a:prstGeom prst="rect">
-            <a:avLst/>
-          </a:prstGeom>
-          <a:noFill/>
-          <a:ln/>
-        </p:spPr>
-        <p:txBody>
-          <a:bodyPr wrap="square" lIns="0" tIns="0" rIns="0" bIns="0" rtlCol="0" anchor="t">
-            <a:normAutofit/>
-          </a:bodyPr>
-          <a:lstStyle/>
-          <a:p>
-            <a:pPr indent="0" marL="0">
-              <a:buNone/>
-            </a:pPr>
-            <a:r>
-              <a:rPr lang="en-US" sz="1150" dirty="0">
-                <a:solidFill>
-                  <a:srgbClr val="212121"/>
-                </a:solidFill>
-                <a:latin typeface="Calibri" pitchFamily="34" charset="0"/>
-                <a:ea typeface="Calibri" pitchFamily="34" charset="-122"/>
-                <a:cs typeface="Calibri" pitchFamily="34" charset="-120"/>
-              </a:rPr>
-              <a:t>your app still controls whether a write is offered or approved</a:t>
-            </a:r>
-            <a:endParaRPr lang="en-US" sz="1150" dirty="0"/>
-          </a:p>
-        </p:txBody>
-      </p:sp>
-      <p:sp>
-        <p:nvSpPr>
-          <p:cNvPr id="28" name="Shape 26"/>
+          <p:cNvPr id="7" name="Shape 5"/>
           <p:cNvSpPr/>
           <p:nvPr/>
         </p:nvSpPr>
@@ -11094,7 +8760,7 @@
       </p:sp>
       <p:sp>
         <p:nvSpPr>
-          <p:cNvPr id="29" name="Text 27"/>
+          <p:cNvPr id="8" name="Text 6"/>
           <p:cNvSpPr/>
           <p:nvPr/>
         </p:nvSpPr>
@@ -11147,7 +8813,7 @@
     <p:bg>
       <p:bgPr>
         <a:solidFill>
-          <a:srgbClr val="FFFFFF"/>
+          <a:srgbClr val="CADCFC"/>
         </a:solidFill>
       </p:bgPr>
     </p:bg>
@@ -11174,7 +8840,7 @@
         <p:spPr>
           <a:xfrm>
             <a:off x="0" y="0"/>
-            <a:ext cx="54864" cy="5143500"/>
+            <a:ext cx="146304" cy="5143500"/>
           </a:xfrm>
           <a:prstGeom prst="rect">
             <a:avLst/>
@@ -11193,8 +8859,8 @@
         </p:nvSpPr>
         <p:spPr>
           <a:xfrm>
-            <a:off x="5486400" y="256032"/>
-            <a:ext cx="3337560" cy="228600"/>
+            <a:off x="5669280" y="274320"/>
+            <a:ext cx="3291840" cy="274320"/>
           </a:xfrm>
           <a:prstGeom prst="rect">
             <a:avLst/>
@@ -11203,16 +8869,14 @@
           <a:ln/>
         </p:spPr>
         <p:txBody>
-          <a:bodyPr wrap="square" lIns="0" tIns="0" rIns="0" bIns="0" rtlCol="0" anchor="ctr">
-            <a:normAutofit/>
-          </a:bodyPr>
+          <a:bodyPr wrap="square" lIns="0" tIns="0" rIns="0" bIns="0" rtlCol="0" anchor="ctr"/>
           <a:lstStyle/>
           <a:p>
             <a:pPr algn="r" indent="0" marL="0">
               <a:buNone/>
             </a:pPr>
             <a:r>
-              <a:rPr lang="en-US" sz="950" dirty="0">
+              <a:rPr lang="en-US" sz="1000" dirty="0">
                 <a:solidFill>
                   <a:srgbClr val="6B7280"/>
                 </a:solidFill>
@@ -11220,9 +8884,9 @@
                 <a:ea typeface="Calibri" pitchFamily="34" charset="-122"/>
                 <a:cs typeface="Calibri" pitchFamily="34" charset="-120"/>
               </a:rPr>
-              <a:t>Day 3 · Module 2</a:t>
-            </a:r>
-            <a:endParaRPr lang="en-US" sz="950" dirty="0"/>
+              <a:t>Day 3 · Module 2 · Demo</a:t>
+            </a:r>
+            <a:endParaRPr lang="en-US" sz="1000" dirty="0"/>
           </a:p>
         </p:txBody>
       </p:sp>
@@ -11234,8 +8898,8 @@
         </p:nvSpPr>
         <p:spPr>
           <a:xfrm>
-            <a:off x="365760" y="310896"/>
-            <a:ext cx="6583680" cy="603504"/>
+            <a:off x="548640" y="1051560"/>
+            <a:ext cx="5486400" cy="502920"/>
           </a:xfrm>
           <a:prstGeom prst="rect">
             <a:avLst/>
@@ -11244,16 +8908,14 @@
           <a:ln/>
         </p:spPr>
         <p:txBody>
-          <a:bodyPr wrap="square" lIns="0" tIns="0" rIns="0" bIns="0" rtlCol="0" anchor="ctr">
-            <a:normAutofit/>
-          </a:bodyPr>
+          <a:bodyPr wrap="square" lIns="0" tIns="0" rIns="0" bIns="0" rtlCol="0" anchor="ctr"/>
           <a:lstStyle/>
           <a:p>
             <a:pPr indent="0" marL="0">
               <a:buNone/>
             </a:pPr>
             <a:r>
-              <a:rPr lang="en-US" sz="2800" b="1" dirty="0">
+              <a:rPr lang="en-US" sz="3200" b="1" spc="800" kern="0" dirty="0">
                 <a:solidFill>
                   <a:srgbClr val="1E2761"/>
                 </a:solidFill>
@@ -11261,47 +8923,22 @@
                 <a:ea typeface="Calibri" pitchFamily="34" charset="-122"/>
                 <a:cs typeface="Calibri" pitchFamily="34" charset="-120"/>
               </a:rPr>
-              <a:t>Combine streaming and structure</a:t>
-            </a:r>
-            <a:endParaRPr lang="en-US" sz="2800" dirty="0"/>
+              <a:t>DEMO</a:t>
+            </a:r>
+            <a:endParaRPr lang="en-US" sz="3200" dirty="0"/>
           </a:p>
         </p:txBody>
       </p:sp>
       <p:sp>
         <p:nvSpPr>
-          <p:cNvPr id="5" name="Shape 3"/>
-          <p:cNvSpPr/>
-          <p:nvPr/>
-        </p:nvSpPr>
-        <p:spPr>
-          <a:xfrm>
-            <a:off x="365760" y="1115568"/>
-            <a:ext cx="8412480" cy="3191256"/>
-          </a:xfrm>
-          <a:prstGeom prst="rect">
-            <a:avLst/>
-          </a:prstGeom>
-          <a:solidFill>
-            <a:srgbClr val="1D1E22"/>
-          </a:solidFill>
-          <a:ln w="9525">
-            <a:solidFill>
-              <a:srgbClr val="2A2B2E"/>
-            </a:solidFill>
-            <a:prstDash val="solid"/>
-          </a:ln>
-        </p:spPr>
-      </p:sp>
-      <p:sp>
-        <p:nvSpPr>
-          <p:cNvPr id="6" name="Text 4"/>
-          <p:cNvSpPr/>
-          <p:nvPr/>
-        </p:nvSpPr>
-        <p:spPr>
-          <a:xfrm>
-            <a:off x="502920" y="1207008"/>
-            <a:ext cx="8138160" cy="3008376"/>
+          <p:cNvPr id="5" name="Text 3"/>
+          <p:cNvSpPr/>
+          <p:nvPr/>
+        </p:nvSpPr>
+        <p:spPr>
+          <a:xfrm>
+            <a:off x="548640" y="1691640"/>
+            <a:ext cx="8046720" cy="914400"/>
           </a:xfrm>
           <a:prstGeom prst="rect">
             <a:avLst/>
@@ -11310,382 +8947,150 @@
           <a:ln/>
         </p:spPr>
         <p:txBody>
-          <a:bodyPr wrap="square" lIns="0" tIns="0" rIns="0" bIns="0" rtlCol="0" anchor="t"/>
+          <a:bodyPr wrap="square" lIns="0" tIns="0" rIns="0" bIns="0" rtlCol="0" anchor="ctr"/>
           <a:lstStyle/>
           <a:p>
             <a:pPr indent="0" marL="0">
               <a:buNone/>
             </a:pPr>
             <a:r>
-              <a:rPr lang="en-US" sz="1080" dirty="0">
-                <a:solidFill>
-                  <a:srgbClr val="FFFFFF"/>
-                </a:solidFill>
-                <a:latin typeface="Consolas" pitchFamily="34" charset="0"/>
-                <a:ea typeface="Consolas" pitchFamily="34" charset="-122"/>
-                <a:cs typeface="Consolas" pitchFamily="34" charset="-120"/>
-              </a:rPr>
-              <a:t>stream = agent.run(</a:t>
-            </a:r>
-            <a:endParaRPr lang="en-US" sz="1080" dirty="0"/>
-          </a:p>
-          <a:p>
-            <a:pPr indent="0" marL="0">
-              <a:buNone/>
-            </a:pPr>
-            <a:r>
-              <a:rPr lang="en-US" sz="1080" dirty="0">
-                <a:solidFill>
-                  <a:srgbClr val="FFFFFF"/>
-                </a:solidFill>
-                <a:latin typeface="Consolas" pitchFamily="34" charset="0"/>
-                <a:ea typeface="Consolas" pitchFamily="34" charset="-122"/>
-                <a:cs typeface="Consolas" pitchFamily="34" charset="-120"/>
-              </a:rPr>
-              <a:t>    request,</a:t>
-            </a:r>
-            <a:endParaRPr lang="en-US" sz="1080" dirty="0"/>
-          </a:p>
-          <a:p>
-            <a:pPr indent="0" marL="0">
-              <a:buNone/>
-            </a:pPr>
-            <a:r>
-              <a:rPr lang="en-US" sz="1080" dirty="0">
-                <a:solidFill>
-                  <a:srgbClr val="FFFFFF"/>
-                </a:solidFill>
-                <a:latin typeface="Consolas" pitchFamily="34" charset="0"/>
-                <a:ea typeface="Consolas" pitchFamily="34" charset="-122"/>
-                <a:cs typeface="Consolas" pitchFamily="34" charset="-120"/>
-              </a:rPr>
-              <a:t>    stream=</a:t>
-            </a:r>
-            <a:endParaRPr lang="en-US" sz="1080" dirty="0"/>
-          </a:p>
-          <a:p>
-            <a:pPr indent="0" marL="0">
-              <a:buNone/>
-            </a:pPr>
-            <a:r>
-              <a:rPr lang="en-US" sz="1080" dirty="0">
-                <a:solidFill>
-                  <a:srgbClr val="A996B6"/>
-                </a:solidFill>
-                <a:latin typeface="Consolas" pitchFamily="34" charset="0"/>
-                <a:ea typeface="Consolas" pitchFamily="34" charset="-122"/>
-                <a:cs typeface="Consolas" pitchFamily="34" charset="-120"/>
-              </a:rPr>
-              <a:t>True</a:t>
-            </a:r>
-            <a:pPr indent="0" marL="0">
-              <a:buNone/>
-            </a:pPr>
-            <a:r>
-              <a:rPr lang="en-US" sz="1080" dirty="0">
-                <a:solidFill>
-                  <a:srgbClr val="FFFFFF"/>
-                </a:solidFill>
-                <a:latin typeface="Consolas" pitchFamily="34" charset="0"/>
-                <a:ea typeface="Consolas" pitchFamily="34" charset="-122"/>
-                <a:cs typeface="Consolas" pitchFamily="34" charset="-120"/>
-              </a:rPr>
-              <a:t>,</a:t>
-            </a:r>
-            <a:endParaRPr lang="en-US" sz="1080" dirty="0"/>
-          </a:p>
-          <a:p>
-            <a:pPr indent="0" marL="0">
-              <a:buNone/>
-            </a:pPr>
-            <a:r>
-              <a:rPr lang="en-US" sz="1080" dirty="0">
-                <a:solidFill>
-                  <a:srgbClr val="FFFFFF"/>
-                </a:solidFill>
-                <a:latin typeface="Consolas" pitchFamily="34" charset="0"/>
-                <a:ea typeface="Consolas" pitchFamily="34" charset="-122"/>
-                <a:cs typeface="Consolas" pitchFamily="34" charset="-120"/>
-              </a:rPr>
-              <a:t>    session=session,</a:t>
-            </a:r>
-            <a:endParaRPr lang="en-US" sz="1080" dirty="0"/>
-          </a:p>
-          <a:p>
-            <a:pPr indent="0" marL="0">
-              <a:buNone/>
-            </a:pPr>
-            <a:r>
-              <a:rPr lang="en-US" sz="1080" dirty="0">
-                <a:solidFill>
-                  <a:srgbClr val="FFFFFF"/>
-                </a:solidFill>
-                <a:latin typeface="Consolas" pitchFamily="34" charset="0"/>
-                <a:ea typeface="Consolas" pitchFamily="34" charset="-122"/>
-                <a:cs typeface="Consolas" pitchFamily="34" charset="-120"/>
-              </a:rPr>
-              <a:t>    options={</a:t>
-            </a:r>
-            <a:endParaRPr lang="en-US" sz="1080" dirty="0"/>
-          </a:p>
-          <a:p>
-            <a:pPr indent="0" marL="0">
-              <a:buNone/>
-            </a:pPr>
-            <a:r>
-              <a:rPr lang="en-US" sz="1080" dirty="0">
-                <a:solidFill>
-                  <a:srgbClr val="E4C98A"/>
-                </a:solidFill>
-                <a:latin typeface="Consolas" pitchFamily="34" charset="0"/>
-                <a:ea typeface="Consolas" pitchFamily="34" charset="-122"/>
-                <a:cs typeface="Consolas" pitchFamily="34" charset="-120"/>
-              </a:rPr>
-              <a:t>"response_format"</a:t>
-            </a:r>
-            <a:pPr indent="0" marL="0">
-              <a:buNone/>
-            </a:pPr>
-            <a:r>
-              <a:rPr lang="en-US" sz="1080" dirty="0">
-                <a:solidFill>
-                  <a:srgbClr val="FFFFFF"/>
-                </a:solidFill>
-                <a:latin typeface="Consolas" pitchFamily="34" charset="0"/>
-                <a:ea typeface="Consolas" pitchFamily="34" charset="-122"/>
-                <a:cs typeface="Consolas" pitchFamily="34" charset="-120"/>
-              </a:rPr>
-              <a:t>: TriageResult},
-)
-</a:t>
-            </a:r>
-            <a:pPr indent="0" marL="0">
-              <a:buNone/>
-            </a:pPr>
-            <a:r>
-              <a:rPr lang="en-US" sz="1080" dirty="0">
-                <a:solidFill>
-                  <a:srgbClr val="A996B6"/>
-                </a:solidFill>
-                <a:latin typeface="Consolas" pitchFamily="34" charset="0"/>
-                <a:ea typeface="Consolas" pitchFamily="34" charset="-122"/>
-                <a:cs typeface="Consolas" pitchFamily="34" charset="-120"/>
-              </a:rPr>
-              <a:t>async</a:t>
-            </a:r>
-            <a:pPr indent="0" marL="0">
-              <a:buNone/>
-            </a:pPr>
-            <a:r>
-              <a:rPr lang="en-US" sz="1080" dirty="0">
-                <a:solidFill>
-                  <a:srgbClr val="FFFFFF"/>
-                </a:solidFill>
-                <a:latin typeface="Consolas" pitchFamily="34" charset="0"/>
-                <a:ea typeface="Consolas" pitchFamily="34" charset="-122"/>
-                <a:cs typeface="Consolas" pitchFamily="34" charset="-120"/>
-              </a:rPr>
-              <a:t> </a:t>
-            </a:r>
-            <a:pPr indent="0" marL="0">
-              <a:buNone/>
-            </a:pPr>
-            <a:r>
-              <a:rPr lang="en-US" sz="1080" dirty="0">
-                <a:solidFill>
-                  <a:srgbClr val="A996B6"/>
-                </a:solidFill>
-                <a:latin typeface="Consolas" pitchFamily="34" charset="0"/>
-                <a:ea typeface="Consolas" pitchFamily="34" charset="-122"/>
-                <a:cs typeface="Consolas" pitchFamily="34" charset="-120"/>
-              </a:rPr>
-              <a:t>for</a:t>
-            </a:r>
-            <a:pPr indent="0" marL="0">
-              <a:buNone/>
-            </a:pPr>
-            <a:r>
-              <a:rPr lang="en-US" sz="1080" dirty="0">
-                <a:solidFill>
-                  <a:srgbClr val="FFFFFF"/>
-                </a:solidFill>
-                <a:latin typeface="Consolas" pitchFamily="34" charset="0"/>
-                <a:ea typeface="Consolas" pitchFamily="34" charset="-122"/>
-                <a:cs typeface="Consolas" pitchFamily="34" charset="-120"/>
-              </a:rPr>
-              <a:t> update </a:t>
-            </a:r>
-            <a:pPr indent="0" marL="0">
-              <a:buNone/>
-            </a:pPr>
-            <a:r>
-              <a:rPr lang="en-US" sz="1080" dirty="0">
-                <a:solidFill>
-                  <a:srgbClr val="A996B6"/>
-                </a:solidFill>
-                <a:latin typeface="Consolas" pitchFamily="34" charset="0"/>
-                <a:ea typeface="Consolas" pitchFamily="34" charset="-122"/>
-                <a:cs typeface="Consolas" pitchFamily="34" charset="-120"/>
-              </a:rPr>
-              <a:t>in</a:t>
-            </a:r>
-            <a:pPr indent="0" marL="0">
-              <a:buNone/>
-            </a:pPr>
-            <a:r>
-              <a:rPr lang="en-US" sz="1080" dirty="0">
-                <a:solidFill>
-                  <a:srgbClr val="FFFFFF"/>
-                </a:solidFill>
-                <a:latin typeface="Consolas" pitchFamily="34" charset="0"/>
-                <a:ea typeface="Consolas" pitchFamily="34" charset="-122"/>
-                <a:cs typeface="Consolas" pitchFamily="34" charset="-120"/>
-              </a:rPr>
-              <a:t> stream:</a:t>
-            </a:r>
-            <a:endParaRPr lang="en-US" sz="1080" dirty="0"/>
-          </a:p>
-          <a:p>
-            <a:pPr indent="0" marL="0">
-              <a:buNone/>
-            </a:pPr>
-            <a:r>
-              <a:rPr lang="en-US" sz="1080" dirty="0">
-                <a:solidFill>
-                  <a:srgbClr val="FFFFFF"/>
-                </a:solidFill>
-                <a:latin typeface="Consolas" pitchFamily="34" charset="0"/>
-                <a:ea typeface="Consolas" pitchFamily="34" charset="-122"/>
-                <a:cs typeface="Consolas" pitchFamily="34" charset="-120"/>
-              </a:rPr>
-              <a:t>    </a:t>
-            </a:r>
-            <a:endParaRPr lang="en-US" sz="1080" dirty="0"/>
-          </a:p>
-          <a:p>
-            <a:pPr indent="0" marL="0">
-              <a:buNone/>
-            </a:pPr>
-            <a:r>
-              <a:rPr lang="en-US" sz="1080" dirty="0">
-                <a:solidFill>
-                  <a:srgbClr val="A996B6"/>
-                </a:solidFill>
-                <a:latin typeface="Consolas" pitchFamily="34" charset="0"/>
-                <a:ea typeface="Consolas" pitchFamily="34" charset="-122"/>
-                <a:cs typeface="Consolas" pitchFamily="34" charset="-120"/>
-              </a:rPr>
-              <a:t>if</a:t>
-            </a:r>
-            <a:pPr indent="0" marL="0">
-              <a:buNone/>
-            </a:pPr>
-            <a:r>
-              <a:rPr lang="en-US" sz="1080" dirty="0">
-                <a:solidFill>
-                  <a:srgbClr val="FFFFFF"/>
-                </a:solidFill>
-                <a:latin typeface="Consolas" pitchFamily="34" charset="0"/>
-                <a:ea typeface="Consolas" pitchFamily="34" charset="-122"/>
-                <a:cs typeface="Consolas" pitchFamily="34" charset="-120"/>
-              </a:rPr>
-              <a:t> update.text:</a:t>
-            </a:r>
-            <a:endParaRPr lang="en-US" sz="1080" dirty="0"/>
-          </a:p>
-          <a:p>
-            <a:pPr indent="0" marL="0">
-              <a:buNone/>
-            </a:pPr>
-            <a:r>
-              <a:rPr lang="en-US" sz="1080" dirty="0">
-                <a:solidFill>
-                  <a:srgbClr val="FFFFFF"/>
-                </a:solidFill>
-                <a:latin typeface="Consolas" pitchFamily="34" charset="0"/>
-                <a:ea typeface="Consolas" pitchFamily="34" charset="-122"/>
-                <a:cs typeface="Consolas" pitchFamily="34" charset="-120"/>
-              </a:rPr>
-              <a:t>        render(update.text)</a:t>
-            </a:r>
-            <a:endParaRPr lang="en-US" sz="1080" dirty="0"/>
-          </a:p>
-          <a:p>
-            <a:pPr indent="0" marL="0">
-              <a:buNone/>
-            </a:pPr>
-            <a:endParaRPr lang="en-US" sz="1080" dirty="0"/>
-          </a:p>
-          <a:p>
-            <a:pPr indent="0" marL="0">
-              <a:buNone/>
-            </a:pPr>
-            <a:r>
-              <a:rPr lang="en-US" sz="1080" dirty="0">
-                <a:solidFill>
-                  <a:srgbClr val="FFFFFF"/>
-                </a:solidFill>
-                <a:latin typeface="Consolas" pitchFamily="34" charset="0"/>
-                <a:ea typeface="Consolas" pitchFamily="34" charset="-122"/>
-                <a:cs typeface="Consolas" pitchFamily="34" charset="-120"/>
-              </a:rPr>
-              <a:t>final = </a:t>
-            </a:r>
-            <a:endParaRPr lang="en-US" sz="1080" dirty="0"/>
-          </a:p>
-          <a:p>
-            <a:pPr indent="0" marL="0">
-              <a:buNone/>
-            </a:pPr>
-            <a:r>
-              <a:rPr lang="en-US" sz="1080" dirty="0">
-                <a:solidFill>
-                  <a:srgbClr val="A996B6"/>
-                </a:solidFill>
-                <a:latin typeface="Consolas" pitchFamily="34" charset="0"/>
-                <a:ea typeface="Consolas" pitchFamily="34" charset="-122"/>
-                <a:cs typeface="Consolas" pitchFamily="34" charset="-120"/>
-              </a:rPr>
-              <a:t>await</a:t>
-            </a:r>
-            <a:pPr indent="0" marL="0">
-              <a:buNone/>
-            </a:pPr>
-            <a:r>
-              <a:rPr lang="en-US" sz="1080" dirty="0">
-                <a:solidFill>
-                  <a:srgbClr val="FFFFFF"/>
-                </a:solidFill>
-                <a:latin typeface="Consolas" pitchFamily="34" charset="0"/>
-                <a:ea typeface="Consolas" pitchFamily="34" charset="-122"/>
-                <a:cs typeface="Consolas" pitchFamily="34" charset="-120"/>
-              </a:rPr>
-              <a:t> stream.get_final_response()</a:t>
-            </a:r>
-            <a:endParaRPr lang="en-US" sz="1080" dirty="0"/>
-          </a:p>
-          <a:p>
-            <a:pPr indent="0" marL="0">
-              <a:buNone/>
-            </a:pPr>
-            <a:r>
-              <a:rPr lang="en-US" sz="1080" dirty="0">
-                <a:solidFill>
-                  <a:srgbClr val="FFFFFF"/>
-                </a:solidFill>
-                <a:latin typeface="Consolas" pitchFamily="34" charset="0"/>
-                <a:ea typeface="Consolas" pitchFamily="34" charset="-122"/>
-                <a:cs typeface="Consolas" pitchFamily="34" charset="-120"/>
-              </a:rPr>
-              <a:t>triage = final.value</a:t>
-            </a:r>
-            <a:endParaRPr lang="en-US" sz="1080" dirty="0"/>
+              <a:rPr lang="en-US" sz="3000" b="1" dirty="0">
+                <a:solidFill>
+                  <a:srgbClr val="1E2761"/>
+                </a:solidFill>
+                <a:latin typeface="Calibri" pitchFamily="34" charset="0"/>
+                <a:ea typeface="Calibri" pitchFamily="34" charset="-122"/>
+                <a:cs typeface="Calibri" pitchFamily="34" charset="-120"/>
+              </a:rPr>
+              <a:t>Watch it stream, then get the typed TriageResult</a:t>
+            </a:r>
+            <a:endParaRPr lang="en-US" sz="3000" dirty="0"/>
           </a:p>
         </p:txBody>
       </p:sp>
       <p:sp>
         <p:nvSpPr>
-          <p:cNvPr id="7" name="Shape 5"/>
+          <p:cNvPr id="6" name="Text 4"/>
+          <p:cNvSpPr/>
+          <p:nvPr/>
+        </p:nvSpPr>
+        <p:spPr>
+          <a:xfrm>
+            <a:off x="6583680" y="1051560"/>
+            <a:ext cx="2194560" cy="502920"/>
+          </a:xfrm>
+          <a:prstGeom prst="rect">
+            <a:avLst/>
+          </a:prstGeom>
+          <a:noFill/>
+          <a:ln/>
+        </p:spPr>
+        <p:txBody>
+          <a:bodyPr wrap="square" lIns="0" tIns="0" rIns="0" bIns="0" rtlCol="0" anchor="ctr"/>
+          <a:lstStyle/>
+          <a:p>
+            <a:pPr algn="r" indent="0" marL="0">
+              <a:buNone/>
+            </a:pPr>
+            <a:r>
+              <a:rPr lang="en-US" sz="1800" i="1" dirty="0">
+                <a:solidFill>
+                  <a:srgbClr val="6B7280"/>
+                </a:solidFill>
+                <a:latin typeface="Calibri" pitchFamily="34" charset="0"/>
+                <a:ea typeface="Calibri" pitchFamily="34" charset="-122"/>
+                <a:cs typeface="Calibri" pitchFamily="34" charset="-120"/>
+              </a:rPr>
+              <a:t>~5 min</a:t>
+            </a:r>
+            <a:endParaRPr lang="en-US" sz="1800" dirty="0"/>
+          </a:p>
+        </p:txBody>
+      </p:sp>
+      <p:sp>
+        <p:nvSpPr>
+          <p:cNvPr id="7" name="Text 5"/>
+          <p:cNvSpPr/>
+          <p:nvPr/>
+        </p:nvSpPr>
+        <p:spPr>
+          <a:xfrm>
+            <a:off x="548640" y="2788920"/>
+            <a:ext cx="8046720" cy="1371600"/>
+          </a:xfrm>
+          <a:prstGeom prst="rect">
+            <a:avLst/>
+          </a:prstGeom>
+          <a:noFill/>
+          <a:ln/>
+        </p:spPr>
+        <p:txBody>
+          <a:bodyPr wrap="square" lIns="0" tIns="0" rIns="0" bIns="0" rtlCol="0" anchor="ctr"/>
+          <a:lstStyle/>
+          <a:p>
+            <a:pPr indent="0" marL="0">
+              <a:spcAft>
+                <a:spcPts val="600"/>
+              </a:spcAft>
+              <a:buNone/>
+            </a:pPr>
+            <a:r>
+              <a:rPr lang="en-US" sz="1600" dirty="0">
+                <a:solidFill>
+                  <a:srgbClr val="212121"/>
+                </a:solidFill>
+                <a:latin typeface="Calibri" pitchFamily="34" charset="0"/>
+                <a:ea typeface="Calibri" pitchFamily="34" charset="-122"/>
+                <a:cs typeface="Calibri" pitchFamily="34" charset="-120"/>
+              </a:rPr>
+              <a:t>Run the previous slide's exact combined pattern live: text tokens render as they arrive, then stream.get_final_response().value prints a validated TriageResult — the two-contract model made concrete on the Day 2 docs assistant.</a:t>
+            </a:r>
+            <a:endParaRPr lang="en-US" sz="1600" dirty="0"/>
+          </a:p>
+        </p:txBody>
+      </p:sp>
+      <p:sp>
+        <p:nvSpPr>
+          <p:cNvPr id="8" name="Text 6"/>
+          <p:cNvSpPr/>
+          <p:nvPr/>
+        </p:nvSpPr>
+        <p:spPr>
+          <a:xfrm>
+            <a:off x="548640" y="4434840"/>
+            <a:ext cx="8046720" cy="320040"/>
+          </a:xfrm>
+          <a:prstGeom prst="rect">
+            <a:avLst/>
+          </a:prstGeom>
+          <a:noFill/>
+          <a:ln/>
+        </p:spPr>
+        <p:txBody>
+          <a:bodyPr wrap="square" lIns="0" tIns="0" rIns="0" bIns="0" rtlCol="0" anchor="ctr"/>
+          <a:lstStyle/>
+          <a:p>
+            <a:pPr indent="0" marL="0">
+              <a:buNone/>
+            </a:pPr>
+            <a:r>
+              <a:rPr lang="en-US" sz="1100" i="1" dirty="0">
+                <a:solidFill>
+                  <a:srgbClr val="6B7280"/>
+                </a:solidFill>
+                <a:latin typeface="Calibri" pitchFamily="34" charset="0"/>
+                <a:ea typeface="Calibri" pitchFamily="34" charset="-122"/>
+                <a:cs typeface="Calibri" pitchFamily="34" charset="-120"/>
+              </a:rPr>
+              <a:t>Runbook: demos/day3/module-2-demo-1-stream-then-triage.md</a:t>
+            </a:r>
+            <a:endParaRPr lang="en-US" sz="1100" dirty="0"/>
+          </a:p>
+        </p:txBody>
+      </p:sp>
+      <p:sp>
+        <p:nvSpPr>
+          <p:cNvPr id="9" name="Shape 7"/>
           <p:cNvSpPr/>
           <p:nvPr/>
         </p:nvSpPr>
@@ -11708,7 +9113,7 @@
       </p:sp>
       <p:sp>
         <p:nvSpPr>
-          <p:cNvPr id="8" name="Text 6"/>
+          <p:cNvPr id="10" name="Text 8"/>
           <p:cNvSpPr/>
           <p:nvPr/>
         </p:nvSpPr>

--- a/decks/day3/module-2-streaming-structured.pptx
+++ b/decks/day3/module-2-streaming-structured.pptx
@@ -2636,8 +2636,8 @@
             <a:tbl>
               <a:tblPr/>
               <a:tblGrid>
-                <a:gridCol w="4206240"/>
-                <a:gridCol w="4206240"/>
+                <a:gridCol w="3925824"/>
+                <a:gridCol w="4486656"/>
               </a:tblGrid>
               <a:tr h="586740">
                 <a:tc>
